--- a/6th Sem/Data mining and warehouse/Unit_5_new.pptx
+++ b/6th Sem/Data mining and warehouse/Unit_5_new.pptx
@@ -1,29 +1,29 @@
 
 <file path=ppt/presentation.xml><?xml version="1.0" encoding="utf-8"?>
-<p:presentation xmlns:a="http://schemas.openxmlformats.org/drawingml/2006/main" xmlns:r="http://schemas.openxmlformats.org/officeDocument/2006/relationships" xmlns:p="http://schemas.openxmlformats.org/presentationml/2006/main" saveSubsetFonts="1">
+<p:presentation xmlns:a="http://schemas.openxmlformats.org/drawingml/2006/main" xmlns:r="http://schemas.openxmlformats.org/officeDocument/2006/relationships" xmlns:p="http://schemas.openxmlformats.org/presentationml/2006/main">
   <p:sldMasterIdLst>
     <p:sldMasterId id="2147483648" r:id="rId1"/>
   </p:sldMasterIdLst>
   <p:sldIdLst>
-    <p:sldId id="256" r:id="rId2"/>
-    <p:sldId id="257" r:id="rId3"/>
-    <p:sldId id="258" r:id="rId4"/>
-    <p:sldId id="259" r:id="rId5"/>
-    <p:sldId id="260" r:id="rId6"/>
-    <p:sldId id="261" r:id="rId7"/>
-    <p:sldId id="262" r:id="rId8"/>
-    <p:sldId id="263" r:id="rId9"/>
-    <p:sldId id="264" r:id="rId10"/>
-    <p:sldId id="265" r:id="rId11"/>
-    <p:sldId id="266" r:id="rId12"/>
-    <p:sldId id="267" r:id="rId13"/>
-    <p:sldId id="268" r:id="rId14"/>
-    <p:sldId id="269" r:id="rId15"/>
-    <p:sldId id="270" r:id="rId16"/>
-    <p:sldId id="271" r:id="rId17"/>
-    <p:sldId id="272" r:id="rId18"/>
-    <p:sldId id="273" r:id="rId19"/>
-    <p:sldId id="274" r:id="rId20"/>
+    <p:sldId id="256" r:id="rId3"/>
+    <p:sldId id="257" r:id="rId4"/>
+    <p:sldId id="258" r:id="rId5"/>
+    <p:sldId id="259" r:id="rId6"/>
+    <p:sldId id="260" r:id="rId7"/>
+    <p:sldId id="261" r:id="rId8"/>
+    <p:sldId id="262" r:id="rId9"/>
+    <p:sldId id="263" r:id="rId10"/>
+    <p:sldId id="264" r:id="rId11"/>
+    <p:sldId id="265" r:id="rId12"/>
+    <p:sldId id="266" r:id="rId13"/>
+    <p:sldId id="267" r:id="rId14"/>
+    <p:sldId id="268" r:id="rId15"/>
+    <p:sldId id="269" r:id="rId16"/>
+    <p:sldId id="270" r:id="rId17"/>
+    <p:sldId id="271" r:id="rId18"/>
+    <p:sldId id="272" r:id="rId19"/>
+    <p:sldId id="273" r:id="rId20"/>
+    <p:sldId id="274" r:id="rId21"/>
   </p:sldIdLst>
   <p:sldSz cx="12192000" cy="6858000"/>
   <p:notesSz cx="6858000" cy="9144000"/>
@@ -122,11 +122,6 @@
       </a:defRPr>
     </a:lvl9pPr>
   </p:defaultTextStyle>
-  <p:extLst>
-    <p:ext uri="{EFAFB233-063F-42B5-8137-9DF3F51BA10A}">
-      <p15:sldGuideLst xmlns:p15="http://schemas.microsoft.com/office/powerpoint/2012/main"/>
-    </p:ext>
-  </p:extLst>
 </p:presentation>
 </file>
 
@@ -261,7 +256,6 @@
           <a:p>
             <a:fld id="{90867743-95B3-4C68-AD86-AECB47900815}" type="datetimeFigureOut">
               <a:rPr lang="en-US" smtClean="0"/>
-              <a:t>5/30/2026</a:t>
             </a:fld>
             <a:endParaRPr lang="en-US"/>
           </a:p>
@@ -303,18 +297,12 @@
           <a:p>
             <a:fld id="{D233FBF5-F569-4CE1-9AFD-EF5EEDD8FE3A}" type="slidenum">
               <a:rPr lang="en-US" smtClean="0"/>
-              <a:t>‹#›</a:t>
             </a:fld>
             <a:endParaRPr lang="en-US"/>
           </a:p>
         </p:txBody>
       </p:sp>
     </p:spTree>
-    <p:extLst>
-      <p:ext uri="{BB962C8B-B14F-4D97-AF65-F5344CB8AC3E}">
-        <p14:creationId xmlns:p14="http://schemas.microsoft.com/office/powerpoint/2010/main" val="2758142893"/>
-      </p:ext>
-    </p:extLst>
   </p:cSld>
   <p:clrMapOvr>
     <a:masterClrMapping/>
@@ -382,6 +370,7 @@
               <a:rPr lang="en-US" smtClean="0"/>
               <a:t>Edit Master text styles</a:t>
             </a:r>
+            <a:endParaRPr lang="en-US" smtClean="0"/>
           </a:p>
           <a:p>
             <a:pPr lvl="1"/>
@@ -389,6 +378,7 @@
               <a:rPr lang="en-US" smtClean="0"/>
               <a:t>Second level</a:t>
             </a:r>
+            <a:endParaRPr lang="en-US" smtClean="0"/>
           </a:p>
           <a:p>
             <a:pPr lvl="2"/>
@@ -396,6 +386,7 @@
               <a:rPr lang="en-US" smtClean="0"/>
               <a:t>Third level</a:t>
             </a:r>
+            <a:endParaRPr lang="en-US" smtClean="0"/>
           </a:p>
           <a:p>
             <a:pPr lvl="3"/>
@@ -403,6 +394,7 @@
               <a:rPr lang="en-US" smtClean="0"/>
               <a:t>Fourth level</a:t>
             </a:r>
+            <a:endParaRPr lang="en-US" smtClean="0"/>
           </a:p>
           <a:p>
             <a:pPr lvl="4"/>
@@ -431,7 +423,6 @@
           <a:p>
             <a:fld id="{90867743-95B3-4C68-AD86-AECB47900815}" type="datetimeFigureOut">
               <a:rPr lang="en-US" smtClean="0"/>
-              <a:t>5/30/2026</a:t>
             </a:fld>
             <a:endParaRPr lang="en-US"/>
           </a:p>
@@ -473,18 +464,12 @@
           <a:p>
             <a:fld id="{D233FBF5-F569-4CE1-9AFD-EF5EEDD8FE3A}" type="slidenum">
               <a:rPr lang="en-US" smtClean="0"/>
-              <a:t>‹#›</a:t>
             </a:fld>
             <a:endParaRPr lang="en-US"/>
           </a:p>
         </p:txBody>
       </p:sp>
     </p:spTree>
-    <p:extLst>
-      <p:ext uri="{BB962C8B-B14F-4D97-AF65-F5344CB8AC3E}">
-        <p14:creationId xmlns:p14="http://schemas.microsoft.com/office/powerpoint/2010/main" val="3091318958"/>
-      </p:ext>
-    </p:extLst>
   </p:cSld>
   <p:clrMapOvr>
     <a:masterClrMapping/>
@@ -562,6 +547,7 @@
               <a:rPr lang="en-US" smtClean="0"/>
               <a:t>Edit Master text styles</a:t>
             </a:r>
+            <a:endParaRPr lang="en-US" smtClean="0"/>
           </a:p>
           <a:p>
             <a:pPr lvl="1"/>
@@ -569,6 +555,7 @@
               <a:rPr lang="en-US" smtClean="0"/>
               <a:t>Second level</a:t>
             </a:r>
+            <a:endParaRPr lang="en-US" smtClean="0"/>
           </a:p>
           <a:p>
             <a:pPr lvl="2"/>
@@ -576,6 +563,7 @@
               <a:rPr lang="en-US" smtClean="0"/>
               <a:t>Third level</a:t>
             </a:r>
+            <a:endParaRPr lang="en-US" smtClean="0"/>
           </a:p>
           <a:p>
             <a:pPr lvl="3"/>
@@ -583,6 +571,7 @@
               <a:rPr lang="en-US" smtClean="0"/>
               <a:t>Fourth level</a:t>
             </a:r>
+            <a:endParaRPr lang="en-US" smtClean="0"/>
           </a:p>
           <a:p>
             <a:pPr lvl="4"/>
@@ -611,7 +600,6 @@
           <a:p>
             <a:fld id="{90867743-95B3-4C68-AD86-AECB47900815}" type="datetimeFigureOut">
               <a:rPr lang="en-US" smtClean="0"/>
-              <a:t>5/30/2026</a:t>
             </a:fld>
             <a:endParaRPr lang="en-US"/>
           </a:p>
@@ -653,18 +641,12 @@
           <a:p>
             <a:fld id="{D233FBF5-F569-4CE1-9AFD-EF5EEDD8FE3A}" type="slidenum">
               <a:rPr lang="en-US" smtClean="0"/>
-              <a:t>‹#›</a:t>
             </a:fld>
             <a:endParaRPr lang="en-US"/>
           </a:p>
         </p:txBody>
       </p:sp>
     </p:spTree>
-    <p:extLst>
-      <p:ext uri="{BB962C8B-B14F-4D97-AF65-F5344CB8AC3E}">
-        <p14:creationId xmlns:p14="http://schemas.microsoft.com/office/powerpoint/2010/main" val="1223643019"/>
-      </p:ext>
-    </p:extLst>
   </p:cSld>
   <p:clrMapOvr>
     <a:masterClrMapping/>
@@ -732,6 +714,7 @@
               <a:rPr lang="en-US" smtClean="0"/>
               <a:t>Edit Master text styles</a:t>
             </a:r>
+            <a:endParaRPr lang="en-US" smtClean="0"/>
           </a:p>
           <a:p>
             <a:pPr lvl="1"/>
@@ -739,6 +722,7 @@
               <a:rPr lang="en-US" smtClean="0"/>
               <a:t>Second level</a:t>
             </a:r>
+            <a:endParaRPr lang="en-US" smtClean="0"/>
           </a:p>
           <a:p>
             <a:pPr lvl="2"/>
@@ -746,6 +730,7 @@
               <a:rPr lang="en-US" smtClean="0"/>
               <a:t>Third level</a:t>
             </a:r>
+            <a:endParaRPr lang="en-US" smtClean="0"/>
           </a:p>
           <a:p>
             <a:pPr lvl="3"/>
@@ -753,6 +738,7 @@
               <a:rPr lang="en-US" smtClean="0"/>
               <a:t>Fourth level</a:t>
             </a:r>
+            <a:endParaRPr lang="en-US" smtClean="0"/>
           </a:p>
           <a:p>
             <a:pPr lvl="4"/>
@@ -781,7 +767,6 @@
           <a:p>
             <a:fld id="{90867743-95B3-4C68-AD86-AECB47900815}" type="datetimeFigureOut">
               <a:rPr lang="en-US" smtClean="0"/>
-              <a:t>5/30/2026</a:t>
             </a:fld>
             <a:endParaRPr lang="en-US"/>
           </a:p>
@@ -823,18 +808,12 @@
           <a:p>
             <a:fld id="{D233FBF5-F569-4CE1-9AFD-EF5EEDD8FE3A}" type="slidenum">
               <a:rPr lang="en-US" smtClean="0"/>
-              <a:t>‹#›</a:t>
             </a:fld>
             <a:endParaRPr lang="en-US"/>
           </a:p>
         </p:txBody>
       </p:sp>
     </p:spTree>
-    <p:extLst>
-      <p:ext uri="{BB962C8B-B14F-4D97-AF65-F5344CB8AC3E}">
-        <p14:creationId xmlns:p14="http://schemas.microsoft.com/office/powerpoint/2010/main" val="3522049595"/>
-      </p:ext>
-    </p:extLst>
   </p:cSld>
   <p:clrMapOvr>
     <a:masterClrMapping/>
@@ -1007,6 +986,7 @@
               <a:rPr lang="en-US" smtClean="0"/>
               <a:t>Edit Master text styles</a:t>
             </a:r>
+            <a:endParaRPr lang="en-US" smtClean="0"/>
           </a:p>
         </p:txBody>
       </p:sp>
@@ -1027,7 +1007,6 @@
           <a:p>
             <a:fld id="{90867743-95B3-4C68-AD86-AECB47900815}" type="datetimeFigureOut">
               <a:rPr lang="en-US" smtClean="0"/>
-              <a:t>5/30/2026</a:t>
             </a:fld>
             <a:endParaRPr lang="en-US"/>
           </a:p>
@@ -1069,18 +1048,12 @@
           <a:p>
             <a:fld id="{D233FBF5-F569-4CE1-9AFD-EF5EEDD8FE3A}" type="slidenum">
               <a:rPr lang="en-US" smtClean="0"/>
-              <a:t>‹#›</a:t>
             </a:fld>
             <a:endParaRPr lang="en-US"/>
           </a:p>
         </p:txBody>
       </p:sp>
     </p:spTree>
-    <p:extLst>
-      <p:ext uri="{BB962C8B-B14F-4D97-AF65-F5344CB8AC3E}">
-        <p14:creationId xmlns:p14="http://schemas.microsoft.com/office/powerpoint/2010/main" val="3292997337"/>
-      </p:ext>
-    </p:extLst>
   </p:cSld>
   <p:clrMapOvr>
     <a:masterClrMapping/>
@@ -1153,6 +1126,7 @@
               <a:rPr lang="en-US" smtClean="0"/>
               <a:t>Edit Master text styles</a:t>
             </a:r>
+            <a:endParaRPr lang="en-US" smtClean="0"/>
           </a:p>
           <a:p>
             <a:pPr lvl="1"/>
@@ -1160,6 +1134,7 @@
               <a:rPr lang="en-US" smtClean="0"/>
               <a:t>Second level</a:t>
             </a:r>
+            <a:endParaRPr lang="en-US" smtClean="0"/>
           </a:p>
           <a:p>
             <a:pPr lvl="2"/>
@@ -1167,6 +1142,7 @@
               <a:rPr lang="en-US" smtClean="0"/>
               <a:t>Third level</a:t>
             </a:r>
+            <a:endParaRPr lang="en-US" smtClean="0"/>
           </a:p>
           <a:p>
             <a:pPr lvl="3"/>
@@ -1174,6 +1150,7 @@
               <a:rPr lang="en-US" smtClean="0"/>
               <a:t>Fourth level</a:t>
             </a:r>
+            <a:endParaRPr lang="en-US" smtClean="0"/>
           </a:p>
           <a:p>
             <a:pPr lvl="4"/>
@@ -1210,6 +1187,7 @@
               <a:rPr lang="en-US" smtClean="0"/>
               <a:t>Edit Master text styles</a:t>
             </a:r>
+            <a:endParaRPr lang="en-US" smtClean="0"/>
           </a:p>
           <a:p>
             <a:pPr lvl="1"/>
@@ -1217,6 +1195,7 @@
               <a:rPr lang="en-US" smtClean="0"/>
               <a:t>Second level</a:t>
             </a:r>
+            <a:endParaRPr lang="en-US" smtClean="0"/>
           </a:p>
           <a:p>
             <a:pPr lvl="2"/>
@@ -1224,6 +1203,7 @@
               <a:rPr lang="en-US" smtClean="0"/>
               <a:t>Third level</a:t>
             </a:r>
+            <a:endParaRPr lang="en-US" smtClean="0"/>
           </a:p>
           <a:p>
             <a:pPr lvl="3"/>
@@ -1231,6 +1211,7 @@
               <a:rPr lang="en-US" smtClean="0"/>
               <a:t>Fourth level</a:t>
             </a:r>
+            <a:endParaRPr lang="en-US" smtClean="0"/>
           </a:p>
           <a:p>
             <a:pPr lvl="4"/>
@@ -1259,7 +1240,6 @@
           <a:p>
             <a:fld id="{90867743-95B3-4C68-AD86-AECB47900815}" type="datetimeFigureOut">
               <a:rPr lang="en-US" smtClean="0"/>
-              <a:t>5/30/2026</a:t>
             </a:fld>
             <a:endParaRPr lang="en-US"/>
           </a:p>
@@ -1301,18 +1281,12 @@
           <a:p>
             <a:fld id="{D233FBF5-F569-4CE1-9AFD-EF5EEDD8FE3A}" type="slidenum">
               <a:rPr lang="en-US" smtClean="0"/>
-              <a:t>‹#›</a:t>
             </a:fld>
             <a:endParaRPr lang="en-US"/>
           </a:p>
         </p:txBody>
       </p:sp>
     </p:spTree>
-    <p:extLst>
-      <p:ext uri="{BB962C8B-B14F-4D97-AF65-F5344CB8AC3E}">
-        <p14:creationId xmlns:p14="http://schemas.microsoft.com/office/powerpoint/2010/main" val="889386362"/>
-      </p:ext>
-    </p:extLst>
   </p:cSld>
   <p:clrMapOvr>
     <a:masterClrMapping/>
@@ -1427,6 +1401,7 @@
               <a:rPr lang="en-US" smtClean="0"/>
               <a:t>Edit Master text styles</a:t>
             </a:r>
+            <a:endParaRPr lang="en-US" smtClean="0"/>
           </a:p>
         </p:txBody>
       </p:sp>
@@ -1455,6 +1430,7 @@
               <a:rPr lang="en-US" smtClean="0"/>
               <a:t>Edit Master text styles</a:t>
             </a:r>
+            <a:endParaRPr lang="en-US" smtClean="0"/>
           </a:p>
           <a:p>
             <a:pPr lvl="1"/>
@@ -1462,6 +1438,7 @@
               <a:rPr lang="en-US" smtClean="0"/>
               <a:t>Second level</a:t>
             </a:r>
+            <a:endParaRPr lang="en-US" smtClean="0"/>
           </a:p>
           <a:p>
             <a:pPr lvl="2"/>
@@ -1469,6 +1446,7 @@
               <a:rPr lang="en-US" smtClean="0"/>
               <a:t>Third level</a:t>
             </a:r>
+            <a:endParaRPr lang="en-US" smtClean="0"/>
           </a:p>
           <a:p>
             <a:pPr lvl="3"/>
@@ -1476,6 +1454,7 @@
               <a:rPr lang="en-US" smtClean="0"/>
               <a:t>Fourth level</a:t>
             </a:r>
+            <a:endParaRPr lang="en-US" smtClean="0"/>
           </a:p>
           <a:p>
             <a:pPr lvl="4"/>
@@ -1549,6 +1528,7 @@
               <a:rPr lang="en-US" smtClean="0"/>
               <a:t>Edit Master text styles</a:t>
             </a:r>
+            <a:endParaRPr lang="en-US" smtClean="0"/>
           </a:p>
         </p:txBody>
       </p:sp>
@@ -1577,6 +1557,7 @@
               <a:rPr lang="en-US" smtClean="0"/>
               <a:t>Edit Master text styles</a:t>
             </a:r>
+            <a:endParaRPr lang="en-US" smtClean="0"/>
           </a:p>
           <a:p>
             <a:pPr lvl="1"/>
@@ -1584,6 +1565,7 @@
               <a:rPr lang="en-US" smtClean="0"/>
               <a:t>Second level</a:t>
             </a:r>
+            <a:endParaRPr lang="en-US" smtClean="0"/>
           </a:p>
           <a:p>
             <a:pPr lvl="2"/>
@@ -1591,6 +1573,7 @@
               <a:rPr lang="en-US" smtClean="0"/>
               <a:t>Third level</a:t>
             </a:r>
+            <a:endParaRPr lang="en-US" smtClean="0"/>
           </a:p>
           <a:p>
             <a:pPr lvl="3"/>
@@ -1598,6 +1581,7 @@
               <a:rPr lang="en-US" smtClean="0"/>
               <a:t>Fourth level</a:t>
             </a:r>
+            <a:endParaRPr lang="en-US" smtClean="0"/>
           </a:p>
           <a:p>
             <a:pPr lvl="4"/>
@@ -1626,7 +1610,6 @@
           <a:p>
             <a:fld id="{90867743-95B3-4C68-AD86-AECB47900815}" type="datetimeFigureOut">
               <a:rPr lang="en-US" smtClean="0"/>
-              <a:t>5/30/2026</a:t>
             </a:fld>
             <a:endParaRPr lang="en-US"/>
           </a:p>
@@ -1668,18 +1651,12 @@
           <a:p>
             <a:fld id="{D233FBF5-F569-4CE1-9AFD-EF5EEDD8FE3A}" type="slidenum">
               <a:rPr lang="en-US" smtClean="0"/>
-              <a:t>‹#›</a:t>
             </a:fld>
             <a:endParaRPr lang="en-US"/>
           </a:p>
         </p:txBody>
       </p:sp>
     </p:spTree>
-    <p:extLst>
-      <p:ext uri="{BB962C8B-B14F-4D97-AF65-F5344CB8AC3E}">
-        <p14:creationId xmlns:p14="http://schemas.microsoft.com/office/powerpoint/2010/main" val="3540349045"/>
-      </p:ext>
-    </p:extLst>
   </p:cSld>
   <p:clrMapOvr>
     <a:masterClrMapping/>
@@ -1744,7 +1721,6 @@
           <a:p>
             <a:fld id="{90867743-95B3-4C68-AD86-AECB47900815}" type="datetimeFigureOut">
               <a:rPr lang="en-US" smtClean="0"/>
-              <a:t>5/30/2026</a:t>
             </a:fld>
             <a:endParaRPr lang="en-US"/>
           </a:p>
@@ -1786,18 +1762,12 @@
           <a:p>
             <a:fld id="{D233FBF5-F569-4CE1-9AFD-EF5EEDD8FE3A}" type="slidenum">
               <a:rPr lang="en-US" smtClean="0"/>
-              <a:t>‹#›</a:t>
             </a:fld>
             <a:endParaRPr lang="en-US"/>
           </a:p>
         </p:txBody>
       </p:sp>
     </p:spTree>
-    <p:extLst>
-      <p:ext uri="{BB962C8B-B14F-4D97-AF65-F5344CB8AC3E}">
-        <p14:creationId xmlns:p14="http://schemas.microsoft.com/office/powerpoint/2010/main" val="1322339031"/>
-      </p:ext>
-    </p:extLst>
   </p:cSld>
   <p:clrMapOvr>
     <a:masterClrMapping/>
@@ -1839,7 +1809,6 @@
           <a:p>
             <a:fld id="{90867743-95B3-4C68-AD86-AECB47900815}" type="datetimeFigureOut">
               <a:rPr lang="en-US" smtClean="0"/>
-              <a:t>5/30/2026</a:t>
             </a:fld>
             <a:endParaRPr lang="en-US"/>
           </a:p>
@@ -1881,18 +1850,12 @@
           <a:p>
             <a:fld id="{D233FBF5-F569-4CE1-9AFD-EF5EEDD8FE3A}" type="slidenum">
               <a:rPr lang="en-US" smtClean="0"/>
-              <a:t>‹#›</a:t>
             </a:fld>
             <a:endParaRPr lang="en-US"/>
           </a:p>
         </p:txBody>
       </p:sp>
     </p:spTree>
-    <p:extLst>
-      <p:ext uri="{BB962C8B-B14F-4D97-AF65-F5344CB8AC3E}">
-        <p14:creationId xmlns:p14="http://schemas.microsoft.com/office/powerpoint/2010/main" val="941702171"/>
-      </p:ext>
-    </p:extLst>
   </p:cSld>
   <p:clrMapOvr>
     <a:masterClrMapping/>
@@ -2002,6 +1965,7 @@
               <a:rPr lang="en-US" smtClean="0"/>
               <a:t>Edit Master text styles</a:t>
             </a:r>
+            <a:endParaRPr lang="en-US" smtClean="0"/>
           </a:p>
           <a:p>
             <a:pPr lvl="1"/>
@@ -2009,6 +1973,7 @@
               <a:rPr lang="en-US" smtClean="0"/>
               <a:t>Second level</a:t>
             </a:r>
+            <a:endParaRPr lang="en-US" smtClean="0"/>
           </a:p>
           <a:p>
             <a:pPr lvl="2"/>
@@ -2016,6 +1981,7 @@
               <a:rPr lang="en-US" smtClean="0"/>
               <a:t>Third level</a:t>
             </a:r>
+            <a:endParaRPr lang="en-US" smtClean="0"/>
           </a:p>
           <a:p>
             <a:pPr lvl="3"/>
@@ -2023,6 +1989,7 @@
               <a:rPr lang="en-US" smtClean="0"/>
               <a:t>Fourth level</a:t>
             </a:r>
+            <a:endParaRPr lang="en-US" smtClean="0"/>
           </a:p>
           <a:p>
             <a:pPr lvl="4"/>
@@ -2096,6 +2063,7 @@
               <a:rPr lang="en-US" smtClean="0"/>
               <a:t>Edit Master text styles</a:t>
             </a:r>
+            <a:endParaRPr lang="en-US" smtClean="0"/>
           </a:p>
         </p:txBody>
       </p:sp>
@@ -2116,7 +2084,6 @@
           <a:p>
             <a:fld id="{90867743-95B3-4C68-AD86-AECB47900815}" type="datetimeFigureOut">
               <a:rPr lang="en-US" smtClean="0"/>
-              <a:t>5/30/2026</a:t>
             </a:fld>
             <a:endParaRPr lang="en-US"/>
           </a:p>
@@ -2158,18 +2125,12 @@
           <a:p>
             <a:fld id="{D233FBF5-F569-4CE1-9AFD-EF5EEDD8FE3A}" type="slidenum">
               <a:rPr lang="en-US" smtClean="0"/>
-              <a:t>‹#›</a:t>
             </a:fld>
             <a:endParaRPr lang="en-US"/>
           </a:p>
         </p:txBody>
       </p:sp>
     </p:spTree>
-    <p:extLst>
-      <p:ext uri="{BB962C8B-B14F-4D97-AF65-F5344CB8AC3E}">
-        <p14:creationId xmlns:p14="http://schemas.microsoft.com/office/powerpoint/2010/main" val="2010160023"/>
-      </p:ext>
-    </p:extLst>
   </p:cSld>
   <p:clrMapOvr>
     <a:masterClrMapping/>
@@ -2349,6 +2310,7 @@
               <a:rPr lang="en-US" smtClean="0"/>
               <a:t>Edit Master text styles</a:t>
             </a:r>
+            <a:endParaRPr lang="en-US" smtClean="0"/>
           </a:p>
         </p:txBody>
       </p:sp>
@@ -2369,7 +2331,6 @@
           <a:p>
             <a:fld id="{90867743-95B3-4C68-AD86-AECB47900815}" type="datetimeFigureOut">
               <a:rPr lang="en-US" smtClean="0"/>
-              <a:t>5/30/2026</a:t>
             </a:fld>
             <a:endParaRPr lang="en-US"/>
           </a:p>
@@ -2411,18 +2372,12 @@
           <a:p>
             <a:fld id="{D233FBF5-F569-4CE1-9AFD-EF5EEDD8FE3A}" type="slidenum">
               <a:rPr lang="en-US" smtClean="0"/>
-              <a:t>‹#›</a:t>
             </a:fld>
             <a:endParaRPr lang="en-US"/>
           </a:p>
         </p:txBody>
       </p:sp>
     </p:spTree>
-    <p:extLst>
-      <p:ext uri="{BB962C8B-B14F-4D97-AF65-F5344CB8AC3E}">
-        <p14:creationId xmlns:p14="http://schemas.microsoft.com/office/powerpoint/2010/main" val="3014260240"/>
-      </p:ext>
-    </p:extLst>
   </p:cSld>
   <p:clrMapOvr>
     <a:masterClrMapping/>
@@ -2515,6 +2470,7 @@
               <a:rPr lang="en-US" smtClean="0"/>
               <a:t>Edit Master text styles</a:t>
             </a:r>
+            <a:endParaRPr lang="en-US" smtClean="0"/>
           </a:p>
           <a:p>
             <a:pPr lvl="1"/>
@@ -2522,6 +2478,7 @@
               <a:rPr lang="en-US" smtClean="0"/>
               <a:t>Second level</a:t>
             </a:r>
+            <a:endParaRPr lang="en-US" smtClean="0"/>
           </a:p>
           <a:p>
             <a:pPr lvl="2"/>
@@ -2529,6 +2486,7 @@
               <a:rPr lang="en-US" smtClean="0"/>
               <a:t>Third level</a:t>
             </a:r>
+            <a:endParaRPr lang="en-US" smtClean="0"/>
           </a:p>
           <a:p>
             <a:pPr lvl="3"/>
@@ -2536,6 +2494,7 @@
               <a:rPr lang="en-US" smtClean="0"/>
               <a:t>Fourth level</a:t>
             </a:r>
+            <a:endParaRPr lang="en-US" smtClean="0"/>
           </a:p>
           <a:p>
             <a:pPr lvl="4"/>
@@ -2582,7 +2541,6 @@
           <a:p>
             <a:fld id="{90867743-95B3-4C68-AD86-AECB47900815}" type="datetimeFigureOut">
               <a:rPr lang="en-US" smtClean="0"/>
-              <a:t>5/30/2026</a:t>
             </a:fld>
             <a:endParaRPr lang="en-US"/>
           </a:p>
@@ -2660,18 +2618,12 @@
           <a:p>
             <a:fld id="{D233FBF5-F569-4CE1-9AFD-EF5EEDD8FE3A}" type="slidenum">
               <a:rPr lang="en-US" smtClean="0"/>
-              <a:t>‹#›</a:t>
             </a:fld>
             <a:endParaRPr lang="en-US"/>
           </a:p>
         </p:txBody>
       </p:sp>
     </p:spTree>
-    <p:extLst>
-      <p:ext uri="{BB962C8B-B14F-4D97-AF65-F5344CB8AC3E}">
-        <p14:creationId xmlns:p14="http://schemas.microsoft.com/office/powerpoint/2010/main" val="1183124389"/>
-      </p:ext>
-    </p:extLst>
   </p:cSld>
   <p:clrMap bg1="lt1" tx1="dk1" bg2="lt2" tx2="dk2" accent1="accent1" accent2="accent2" accent3="accent3" accent4="accent4" accent5="accent5" accent6="accent6" hlink="hlink" folHlink="folHlink"/>
   <p:sldLayoutIdLst>
@@ -2715,7 +2667,7 @@
         <a:spcBef>
           <a:spcPts val="1000"/>
         </a:spcBef>
-        <a:buFont typeface="Arial" panose="020B0604020202020204" pitchFamily="34" charset="0"/>
+        <a:buFont typeface="Arial" panose="02080604020202020204" pitchFamily="34" charset="0"/>
         <a:buChar char="•"/>
         <a:defRPr sz="2800" kern="1200">
           <a:solidFill>
@@ -2733,7 +2685,7 @@
         <a:spcBef>
           <a:spcPts val="500"/>
         </a:spcBef>
-        <a:buFont typeface="Arial" panose="020B0604020202020204" pitchFamily="34" charset="0"/>
+        <a:buFont typeface="Arial" panose="02080604020202020204" pitchFamily="34" charset="0"/>
         <a:buChar char="•"/>
         <a:defRPr sz="2400" kern="1200">
           <a:solidFill>
@@ -2751,7 +2703,7 @@
         <a:spcBef>
           <a:spcPts val="500"/>
         </a:spcBef>
-        <a:buFont typeface="Arial" panose="020B0604020202020204" pitchFamily="34" charset="0"/>
+        <a:buFont typeface="Arial" panose="02080604020202020204" pitchFamily="34" charset="0"/>
         <a:buChar char="•"/>
         <a:defRPr sz="2000" kern="1200">
           <a:solidFill>
@@ -2769,7 +2721,7 @@
         <a:spcBef>
           <a:spcPts val="500"/>
         </a:spcBef>
-        <a:buFont typeface="Arial" panose="020B0604020202020204" pitchFamily="34" charset="0"/>
+        <a:buFont typeface="Arial" panose="02080604020202020204" pitchFamily="34" charset="0"/>
         <a:buChar char="•"/>
         <a:defRPr sz="1800" kern="1200">
           <a:solidFill>
@@ -2787,7 +2739,7 @@
         <a:spcBef>
           <a:spcPts val="500"/>
         </a:spcBef>
-        <a:buFont typeface="Arial" panose="020B0604020202020204" pitchFamily="34" charset="0"/>
+        <a:buFont typeface="Arial" panose="02080604020202020204" pitchFamily="34" charset="0"/>
         <a:buChar char="•"/>
         <a:defRPr sz="1800" kern="1200">
           <a:solidFill>
@@ -2805,7 +2757,7 @@
         <a:spcBef>
           <a:spcPts val="500"/>
         </a:spcBef>
-        <a:buFont typeface="Arial" panose="020B0604020202020204" pitchFamily="34" charset="0"/>
+        <a:buFont typeface="Arial" panose="02080604020202020204" pitchFamily="34" charset="0"/>
         <a:buChar char="•"/>
         <a:defRPr sz="1800" kern="1200">
           <a:solidFill>
@@ -2823,7 +2775,7 @@
         <a:spcBef>
           <a:spcPts val="500"/>
         </a:spcBef>
-        <a:buFont typeface="Arial" panose="020B0604020202020204" pitchFamily="34" charset="0"/>
+        <a:buFont typeface="Arial" panose="02080604020202020204" pitchFamily="34" charset="0"/>
         <a:buChar char="•"/>
         <a:defRPr sz="1800" kern="1200">
           <a:solidFill>
@@ -2841,7 +2793,7 @@
         <a:spcBef>
           <a:spcPts val="500"/>
         </a:spcBef>
-        <a:buFont typeface="Arial" panose="020B0604020202020204" pitchFamily="34" charset="0"/>
+        <a:buFont typeface="Arial" panose="02080604020202020204" pitchFamily="34" charset="0"/>
         <a:buChar char="•"/>
         <a:defRPr sz="1800" kern="1200">
           <a:solidFill>
@@ -2859,7 +2811,7 @@
         <a:spcBef>
           <a:spcPts val="500"/>
         </a:spcBef>
-        <a:buFont typeface="Arial" panose="020B0604020202020204" pitchFamily="34" charset="0"/>
+        <a:buFont typeface="Arial" panose="02080604020202020204" pitchFamily="34" charset="0"/>
         <a:buChar char="•"/>
         <a:defRPr sz="1800" kern="1200">
           <a:solidFill>
@@ -3025,12 +2977,32 @@
           </a:p>
         </p:txBody>
       </p:sp>
+      <p:sp>
+        <p:nvSpPr>
+          <p:cNvPr id="4" name="Text Box 3"/>
+          <p:cNvSpPr txBox="1"/>
+          <p:nvPr/>
+        </p:nvSpPr>
+        <p:spPr>
+          <a:xfrm>
+            <a:off x="677545" y="1988185"/>
+            <a:ext cx="309880" cy="368300"/>
+          </a:xfrm>
+          <a:prstGeom prst="rect">
+            <a:avLst/>
+          </a:prstGeom>
+          <a:noFill/>
+        </p:spPr>
+        <p:txBody>
+          <a:bodyPr wrap="none" rtlCol="0">
+            <a:spAutoFit/>
+          </a:bodyPr>
+          <a:p>
+            <a:endParaRPr lang="en-US"/>
+          </a:p>
+        </p:txBody>
+      </p:sp>
     </p:spTree>
-    <p:extLst>
-      <p:ext uri="{BB962C8B-B14F-4D97-AF65-F5344CB8AC3E}">
-        <p14:creationId xmlns:p14="http://schemas.microsoft.com/office/powerpoint/2010/main" val="1299130550"/>
-      </p:ext>
-    </p:extLst>
   </p:cSld>
   <p:clrMapOvr>
     <a:masterClrMapping/>
@@ -3066,7 +3038,7 @@
           </p:nvPr>
         </p:nvPicPr>
         <p:blipFill>
-          <a:blip r:embed="rId2"/>
+          <a:blip r:embed="rId1"/>
           <a:stretch>
             <a:fillRect/>
           </a:stretch>
@@ -3092,7 +3064,7 @@
           </p:nvPr>
         </p:nvPicPr>
         <p:blipFill>
-          <a:blip r:embed="rId3"/>
+          <a:blip r:embed="rId2"/>
           <a:stretch>
             <a:fillRect/>
           </a:stretch>
@@ -3108,11 +3080,6 @@
         </p:spPr>
       </p:pic>
     </p:spTree>
-    <p:extLst>
-      <p:ext uri="{BB962C8B-B14F-4D97-AF65-F5344CB8AC3E}">
-        <p14:creationId xmlns:p14="http://schemas.microsoft.com/office/powerpoint/2010/main" val="848270865"/>
-      </p:ext>
-    </p:extLst>
   </p:cSld>
   <p:clrMapOvr>
     <a:masterClrMapping/>
@@ -3163,30 +3130,35 @@
               <a:rPr lang="en-US" b="1" dirty="0" smtClean="0"/>
               <a:t>Business Interpretation</a:t>
             </a:r>
+            <a:endParaRPr lang="en-US" b="1" dirty="0" smtClean="0"/>
           </a:p>
           <a:p>
             <a:r>
               <a:rPr lang="en-US" dirty="0" smtClean="0"/>
               <a:t>The supermarket can use this information to:</a:t>
             </a:r>
+            <a:endParaRPr lang="en-US" dirty="0" smtClean="0"/>
           </a:p>
           <a:p>
             <a:r>
               <a:rPr lang="en-US" dirty="0" smtClean="0"/>
               <a:t>Place bread and butter near each other Offer combo discounts </a:t>
             </a:r>
+            <a:endParaRPr lang="en-US" dirty="0" smtClean="0"/>
           </a:p>
           <a:p>
             <a:r>
               <a:rPr lang="en-US" dirty="0" smtClean="0"/>
               <a:t>Recommend butter when customers buy bread </a:t>
             </a:r>
+            <a:endParaRPr lang="en-US" dirty="0" smtClean="0"/>
           </a:p>
           <a:p>
             <a:r>
               <a:rPr lang="en-US" dirty="0" smtClean="0"/>
               <a:t>Increase sales through cross-selling</a:t>
             </a:r>
+            <a:endParaRPr lang="en-US" dirty="0" smtClean="0"/>
           </a:p>
           <a:p>
             <a:endParaRPr lang="en-US" dirty="0"/>
@@ -3236,10 +3208,20 @@
                   <a:schemeClr val="tx1"/>
                 </a:solidFill>
                 <a:effectLst/>
-                <a:latin typeface="Arial" panose="020B0604020202020204" pitchFamily="34" charset="0"/>
+                <a:latin typeface="Arial" panose="02080604020202020204" pitchFamily="34" charset="0"/>
               </a:rPr>
               <a:t>Real-Life Example</a:t>
             </a:r>
+            <a:endParaRPr kumimoji="0" lang="en-US" altLang="en-US" sz="2400" b="1" i="0" u="none" strike="noStrike" cap="none" normalizeH="0" baseline="0" dirty="0" smtClean="0">
+              <a:ln>
+                <a:noFill/>
+              </a:ln>
+              <a:solidFill>
+                <a:schemeClr val="tx1"/>
+              </a:solidFill>
+              <a:effectLst/>
+              <a:latin typeface="Arial" panose="02080604020202020204" pitchFamily="34" charset="0"/>
+            </a:endParaRPr>
           </a:p>
           <a:p>
             <a:pPr marL="0" lvl="0" indent="0" eaLnBrk="0" fontAlgn="base" hangingPunct="0">
@@ -3263,16 +3245,19 @@
                   <a:schemeClr val="tx1"/>
                 </a:solidFill>
                 <a:effectLst/>
-                <a:latin typeface="Arial" panose="020B0604020202020204" pitchFamily="34" charset="0"/>
+                <a:latin typeface="Arial" panose="02080604020202020204" pitchFamily="34" charset="0"/>
               </a:rPr>
               <a:t>Online shopping websites such as </a:t>
             </a:r>
             <a:r>
               <a:rPr lang="en-US" altLang="en-US" dirty="0">
-                <a:latin typeface="Arial" panose="020B0604020202020204" pitchFamily="34" charset="0"/>
+                <a:latin typeface="Arial" panose="02080604020202020204" pitchFamily="34" charset="0"/>
               </a:rPr>
               <a:t>Amazon use Market Basket Analysis for recommendations like:</a:t>
             </a:r>
+            <a:endParaRPr lang="en-US" altLang="en-US" dirty="0">
+              <a:latin typeface="Arial" panose="02080604020202020204" pitchFamily="34" charset="0"/>
+            </a:endParaRPr>
           </a:p>
           <a:p>
             <a:pPr marL="0" lvl="0" indent="0" eaLnBrk="0" fontAlgn="base" hangingPunct="0">
@@ -3289,10 +3274,13 @@
             </a:pPr>
             <a:r>
               <a:rPr lang="en-US" altLang="en-US" dirty="0">
-                <a:latin typeface="Arial" panose="020B0604020202020204" pitchFamily="34" charset="0"/>
+                <a:latin typeface="Arial" panose="02080604020202020204" pitchFamily="34" charset="0"/>
               </a:rPr>
               <a:t>“Customers who bought this product also bought...”</a:t>
             </a:r>
+            <a:endParaRPr lang="en-US" altLang="en-US" dirty="0">
+              <a:latin typeface="Arial" panose="02080604020202020204" pitchFamily="34" charset="0"/>
+            </a:endParaRPr>
           </a:p>
           <a:p>
             <a:endParaRPr lang="en-US" dirty="0"/>
@@ -3300,11 +3288,6 @@
         </p:txBody>
       </p:sp>
     </p:spTree>
-    <p:extLst>
-      <p:ext uri="{BB962C8B-B14F-4D97-AF65-F5344CB8AC3E}">
-        <p14:creationId xmlns:p14="http://schemas.microsoft.com/office/powerpoint/2010/main" val="2476581801"/>
-      </p:ext>
-    </p:extLst>
   </p:cSld>
   <p:clrMapOvr>
     <a:masterClrMapping/>
@@ -3421,6 +3404,7 @@
               <a:rPr lang="en-US" dirty="0" smtClean="0"/>
               <a:t>.</a:t>
             </a:r>
+            <a:endParaRPr lang="en-US" dirty="0" smtClean="0"/>
           </a:p>
           <a:p>
             <a:r>
@@ -3447,6 +3431,7 @@
               <a:rPr lang="en-US" dirty="0" smtClean="0"/>
               <a:t>.</a:t>
             </a:r>
+            <a:endParaRPr lang="en-US" dirty="0" smtClean="0"/>
           </a:p>
           <a:p>
             <a:r>
@@ -3478,7 +3463,7 @@
           </p:nvPr>
         </p:nvPicPr>
         <p:blipFill>
-          <a:blip r:embed="rId2"/>
+          <a:blip r:embed="rId1"/>
           <a:stretch>
             <a:fillRect/>
           </a:stretch>
@@ -3494,11 +3479,6 @@
         </p:spPr>
       </p:pic>
     </p:spTree>
-    <p:extLst>
-      <p:ext uri="{BB962C8B-B14F-4D97-AF65-F5344CB8AC3E}">
-        <p14:creationId xmlns:p14="http://schemas.microsoft.com/office/powerpoint/2010/main" val="1680655669"/>
-      </p:ext>
-    </p:extLst>
   </p:cSld>
   <p:clrMapOvr>
     <a:masterClrMapping/>
@@ -3534,7 +3514,7 @@
           </p:nvPr>
         </p:nvPicPr>
         <p:blipFill>
-          <a:blip r:embed="rId2"/>
+          <a:blip r:embed="rId1"/>
           <a:stretch>
             <a:fillRect/>
           </a:stretch>
@@ -3550,11 +3530,6 @@
         </p:spPr>
       </p:pic>
     </p:spTree>
-    <p:extLst>
-      <p:ext uri="{BB962C8B-B14F-4D97-AF65-F5344CB8AC3E}">
-        <p14:creationId xmlns:p14="http://schemas.microsoft.com/office/powerpoint/2010/main" val="3278495927"/>
-      </p:ext>
-    </p:extLst>
   </p:cSld>
   <p:clrMapOvr>
     <a:masterClrMapping/>
@@ -3747,6 +3722,10 @@
               </a:rPr>
               <a:t>.</a:t>
             </a:r>
+            <a:endParaRPr lang="en-US" altLang="en-US" dirty="0" smtClean="0">
+              <a:latin typeface="Times New Roman" panose="02020603050405020304" pitchFamily="18" charset="0"/>
+              <a:cs typeface="Times New Roman" panose="02020603050405020304" pitchFamily="18" charset="0"/>
+            </a:endParaRPr>
           </a:p>
           <a:p>
             <a:pPr marL="0" lvl="0" indent="0" eaLnBrk="0" fontAlgn="base" hangingPunct="0">
@@ -3856,6 +3835,10 @@
               </a:rPr>
               <a:t> containing it with the same support.</a:t>
             </a:r>
+            <a:endParaRPr lang="en-US" altLang="en-US" dirty="0">
+              <a:latin typeface="Times New Roman" panose="02020603050405020304" pitchFamily="18" charset="0"/>
+              <a:cs typeface="Times New Roman" panose="02020603050405020304" pitchFamily="18" charset="0"/>
+            </a:endParaRPr>
           </a:p>
           <a:p>
             <a:endParaRPr lang="en-US" dirty="0">
@@ -3866,11 +3849,6 @@
         </p:txBody>
       </p:sp>
     </p:spTree>
-    <p:extLst>
-      <p:ext uri="{BB962C8B-B14F-4D97-AF65-F5344CB8AC3E}">
-        <p14:creationId xmlns:p14="http://schemas.microsoft.com/office/powerpoint/2010/main" val="2690965593"/>
-      </p:ext>
-    </p:extLst>
   </p:cSld>
   <p:clrMapOvr>
     <a:masterClrMapping/>
@@ -3906,7 +3884,7 @@
           </p:nvPr>
         </p:nvPicPr>
         <p:blipFill>
-          <a:blip r:embed="rId2"/>
+          <a:blip r:embed="rId1"/>
           <a:stretch>
             <a:fillRect/>
           </a:stretch>
@@ -3940,6 +3918,7 @@
               <a:rPr lang="en-US" dirty="0" smtClean="0"/>
               <a:t>Therefore:</a:t>
             </a:r>
+            <a:endParaRPr lang="en-US" dirty="0" smtClean="0"/>
           </a:p>
           <a:p>
             <a:r>
@@ -3958,6 +3937,7 @@
               <a:rPr lang="en-US" dirty="0" smtClean="0"/>
               <a:t>.</a:t>
             </a:r>
+            <a:endParaRPr lang="en-US" dirty="0" smtClean="0"/>
           </a:p>
           <a:p>
             <a:endParaRPr lang="en-US" dirty="0"/>
@@ -3965,11 +3945,6 @@
         </p:txBody>
       </p:sp>
     </p:spTree>
-    <p:extLst>
-      <p:ext uri="{BB962C8B-B14F-4D97-AF65-F5344CB8AC3E}">
-        <p14:creationId xmlns:p14="http://schemas.microsoft.com/office/powerpoint/2010/main" val="4179944137"/>
-      </p:ext>
-    </p:extLst>
   </p:cSld>
   <p:clrMapOvr>
     <a:masterClrMapping/>
@@ -4005,7 +3980,7 @@
           </p:nvPr>
         </p:nvPicPr>
         <p:blipFill>
-          <a:blip r:embed="rId2"/>
+          <a:blip r:embed="rId1"/>
           <a:stretch>
             <a:fillRect/>
           </a:stretch>
@@ -4021,11 +3996,6 @@
         </p:spPr>
       </p:pic>
     </p:spTree>
-    <p:extLst>
-      <p:ext uri="{BB962C8B-B14F-4D97-AF65-F5344CB8AC3E}">
-        <p14:creationId xmlns:p14="http://schemas.microsoft.com/office/powerpoint/2010/main" val="1899826750"/>
-      </p:ext>
-    </p:extLst>
   </p:cSld>
   <p:clrMapOvr>
     <a:masterClrMapping/>
@@ -4076,6 +4046,7 @@
               <a:rPr lang="en-US" b="1" dirty="0"/>
               <a:t>Association Rules</a:t>
             </a:r>
+            <a:endParaRPr lang="en-US" b="1" dirty="0"/>
           </a:p>
           <a:p>
             <a:r>
@@ -4100,6 +4071,7 @@
               <a:rPr lang="en-US" dirty="0" smtClean="0"/>
               <a:t>.</a:t>
             </a:r>
+            <a:endParaRPr lang="en-US" dirty="0" smtClean="0"/>
           </a:p>
           <a:p>
             <a:endParaRPr lang="en-US" dirty="0"/>
@@ -4109,6 +4081,7 @@
               <a:rPr lang="en-US" dirty="0"/>
               <a:t>An association rule is generally written in the form:</a:t>
             </a:r>
+            <a:endParaRPr lang="en-US" dirty="0"/>
           </a:p>
           <a:p>
             <a:r>
@@ -4149,6 +4122,7 @@
               <a:rPr lang="en-US" dirty="0"/>
               <a:t>where:</a:t>
             </a:r>
+            <a:endParaRPr lang="en-US" dirty="0"/>
           </a:p>
           <a:p>
             <a:r>
@@ -4159,6 +4133,7 @@
               <a:rPr lang="en-US" dirty="0"/>
               <a:t> = antecedent (if part) </a:t>
             </a:r>
+            <a:endParaRPr lang="en-US" dirty="0"/>
           </a:p>
           <a:p>
             <a:r>
@@ -4169,6 +4144,7 @@
               <a:rPr lang="en-US" dirty="0"/>
               <a:t> = consequent (then part) </a:t>
             </a:r>
+            <a:endParaRPr lang="en-US" dirty="0"/>
           </a:p>
           <a:p>
             <a:r>
@@ -4191,6 +4167,7 @@
               <a:rPr lang="en-US" dirty="0"/>
               <a:t> is likely to occur as well.</a:t>
             </a:r>
+            <a:endParaRPr lang="en-US" dirty="0"/>
           </a:p>
           <a:p>
             <a:r>
@@ -4201,6 +4178,7 @@
               <a:rPr lang="en-US" dirty="0" smtClean="0"/>
               <a:t>:</a:t>
             </a:r>
+            <a:endParaRPr lang="en-US" dirty="0" smtClean="0"/>
           </a:p>
           <a:p>
             <a:r>
@@ -4222,6 +4200,7 @@
               <a:rPr lang="en-US" dirty="0" smtClean="0"/>
               <a:t>.</a:t>
             </a:r>
+            <a:endParaRPr lang="en-US" dirty="0" smtClean="0"/>
           </a:p>
           <a:p>
             <a:endParaRPr lang="en-US" dirty="0"/>
@@ -4232,11 +4211,6 @@
         </p:txBody>
       </p:sp>
     </p:spTree>
-    <p:extLst>
-      <p:ext uri="{BB962C8B-B14F-4D97-AF65-F5344CB8AC3E}">
-        <p14:creationId xmlns:p14="http://schemas.microsoft.com/office/powerpoint/2010/main" val="393951035"/>
-      </p:ext>
-    </p:extLst>
   </p:cSld>
   <p:clrMapOvr>
     <a:masterClrMapping/>
@@ -4272,7 +4246,7 @@
           </p:nvPr>
         </p:nvPicPr>
         <p:blipFill>
-          <a:blip r:embed="rId2"/>
+          <a:blip r:embed="rId1"/>
           <a:stretch>
             <a:fillRect/>
           </a:stretch>
@@ -4288,11 +4262,6 @@
         </p:spPr>
       </p:pic>
     </p:spTree>
-    <p:extLst>
-      <p:ext uri="{BB962C8B-B14F-4D97-AF65-F5344CB8AC3E}">
-        <p14:creationId xmlns:p14="http://schemas.microsoft.com/office/powerpoint/2010/main" val="398338066"/>
-      </p:ext>
-    </p:extLst>
   </p:cSld>
   <p:clrMapOvr>
     <a:masterClrMapping/>
@@ -4343,6 +4312,7 @@
               <a:rPr lang="en-US" dirty="0"/>
               <a:t>Types of Association Rules</a:t>
             </a:r>
+            <a:endParaRPr lang="en-US" dirty="0"/>
           </a:p>
         </p:txBody>
       </p:sp>
@@ -4372,18 +4342,21 @@
               <a:rPr lang="en-US" b="1" dirty="0"/>
               <a:t>1. Single Dimensional Association Rule</a:t>
             </a:r>
+            <a:endParaRPr lang="en-US" b="1" dirty="0"/>
           </a:p>
           <a:p>
             <a:r>
               <a:rPr lang="en-US" dirty="0"/>
               <a:t>A single-dimensional association rule contains only one predicate or dimension.</a:t>
             </a:r>
+            <a:endParaRPr lang="en-US" dirty="0"/>
           </a:p>
           <a:p>
             <a:r>
               <a:rPr lang="en-US" b="1" dirty="0" smtClean="0"/>
               <a:t>Example</a:t>
             </a:r>
+            <a:endParaRPr lang="en-US" b="1" dirty="0" smtClean="0"/>
           </a:p>
           <a:p>
             <a:r>
@@ -4429,48 +4402,56 @@
               <a:rPr lang="en-US" dirty="0"/>
               <a:t>.</a:t>
             </a:r>
+            <a:endParaRPr lang="en-US" dirty="0"/>
           </a:p>
           <a:p>
             <a:r>
               <a:rPr lang="en-US" b="1" dirty="0"/>
               <a:t>Characteristics</a:t>
             </a:r>
+            <a:endParaRPr lang="en-US" b="1" dirty="0"/>
           </a:p>
           <a:p>
             <a:r>
               <a:rPr lang="en-US" dirty="0"/>
               <a:t>Uses one type of relationship </a:t>
             </a:r>
+            <a:endParaRPr lang="en-US" dirty="0"/>
           </a:p>
           <a:p>
             <a:r>
               <a:rPr lang="en-US" dirty="0"/>
               <a:t>Simple and easy to analyze </a:t>
             </a:r>
+            <a:endParaRPr lang="en-US" dirty="0"/>
           </a:p>
           <a:p>
             <a:r>
               <a:rPr lang="en-US" dirty="0"/>
               <a:t>Mostly used in market basket analysis </a:t>
             </a:r>
+            <a:endParaRPr lang="en-US" dirty="0"/>
           </a:p>
           <a:p>
             <a:r>
               <a:rPr lang="en-US" b="1" dirty="0"/>
               <a:t>Applications</a:t>
             </a:r>
+            <a:endParaRPr lang="en-US" b="1" dirty="0"/>
           </a:p>
           <a:p>
             <a:r>
               <a:rPr lang="en-US" dirty="0"/>
               <a:t>Supermarket sales analysis </a:t>
             </a:r>
+            <a:endParaRPr lang="en-US" dirty="0"/>
           </a:p>
           <a:p>
             <a:r>
               <a:rPr lang="en-US" dirty="0"/>
               <a:t>Product recommendation systems</a:t>
             </a:r>
+            <a:endParaRPr lang="en-US" dirty="0"/>
           </a:p>
           <a:p>
             <a:endParaRPr lang="en-US" dirty="0"/>
@@ -4503,18 +4484,21 @@
               <a:rPr lang="en-US" b="1" dirty="0"/>
               <a:t>2. Multidimensional Association Rule</a:t>
             </a:r>
+            <a:endParaRPr lang="en-US" b="1" dirty="0"/>
           </a:p>
           <a:p>
             <a:r>
               <a:rPr lang="en-US" dirty="0"/>
               <a:t>A multidimensional association rule involves two or more dimensions or predicates.</a:t>
             </a:r>
+            <a:endParaRPr lang="en-US" dirty="0"/>
           </a:p>
           <a:p>
             <a:r>
               <a:rPr lang="en-US" b="1" dirty="0" smtClean="0"/>
               <a:t>Example</a:t>
             </a:r>
+            <a:endParaRPr lang="en-US" b="1" dirty="0" smtClean="0"/>
           </a:p>
           <a:p>
             <a:r>
@@ -4528,24 +4512,28 @@
               <a:rPr lang="en-US" dirty="0"/>
               <a:t>This rule includes:</a:t>
             </a:r>
+            <a:endParaRPr lang="en-US" dirty="0"/>
           </a:p>
           <a:p>
             <a:r>
               <a:rPr lang="en-US" dirty="0"/>
               <a:t>Age dimension </a:t>
             </a:r>
+            <a:endParaRPr lang="en-US" dirty="0"/>
           </a:p>
           <a:p>
             <a:r>
               <a:rPr lang="en-US" dirty="0"/>
               <a:t>Occupation dimension </a:t>
             </a:r>
+            <a:endParaRPr lang="en-US" dirty="0"/>
           </a:p>
           <a:p>
             <a:r>
               <a:rPr lang="en-US" dirty="0"/>
               <a:t>Buying behavior</a:t>
             </a:r>
+            <a:endParaRPr lang="en-US" dirty="0"/>
           </a:p>
           <a:p>
             <a:r>
@@ -4559,54 +4547,56 @@
               <a:rPr lang="en-US" dirty="0"/>
               <a:t>Uses multiple attributes </a:t>
             </a:r>
+            <a:endParaRPr lang="en-US" dirty="0"/>
           </a:p>
           <a:p>
             <a:r>
               <a:rPr lang="en-US" dirty="0"/>
               <a:t>More informative than single-dimensional rules </a:t>
             </a:r>
+            <a:endParaRPr lang="en-US" dirty="0"/>
           </a:p>
           <a:p>
             <a:r>
               <a:rPr lang="en-US" dirty="0"/>
               <a:t>Helps in customer segmentation </a:t>
             </a:r>
+            <a:endParaRPr lang="en-US" dirty="0"/>
           </a:p>
           <a:p>
             <a:r>
               <a:rPr lang="en-US" b="1" dirty="0"/>
               <a:t>Applications</a:t>
             </a:r>
+            <a:endParaRPr lang="en-US" b="1" dirty="0"/>
           </a:p>
           <a:p>
             <a:r>
               <a:rPr lang="en-US" dirty="0"/>
               <a:t>Customer profiling </a:t>
             </a:r>
+            <a:endParaRPr lang="en-US" dirty="0"/>
           </a:p>
           <a:p>
             <a:r>
               <a:rPr lang="en-US" dirty="0"/>
               <a:t>Business intelligence </a:t>
             </a:r>
+            <a:endParaRPr lang="en-US" dirty="0"/>
           </a:p>
           <a:p>
             <a:r>
               <a:rPr lang="en-US" dirty="0"/>
               <a:t>Decision support systems</a:t>
             </a:r>
-          </a:p>
-          <a:p>
             <a:endParaRPr lang="en-US" dirty="0"/>
           </a:p>
+          <a:p>
+            <a:endParaRPr lang="en-US" dirty="0"/>
+          </a:p>
         </p:txBody>
       </p:sp>
     </p:spTree>
-    <p:extLst>
-      <p:ext uri="{BB962C8B-B14F-4D97-AF65-F5344CB8AC3E}">
-        <p14:creationId xmlns:p14="http://schemas.microsoft.com/office/powerpoint/2010/main" val="404144141"/>
-      </p:ext>
-    </p:extLst>
   </p:cSld>
   <p:clrMapOvr>
     <a:masterClrMapping/>
@@ -4686,36 +4676,42 @@
               <a:rPr lang="en-US" dirty="0" smtClean="0"/>
               <a:t> techniques in data mining.</a:t>
             </a:r>
+            <a:endParaRPr lang="en-US" dirty="0" smtClean="0"/>
           </a:p>
           <a:p>
             <a:r>
               <a:rPr lang="en-US" b="1" dirty="0" smtClean="0"/>
               <a:t>Example</a:t>
             </a:r>
+            <a:endParaRPr lang="en-US" b="1" dirty="0" smtClean="0"/>
           </a:p>
           <a:p>
             <a:r>
               <a:rPr lang="en-US" dirty="0" smtClean="0"/>
               <a:t>If customers frequently buy:</a:t>
             </a:r>
+            <a:endParaRPr lang="en-US" dirty="0" smtClean="0"/>
           </a:p>
           <a:p>
             <a:r>
               <a:rPr lang="en-US" dirty="0" smtClean="0"/>
               <a:t>Bread + Butter </a:t>
             </a:r>
+            <a:endParaRPr lang="en-US" dirty="0" smtClean="0"/>
           </a:p>
           <a:p>
             <a:r>
               <a:rPr lang="en-US" dirty="0" smtClean="0"/>
               <a:t>Milk + Bread </a:t>
             </a:r>
+            <a:endParaRPr lang="en-US" dirty="0" smtClean="0"/>
           </a:p>
           <a:p>
             <a:r>
               <a:rPr lang="en-US" dirty="0" smtClean="0"/>
               <a:t>then the store may place these products nearby or provide combo offers.</a:t>
             </a:r>
+            <a:endParaRPr lang="en-US" dirty="0" smtClean="0"/>
           </a:p>
           <a:p>
             <a:endParaRPr lang="en-US" dirty="0"/>
@@ -4723,11 +4719,6 @@
         </p:txBody>
       </p:sp>
     </p:spTree>
-    <p:extLst>
-      <p:ext uri="{BB962C8B-B14F-4D97-AF65-F5344CB8AC3E}">
-        <p14:creationId xmlns:p14="http://schemas.microsoft.com/office/powerpoint/2010/main" val="3848092348"/>
-      </p:ext>
-    </p:extLst>
   </p:cSld>
   <p:clrMapOvr>
     <a:masterClrMapping/>
@@ -4776,42 +4767,49 @@
               <a:rPr lang="en-US" b="1" dirty="0" smtClean="0"/>
               <a:t>Objectives of Market Basket Analysis</a:t>
             </a:r>
+            <a:endParaRPr lang="en-US" b="1" dirty="0" smtClean="0"/>
           </a:p>
           <a:p>
             <a:r>
               <a:rPr lang="en-US" dirty="0" smtClean="0"/>
               <a:t>Identify customer purchasing patterns </a:t>
             </a:r>
+            <a:endParaRPr lang="en-US" dirty="0" smtClean="0"/>
           </a:p>
           <a:p>
             <a:r>
               <a:rPr lang="en-US" dirty="0" smtClean="0"/>
               <a:t>Improve product placement </a:t>
             </a:r>
+            <a:endParaRPr lang="en-US" dirty="0" smtClean="0"/>
           </a:p>
           <a:p>
             <a:r>
               <a:rPr lang="en-US" dirty="0" smtClean="0"/>
               <a:t>Increase cross-selling opportunities </a:t>
             </a:r>
+            <a:endParaRPr lang="en-US" dirty="0" smtClean="0"/>
           </a:p>
           <a:p>
             <a:r>
               <a:rPr lang="en-US" dirty="0" smtClean="0"/>
               <a:t>Enhance customer satisfaction </a:t>
             </a:r>
+            <a:endParaRPr lang="en-US" dirty="0" smtClean="0"/>
           </a:p>
           <a:p>
             <a:r>
               <a:rPr lang="en-US" dirty="0" smtClean="0"/>
               <a:t>Boost sales and profit </a:t>
             </a:r>
+            <a:endParaRPr lang="en-US" dirty="0" smtClean="0"/>
           </a:p>
           <a:p>
             <a:r>
               <a:rPr lang="en-US" dirty="0" smtClean="0"/>
               <a:t>Design promotional offers and discounts</a:t>
             </a:r>
+            <a:endParaRPr lang="en-US" dirty="0" smtClean="0"/>
           </a:p>
           <a:p>
             <a:endParaRPr lang="en-US" dirty="0"/>
@@ -4819,11 +4817,6 @@
         </p:txBody>
       </p:sp>
     </p:spTree>
-    <p:extLst>
-      <p:ext uri="{BB962C8B-B14F-4D97-AF65-F5344CB8AC3E}">
-        <p14:creationId xmlns:p14="http://schemas.microsoft.com/office/powerpoint/2010/main" val="1829517492"/>
-      </p:ext>
-    </p:extLst>
   </p:cSld>
   <p:clrMapOvr>
     <a:masterClrMapping/>
@@ -4872,12 +4865,14 @@
               <a:rPr lang="en-US" b="1" dirty="0" smtClean="0"/>
               <a:t>Working Principle</a:t>
             </a:r>
+            <a:endParaRPr lang="en-US" b="1" dirty="0" smtClean="0"/>
           </a:p>
           <a:p>
             <a:r>
               <a:rPr lang="en-US" dirty="0" smtClean="0"/>
               <a:t>The analysis studies transaction data collected from customer purchases. It identifies:</a:t>
             </a:r>
+            <a:endParaRPr lang="en-US" dirty="0" smtClean="0"/>
           </a:p>
           <a:p>
             <a:r>
@@ -4892,6 +4887,7 @@
               <a:rPr lang="en-US" dirty="0" smtClean="0"/>
               <a:t> → items often purchased together </a:t>
             </a:r>
+            <a:endParaRPr lang="en-US" dirty="0" smtClean="0"/>
           </a:p>
           <a:p>
             <a:r>
@@ -4902,6 +4898,7 @@
               <a:rPr lang="en-US" dirty="0" smtClean="0"/>
               <a:t> → relationships among products </a:t>
             </a:r>
+            <a:endParaRPr lang="en-US" dirty="0" smtClean="0"/>
           </a:p>
           <a:p>
             <a:endParaRPr lang="en-US" dirty="0"/>
@@ -4909,11 +4906,6 @@
         </p:txBody>
       </p:sp>
     </p:spTree>
-    <p:extLst>
-      <p:ext uri="{BB962C8B-B14F-4D97-AF65-F5344CB8AC3E}">
-        <p14:creationId xmlns:p14="http://schemas.microsoft.com/office/powerpoint/2010/main" val="2813724263"/>
-      </p:ext>
-    </p:extLst>
   </p:cSld>
   <p:clrMapOvr>
     <a:masterClrMapping/>
@@ -4949,7 +4941,7 @@
           </p:nvPr>
         </p:nvPicPr>
         <p:blipFill>
-          <a:blip r:embed="rId2"/>
+          <a:blip r:embed="rId1"/>
           <a:stretch>
             <a:fillRect/>
           </a:stretch>
@@ -4965,11 +4957,6 @@
         </p:spPr>
       </p:pic>
     </p:spTree>
-    <p:extLst>
-      <p:ext uri="{BB962C8B-B14F-4D97-AF65-F5344CB8AC3E}">
-        <p14:creationId xmlns:p14="http://schemas.microsoft.com/office/powerpoint/2010/main" val="1499583993"/>
-      </p:ext>
-    </p:extLst>
   </p:cSld>
   <p:clrMapOvr>
     <a:masterClrMapping/>
@@ -5020,6 +5007,7 @@
               <a:rPr lang="en-US" b="1" dirty="0" smtClean="0"/>
               <a:t>Applications of Market Basket Analysis</a:t>
             </a:r>
+            <a:endParaRPr lang="en-US" b="1" dirty="0" smtClean="0"/>
           </a:p>
           <a:p>
             <a:pPr marL="0" indent="0">
@@ -5029,24 +5017,28 @@
               <a:rPr lang="en-US" b="1" dirty="0" smtClean="0"/>
               <a:t>1. Sales and Marketing</a:t>
             </a:r>
+            <a:endParaRPr lang="en-US" b="1" dirty="0" smtClean="0"/>
           </a:p>
           <a:p>
             <a:r>
               <a:rPr lang="en-US" dirty="0" smtClean="0"/>
               <a:t>Improves customer service </a:t>
             </a:r>
+            <a:endParaRPr lang="en-US" dirty="0" smtClean="0"/>
           </a:p>
           <a:p>
             <a:r>
               <a:rPr lang="en-US" dirty="0" smtClean="0"/>
               <a:t>Helps in cross-selling products </a:t>
             </a:r>
+            <a:endParaRPr lang="en-US" dirty="0" smtClean="0"/>
           </a:p>
           <a:p>
             <a:r>
               <a:rPr lang="en-US" dirty="0" smtClean="0"/>
               <a:t>Increases response rates in promotions and direct marketing </a:t>
             </a:r>
+            <a:endParaRPr lang="en-US" dirty="0" smtClean="0"/>
           </a:p>
           <a:p>
             <a:pPr marL="0" indent="0">
@@ -5056,24 +5048,28 @@
               <a:rPr lang="en-US" b="1" dirty="0" smtClean="0"/>
               <a:t>2. Customer Retention</a:t>
             </a:r>
+            <a:endParaRPr lang="en-US" b="1" dirty="0" smtClean="0"/>
           </a:p>
           <a:p>
             <a:r>
               <a:rPr lang="en-US" dirty="0" smtClean="0"/>
               <a:t>Identifies customer behavior patterns </a:t>
             </a:r>
+            <a:endParaRPr lang="en-US" dirty="0" smtClean="0"/>
           </a:p>
           <a:p>
             <a:r>
               <a:rPr lang="en-US" dirty="0" smtClean="0"/>
               <a:t>Predicts possible customer defections </a:t>
             </a:r>
+            <a:endParaRPr lang="en-US" dirty="0" smtClean="0"/>
           </a:p>
           <a:p>
             <a:r>
               <a:rPr lang="en-US" dirty="0" smtClean="0"/>
               <a:t>Helps companies maintain loyal customers </a:t>
             </a:r>
+            <a:endParaRPr lang="en-US" dirty="0" smtClean="0"/>
           </a:p>
         </p:txBody>
       </p:sp>
@@ -5106,24 +5102,28 @@
               <a:rPr lang="en-US" b="1" dirty="0" smtClean="0"/>
               <a:t>3. Risk Assessment and Fraud Detection</a:t>
             </a:r>
+            <a:endParaRPr lang="en-US" b="1" dirty="0" smtClean="0"/>
           </a:p>
           <a:p>
             <a:r>
               <a:rPr lang="en-US" dirty="0" smtClean="0"/>
               <a:t>Detects unusual purchasing behavior </a:t>
             </a:r>
+            <a:endParaRPr lang="en-US" dirty="0" smtClean="0"/>
           </a:p>
           <a:p>
             <a:r>
               <a:rPr lang="en-US" dirty="0" smtClean="0"/>
               <a:t>Identifies fraudulent activities </a:t>
             </a:r>
+            <a:endParaRPr lang="en-US" dirty="0" smtClean="0"/>
           </a:p>
           <a:p>
             <a:r>
               <a:rPr lang="en-US" dirty="0" smtClean="0"/>
               <a:t>Helps in security and monitoring systems </a:t>
             </a:r>
+            <a:endParaRPr lang="en-US" dirty="0" smtClean="0"/>
           </a:p>
           <a:p>
             <a:pPr marL="0" indent="0">
@@ -5133,18 +5133,21 @@
               <a:rPr lang="en-US" b="1" dirty="0" smtClean="0"/>
               <a:t>4. Store Layout Design</a:t>
             </a:r>
+            <a:endParaRPr lang="en-US" b="1" dirty="0" smtClean="0"/>
           </a:p>
           <a:p>
             <a:r>
               <a:rPr lang="en-US" dirty="0" smtClean="0"/>
               <a:t>Products frequently bought together are placed nearby </a:t>
             </a:r>
+            <a:endParaRPr lang="en-US" dirty="0" smtClean="0"/>
           </a:p>
           <a:p>
             <a:r>
               <a:rPr lang="en-US" dirty="0" smtClean="0"/>
               <a:t>Improves shopping convenience </a:t>
             </a:r>
+            <a:endParaRPr lang="en-US" dirty="0" smtClean="0"/>
           </a:p>
           <a:p>
             <a:pPr marL="0" indent="0">
@@ -5154,18 +5157,21 @@
               <a:rPr lang="en-US" b="1" dirty="0" smtClean="0"/>
               <a:t>5. Recommendation Systems</a:t>
             </a:r>
+            <a:endParaRPr lang="en-US" b="1" dirty="0" smtClean="0"/>
           </a:p>
           <a:p>
             <a:r>
               <a:rPr lang="en-US" dirty="0" smtClean="0"/>
               <a:t>Used in online shopping platforms such as:</a:t>
             </a:r>
+            <a:endParaRPr lang="en-US" dirty="0" smtClean="0"/>
           </a:p>
           <a:p>
             <a:r>
               <a:rPr lang="en-US" dirty="0" smtClean="0"/>
               <a:t>“Customers who bought this also bought…”</a:t>
             </a:r>
+            <a:endParaRPr lang="en-US" dirty="0" smtClean="0"/>
           </a:p>
           <a:p>
             <a:endParaRPr lang="en-US" dirty="0" smtClean="0"/>
@@ -5176,11 +5182,6 @@
         </p:txBody>
       </p:sp>
     </p:spTree>
-    <p:extLst>
-      <p:ext uri="{BB962C8B-B14F-4D97-AF65-F5344CB8AC3E}">
-        <p14:creationId xmlns:p14="http://schemas.microsoft.com/office/powerpoint/2010/main" val="1199695070"/>
-      </p:ext>
-    </p:extLst>
   </p:cSld>
   <p:clrMapOvr>
     <a:masterClrMapping/>
@@ -5229,36 +5230,42 @@
               <a:rPr lang="en-US" b="1" dirty="0" smtClean="0"/>
               <a:t>Advantages</a:t>
             </a:r>
+            <a:endParaRPr lang="en-US" b="1" dirty="0" smtClean="0"/>
           </a:p>
           <a:p>
             <a:r>
               <a:rPr lang="en-US" dirty="0" smtClean="0"/>
               <a:t>Increases sales and revenue </a:t>
             </a:r>
+            <a:endParaRPr lang="en-US" dirty="0" smtClean="0"/>
           </a:p>
           <a:p>
             <a:r>
               <a:rPr lang="en-US" dirty="0" smtClean="0"/>
               <a:t>Improves customer satisfaction </a:t>
             </a:r>
+            <a:endParaRPr lang="en-US" dirty="0" smtClean="0"/>
           </a:p>
           <a:p>
             <a:r>
               <a:rPr lang="en-US" dirty="0" smtClean="0"/>
               <a:t>Supports better decision-making </a:t>
             </a:r>
+            <a:endParaRPr lang="en-US" dirty="0" smtClean="0"/>
           </a:p>
           <a:p>
             <a:r>
               <a:rPr lang="en-US" dirty="0" smtClean="0"/>
               <a:t>Helps in targeted marketing </a:t>
             </a:r>
+            <a:endParaRPr lang="en-US" dirty="0" smtClean="0"/>
           </a:p>
           <a:p>
             <a:r>
               <a:rPr lang="en-US" dirty="0" smtClean="0"/>
               <a:t>Easy to implement with transaction data</a:t>
             </a:r>
+            <a:endParaRPr lang="en-US" dirty="0" smtClean="0"/>
           </a:p>
           <a:p>
             <a:endParaRPr lang="en-US" dirty="0"/>
@@ -5289,30 +5296,35 @@
               <a:rPr lang="en-US" b="1" dirty="0" smtClean="0"/>
               <a:t>Limitations</a:t>
             </a:r>
+            <a:endParaRPr lang="en-US" b="1" dirty="0" smtClean="0"/>
           </a:p>
           <a:p>
             <a:r>
               <a:rPr lang="en-US" dirty="0" smtClean="0"/>
               <a:t>Requires large amounts of data </a:t>
             </a:r>
+            <a:endParaRPr lang="en-US" dirty="0" smtClean="0"/>
           </a:p>
           <a:p>
             <a:r>
               <a:rPr lang="en-US" dirty="0" smtClean="0"/>
               <a:t>Patterns may change over time </a:t>
             </a:r>
+            <a:endParaRPr lang="en-US" dirty="0" smtClean="0"/>
           </a:p>
           <a:p>
             <a:r>
               <a:rPr lang="en-US" dirty="0" smtClean="0"/>
               <a:t>Rare item combinations may be ignored </a:t>
             </a:r>
+            <a:endParaRPr lang="en-US" dirty="0" smtClean="0"/>
           </a:p>
           <a:p>
             <a:r>
               <a:rPr lang="en-US" dirty="0" smtClean="0"/>
               <a:t>Incorrect analysis may lead to poor business decisions</a:t>
             </a:r>
+            <a:endParaRPr lang="en-US" dirty="0" smtClean="0"/>
           </a:p>
           <a:p>
             <a:endParaRPr lang="en-US" dirty="0"/>
@@ -5320,11 +5332,6 @@
         </p:txBody>
       </p:sp>
     </p:spTree>
-    <p:extLst>
-      <p:ext uri="{BB962C8B-B14F-4D97-AF65-F5344CB8AC3E}">
-        <p14:creationId xmlns:p14="http://schemas.microsoft.com/office/powerpoint/2010/main" val="3841543806"/>
-      </p:ext>
-    </p:extLst>
   </p:cSld>
   <p:clrMapOvr>
     <a:masterClrMapping/>
@@ -5360,7 +5367,7 @@
           </p:nvPr>
         </p:nvPicPr>
         <p:blipFill>
-          <a:blip r:embed="rId2"/>
+          <a:blip r:embed="rId1"/>
           <a:stretch>
             <a:fillRect/>
           </a:stretch>
@@ -5376,11 +5383,6 @@
         </p:spPr>
       </p:pic>
     </p:spTree>
-    <p:extLst>
-      <p:ext uri="{BB962C8B-B14F-4D97-AF65-F5344CB8AC3E}">
-        <p14:creationId xmlns:p14="http://schemas.microsoft.com/office/powerpoint/2010/main" val="2074703567"/>
-      </p:ext>
-    </p:extLst>
   </p:cSld>
   <p:clrMapOvr>
     <a:masterClrMapping/>
@@ -5445,12 +5447,14 @@
               <a:rPr lang="en-US" dirty="0" smtClean="0"/>
               <a:t>From the transactions, we observe:</a:t>
             </a:r>
+            <a:endParaRPr lang="en-US" dirty="0" smtClean="0"/>
           </a:p>
           <a:p>
             <a:r>
               <a:rPr lang="en-US" dirty="0" smtClean="0"/>
               <a:t>Bread and Butter appear together in: </a:t>
             </a:r>
+            <a:endParaRPr lang="en-US" dirty="0" smtClean="0"/>
           </a:p>
           <a:p>
             <a:pPr lvl="1"/>
@@ -5458,6 +5462,7 @@
               <a:rPr lang="en-US" dirty="0" smtClean="0"/>
               <a:t>T1 </a:t>
             </a:r>
+            <a:endParaRPr lang="en-US" dirty="0" smtClean="0"/>
           </a:p>
           <a:p>
             <a:pPr lvl="1"/>
@@ -5465,6 +5470,7 @@
               <a:rPr lang="en-US" dirty="0" smtClean="0"/>
               <a:t>T4 </a:t>
             </a:r>
+            <a:endParaRPr lang="en-US" dirty="0" smtClean="0"/>
           </a:p>
           <a:p>
             <a:pPr lvl="1"/>
@@ -5472,6 +5478,7 @@
               <a:rPr lang="en-US" dirty="0" smtClean="0"/>
               <a:t>T5 </a:t>
             </a:r>
+            <a:endParaRPr lang="en-US" dirty="0" smtClean="0"/>
           </a:p>
           <a:p>
             <a:r>
@@ -5494,12 +5501,14 @@
               <a:rPr lang="en-US" dirty="0" smtClean="0"/>
               <a:t>.</a:t>
             </a:r>
+            <a:endParaRPr lang="en-US" dirty="0" smtClean="0"/>
           </a:p>
           <a:p>
             <a:r>
               <a:rPr lang="en-US" dirty="0" smtClean="0"/>
               <a:t>Diaper and Beer appear together in: </a:t>
             </a:r>
+            <a:endParaRPr lang="en-US" dirty="0" smtClean="0"/>
           </a:p>
           <a:p>
             <a:pPr lvl="1"/>
@@ -5507,6 +5516,7 @@
               <a:rPr lang="en-US" dirty="0" smtClean="0"/>
               <a:t>T2 </a:t>
             </a:r>
+            <a:endParaRPr lang="en-US" dirty="0" smtClean="0"/>
           </a:p>
           <a:p>
             <a:pPr lvl="1"/>
@@ -5514,6 +5524,7 @@
               <a:rPr lang="en-US" dirty="0" smtClean="0"/>
               <a:t>T3 </a:t>
             </a:r>
+            <a:endParaRPr lang="en-US" dirty="0" smtClean="0"/>
           </a:p>
           <a:p>
             <a:pPr lvl="1"/>
@@ -5521,6 +5532,7 @@
               <a:rPr lang="en-US" dirty="0" smtClean="0"/>
               <a:t>T4 </a:t>
             </a:r>
+            <a:endParaRPr lang="en-US" dirty="0" smtClean="0"/>
           </a:p>
           <a:p>
             <a:r>
@@ -5543,6 +5555,7 @@
               <a:rPr lang="en-US" dirty="0" smtClean="0"/>
               <a:t>.</a:t>
             </a:r>
+            <a:endParaRPr lang="en-US" dirty="0" smtClean="0"/>
           </a:p>
           <a:p>
             <a:endParaRPr lang="en-US" dirty="0"/>
@@ -5560,7 +5573,7 @@
           </p:nvPr>
         </p:nvPicPr>
         <p:blipFill>
-          <a:blip r:embed="rId2"/>
+          <a:blip r:embed="rId1"/>
           <a:stretch>
             <a:fillRect/>
           </a:stretch>
@@ -5576,11 +5589,6 @@
         </p:spPr>
       </p:pic>
     </p:spTree>
-    <p:extLst>
-      <p:ext uri="{BB962C8B-B14F-4D97-AF65-F5344CB8AC3E}">
-        <p14:creationId xmlns:p14="http://schemas.microsoft.com/office/powerpoint/2010/main" val="952038870"/>
-      </p:ext>
-    </p:extLst>
   </p:cSld>
   <p:clrMapOvr>
     <a:masterClrMapping/>
@@ -5631,7 +5639,7 @@
     </a:clrScheme>
     <a:fontScheme name="Office">
       <a:majorFont>
-        <a:latin typeface="Calibri Light" panose="020F0302020204030204"/>
+        <a:latin typeface="Calibri Light"/>
         <a:ea typeface=""/>
         <a:cs typeface=""/>
         <a:font script="Jpan" typeface="游ゴシック Light"/>
@@ -5666,7 +5674,7 @@
         <a:font script="Geor" typeface="Sylfaen"/>
       </a:majorFont>
       <a:minorFont>
-        <a:latin typeface="Calibri" panose="020F0502020204030204"/>
+        <a:latin typeface="Calibri"/>
         <a:ea typeface=""/>
         <a:cs typeface=""/>
         <a:font script="Jpan" typeface="游ゴシック"/>
@@ -5839,8 +5847,6 @@
       </a:bgFillStyleLst>
     </a:fmtScheme>
   </a:themeElements>
-  <a:objectDefaults/>
-  <a:extraClrSchemeLst/>
   <a:extLst>
     <a:ext uri="{05A4C25C-085E-4340-85A3-A5531E510DB2}">
       <thm15:themeFamily xmlns:thm15="http://schemas.microsoft.com/office/thememl/2012/main" name="Office Theme" id="{62F939B6-93AF-4DB8-9C6B-D6C7DFDC589F}" vid="{4A3C46E8-61CC-4603-A589-7422A47A8E4A}"/>

--- a/6th Sem/Data mining and warehouse/Unit_5_new.pptx
+++ b/6th Sem/Data mining and warehouse/Unit_5_new.pptx
@@ -1,29 +1,32 @@
 
 <file path=ppt/presentation.xml><?xml version="1.0" encoding="utf-8"?>
-<p:presentation xmlns:a="http://schemas.openxmlformats.org/drawingml/2006/main" xmlns:r="http://schemas.openxmlformats.org/officeDocument/2006/relationships" xmlns:p="http://schemas.openxmlformats.org/presentationml/2006/main">
+<p:presentation xmlns:a="http://schemas.openxmlformats.org/drawingml/2006/main" xmlns:r="http://schemas.openxmlformats.org/officeDocument/2006/relationships" xmlns:p="http://schemas.openxmlformats.org/presentationml/2006/main" xmlns:m="http://schemas.openxmlformats.org/officeDocument/2006/math" xmlns:w="http://schemas.openxmlformats.org/wordprocessingml/2006/main">
   <p:sldMasterIdLst>
     <p:sldMasterId id="2147483648" r:id="rId1"/>
   </p:sldMasterIdLst>
+  <p:notesMasterIdLst>
+    <p:notesMasterId r:id="rId23"/>
+  </p:notesMasterIdLst>
   <p:sldIdLst>
-    <p:sldId id="256" r:id="rId3"/>
-    <p:sldId id="257" r:id="rId4"/>
-    <p:sldId id="258" r:id="rId5"/>
-    <p:sldId id="259" r:id="rId6"/>
-    <p:sldId id="260" r:id="rId7"/>
-    <p:sldId id="261" r:id="rId8"/>
-    <p:sldId id="262" r:id="rId9"/>
-    <p:sldId id="263" r:id="rId10"/>
-    <p:sldId id="264" r:id="rId11"/>
-    <p:sldId id="265" r:id="rId12"/>
-    <p:sldId id="266" r:id="rId13"/>
-    <p:sldId id="267" r:id="rId14"/>
-    <p:sldId id="268" r:id="rId15"/>
-    <p:sldId id="269" r:id="rId16"/>
-    <p:sldId id="270" r:id="rId17"/>
-    <p:sldId id="271" r:id="rId18"/>
-    <p:sldId id="272" r:id="rId19"/>
-    <p:sldId id="273" r:id="rId20"/>
-    <p:sldId id="274" r:id="rId21"/>
+    <p:sldId id="256" r:id="rId4"/>
+    <p:sldId id="257" r:id="rId5"/>
+    <p:sldId id="258" r:id="rId6"/>
+    <p:sldId id="259" r:id="rId7"/>
+    <p:sldId id="260" r:id="rId8"/>
+    <p:sldId id="261" r:id="rId9"/>
+    <p:sldId id="262" r:id="rId10"/>
+    <p:sldId id="263" r:id="rId11"/>
+    <p:sldId id="264" r:id="rId12"/>
+    <p:sldId id="265" r:id="rId13"/>
+    <p:sldId id="266" r:id="rId14"/>
+    <p:sldId id="267" r:id="rId15"/>
+    <p:sldId id="268" r:id="rId16"/>
+    <p:sldId id="269" r:id="rId17"/>
+    <p:sldId id="270" r:id="rId18"/>
+    <p:sldId id="271" r:id="rId19"/>
+    <p:sldId id="272" r:id="rId20"/>
+    <p:sldId id="273" r:id="rId21"/>
+    <p:sldId id="274" r:id="rId22"/>
   </p:sldIdLst>
   <p:sldSz cx="12192000" cy="6858000"/>
   <p:notesSz cx="6858000" cy="9144000"/>
@@ -31,8 +34,8 @@
     <a:defPPr>
       <a:defRPr lang="en-US"/>
     </a:defPPr>
-    <a:lvl1pPr marL="0" algn="l" defTabSz="914400" rtl="0" eaLnBrk="1" latinLnBrk="0" hangingPunct="1">
-      <a:defRPr sz="1800" kern="1200">
+    <a:lvl1pPr marL="0" algn="l" defTabSz="914400" rtl="0">
+      <a:defRPr sz="1800">
         <a:solidFill>
           <a:schemeClr val="tx1"/>
         </a:solidFill>
@@ -41,8 +44,8 @@
         <a:cs typeface="+mn-cs"/>
       </a:defRPr>
     </a:lvl1pPr>
-    <a:lvl2pPr marL="457200" algn="l" defTabSz="914400" rtl="0" eaLnBrk="1" latinLnBrk="0" hangingPunct="1">
-      <a:defRPr sz="1800" kern="1200">
+    <a:lvl2pPr marL="457200" algn="l" defTabSz="914400" rtl="0">
+      <a:defRPr sz="1800">
         <a:solidFill>
           <a:schemeClr val="tx1"/>
         </a:solidFill>
@@ -51,8 +54,8 @@
         <a:cs typeface="+mn-cs"/>
       </a:defRPr>
     </a:lvl2pPr>
-    <a:lvl3pPr marL="914400" algn="l" defTabSz="914400" rtl="0" eaLnBrk="1" latinLnBrk="0" hangingPunct="1">
-      <a:defRPr sz="1800" kern="1200">
+    <a:lvl3pPr marL="914400" algn="l" defTabSz="914400" rtl="0">
+      <a:defRPr sz="1800">
         <a:solidFill>
           <a:schemeClr val="tx1"/>
         </a:solidFill>
@@ -61,8 +64,8 @@
         <a:cs typeface="+mn-cs"/>
       </a:defRPr>
     </a:lvl3pPr>
-    <a:lvl4pPr marL="1371600" algn="l" defTabSz="914400" rtl="0" eaLnBrk="1" latinLnBrk="0" hangingPunct="1">
-      <a:defRPr sz="1800" kern="1200">
+    <a:lvl4pPr marL="1371600" algn="l" defTabSz="914400" rtl="0">
+      <a:defRPr sz="1800">
         <a:solidFill>
           <a:schemeClr val="tx1"/>
         </a:solidFill>
@@ -71,8 +74,8 @@
         <a:cs typeface="+mn-cs"/>
       </a:defRPr>
     </a:lvl4pPr>
-    <a:lvl5pPr marL="1828800" algn="l" defTabSz="914400" rtl="0" eaLnBrk="1" latinLnBrk="0" hangingPunct="1">
-      <a:defRPr sz="1800" kern="1200">
+    <a:lvl5pPr marL="1828800" algn="l" defTabSz="914400" rtl="0">
+      <a:defRPr sz="1800">
         <a:solidFill>
           <a:schemeClr val="tx1"/>
         </a:solidFill>
@@ -81,8 +84,8 @@
         <a:cs typeface="+mn-cs"/>
       </a:defRPr>
     </a:lvl5pPr>
-    <a:lvl6pPr marL="2286000" algn="l" defTabSz="914400" rtl="0" eaLnBrk="1" latinLnBrk="0" hangingPunct="1">
-      <a:defRPr sz="1800" kern="1200">
+    <a:lvl6pPr marL="2286000" algn="l" defTabSz="914400" rtl="0">
+      <a:defRPr sz="1800">
         <a:solidFill>
           <a:schemeClr val="tx1"/>
         </a:solidFill>
@@ -91,8 +94,8 @@
         <a:cs typeface="+mn-cs"/>
       </a:defRPr>
     </a:lvl6pPr>
-    <a:lvl7pPr marL="2743200" algn="l" defTabSz="914400" rtl="0" eaLnBrk="1" latinLnBrk="0" hangingPunct="1">
-      <a:defRPr sz="1800" kern="1200">
+    <a:lvl7pPr marL="2743200" algn="l" defTabSz="914400" rtl="0">
+      <a:defRPr sz="1800">
         <a:solidFill>
           <a:schemeClr val="tx1"/>
         </a:solidFill>
@@ -101,8 +104,8 @@
         <a:cs typeface="+mn-cs"/>
       </a:defRPr>
     </a:lvl7pPr>
-    <a:lvl8pPr marL="3200400" algn="l" defTabSz="914400" rtl="0" eaLnBrk="1" latinLnBrk="0" hangingPunct="1">
-      <a:defRPr sz="1800" kern="1200">
+    <a:lvl8pPr marL="3200400" algn="l" defTabSz="914400" rtl="0">
+      <a:defRPr sz="1800">
         <a:solidFill>
           <a:schemeClr val="tx1"/>
         </a:solidFill>
@@ -111,8 +114,8 @@
         <a:cs typeface="+mn-cs"/>
       </a:defRPr>
     </a:lvl8pPr>
-    <a:lvl9pPr marL="3657600" algn="l" defTabSz="914400" rtl="0" eaLnBrk="1" latinLnBrk="0" hangingPunct="1">
-      <a:defRPr sz="1800" kern="1200">
+    <a:lvl9pPr marL="3657600" algn="l" defTabSz="914400" rtl="0">
+      <a:defRPr sz="1800">
         <a:solidFill>
           <a:schemeClr val="tx1"/>
         </a:solidFill>
@@ -125,8 +128,1943 @@
 </p:presentation>
 </file>
 
+<file path=ppt/notesMasters/notesMaster1.xml><?xml version="1.0" encoding="utf-8"?>
+<p:notesMaster xmlns:a="http://schemas.openxmlformats.org/drawingml/2006/main" xmlns:r="http://schemas.openxmlformats.org/officeDocument/2006/relationships" xmlns:p="http://schemas.openxmlformats.org/presentationml/2006/main">
+  <p:cSld name="">
+    <p:bg>
+      <p:bgRef idx="1001">
+        <a:schemeClr val="bg1"/>
+      </p:bgRef>
+    </p:bg>
+    <p:spTree>
+      <p:nvGrpSpPr>
+        <p:cNvPr id="1" name=""/>
+        <p:cNvGrpSpPr/>
+        <p:nvPr/>
+      </p:nvGrpSpPr>
+      <p:grpSpPr bwMode="auto">
+        <a:xfrm>
+          <a:off x="0" y="0"/>
+          <a:ext cx="0" cy="0"/>
+          <a:chOff x="0" y="0"/>
+          <a:chExt cx="0" cy="0"/>
+        </a:xfrm>
+      </p:grpSpPr>
+      <p:sp>
+        <p:nvSpPr>
+          <p:cNvPr id="2" name="Header Placeholder 1"/>
+          <p:cNvSpPr>
+            <a:spLocks noGrp="1"/>
+          </p:cNvSpPr>
+          <p:nvPr>
+            <p:ph type="hdr" sz="quarter"/>
+          </p:nvPr>
+        </p:nvSpPr>
+        <p:spPr bwMode="auto">
+          <a:xfrm>
+            <a:off x="0" y="0"/>
+            <a:ext cx="2971800" cy="458788"/>
+          </a:xfrm>
+          <a:prstGeom prst="rect">
+            <a:avLst/>
+          </a:prstGeom>
+        </p:spPr>
+        <p:txBody>
+          <a:bodyPr vert="horz" lIns="91440" tIns="45720" rIns="91440" bIns="45720" rtlCol="0" anchor="ctr"/>
+          <a:lstStyle>
+            <a:lvl1pPr algn="l">
+              <a:defRPr sz="1200"/>
+            </a:lvl1pPr>
+          </a:lstStyle>
+          <a:p>
+            <a:pPr>
+              <a:defRPr/>
+            </a:pPr>
+            <a:endParaRPr/>
+          </a:p>
+        </p:txBody>
+      </p:sp>
+      <p:sp>
+        <p:nvSpPr>
+          <p:cNvPr id="3" name="Date Placeholder 2"/>
+          <p:cNvSpPr>
+            <a:spLocks noGrp="1"/>
+          </p:cNvSpPr>
+          <p:nvPr>
+            <p:ph type="dt" idx="2"/>
+          </p:nvPr>
+        </p:nvSpPr>
+        <p:spPr bwMode="auto">
+          <a:xfrm>
+            <a:off x="3884613" y="0"/>
+            <a:ext cx="2971800" cy="458788"/>
+          </a:xfrm>
+          <a:prstGeom prst="rect">
+            <a:avLst/>
+          </a:prstGeom>
+        </p:spPr>
+        <p:txBody>
+          <a:bodyPr vert="horz" lIns="91440" tIns="45720" rIns="91440" bIns="45720" rtlCol="0" anchor="ctr"/>
+          <a:lstStyle>
+            <a:lvl1pPr algn="r">
+              <a:defRPr sz="1200"/>
+            </a:lvl1pPr>
+          </a:lstStyle>
+          <a:p>
+            <a:pPr>
+              <a:defRPr/>
+            </a:pPr>
+            <a:endParaRPr/>
+          </a:p>
+        </p:txBody>
+      </p:sp>
+      <p:sp>
+        <p:nvSpPr>
+          <p:cNvPr id="3" name="Date Placeholder 2"/>
+          <p:cNvSpPr>
+            <a:spLocks noGrp="1"/>
+          </p:cNvSpPr>
+          <p:nvPr>
+            <p:ph type="dt" idx="3"/>
+          </p:nvPr>
+        </p:nvSpPr>
+        <p:spPr bwMode="auto">
+          <a:xfrm>
+            <a:off x="3884613" y="0"/>
+            <a:ext cx="2971800" cy="458788"/>
+          </a:xfrm>
+          <a:prstGeom prst="rect">
+            <a:avLst/>
+          </a:prstGeom>
+        </p:spPr>
+        <p:txBody>
+          <a:bodyPr vert="horz" lIns="91440" tIns="45720" rIns="91440" bIns="45720" rtlCol="0" anchor="ctr"/>
+          <a:lstStyle>
+            <a:lvl1pPr algn="r">
+              <a:defRPr sz="1200"/>
+            </a:lvl1pPr>
+          </a:lstStyle>
+          <a:p>
+            <a:pPr>
+              <a:defRPr/>
+            </a:pPr>
+            <a:endParaRPr/>
+          </a:p>
+        </p:txBody>
+      </p:sp>
+      <p:sp>
+        <p:nvSpPr>
+          <p:cNvPr id="5" name="Notes Placeholder 4"/>
+          <p:cNvSpPr>
+            <a:spLocks noGrp="1"/>
+          </p:cNvSpPr>
+          <p:nvPr>
+            <p:ph type="body" sz="quarter" idx="1"/>
+          </p:nvPr>
+        </p:nvSpPr>
+        <p:spPr bwMode="auto">
+          <a:xfrm>
+            <a:off x="685800" y="4400550"/>
+            <a:ext cx="5486400" cy="3600450"/>
+          </a:xfrm>
+          <a:prstGeom prst="rect">
+            <a:avLst/>
+          </a:prstGeom>
+        </p:spPr>
+        <p:txBody>
+          <a:bodyPr vert="horz" lIns="91440" tIns="45720" rIns="91440" bIns="45720" rtlCol="0" anchor="ctr"/>
+          <a:lstStyle/>
+          <a:p>
+            <a:pPr>
+              <a:defRPr/>
+            </a:pPr>
+            <a:endParaRPr/>
+          </a:p>
+        </p:txBody>
+      </p:sp>
+      <p:sp>
+        <p:nvSpPr>
+          <p:cNvPr id="6" name="Footer Placeholder 5"/>
+          <p:cNvSpPr>
+            <a:spLocks noGrp="1"/>
+          </p:cNvSpPr>
+          <p:nvPr>
+            <p:ph type="ftr" sz="quarter" idx="4"/>
+          </p:nvPr>
+        </p:nvSpPr>
+        <p:spPr bwMode="auto">
+          <a:xfrm>
+            <a:off x="0" y="8685213"/>
+            <a:ext cx="2971800" cy="458787"/>
+          </a:xfrm>
+          <a:prstGeom prst="rect">
+            <a:avLst/>
+          </a:prstGeom>
+        </p:spPr>
+        <p:txBody>
+          <a:bodyPr vert="horz" lIns="91440" tIns="45720" rIns="91440" bIns="45720" rtlCol="0" anchor="b"/>
+          <a:lstStyle>
+            <a:lvl1pPr algn="l">
+              <a:defRPr sz="1200"/>
+            </a:lvl1pPr>
+          </a:lstStyle>
+          <a:p>
+            <a:pPr>
+              <a:defRPr/>
+            </a:pPr>
+            <a:endParaRPr/>
+          </a:p>
+        </p:txBody>
+      </p:sp>
+      <p:sp>
+        <p:nvSpPr>
+          <p:cNvPr id="7" name="Slide Number Placeholder 6"/>
+          <p:cNvSpPr>
+            <a:spLocks noGrp="1"/>
+          </p:cNvSpPr>
+          <p:nvPr>
+            <p:ph type="sldNum" sz="quarter" idx="10"/>
+          </p:nvPr>
+        </p:nvSpPr>
+        <p:spPr bwMode="auto">
+          <a:xfrm>
+            <a:off x="3884613" y="8685213"/>
+            <a:ext cx="2971800" cy="458787"/>
+          </a:xfrm>
+          <a:prstGeom prst="rect">
+            <a:avLst/>
+          </a:prstGeom>
+        </p:spPr>
+        <p:txBody>
+          <a:bodyPr vert="horz" lIns="91440" tIns="45720" rIns="91440" bIns="45720" rtlCol="0" anchor="b"/>
+          <a:lstStyle>
+            <a:lvl1pPr algn="r">
+              <a:defRPr sz="1200"/>
+            </a:lvl1pPr>
+          </a:lstStyle>
+          <a:p>
+            <a:pPr>
+              <a:defRPr/>
+            </a:pPr>
+            <a:endParaRPr/>
+          </a:p>
+        </p:txBody>
+      </p:sp>
+    </p:spTree>
+  </p:cSld>
+  <p:clrMap bg1="lt1" tx1="dk1" bg2="lt2" tx2="dk2" accent1="accent1" accent2="accent2" accent3="accent3" accent4="accent4" accent5="accent5" accent6="accent6" hlink="hlink" folHlink="folHlink"/>
+  <p:notesStyle>
+    <a:lvl1pPr marL="0" algn="l" defTabSz="914400">
+      <a:defRPr sz="1200">
+        <a:solidFill>
+          <a:schemeClr val="tx1"/>
+        </a:solidFill>
+        <a:latin typeface="+mn-lt"/>
+        <a:ea typeface="+mn-ea"/>
+        <a:cs typeface="+mn-cs"/>
+      </a:defRPr>
+    </a:lvl1pPr>
+    <a:lvl2pPr marL="457200" algn="l" defTabSz="914400">
+      <a:defRPr sz="1200">
+        <a:solidFill>
+          <a:schemeClr val="tx1"/>
+        </a:solidFill>
+        <a:latin typeface="+mn-lt"/>
+        <a:ea typeface="+mn-ea"/>
+        <a:cs typeface="+mn-cs"/>
+      </a:defRPr>
+    </a:lvl2pPr>
+    <a:lvl3pPr marL="914400" algn="l" defTabSz="914400">
+      <a:defRPr sz="1200">
+        <a:solidFill>
+          <a:schemeClr val="tx1"/>
+        </a:solidFill>
+        <a:latin typeface="+mn-lt"/>
+        <a:ea typeface="+mn-ea"/>
+        <a:cs typeface="+mn-cs"/>
+      </a:defRPr>
+    </a:lvl3pPr>
+    <a:lvl4pPr marL="1371600" algn="l" defTabSz="914400">
+      <a:defRPr sz="1200">
+        <a:solidFill>
+          <a:schemeClr val="tx1"/>
+        </a:solidFill>
+        <a:latin typeface="+mn-lt"/>
+        <a:ea typeface="+mn-ea"/>
+        <a:cs typeface="+mn-cs"/>
+      </a:defRPr>
+    </a:lvl4pPr>
+    <a:lvl5pPr marL="1828800" algn="l" defTabSz="914400">
+      <a:defRPr sz="1200">
+        <a:solidFill>
+          <a:schemeClr val="tx1"/>
+        </a:solidFill>
+        <a:latin typeface="+mn-lt"/>
+        <a:ea typeface="+mn-ea"/>
+        <a:cs typeface="+mn-cs"/>
+      </a:defRPr>
+    </a:lvl5pPr>
+    <a:lvl6pPr marL="2286000" algn="l" defTabSz="914400">
+      <a:defRPr sz="1200">
+        <a:solidFill>
+          <a:schemeClr val="tx1"/>
+        </a:solidFill>
+        <a:latin typeface="+mn-lt"/>
+        <a:ea typeface="+mn-ea"/>
+        <a:cs typeface="+mn-cs"/>
+      </a:defRPr>
+    </a:lvl6pPr>
+    <a:lvl7pPr marL="2743200" algn="l" defTabSz="914400">
+      <a:defRPr sz="1200">
+        <a:solidFill>
+          <a:schemeClr val="tx1"/>
+        </a:solidFill>
+        <a:latin typeface="+mn-lt"/>
+        <a:ea typeface="+mn-ea"/>
+        <a:cs typeface="+mn-cs"/>
+      </a:defRPr>
+    </a:lvl7pPr>
+    <a:lvl8pPr marL="3200400" algn="l" defTabSz="914400">
+      <a:defRPr sz="1200">
+        <a:solidFill>
+          <a:schemeClr val="tx1"/>
+        </a:solidFill>
+        <a:latin typeface="+mn-lt"/>
+        <a:ea typeface="+mn-ea"/>
+        <a:cs typeface="+mn-cs"/>
+      </a:defRPr>
+    </a:lvl8pPr>
+    <a:lvl9pPr marL="3657600" algn="l" defTabSz="914400">
+      <a:defRPr sz="1200">
+        <a:solidFill>
+          <a:schemeClr val="tx1"/>
+        </a:solidFill>
+        <a:latin typeface="+mn-lt"/>
+        <a:ea typeface="+mn-ea"/>
+        <a:cs typeface="+mn-cs"/>
+      </a:defRPr>
+    </a:lvl9pPr>
+  </p:notesStyle>
+</p:notesMaster>
+</file>
+
+<file path=ppt/notesSlides/notesSlide1.xml><?xml version="1.0" encoding="utf-8"?>
+<p:notes xmlns:a="http://schemas.openxmlformats.org/drawingml/2006/main" xmlns:r="http://schemas.openxmlformats.org/officeDocument/2006/relationships" xmlns:p="http://schemas.openxmlformats.org/presentationml/2006/main" xmlns:m="http://schemas.openxmlformats.org/officeDocument/2006/math" xmlns:w="http://schemas.openxmlformats.org/wordprocessingml/2006/main">
+  <p:cSld name="">
+    <p:spTree>
+      <p:nvGrpSpPr>
+        <p:cNvPr id="1" name=""/>
+        <p:cNvGrpSpPr/>
+        <p:nvPr/>
+      </p:nvGrpSpPr>
+      <p:grpSpPr bwMode="auto">
+        <a:xfrm>
+          <a:off x="0" y="0"/>
+          <a:ext cx="0" cy="0"/>
+          <a:chOff x="0" y="0"/>
+          <a:chExt cx="0" cy="0"/>
+        </a:xfrm>
+      </p:grpSpPr>
+      <p:sp>
+        <p:nvSpPr>
+          <p:cNvPr id="2" name="Slide Image Placeholder 1"/>
+          <p:cNvSpPr>
+            <a:spLocks noChangeAspect="1" noGrp="1" noRot="1"/>
+          </p:cNvSpPr>
+          <p:nvPr>
+            <p:ph type="sldImg"/>
+          </p:nvPr>
+        </p:nvSpPr>
+        <p:spPr bwMode="auto"/>
+      </p:sp>
+      <p:sp>
+        <p:nvSpPr>
+          <p:cNvPr id="3" name="Notes Placeholder 2"/>
+          <p:cNvSpPr>
+            <a:spLocks noGrp="1"/>
+          </p:cNvSpPr>
+          <p:nvPr>
+            <p:ph type="body" idx="1"/>
+          </p:nvPr>
+        </p:nvSpPr>
+        <p:spPr bwMode="auto"/>
+        <p:txBody>
+          <a:bodyPr/>
+          <a:lstStyle/>
+          <a:p>
+            <a:pPr>
+              <a:defRPr/>
+            </a:pPr>
+            <a:endParaRPr/>
+          </a:p>
+        </p:txBody>
+      </p:sp>
+      <p:sp>
+        <p:nvSpPr>
+          <p:cNvPr id="4" name="Slide Number Placeholder 3"/>
+          <p:cNvSpPr>
+            <a:spLocks noGrp="1"/>
+          </p:cNvSpPr>
+          <p:nvPr>
+            <p:ph type="sldNum" sz="quarter" idx="10"/>
+          </p:nvPr>
+        </p:nvSpPr>
+        <p:spPr bwMode="auto"/>
+        <p:txBody>
+          <a:bodyPr/>
+          <a:lstStyle/>
+          <a:p>
+            <a:pPr>
+              <a:defRPr/>
+            </a:pPr>
+            <a:fld id="{54581525-7308-09B0-9B77-DE7E5392F188}" type="slidenum">
+              <a:rPr/>
+              <a:t/>
+            </a:fld>
+            <a:endParaRPr/>
+          </a:p>
+        </p:txBody>
+      </p:sp>
+    </p:spTree>
+  </p:cSld>
+  <p:clrMapOvr>
+    <a:masterClrMapping/>
+  </p:clrMapOvr>
+</p:notes>
+</file>
+
+<file path=ppt/notesSlides/notesSlide10.xml><?xml version="1.0" encoding="utf-8"?>
+<p:notes xmlns:a="http://schemas.openxmlformats.org/drawingml/2006/main" xmlns:r="http://schemas.openxmlformats.org/officeDocument/2006/relationships" xmlns:p="http://schemas.openxmlformats.org/presentationml/2006/main" xmlns:m="http://schemas.openxmlformats.org/officeDocument/2006/math" xmlns:w="http://schemas.openxmlformats.org/wordprocessingml/2006/main">
+  <p:cSld name="">
+    <p:spTree>
+      <p:nvGrpSpPr>
+        <p:cNvPr id="1" name=""/>
+        <p:cNvGrpSpPr/>
+        <p:nvPr/>
+      </p:nvGrpSpPr>
+      <p:grpSpPr bwMode="auto">
+        <a:xfrm>
+          <a:off x="0" y="0"/>
+          <a:ext cx="0" cy="0"/>
+          <a:chOff x="0" y="0"/>
+          <a:chExt cx="0" cy="0"/>
+        </a:xfrm>
+      </p:grpSpPr>
+      <p:sp>
+        <p:nvSpPr>
+          <p:cNvPr id="2" name="Slide Image Placeholder 1"/>
+          <p:cNvSpPr>
+            <a:spLocks noChangeAspect="1" noGrp="1" noRot="1"/>
+          </p:cNvSpPr>
+          <p:nvPr>
+            <p:ph type="sldImg"/>
+          </p:nvPr>
+        </p:nvSpPr>
+        <p:spPr bwMode="auto"/>
+      </p:sp>
+      <p:sp>
+        <p:nvSpPr>
+          <p:cNvPr id="3" name="Notes Placeholder 2"/>
+          <p:cNvSpPr>
+            <a:spLocks noGrp="1"/>
+          </p:cNvSpPr>
+          <p:nvPr>
+            <p:ph type="body" idx="1"/>
+          </p:nvPr>
+        </p:nvSpPr>
+        <p:spPr bwMode="auto"/>
+        <p:txBody>
+          <a:bodyPr/>
+          <a:lstStyle/>
+          <a:p>
+            <a:pPr>
+              <a:defRPr/>
+            </a:pPr>
+            <a:endParaRPr/>
+          </a:p>
+        </p:txBody>
+      </p:sp>
+      <p:sp>
+        <p:nvSpPr>
+          <p:cNvPr id="4" name="Slide Number Placeholder 3"/>
+          <p:cNvSpPr>
+            <a:spLocks noGrp="1"/>
+          </p:cNvSpPr>
+          <p:nvPr>
+            <p:ph type="sldNum" sz="quarter" idx="10"/>
+          </p:nvPr>
+        </p:nvSpPr>
+        <p:spPr bwMode="auto"/>
+        <p:txBody>
+          <a:bodyPr/>
+          <a:lstStyle/>
+          <a:p>
+            <a:pPr>
+              <a:defRPr/>
+            </a:pPr>
+            <a:fld id="{AA361FD8-095C-5761-DE95-F8D9FD72E8AC}" type="slidenum">
+              <a:rPr/>
+              <a:t/>
+            </a:fld>
+            <a:endParaRPr/>
+          </a:p>
+        </p:txBody>
+      </p:sp>
+    </p:spTree>
+  </p:cSld>
+  <p:clrMapOvr>
+    <a:masterClrMapping/>
+  </p:clrMapOvr>
+</p:notes>
+</file>
+
+<file path=ppt/notesSlides/notesSlide11.xml><?xml version="1.0" encoding="utf-8"?>
+<p:notes xmlns:a="http://schemas.openxmlformats.org/drawingml/2006/main" xmlns:r="http://schemas.openxmlformats.org/officeDocument/2006/relationships" xmlns:p="http://schemas.openxmlformats.org/presentationml/2006/main" xmlns:m="http://schemas.openxmlformats.org/officeDocument/2006/math" xmlns:w="http://schemas.openxmlformats.org/wordprocessingml/2006/main">
+  <p:cSld name="">
+    <p:spTree>
+      <p:nvGrpSpPr>
+        <p:cNvPr id="1" name=""/>
+        <p:cNvGrpSpPr/>
+        <p:nvPr/>
+      </p:nvGrpSpPr>
+      <p:grpSpPr bwMode="auto">
+        <a:xfrm>
+          <a:off x="0" y="0"/>
+          <a:ext cx="0" cy="0"/>
+          <a:chOff x="0" y="0"/>
+          <a:chExt cx="0" cy="0"/>
+        </a:xfrm>
+      </p:grpSpPr>
+      <p:sp>
+        <p:nvSpPr>
+          <p:cNvPr id="2" name="Slide Image Placeholder 1"/>
+          <p:cNvSpPr>
+            <a:spLocks noChangeAspect="1" noGrp="1" noRot="1"/>
+          </p:cNvSpPr>
+          <p:nvPr>
+            <p:ph type="sldImg"/>
+          </p:nvPr>
+        </p:nvSpPr>
+        <p:spPr bwMode="auto"/>
+      </p:sp>
+      <p:sp>
+        <p:nvSpPr>
+          <p:cNvPr id="3" name="Notes Placeholder 2"/>
+          <p:cNvSpPr>
+            <a:spLocks noGrp="1"/>
+          </p:cNvSpPr>
+          <p:nvPr>
+            <p:ph type="body" idx="1"/>
+          </p:nvPr>
+        </p:nvSpPr>
+        <p:spPr bwMode="auto"/>
+        <p:txBody>
+          <a:bodyPr/>
+          <a:lstStyle/>
+          <a:p>
+            <a:pPr>
+              <a:defRPr/>
+            </a:pPr>
+            <a:endParaRPr/>
+          </a:p>
+        </p:txBody>
+      </p:sp>
+      <p:sp>
+        <p:nvSpPr>
+          <p:cNvPr id="4" name="Slide Number Placeholder 3"/>
+          <p:cNvSpPr>
+            <a:spLocks noGrp="1"/>
+          </p:cNvSpPr>
+          <p:nvPr>
+            <p:ph type="sldNum" sz="quarter" idx="10"/>
+          </p:nvPr>
+        </p:nvSpPr>
+        <p:spPr bwMode="auto"/>
+        <p:txBody>
+          <a:bodyPr/>
+          <a:lstStyle/>
+          <a:p>
+            <a:pPr>
+              <a:defRPr/>
+            </a:pPr>
+            <a:fld id="{8CE02C74-010E-9D75-17F9-82D8D1775276}" type="slidenum">
+              <a:rPr/>
+              <a:t/>
+            </a:fld>
+            <a:endParaRPr/>
+          </a:p>
+        </p:txBody>
+      </p:sp>
+    </p:spTree>
+  </p:cSld>
+  <p:clrMapOvr>
+    <a:masterClrMapping/>
+  </p:clrMapOvr>
+</p:notes>
+</file>
+
+<file path=ppt/notesSlides/notesSlide12.xml><?xml version="1.0" encoding="utf-8"?>
+<p:notes xmlns:a="http://schemas.openxmlformats.org/drawingml/2006/main" xmlns:r="http://schemas.openxmlformats.org/officeDocument/2006/relationships" xmlns:p="http://schemas.openxmlformats.org/presentationml/2006/main" xmlns:m="http://schemas.openxmlformats.org/officeDocument/2006/math" xmlns:w="http://schemas.openxmlformats.org/wordprocessingml/2006/main">
+  <p:cSld name="">
+    <p:spTree>
+      <p:nvGrpSpPr>
+        <p:cNvPr id="1" name=""/>
+        <p:cNvGrpSpPr/>
+        <p:nvPr/>
+      </p:nvGrpSpPr>
+      <p:grpSpPr bwMode="auto">
+        <a:xfrm>
+          <a:off x="0" y="0"/>
+          <a:ext cx="0" cy="0"/>
+          <a:chOff x="0" y="0"/>
+          <a:chExt cx="0" cy="0"/>
+        </a:xfrm>
+      </p:grpSpPr>
+      <p:sp>
+        <p:nvSpPr>
+          <p:cNvPr id="2" name="Slide Image Placeholder 1"/>
+          <p:cNvSpPr>
+            <a:spLocks noChangeAspect="1" noGrp="1" noRot="1"/>
+          </p:cNvSpPr>
+          <p:nvPr>
+            <p:ph type="sldImg"/>
+          </p:nvPr>
+        </p:nvSpPr>
+        <p:spPr bwMode="auto"/>
+      </p:sp>
+      <p:sp>
+        <p:nvSpPr>
+          <p:cNvPr id="3" name="Notes Placeholder 2"/>
+          <p:cNvSpPr>
+            <a:spLocks noGrp="1"/>
+          </p:cNvSpPr>
+          <p:nvPr>
+            <p:ph type="body" idx="1"/>
+          </p:nvPr>
+        </p:nvSpPr>
+        <p:spPr bwMode="auto"/>
+        <p:txBody>
+          <a:bodyPr/>
+          <a:lstStyle/>
+          <a:p>
+            <a:pPr>
+              <a:defRPr/>
+            </a:pPr>
+            <a:endParaRPr/>
+          </a:p>
+        </p:txBody>
+      </p:sp>
+      <p:sp>
+        <p:nvSpPr>
+          <p:cNvPr id="4" name="Slide Number Placeholder 3"/>
+          <p:cNvSpPr>
+            <a:spLocks noGrp="1"/>
+          </p:cNvSpPr>
+          <p:nvPr>
+            <p:ph type="sldNum" sz="quarter" idx="10"/>
+          </p:nvPr>
+        </p:nvSpPr>
+        <p:spPr bwMode="auto"/>
+        <p:txBody>
+          <a:bodyPr/>
+          <a:lstStyle/>
+          <a:p>
+            <a:pPr>
+              <a:defRPr/>
+            </a:pPr>
+            <a:fld id="{FCE603B2-B94A-7EF8-F8C4-2CC4090425DB}" type="slidenum">
+              <a:rPr/>
+              <a:t/>
+            </a:fld>
+            <a:endParaRPr/>
+          </a:p>
+        </p:txBody>
+      </p:sp>
+    </p:spTree>
+  </p:cSld>
+  <p:clrMapOvr>
+    <a:masterClrMapping/>
+  </p:clrMapOvr>
+</p:notes>
+</file>
+
+<file path=ppt/notesSlides/notesSlide13.xml><?xml version="1.0" encoding="utf-8"?>
+<p:notes xmlns:a="http://schemas.openxmlformats.org/drawingml/2006/main" xmlns:r="http://schemas.openxmlformats.org/officeDocument/2006/relationships" xmlns:p="http://schemas.openxmlformats.org/presentationml/2006/main" xmlns:m="http://schemas.openxmlformats.org/officeDocument/2006/math" xmlns:w="http://schemas.openxmlformats.org/wordprocessingml/2006/main">
+  <p:cSld name="">
+    <p:spTree>
+      <p:nvGrpSpPr>
+        <p:cNvPr id="1" name=""/>
+        <p:cNvGrpSpPr/>
+        <p:nvPr/>
+      </p:nvGrpSpPr>
+      <p:grpSpPr bwMode="auto">
+        <a:xfrm>
+          <a:off x="0" y="0"/>
+          <a:ext cx="0" cy="0"/>
+          <a:chOff x="0" y="0"/>
+          <a:chExt cx="0" cy="0"/>
+        </a:xfrm>
+      </p:grpSpPr>
+      <p:sp>
+        <p:nvSpPr>
+          <p:cNvPr id="2" name="Slide Image Placeholder 1"/>
+          <p:cNvSpPr>
+            <a:spLocks noChangeAspect="1" noGrp="1" noRot="1"/>
+          </p:cNvSpPr>
+          <p:nvPr>
+            <p:ph type="sldImg"/>
+          </p:nvPr>
+        </p:nvSpPr>
+        <p:spPr bwMode="auto"/>
+      </p:sp>
+      <p:sp>
+        <p:nvSpPr>
+          <p:cNvPr id="3" name="Notes Placeholder 2"/>
+          <p:cNvSpPr>
+            <a:spLocks noGrp="1"/>
+          </p:cNvSpPr>
+          <p:nvPr>
+            <p:ph type="body" idx="1"/>
+          </p:nvPr>
+        </p:nvSpPr>
+        <p:spPr bwMode="auto"/>
+        <p:txBody>
+          <a:bodyPr/>
+          <a:lstStyle/>
+          <a:p>
+            <a:pPr>
+              <a:defRPr/>
+            </a:pPr>
+            <a:endParaRPr/>
+          </a:p>
+        </p:txBody>
+      </p:sp>
+      <p:sp>
+        <p:nvSpPr>
+          <p:cNvPr id="4" name="Slide Number Placeholder 3"/>
+          <p:cNvSpPr>
+            <a:spLocks noGrp="1"/>
+          </p:cNvSpPr>
+          <p:nvPr>
+            <p:ph type="sldNum" sz="quarter" idx="10"/>
+          </p:nvPr>
+        </p:nvSpPr>
+        <p:spPr bwMode="auto"/>
+        <p:txBody>
+          <a:bodyPr/>
+          <a:lstStyle/>
+          <a:p>
+            <a:pPr>
+              <a:defRPr/>
+            </a:pPr>
+            <a:fld id="{74C3EEA8-ABCF-44B7-3129-72A51D7DA7E2}" type="slidenum">
+              <a:rPr/>
+              <a:t/>
+            </a:fld>
+            <a:endParaRPr/>
+          </a:p>
+        </p:txBody>
+      </p:sp>
+    </p:spTree>
+  </p:cSld>
+  <p:clrMapOvr>
+    <a:masterClrMapping/>
+  </p:clrMapOvr>
+</p:notes>
+</file>
+
+<file path=ppt/notesSlides/notesSlide14.xml><?xml version="1.0" encoding="utf-8"?>
+<p:notes xmlns:a="http://schemas.openxmlformats.org/drawingml/2006/main" xmlns:r="http://schemas.openxmlformats.org/officeDocument/2006/relationships" xmlns:p="http://schemas.openxmlformats.org/presentationml/2006/main" xmlns:m="http://schemas.openxmlformats.org/officeDocument/2006/math" xmlns:w="http://schemas.openxmlformats.org/wordprocessingml/2006/main">
+  <p:cSld name="">
+    <p:spTree>
+      <p:nvGrpSpPr>
+        <p:cNvPr id="1" name=""/>
+        <p:cNvGrpSpPr/>
+        <p:nvPr/>
+      </p:nvGrpSpPr>
+      <p:grpSpPr bwMode="auto">
+        <a:xfrm>
+          <a:off x="0" y="0"/>
+          <a:ext cx="0" cy="0"/>
+          <a:chOff x="0" y="0"/>
+          <a:chExt cx="0" cy="0"/>
+        </a:xfrm>
+      </p:grpSpPr>
+      <p:sp>
+        <p:nvSpPr>
+          <p:cNvPr id="2" name="Slide Image Placeholder 1"/>
+          <p:cNvSpPr>
+            <a:spLocks noChangeAspect="1" noGrp="1" noRot="1"/>
+          </p:cNvSpPr>
+          <p:nvPr>
+            <p:ph type="sldImg"/>
+          </p:nvPr>
+        </p:nvSpPr>
+        <p:spPr bwMode="auto"/>
+      </p:sp>
+      <p:sp>
+        <p:nvSpPr>
+          <p:cNvPr id="3" name="Notes Placeholder 2"/>
+          <p:cNvSpPr>
+            <a:spLocks noGrp="1"/>
+          </p:cNvSpPr>
+          <p:nvPr>
+            <p:ph type="body" idx="1"/>
+          </p:nvPr>
+        </p:nvSpPr>
+        <p:spPr bwMode="auto"/>
+        <p:txBody>
+          <a:bodyPr/>
+          <a:lstStyle/>
+          <a:p>
+            <a:pPr>
+              <a:defRPr/>
+            </a:pPr>
+            <a:endParaRPr/>
+          </a:p>
+        </p:txBody>
+      </p:sp>
+      <p:sp>
+        <p:nvSpPr>
+          <p:cNvPr id="4" name="Slide Number Placeholder 3"/>
+          <p:cNvSpPr>
+            <a:spLocks noGrp="1"/>
+          </p:cNvSpPr>
+          <p:nvPr>
+            <p:ph type="sldNum" sz="quarter" idx="10"/>
+          </p:nvPr>
+        </p:nvSpPr>
+        <p:spPr bwMode="auto"/>
+        <p:txBody>
+          <a:bodyPr/>
+          <a:lstStyle/>
+          <a:p>
+            <a:pPr>
+              <a:defRPr/>
+            </a:pPr>
+            <a:fld id="{46A7D806-4E2C-2AC6-5FD0-136C758F8B1B}" type="slidenum">
+              <a:rPr/>
+              <a:t/>
+            </a:fld>
+            <a:endParaRPr/>
+          </a:p>
+        </p:txBody>
+      </p:sp>
+    </p:spTree>
+  </p:cSld>
+  <p:clrMapOvr>
+    <a:masterClrMapping/>
+  </p:clrMapOvr>
+</p:notes>
+</file>
+
+<file path=ppt/notesSlides/notesSlide15.xml><?xml version="1.0" encoding="utf-8"?>
+<p:notes xmlns:a="http://schemas.openxmlformats.org/drawingml/2006/main" xmlns:r="http://schemas.openxmlformats.org/officeDocument/2006/relationships" xmlns:p="http://schemas.openxmlformats.org/presentationml/2006/main" xmlns:m="http://schemas.openxmlformats.org/officeDocument/2006/math" xmlns:w="http://schemas.openxmlformats.org/wordprocessingml/2006/main">
+  <p:cSld name="">
+    <p:spTree>
+      <p:nvGrpSpPr>
+        <p:cNvPr id="1" name=""/>
+        <p:cNvGrpSpPr/>
+        <p:nvPr/>
+      </p:nvGrpSpPr>
+      <p:grpSpPr bwMode="auto">
+        <a:xfrm>
+          <a:off x="0" y="0"/>
+          <a:ext cx="0" cy="0"/>
+          <a:chOff x="0" y="0"/>
+          <a:chExt cx="0" cy="0"/>
+        </a:xfrm>
+      </p:grpSpPr>
+      <p:sp>
+        <p:nvSpPr>
+          <p:cNvPr id="2" name="Slide Image Placeholder 1"/>
+          <p:cNvSpPr>
+            <a:spLocks noChangeAspect="1" noGrp="1" noRot="1"/>
+          </p:cNvSpPr>
+          <p:nvPr>
+            <p:ph type="sldImg"/>
+          </p:nvPr>
+        </p:nvSpPr>
+        <p:spPr bwMode="auto"/>
+      </p:sp>
+      <p:sp>
+        <p:nvSpPr>
+          <p:cNvPr id="3" name="Notes Placeholder 2"/>
+          <p:cNvSpPr>
+            <a:spLocks noGrp="1"/>
+          </p:cNvSpPr>
+          <p:nvPr>
+            <p:ph type="body" idx="1"/>
+          </p:nvPr>
+        </p:nvSpPr>
+        <p:spPr bwMode="auto"/>
+        <p:txBody>
+          <a:bodyPr/>
+          <a:lstStyle/>
+          <a:p>
+            <a:pPr>
+              <a:defRPr/>
+            </a:pPr>
+            <a:endParaRPr/>
+          </a:p>
+        </p:txBody>
+      </p:sp>
+      <p:sp>
+        <p:nvSpPr>
+          <p:cNvPr id="4" name="Slide Number Placeholder 3"/>
+          <p:cNvSpPr>
+            <a:spLocks noGrp="1"/>
+          </p:cNvSpPr>
+          <p:nvPr>
+            <p:ph type="sldNum" sz="quarter" idx="10"/>
+          </p:nvPr>
+        </p:nvSpPr>
+        <p:spPr bwMode="auto"/>
+        <p:txBody>
+          <a:bodyPr/>
+          <a:lstStyle/>
+          <a:p>
+            <a:pPr>
+              <a:defRPr/>
+            </a:pPr>
+            <a:fld id="{F9E4B45C-F437-CADB-1D57-10F3DE5DF601}" type="slidenum">
+              <a:rPr/>
+              <a:t/>
+            </a:fld>
+            <a:endParaRPr/>
+          </a:p>
+        </p:txBody>
+      </p:sp>
+    </p:spTree>
+  </p:cSld>
+  <p:clrMapOvr>
+    <a:masterClrMapping/>
+  </p:clrMapOvr>
+</p:notes>
+</file>
+
+<file path=ppt/notesSlides/notesSlide16.xml><?xml version="1.0" encoding="utf-8"?>
+<p:notes xmlns:a="http://schemas.openxmlformats.org/drawingml/2006/main" xmlns:r="http://schemas.openxmlformats.org/officeDocument/2006/relationships" xmlns:p="http://schemas.openxmlformats.org/presentationml/2006/main" xmlns:m="http://schemas.openxmlformats.org/officeDocument/2006/math" xmlns:w="http://schemas.openxmlformats.org/wordprocessingml/2006/main">
+  <p:cSld name="">
+    <p:spTree>
+      <p:nvGrpSpPr>
+        <p:cNvPr id="1" name=""/>
+        <p:cNvGrpSpPr/>
+        <p:nvPr/>
+      </p:nvGrpSpPr>
+      <p:grpSpPr bwMode="auto">
+        <a:xfrm>
+          <a:off x="0" y="0"/>
+          <a:ext cx="0" cy="0"/>
+          <a:chOff x="0" y="0"/>
+          <a:chExt cx="0" cy="0"/>
+        </a:xfrm>
+      </p:grpSpPr>
+      <p:sp>
+        <p:nvSpPr>
+          <p:cNvPr id="2" name="Slide Image Placeholder 1"/>
+          <p:cNvSpPr>
+            <a:spLocks noChangeAspect="1" noGrp="1" noRot="1"/>
+          </p:cNvSpPr>
+          <p:nvPr>
+            <p:ph type="sldImg"/>
+          </p:nvPr>
+        </p:nvSpPr>
+        <p:spPr bwMode="auto"/>
+      </p:sp>
+      <p:sp>
+        <p:nvSpPr>
+          <p:cNvPr id="3" name="Notes Placeholder 2"/>
+          <p:cNvSpPr>
+            <a:spLocks noGrp="1"/>
+          </p:cNvSpPr>
+          <p:nvPr>
+            <p:ph type="body" idx="1"/>
+          </p:nvPr>
+        </p:nvSpPr>
+        <p:spPr bwMode="auto"/>
+        <p:txBody>
+          <a:bodyPr/>
+          <a:lstStyle/>
+          <a:p>
+            <a:pPr>
+              <a:defRPr/>
+            </a:pPr>
+            <a:endParaRPr/>
+          </a:p>
+        </p:txBody>
+      </p:sp>
+      <p:sp>
+        <p:nvSpPr>
+          <p:cNvPr id="4" name="Slide Number Placeholder 3"/>
+          <p:cNvSpPr>
+            <a:spLocks noGrp="1"/>
+          </p:cNvSpPr>
+          <p:nvPr>
+            <p:ph type="sldNum" sz="quarter" idx="10"/>
+          </p:nvPr>
+        </p:nvSpPr>
+        <p:spPr bwMode="auto"/>
+        <p:txBody>
+          <a:bodyPr/>
+          <a:lstStyle/>
+          <a:p>
+            <a:pPr>
+              <a:defRPr/>
+            </a:pPr>
+            <a:fld id="{AAC2907D-6266-F417-F2B5-1331020EAA00}" type="slidenum">
+              <a:rPr/>
+              <a:t/>
+            </a:fld>
+            <a:endParaRPr/>
+          </a:p>
+        </p:txBody>
+      </p:sp>
+    </p:spTree>
+  </p:cSld>
+  <p:clrMapOvr>
+    <a:masterClrMapping/>
+  </p:clrMapOvr>
+</p:notes>
+</file>
+
+<file path=ppt/notesSlides/notesSlide17.xml><?xml version="1.0" encoding="utf-8"?>
+<p:notes xmlns:a="http://schemas.openxmlformats.org/drawingml/2006/main" xmlns:r="http://schemas.openxmlformats.org/officeDocument/2006/relationships" xmlns:p="http://schemas.openxmlformats.org/presentationml/2006/main" xmlns:m="http://schemas.openxmlformats.org/officeDocument/2006/math" xmlns:w="http://schemas.openxmlformats.org/wordprocessingml/2006/main">
+  <p:cSld name="">
+    <p:spTree>
+      <p:nvGrpSpPr>
+        <p:cNvPr id="1" name=""/>
+        <p:cNvGrpSpPr/>
+        <p:nvPr/>
+      </p:nvGrpSpPr>
+      <p:grpSpPr bwMode="auto">
+        <a:xfrm>
+          <a:off x="0" y="0"/>
+          <a:ext cx="0" cy="0"/>
+          <a:chOff x="0" y="0"/>
+          <a:chExt cx="0" cy="0"/>
+        </a:xfrm>
+      </p:grpSpPr>
+      <p:sp>
+        <p:nvSpPr>
+          <p:cNvPr id="2" name="Slide Image Placeholder 1"/>
+          <p:cNvSpPr>
+            <a:spLocks noChangeAspect="1" noGrp="1" noRot="1"/>
+          </p:cNvSpPr>
+          <p:nvPr>
+            <p:ph type="sldImg"/>
+          </p:nvPr>
+        </p:nvSpPr>
+        <p:spPr bwMode="auto"/>
+      </p:sp>
+      <p:sp>
+        <p:nvSpPr>
+          <p:cNvPr id="3" name="Notes Placeholder 2"/>
+          <p:cNvSpPr>
+            <a:spLocks noGrp="1"/>
+          </p:cNvSpPr>
+          <p:nvPr>
+            <p:ph type="body" idx="1"/>
+          </p:nvPr>
+        </p:nvSpPr>
+        <p:spPr bwMode="auto"/>
+        <p:txBody>
+          <a:bodyPr/>
+          <a:lstStyle/>
+          <a:p>
+            <a:pPr>
+              <a:defRPr/>
+            </a:pPr>
+            <a:endParaRPr/>
+          </a:p>
+        </p:txBody>
+      </p:sp>
+      <p:sp>
+        <p:nvSpPr>
+          <p:cNvPr id="4" name="Slide Number Placeholder 3"/>
+          <p:cNvSpPr>
+            <a:spLocks noGrp="1"/>
+          </p:cNvSpPr>
+          <p:nvPr>
+            <p:ph type="sldNum" sz="quarter" idx="10"/>
+          </p:nvPr>
+        </p:nvSpPr>
+        <p:spPr bwMode="auto"/>
+        <p:txBody>
+          <a:bodyPr/>
+          <a:lstStyle/>
+          <a:p>
+            <a:pPr>
+              <a:defRPr/>
+            </a:pPr>
+            <a:fld id="{F320AF8A-751A-62C6-BF38-1869990829F6}" type="slidenum">
+              <a:rPr/>
+              <a:t/>
+            </a:fld>
+            <a:endParaRPr/>
+          </a:p>
+        </p:txBody>
+      </p:sp>
+    </p:spTree>
+  </p:cSld>
+  <p:clrMapOvr>
+    <a:masterClrMapping/>
+  </p:clrMapOvr>
+</p:notes>
+</file>
+
+<file path=ppt/notesSlides/notesSlide18.xml><?xml version="1.0" encoding="utf-8"?>
+<p:notes xmlns:a="http://schemas.openxmlformats.org/drawingml/2006/main" xmlns:r="http://schemas.openxmlformats.org/officeDocument/2006/relationships" xmlns:p="http://schemas.openxmlformats.org/presentationml/2006/main" xmlns:m="http://schemas.openxmlformats.org/officeDocument/2006/math" xmlns:w="http://schemas.openxmlformats.org/wordprocessingml/2006/main">
+  <p:cSld name="">
+    <p:spTree>
+      <p:nvGrpSpPr>
+        <p:cNvPr id="1" name=""/>
+        <p:cNvGrpSpPr/>
+        <p:nvPr/>
+      </p:nvGrpSpPr>
+      <p:grpSpPr bwMode="auto">
+        <a:xfrm>
+          <a:off x="0" y="0"/>
+          <a:ext cx="0" cy="0"/>
+          <a:chOff x="0" y="0"/>
+          <a:chExt cx="0" cy="0"/>
+        </a:xfrm>
+      </p:grpSpPr>
+      <p:sp>
+        <p:nvSpPr>
+          <p:cNvPr id="2" name="Slide Image Placeholder 1"/>
+          <p:cNvSpPr>
+            <a:spLocks noChangeAspect="1" noGrp="1" noRot="1"/>
+          </p:cNvSpPr>
+          <p:nvPr>
+            <p:ph type="sldImg"/>
+          </p:nvPr>
+        </p:nvSpPr>
+        <p:spPr bwMode="auto"/>
+      </p:sp>
+      <p:sp>
+        <p:nvSpPr>
+          <p:cNvPr id="3" name="Notes Placeholder 2"/>
+          <p:cNvSpPr>
+            <a:spLocks noGrp="1"/>
+          </p:cNvSpPr>
+          <p:nvPr>
+            <p:ph type="body" idx="1"/>
+          </p:nvPr>
+        </p:nvSpPr>
+        <p:spPr bwMode="auto"/>
+        <p:txBody>
+          <a:bodyPr/>
+          <a:lstStyle/>
+          <a:p>
+            <a:pPr>
+              <a:defRPr/>
+            </a:pPr>
+            <a:endParaRPr/>
+          </a:p>
+        </p:txBody>
+      </p:sp>
+      <p:sp>
+        <p:nvSpPr>
+          <p:cNvPr id="4" name="Slide Number Placeholder 3"/>
+          <p:cNvSpPr>
+            <a:spLocks noGrp="1"/>
+          </p:cNvSpPr>
+          <p:nvPr>
+            <p:ph type="sldNum" sz="quarter" idx="10"/>
+          </p:nvPr>
+        </p:nvSpPr>
+        <p:spPr bwMode="auto"/>
+        <p:txBody>
+          <a:bodyPr/>
+          <a:lstStyle/>
+          <a:p>
+            <a:pPr>
+              <a:defRPr/>
+            </a:pPr>
+            <a:fld id="{14C4AE7D-E281-2AB6-6FA2-F1A7F250B14A}" type="slidenum">
+              <a:rPr/>
+              <a:t/>
+            </a:fld>
+            <a:endParaRPr/>
+          </a:p>
+        </p:txBody>
+      </p:sp>
+    </p:spTree>
+  </p:cSld>
+  <p:clrMapOvr>
+    <a:masterClrMapping/>
+  </p:clrMapOvr>
+</p:notes>
+</file>
+
+<file path=ppt/notesSlides/notesSlide19.xml><?xml version="1.0" encoding="utf-8"?>
+<p:notes xmlns:a="http://schemas.openxmlformats.org/drawingml/2006/main" xmlns:r="http://schemas.openxmlformats.org/officeDocument/2006/relationships" xmlns:p="http://schemas.openxmlformats.org/presentationml/2006/main" xmlns:m="http://schemas.openxmlformats.org/officeDocument/2006/math" xmlns:w="http://schemas.openxmlformats.org/wordprocessingml/2006/main">
+  <p:cSld name="">
+    <p:spTree>
+      <p:nvGrpSpPr>
+        <p:cNvPr id="1" name=""/>
+        <p:cNvGrpSpPr/>
+        <p:nvPr/>
+      </p:nvGrpSpPr>
+      <p:grpSpPr bwMode="auto">
+        <a:xfrm>
+          <a:off x="0" y="0"/>
+          <a:ext cx="0" cy="0"/>
+          <a:chOff x="0" y="0"/>
+          <a:chExt cx="0" cy="0"/>
+        </a:xfrm>
+      </p:grpSpPr>
+      <p:sp>
+        <p:nvSpPr>
+          <p:cNvPr id="2" name="Slide Image Placeholder 1"/>
+          <p:cNvSpPr>
+            <a:spLocks noChangeAspect="1" noGrp="1" noRot="1"/>
+          </p:cNvSpPr>
+          <p:nvPr>
+            <p:ph type="sldImg"/>
+          </p:nvPr>
+        </p:nvSpPr>
+        <p:spPr bwMode="auto"/>
+      </p:sp>
+      <p:sp>
+        <p:nvSpPr>
+          <p:cNvPr id="3" name="Notes Placeholder 2"/>
+          <p:cNvSpPr>
+            <a:spLocks noGrp="1"/>
+          </p:cNvSpPr>
+          <p:nvPr>
+            <p:ph type="body" idx="1"/>
+          </p:nvPr>
+        </p:nvSpPr>
+        <p:spPr bwMode="auto"/>
+        <p:txBody>
+          <a:bodyPr/>
+          <a:lstStyle/>
+          <a:p>
+            <a:pPr>
+              <a:defRPr/>
+            </a:pPr>
+            <a:endParaRPr/>
+          </a:p>
+        </p:txBody>
+      </p:sp>
+      <p:sp>
+        <p:nvSpPr>
+          <p:cNvPr id="4" name="Slide Number Placeholder 3"/>
+          <p:cNvSpPr>
+            <a:spLocks noGrp="1"/>
+          </p:cNvSpPr>
+          <p:nvPr>
+            <p:ph type="sldNum" sz="quarter" idx="10"/>
+          </p:nvPr>
+        </p:nvSpPr>
+        <p:spPr bwMode="auto"/>
+        <p:txBody>
+          <a:bodyPr/>
+          <a:lstStyle/>
+          <a:p>
+            <a:pPr>
+              <a:defRPr/>
+            </a:pPr>
+            <a:fld id="{68585A92-2135-4C04-694D-8895D6B338EB}" type="slidenum">
+              <a:rPr/>
+              <a:t/>
+            </a:fld>
+            <a:endParaRPr/>
+          </a:p>
+        </p:txBody>
+      </p:sp>
+    </p:spTree>
+  </p:cSld>
+  <p:clrMapOvr>
+    <a:masterClrMapping/>
+  </p:clrMapOvr>
+</p:notes>
+</file>
+
+<file path=ppt/notesSlides/notesSlide2.xml><?xml version="1.0" encoding="utf-8"?>
+<p:notes xmlns:a="http://schemas.openxmlformats.org/drawingml/2006/main" xmlns:r="http://schemas.openxmlformats.org/officeDocument/2006/relationships" xmlns:p="http://schemas.openxmlformats.org/presentationml/2006/main" xmlns:m="http://schemas.openxmlformats.org/officeDocument/2006/math" xmlns:w="http://schemas.openxmlformats.org/wordprocessingml/2006/main">
+  <p:cSld name="">
+    <p:spTree>
+      <p:nvGrpSpPr>
+        <p:cNvPr id="1" name=""/>
+        <p:cNvGrpSpPr/>
+        <p:nvPr/>
+      </p:nvGrpSpPr>
+      <p:grpSpPr bwMode="auto">
+        <a:xfrm>
+          <a:off x="0" y="0"/>
+          <a:ext cx="0" cy="0"/>
+          <a:chOff x="0" y="0"/>
+          <a:chExt cx="0" cy="0"/>
+        </a:xfrm>
+      </p:grpSpPr>
+      <p:sp>
+        <p:nvSpPr>
+          <p:cNvPr id="2" name="Slide Image Placeholder 1"/>
+          <p:cNvSpPr>
+            <a:spLocks noChangeAspect="1" noGrp="1" noRot="1"/>
+          </p:cNvSpPr>
+          <p:nvPr>
+            <p:ph type="sldImg"/>
+          </p:nvPr>
+        </p:nvSpPr>
+        <p:spPr bwMode="auto"/>
+      </p:sp>
+      <p:sp>
+        <p:nvSpPr>
+          <p:cNvPr id="3" name="Notes Placeholder 2"/>
+          <p:cNvSpPr>
+            <a:spLocks noGrp="1"/>
+          </p:cNvSpPr>
+          <p:nvPr>
+            <p:ph type="body" idx="1"/>
+          </p:nvPr>
+        </p:nvSpPr>
+        <p:spPr bwMode="auto"/>
+        <p:txBody>
+          <a:bodyPr/>
+          <a:lstStyle/>
+          <a:p>
+            <a:pPr>
+              <a:defRPr/>
+            </a:pPr>
+            <a:endParaRPr/>
+          </a:p>
+        </p:txBody>
+      </p:sp>
+      <p:sp>
+        <p:nvSpPr>
+          <p:cNvPr id="4" name="Slide Number Placeholder 3"/>
+          <p:cNvSpPr>
+            <a:spLocks noGrp="1"/>
+          </p:cNvSpPr>
+          <p:nvPr>
+            <p:ph type="sldNum" sz="quarter" idx="10"/>
+          </p:nvPr>
+        </p:nvSpPr>
+        <p:spPr bwMode="auto"/>
+        <p:txBody>
+          <a:bodyPr/>
+          <a:lstStyle/>
+          <a:p>
+            <a:pPr>
+              <a:defRPr/>
+            </a:pPr>
+            <a:fld id="{3F8B09AF-77FF-DA71-AA1D-6CD6785B977D}" type="slidenum">
+              <a:rPr/>
+              <a:t/>
+            </a:fld>
+            <a:endParaRPr/>
+          </a:p>
+        </p:txBody>
+      </p:sp>
+    </p:spTree>
+  </p:cSld>
+  <p:clrMapOvr>
+    <a:masterClrMapping/>
+  </p:clrMapOvr>
+</p:notes>
+</file>
+
+<file path=ppt/notesSlides/notesSlide3.xml><?xml version="1.0" encoding="utf-8"?>
+<p:notes xmlns:a="http://schemas.openxmlformats.org/drawingml/2006/main" xmlns:r="http://schemas.openxmlformats.org/officeDocument/2006/relationships" xmlns:p="http://schemas.openxmlformats.org/presentationml/2006/main" xmlns:m="http://schemas.openxmlformats.org/officeDocument/2006/math" xmlns:w="http://schemas.openxmlformats.org/wordprocessingml/2006/main">
+  <p:cSld name="">
+    <p:spTree>
+      <p:nvGrpSpPr>
+        <p:cNvPr id="1" name=""/>
+        <p:cNvGrpSpPr/>
+        <p:nvPr/>
+      </p:nvGrpSpPr>
+      <p:grpSpPr bwMode="auto">
+        <a:xfrm>
+          <a:off x="0" y="0"/>
+          <a:ext cx="0" cy="0"/>
+          <a:chOff x="0" y="0"/>
+          <a:chExt cx="0" cy="0"/>
+        </a:xfrm>
+      </p:grpSpPr>
+      <p:sp>
+        <p:nvSpPr>
+          <p:cNvPr id="2" name="Slide Image Placeholder 1"/>
+          <p:cNvSpPr>
+            <a:spLocks noChangeAspect="1" noGrp="1" noRot="1"/>
+          </p:cNvSpPr>
+          <p:nvPr>
+            <p:ph type="sldImg"/>
+          </p:nvPr>
+        </p:nvSpPr>
+        <p:spPr bwMode="auto"/>
+      </p:sp>
+      <p:sp>
+        <p:nvSpPr>
+          <p:cNvPr id="3" name="Notes Placeholder 2"/>
+          <p:cNvSpPr>
+            <a:spLocks noGrp="1"/>
+          </p:cNvSpPr>
+          <p:nvPr>
+            <p:ph type="body" idx="1"/>
+          </p:nvPr>
+        </p:nvSpPr>
+        <p:spPr bwMode="auto"/>
+        <p:txBody>
+          <a:bodyPr/>
+          <a:lstStyle/>
+          <a:p>
+            <a:pPr>
+              <a:defRPr/>
+            </a:pPr>
+            <a:endParaRPr/>
+          </a:p>
+        </p:txBody>
+      </p:sp>
+      <p:sp>
+        <p:nvSpPr>
+          <p:cNvPr id="4" name="Slide Number Placeholder 3"/>
+          <p:cNvSpPr>
+            <a:spLocks noGrp="1"/>
+          </p:cNvSpPr>
+          <p:nvPr>
+            <p:ph type="sldNum" sz="quarter" idx="10"/>
+          </p:nvPr>
+        </p:nvSpPr>
+        <p:spPr bwMode="auto"/>
+        <p:txBody>
+          <a:bodyPr/>
+          <a:lstStyle/>
+          <a:p>
+            <a:pPr>
+              <a:defRPr/>
+            </a:pPr>
+            <a:fld id="{DF4F1BD3-D0C0-9220-53DC-C0F50349AD3E}" type="slidenum">
+              <a:rPr/>
+              <a:t/>
+            </a:fld>
+            <a:endParaRPr/>
+          </a:p>
+        </p:txBody>
+      </p:sp>
+    </p:spTree>
+  </p:cSld>
+  <p:clrMapOvr>
+    <a:masterClrMapping/>
+  </p:clrMapOvr>
+</p:notes>
+</file>
+
+<file path=ppt/notesSlides/notesSlide4.xml><?xml version="1.0" encoding="utf-8"?>
+<p:notes xmlns:a="http://schemas.openxmlformats.org/drawingml/2006/main" xmlns:r="http://schemas.openxmlformats.org/officeDocument/2006/relationships" xmlns:p="http://schemas.openxmlformats.org/presentationml/2006/main" xmlns:m="http://schemas.openxmlformats.org/officeDocument/2006/math" xmlns:w="http://schemas.openxmlformats.org/wordprocessingml/2006/main">
+  <p:cSld name="">
+    <p:spTree>
+      <p:nvGrpSpPr>
+        <p:cNvPr id="1" name=""/>
+        <p:cNvGrpSpPr/>
+        <p:nvPr/>
+      </p:nvGrpSpPr>
+      <p:grpSpPr bwMode="auto">
+        <a:xfrm>
+          <a:off x="0" y="0"/>
+          <a:ext cx="0" cy="0"/>
+          <a:chOff x="0" y="0"/>
+          <a:chExt cx="0" cy="0"/>
+        </a:xfrm>
+      </p:grpSpPr>
+      <p:sp>
+        <p:nvSpPr>
+          <p:cNvPr id="2" name="Slide Image Placeholder 1"/>
+          <p:cNvSpPr>
+            <a:spLocks noChangeAspect="1" noGrp="1" noRot="1"/>
+          </p:cNvSpPr>
+          <p:nvPr>
+            <p:ph type="sldImg"/>
+          </p:nvPr>
+        </p:nvSpPr>
+        <p:spPr bwMode="auto"/>
+      </p:sp>
+      <p:sp>
+        <p:nvSpPr>
+          <p:cNvPr id="3" name="Notes Placeholder 2"/>
+          <p:cNvSpPr>
+            <a:spLocks noGrp="1"/>
+          </p:cNvSpPr>
+          <p:nvPr>
+            <p:ph type="body" idx="1"/>
+          </p:nvPr>
+        </p:nvSpPr>
+        <p:spPr bwMode="auto"/>
+        <p:txBody>
+          <a:bodyPr/>
+          <a:lstStyle/>
+          <a:p>
+            <a:pPr>
+              <a:defRPr/>
+            </a:pPr>
+            <a:endParaRPr/>
+          </a:p>
+        </p:txBody>
+      </p:sp>
+      <p:sp>
+        <p:nvSpPr>
+          <p:cNvPr id="4" name="Slide Number Placeholder 3"/>
+          <p:cNvSpPr>
+            <a:spLocks noGrp="1"/>
+          </p:cNvSpPr>
+          <p:nvPr>
+            <p:ph type="sldNum" sz="quarter" idx="10"/>
+          </p:nvPr>
+        </p:nvSpPr>
+        <p:spPr bwMode="auto"/>
+        <p:txBody>
+          <a:bodyPr/>
+          <a:lstStyle/>
+          <a:p>
+            <a:pPr>
+              <a:defRPr/>
+            </a:pPr>
+            <a:fld id="{5D552231-AD66-8E90-0ECD-598922D9BF4C}" type="slidenum">
+              <a:rPr/>
+              <a:t/>
+            </a:fld>
+            <a:endParaRPr/>
+          </a:p>
+        </p:txBody>
+      </p:sp>
+    </p:spTree>
+  </p:cSld>
+  <p:clrMapOvr>
+    <a:masterClrMapping/>
+  </p:clrMapOvr>
+</p:notes>
+</file>
+
+<file path=ppt/notesSlides/notesSlide5.xml><?xml version="1.0" encoding="utf-8"?>
+<p:notes xmlns:a="http://schemas.openxmlformats.org/drawingml/2006/main" xmlns:r="http://schemas.openxmlformats.org/officeDocument/2006/relationships" xmlns:p="http://schemas.openxmlformats.org/presentationml/2006/main" xmlns:m="http://schemas.openxmlformats.org/officeDocument/2006/math" xmlns:w="http://schemas.openxmlformats.org/wordprocessingml/2006/main">
+  <p:cSld name="">
+    <p:spTree>
+      <p:nvGrpSpPr>
+        <p:cNvPr id="1" name=""/>
+        <p:cNvGrpSpPr/>
+        <p:nvPr/>
+      </p:nvGrpSpPr>
+      <p:grpSpPr bwMode="auto">
+        <a:xfrm>
+          <a:off x="0" y="0"/>
+          <a:ext cx="0" cy="0"/>
+          <a:chOff x="0" y="0"/>
+          <a:chExt cx="0" cy="0"/>
+        </a:xfrm>
+      </p:grpSpPr>
+      <p:sp>
+        <p:nvSpPr>
+          <p:cNvPr id="2" name="Slide Image Placeholder 1"/>
+          <p:cNvSpPr>
+            <a:spLocks noChangeAspect="1" noGrp="1" noRot="1"/>
+          </p:cNvSpPr>
+          <p:nvPr>
+            <p:ph type="sldImg"/>
+          </p:nvPr>
+        </p:nvSpPr>
+        <p:spPr bwMode="auto"/>
+      </p:sp>
+      <p:sp>
+        <p:nvSpPr>
+          <p:cNvPr id="3" name="Notes Placeholder 2"/>
+          <p:cNvSpPr>
+            <a:spLocks noGrp="1"/>
+          </p:cNvSpPr>
+          <p:nvPr>
+            <p:ph type="body" idx="1"/>
+          </p:nvPr>
+        </p:nvSpPr>
+        <p:spPr bwMode="auto"/>
+        <p:txBody>
+          <a:bodyPr/>
+          <a:lstStyle/>
+          <a:p>
+            <a:pPr>
+              <a:defRPr/>
+            </a:pPr>
+            <a:endParaRPr/>
+          </a:p>
+        </p:txBody>
+      </p:sp>
+      <p:sp>
+        <p:nvSpPr>
+          <p:cNvPr id="4" name="Slide Number Placeholder 3"/>
+          <p:cNvSpPr>
+            <a:spLocks noGrp="1"/>
+          </p:cNvSpPr>
+          <p:nvPr>
+            <p:ph type="sldNum" sz="quarter" idx="10"/>
+          </p:nvPr>
+        </p:nvSpPr>
+        <p:spPr bwMode="auto"/>
+        <p:txBody>
+          <a:bodyPr/>
+          <a:lstStyle/>
+          <a:p>
+            <a:pPr>
+              <a:defRPr/>
+            </a:pPr>
+            <a:fld id="{C2B952C0-B358-298E-C2E7-4E2C311293ED}" type="slidenum">
+              <a:rPr/>
+              <a:t/>
+            </a:fld>
+            <a:endParaRPr/>
+          </a:p>
+        </p:txBody>
+      </p:sp>
+    </p:spTree>
+  </p:cSld>
+  <p:clrMapOvr>
+    <a:masterClrMapping/>
+  </p:clrMapOvr>
+</p:notes>
+</file>
+
+<file path=ppt/notesSlides/notesSlide6.xml><?xml version="1.0" encoding="utf-8"?>
+<p:notes xmlns:a="http://schemas.openxmlformats.org/drawingml/2006/main" xmlns:r="http://schemas.openxmlformats.org/officeDocument/2006/relationships" xmlns:p="http://schemas.openxmlformats.org/presentationml/2006/main" xmlns:m="http://schemas.openxmlformats.org/officeDocument/2006/math" xmlns:w="http://schemas.openxmlformats.org/wordprocessingml/2006/main">
+  <p:cSld name="">
+    <p:spTree>
+      <p:nvGrpSpPr>
+        <p:cNvPr id="1" name=""/>
+        <p:cNvGrpSpPr/>
+        <p:nvPr/>
+      </p:nvGrpSpPr>
+      <p:grpSpPr bwMode="auto">
+        <a:xfrm>
+          <a:off x="0" y="0"/>
+          <a:ext cx="0" cy="0"/>
+          <a:chOff x="0" y="0"/>
+          <a:chExt cx="0" cy="0"/>
+        </a:xfrm>
+      </p:grpSpPr>
+      <p:sp>
+        <p:nvSpPr>
+          <p:cNvPr id="2" name="Slide Image Placeholder 1"/>
+          <p:cNvSpPr>
+            <a:spLocks noChangeAspect="1" noGrp="1" noRot="1"/>
+          </p:cNvSpPr>
+          <p:nvPr>
+            <p:ph type="sldImg"/>
+          </p:nvPr>
+        </p:nvSpPr>
+        <p:spPr bwMode="auto"/>
+      </p:sp>
+      <p:sp>
+        <p:nvSpPr>
+          <p:cNvPr id="3" name="Notes Placeholder 2"/>
+          <p:cNvSpPr>
+            <a:spLocks noGrp="1"/>
+          </p:cNvSpPr>
+          <p:nvPr>
+            <p:ph type="body" idx="1"/>
+          </p:nvPr>
+        </p:nvSpPr>
+        <p:spPr bwMode="auto"/>
+        <p:txBody>
+          <a:bodyPr/>
+          <a:lstStyle/>
+          <a:p>
+            <a:pPr>
+              <a:defRPr/>
+            </a:pPr>
+            <a:endParaRPr/>
+          </a:p>
+        </p:txBody>
+      </p:sp>
+      <p:sp>
+        <p:nvSpPr>
+          <p:cNvPr id="4" name="Slide Number Placeholder 3"/>
+          <p:cNvSpPr>
+            <a:spLocks noGrp="1"/>
+          </p:cNvSpPr>
+          <p:nvPr>
+            <p:ph type="sldNum" sz="quarter" idx="10"/>
+          </p:nvPr>
+        </p:nvSpPr>
+        <p:spPr bwMode="auto"/>
+        <p:txBody>
+          <a:bodyPr/>
+          <a:lstStyle/>
+          <a:p>
+            <a:pPr>
+              <a:defRPr/>
+            </a:pPr>
+            <a:fld id="{C964AE77-EFB9-1E0F-6F2C-3E61614AB540}" type="slidenum">
+              <a:rPr/>
+              <a:t/>
+            </a:fld>
+            <a:endParaRPr/>
+          </a:p>
+        </p:txBody>
+      </p:sp>
+    </p:spTree>
+  </p:cSld>
+  <p:clrMapOvr>
+    <a:masterClrMapping/>
+  </p:clrMapOvr>
+</p:notes>
+</file>
+
+<file path=ppt/notesSlides/notesSlide7.xml><?xml version="1.0" encoding="utf-8"?>
+<p:notes xmlns:a="http://schemas.openxmlformats.org/drawingml/2006/main" xmlns:r="http://schemas.openxmlformats.org/officeDocument/2006/relationships" xmlns:p="http://schemas.openxmlformats.org/presentationml/2006/main" xmlns:m="http://schemas.openxmlformats.org/officeDocument/2006/math" xmlns:w="http://schemas.openxmlformats.org/wordprocessingml/2006/main">
+  <p:cSld name="">
+    <p:spTree>
+      <p:nvGrpSpPr>
+        <p:cNvPr id="1" name=""/>
+        <p:cNvGrpSpPr/>
+        <p:nvPr/>
+      </p:nvGrpSpPr>
+      <p:grpSpPr bwMode="auto">
+        <a:xfrm>
+          <a:off x="0" y="0"/>
+          <a:ext cx="0" cy="0"/>
+          <a:chOff x="0" y="0"/>
+          <a:chExt cx="0" cy="0"/>
+        </a:xfrm>
+      </p:grpSpPr>
+      <p:sp>
+        <p:nvSpPr>
+          <p:cNvPr id="2" name="Slide Image Placeholder 1"/>
+          <p:cNvSpPr>
+            <a:spLocks noChangeAspect="1" noGrp="1" noRot="1"/>
+          </p:cNvSpPr>
+          <p:nvPr>
+            <p:ph type="sldImg"/>
+          </p:nvPr>
+        </p:nvSpPr>
+        <p:spPr bwMode="auto"/>
+      </p:sp>
+      <p:sp>
+        <p:nvSpPr>
+          <p:cNvPr id="3" name="Notes Placeholder 2"/>
+          <p:cNvSpPr>
+            <a:spLocks noGrp="1"/>
+          </p:cNvSpPr>
+          <p:nvPr>
+            <p:ph type="body" idx="1"/>
+          </p:nvPr>
+        </p:nvSpPr>
+        <p:spPr bwMode="auto"/>
+        <p:txBody>
+          <a:bodyPr/>
+          <a:lstStyle/>
+          <a:p>
+            <a:pPr>
+              <a:defRPr/>
+            </a:pPr>
+            <a:endParaRPr/>
+          </a:p>
+        </p:txBody>
+      </p:sp>
+      <p:sp>
+        <p:nvSpPr>
+          <p:cNvPr id="4" name="Slide Number Placeholder 3"/>
+          <p:cNvSpPr>
+            <a:spLocks noGrp="1"/>
+          </p:cNvSpPr>
+          <p:nvPr>
+            <p:ph type="sldNum" sz="quarter" idx="10"/>
+          </p:nvPr>
+        </p:nvSpPr>
+        <p:spPr bwMode="auto"/>
+        <p:txBody>
+          <a:bodyPr/>
+          <a:lstStyle/>
+          <a:p>
+            <a:pPr>
+              <a:defRPr/>
+            </a:pPr>
+            <a:fld id="{DA546AA2-7FB8-FDF6-011A-02B963C3C0CB}" type="slidenum">
+              <a:rPr/>
+              <a:t/>
+            </a:fld>
+            <a:endParaRPr/>
+          </a:p>
+        </p:txBody>
+      </p:sp>
+    </p:spTree>
+  </p:cSld>
+  <p:clrMapOvr>
+    <a:masterClrMapping/>
+  </p:clrMapOvr>
+</p:notes>
+</file>
+
+<file path=ppt/notesSlides/notesSlide8.xml><?xml version="1.0" encoding="utf-8"?>
+<p:notes xmlns:a="http://schemas.openxmlformats.org/drawingml/2006/main" xmlns:r="http://schemas.openxmlformats.org/officeDocument/2006/relationships" xmlns:p="http://schemas.openxmlformats.org/presentationml/2006/main" xmlns:m="http://schemas.openxmlformats.org/officeDocument/2006/math" xmlns:w="http://schemas.openxmlformats.org/wordprocessingml/2006/main">
+  <p:cSld name="">
+    <p:spTree>
+      <p:nvGrpSpPr>
+        <p:cNvPr id="1" name=""/>
+        <p:cNvGrpSpPr/>
+        <p:nvPr/>
+      </p:nvGrpSpPr>
+      <p:grpSpPr bwMode="auto">
+        <a:xfrm>
+          <a:off x="0" y="0"/>
+          <a:ext cx="0" cy="0"/>
+          <a:chOff x="0" y="0"/>
+          <a:chExt cx="0" cy="0"/>
+        </a:xfrm>
+      </p:grpSpPr>
+      <p:sp>
+        <p:nvSpPr>
+          <p:cNvPr id="2" name="Slide Image Placeholder 1"/>
+          <p:cNvSpPr>
+            <a:spLocks noChangeAspect="1" noGrp="1" noRot="1"/>
+          </p:cNvSpPr>
+          <p:nvPr>
+            <p:ph type="sldImg"/>
+          </p:nvPr>
+        </p:nvSpPr>
+        <p:spPr bwMode="auto"/>
+      </p:sp>
+      <p:sp>
+        <p:nvSpPr>
+          <p:cNvPr id="3" name="Notes Placeholder 2"/>
+          <p:cNvSpPr>
+            <a:spLocks noGrp="1"/>
+          </p:cNvSpPr>
+          <p:nvPr>
+            <p:ph type="body" idx="1"/>
+          </p:nvPr>
+        </p:nvSpPr>
+        <p:spPr bwMode="auto"/>
+        <p:txBody>
+          <a:bodyPr/>
+          <a:lstStyle/>
+          <a:p>
+            <a:pPr>
+              <a:defRPr/>
+            </a:pPr>
+            <a:endParaRPr/>
+          </a:p>
+        </p:txBody>
+      </p:sp>
+      <p:sp>
+        <p:nvSpPr>
+          <p:cNvPr id="4" name="Slide Number Placeholder 3"/>
+          <p:cNvSpPr>
+            <a:spLocks noGrp="1"/>
+          </p:cNvSpPr>
+          <p:nvPr>
+            <p:ph type="sldNum" sz="quarter" idx="10"/>
+          </p:nvPr>
+        </p:nvSpPr>
+        <p:spPr bwMode="auto"/>
+        <p:txBody>
+          <a:bodyPr/>
+          <a:lstStyle/>
+          <a:p>
+            <a:pPr>
+              <a:defRPr/>
+            </a:pPr>
+            <a:fld id="{2623DFD7-4C6C-CB63-6F00-C3E24565AB04}" type="slidenum">
+              <a:rPr/>
+              <a:t/>
+            </a:fld>
+            <a:endParaRPr/>
+          </a:p>
+        </p:txBody>
+      </p:sp>
+    </p:spTree>
+  </p:cSld>
+  <p:clrMapOvr>
+    <a:masterClrMapping/>
+  </p:clrMapOvr>
+</p:notes>
+</file>
+
+<file path=ppt/notesSlides/notesSlide9.xml><?xml version="1.0" encoding="utf-8"?>
+<p:notes xmlns:a="http://schemas.openxmlformats.org/drawingml/2006/main" xmlns:r="http://schemas.openxmlformats.org/officeDocument/2006/relationships" xmlns:p="http://schemas.openxmlformats.org/presentationml/2006/main" xmlns:m="http://schemas.openxmlformats.org/officeDocument/2006/math" xmlns:w="http://schemas.openxmlformats.org/wordprocessingml/2006/main">
+  <p:cSld name="">
+    <p:spTree>
+      <p:nvGrpSpPr>
+        <p:cNvPr id="1" name=""/>
+        <p:cNvGrpSpPr/>
+        <p:nvPr/>
+      </p:nvGrpSpPr>
+      <p:grpSpPr bwMode="auto">
+        <a:xfrm>
+          <a:off x="0" y="0"/>
+          <a:ext cx="0" cy="0"/>
+          <a:chOff x="0" y="0"/>
+          <a:chExt cx="0" cy="0"/>
+        </a:xfrm>
+      </p:grpSpPr>
+      <p:sp>
+        <p:nvSpPr>
+          <p:cNvPr id="2" name="Slide Image Placeholder 1"/>
+          <p:cNvSpPr>
+            <a:spLocks noChangeAspect="1" noGrp="1" noRot="1"/>
+          </p:cNvSpPr>
+          <p:nvPr>
+            <p:ph type="sldImg"/>
+          </p:nvPr>
+        </p:nvSpPr>
+        <p:spPr bwMode="auto"/>
+      </p:sp>
+      <p:sp>
+        <p:nvSpPr>
+          <p:cNvPr id="3" name="Notes Placeholder 2"/>
+          <p:cNvSpPr>
+            <a:spLocks noGrp="1"/>
+          </p:cNvSpPr>
+          <p:nvPr>
+            <p:ph type="body" idx="1"/>
+          </p:nvPr>
+        </p:nvSpPr>
+        <p:spPr bwMode="auto"/>
+        <p:txBody>
+          <a:bodyPr/>
+          <a:lstStyle/>
+          <a:p>
+            <a:pPr>
+              <a:defRPr/>
+            </a:pPr>
+            <a:endParaRPr/>
+          </a:p>
+        </p:txBody>
+      </p:sp>
+      <p:sp>
+        <p:nvSpPr>
+          <p:cNvPr id="4" name="Slide Number Placeholder 3"/>
+          <p:cNvSpPr>
+            <a:spLocks noGrp="1"/>
+          </p:cNvSpPr>
+          <p:nvPr>
+            <p:ph type="sldNum" sz="quarter" idx="10"/>
+          </p:nvPr>
+        </p:nvSpPr>
+        <p:spPr bwMode="auto"/>
+        <p:txBody>
+          <a:bodyPr/>
+          <a:lstStyle/>
+          <a:p>
+            <a:pPr>
+              <a:defRPr/>
+            </a:pPr>
+            <a:fld id="{9BDFE228-72D3-B333-809F-107261DD0BA8}" type="slidenum">
+              <a:rPr/>
+              <a:t/>
+            </a:fld>
+            <a:endParaRPr/>
+          </a:p>
+        </p:txBody>
+      </p:sp>
+    </p:spTree>
+  </p:cSld>
+  <p:clrMapOvr>
+    <a:masterClrMapping/>
+  </p:clrMapOvr>
+</p:notes>
+</file>
+
 <file path=ppt/slideLayouts/slideLayout1.xml><?xml version="1.0" encoding="utf-8"?>
-<p:sldLayout xmlns:a="http://schemas.openxmlformats.org/drawingml/2006/main" xmlns:r="http://schemas.openxmlformats.org/officeDocument/2006/relationships" xmlns:p="http://schemas.openxmlformats.org/presentationml/2006/main" type="title" preserve="1">
+<p:sldLayout xmlns:a="http://schemas.openxmlformats.org/drawingml/2006/main" xmlns:r="http://schemas.openxmlformats.org/officeDocument/2006/relationships" xmlns:p="http://schemas.openxmlformats.org/presentationml/2006/main" xmlns:m="http://schemas.openxmlformats.org/officeDocument/2006/math" xmlns:w="http://schemas.openxmlformats.org/wordprocessingml/2006/main" matchingName="" preserve="1" showMasterPhAnim="0" showMasterSp="1" type="title" userDrawn="1">
   <p:cSld name="Title Slide">
     <p:spTree>
       <p:nvGrpSpPr>
@@ -134,7 +2072,7 @@
         <p:cNvGrpSpPr/>
         <p:nvPr/>
       </p:nvGrpSpPr>
-      <p:grpSpPr>
+      <p:grpSpPr bwMode="auto">
         <a:xfrm>
           <a:off x="0" y="0"/>
           <a:ext cx="0" cy="0"/>
@@ -144,7 +2082,7 @@
       </p:grpSpPr>
       <p:sp>
         <p:nvSpPr>
-          <p:cNvPr id="2" name="Title 1"/>
+          <p:cNvPr id="729420783" name="Title 1"/>
           <p:cNvSpPr>
             <a:spLocks noGrp="1"/>
           </p:cNvSpPr>
@@ -152,7 +2090,7 @@
             <p:ph type="ctrTitle"/>
           </p:nvPr>
         </p:nvSpPr>
-        <p:spPr>
+        <p:spPr bwMode="auto">
           <a:xfrm>
             <a:off x="1524000" y="1122363"/>
             <a:ext cx="9144000" cy="2387600"/>
@@ -166,8 +2104,11 @@
             </a:lvl1pPr>
           </a:lstStyle>
           <a:p>
-            <a:r>
-              <a:rPr lang="en-US" smtClean="0"/>
+            <a:pPr>
+              <a:defRPr/>
+            </a:pPr>
+            <a:r>
+              <a:rPr lang="en-US"/>
               <a:t>Click to edit Master title style</a:t>
             </a:r>
             <a:endParaRPr lang="en-US"/>
@@ -176,7 +2117,7 @@
       </p:sp>
       <p:sp>
         <p:nvSpPr>
-          <p:cNvPr id="3" name="Subtitle 2"/>
+          <p:cNvPr id="551876900" name="Subtitle 2"/>
           <p:cNvSpPr>
             <a:spLocks noGrp="1"/>
           </p:cNvSpPr>
@@ -184,7 +2125,7 @@
             <p:ph type="subTitle" idx="1"/>
           </p:nvPr>
         </p:nvSpPr>
-        <p:spPr>
+        <p:spPr bwMode="auto">
           <a:xfrm>
             <a:off x="1524000" y="3602038"/>
             <a:ext cx="9144000" cy="1655762"/>
@@ -231,8 +2172,11 @@
             </a:lvl9pPr>
           </a:lstStyle>
           <a:p>
-            <a:r>
-              <a:rPr lang="en-US" smtClean="0"/>
+            <a:pPr>
+              <a:defRPr/>
+            </a:pPr>
+            <a:r>
+              <a:rPr lang="en-US"/>
               <a:t>Click to edit Master subtitle style</a:t>
             </a:r>
             <a:endParaRPr lang="en-US"/>
@@ -241,7 +2185,7 @@
       </p:sp>
       <p:sp>
         <p:nvSpPr>
-          <p:cNvPr id="4" name="Date Placeholder 3"/>
+          <p:cNvPr id="302692740" name="Date Placeholder 3"/>
           <p:cNvSpPr>
             <a:spLocks noGrp="1"/>
           </p:cNvSpPr>
@@ -249,13 +2193,17 @@
             <p:ph type="dt" sz="half" idx="10"/>
           </p:nvPr>
         </p:nvSpPr>
-        <p:spPr/>
-        <p:txBody>
-          <a:bodyPr/>
-          <a:lstStyle/>
-          <a:p>
+        <p:spPr bwMode="auto"/>
+        <p:txBody>
+          <a:bodyPr/>
+          <a:lstStyle/>
+          <a:p>
+            <a:pPr>
+              <a:defRPr/>
+            </a:pPr>
             <a:fld id="{90867743-95B3-4C68-AD86-AECB47900815}" type="datetimeFigureOut">
-              <a:rPr lang="en-US" smtClean="0"/>
+              <a:rPr lang="en-US"/>
+              <a:t/>
             </a:fld>
             <a:endParaRPr lang="en-US"/>
           </a:p>
@@ -263,7 +2211,7 @@
       </p:sp>
       <p:sp>
         <p:nvSpPr>
-          <p:cNvPr id="5" name="Footer Placeholder 4"/>
+          <p:cNvPr id="1407481150" name="Footer Placeholder 4"/>
           <p:cNvSpPr>
             <a:spLocks noGrp="1"/>
           </p:cNvSpPr>
@@ -271,18 +2219,21 @@
             <p:ph type="ftr" sz="quarter" idx="11"/>
           </p:nvPr>
         </p:nvSpPr>
-        <p:spPr/>
-        <p:txBody>
-          <a:bodyPr/>
-          <a:lstStyle/>
-          <a:p>
-            <a:endParaRPr lang="en-US"/>
-          </a:p>
-        </p:txBody>
-      </p:sp>
-      <p:sp>
-        <p:nvSpPr>
-          <p:cNvPr id="6" name="Slide Number Placeholder 5"/>
+        <p:spPr bwMode="auto"/>
+        <p:txBody>
+          <a:bodyPr/>
+          <a:lstStyle/>
+          <a:p>
+            <a:pPr>
+              <a:defRPr/>
+            </a:pPr>
+            <a:endParaRPr lang="en-US"/>
+          </a:p>
+        </p:txBody>
+      </p:sp>
+      <p:sp>
+        <p:nvSpPr>
+          <p:cNvPr id="820356198" name="Slide Number Placeholder 5"/>
           <p:cNvSpPr>
             <a:spLocks noGrp="1"/>
           </p:cNvSpPr>
@@ -290,13 +2241,17 @@
             <p:ph type="sldNum" sz="quarter" idx="12"/>
           </p:nvPr>
         </p:nvSpPr>
-        <p:spPr/>
-        <p:txBody>
-          <a:bodyPr/>
-          <a:lstStyle/>
-          <a:p>
+        <p:spPr bwMode="auto"/>
+        <p:txBody>
+          <a:bodyPr/>
+          <a:lstStyle/>
+          <a:p>
+            <a:pPr>
+              <a:defRPr/>
+            </a:pPr>
             <a:fld id="{D233FBF5-F569-4CE1-9AFD-EF5EEDD8FE3A}" type="slidenum">
-              <a:rPr lang="en-US" smtClean="0"/>
+              <a:rPr lang="en-US"/>
+              <a:t/>
             </a:fld>
             <a:endParaRPr lang="en-US"/>
           </a:p>
@@ -311,7 +2266,7 @@
 </file>
 
 <file path=ppt/slideLayouts/slideLayout10.xml><?xml version="1.0" encoding="utf-8"?>
-<p:sldLayout xmlns:a="http://schemas.openxmlformats.org/drawingml/2006/main" xmlns:r="http://schemas.openxmlformats.org/officeDocument/2006/relationships" xmlns:p="http://schemas.openxmlformats.org/presentationml/2006/main" type="vertTx" preserve="1">
+<p:sldLayout xmlns:a="http://schemas.openxmlformats.org/drawingml/2006/main" xmlns:r="http://schemas.openxmlformats.org/officeDocument/2006/relationships" xmlns:p="http://schemas.openxmlformats.org/presentationml/2006/main" xmlns:m="http://schemas.openxmlformats.org/officeDocument/2006/math" xmlns:w="http://schemas.openxmlformats.org/wordprocessingml/2006/main" matchingName="" preserve="1" showMasterPhAnim="0" showMasterSp="1" type="vertTx" userDrawn="1">
   <p:cSld name="Title and Vertical Text">
     <p:spTree>
       <p:nvGrpSpPr>
@@ -319,7 +2274,7 @@
         <p:cNvGrpSpPr/>
         <p:nvPr/>
       </p:nvGrpSpPr>
-      <p:grpSpPr>
+      <p:grpSpPr bwMode="auto">
         <a:xfrm>
           <a:off x="0" y="0"/>
           <a:ext cx="0" cy="0"/>
@@ -329,7 +2284,7 @@
       </p:grpSpPr>
       <p:sp>
         <p:nvSpPr>
-          <p:cNvPr id="2" name="Title 1"/>
+          <p:cNvPr id="587653489" name="Title 1"/>
           <p:cNvSpPr>
             <a:spLocks noGrp="1"/>
           </p:cNvSpPr>
@@ -337,13 +2292,16 @@
             <p:ph type="title"/>
           </p:nvPr>
         </p:nvSpPr>
-        <p:spPr/>
-        <p:txBody>
-          <a:bodyPr/>
-          <a:lstStyle/>
-          <a:p>
-            <a:r>
-              <a:rPr lang="en-US" smtClean="0"/>
+        <p:spPr bwMode="auto"/>
+        <p:txBody>
+          <a:bodyPr/>
+          <a:lstStyle/>
+          <a:p>
+            <a:pPr>
+              <a:defRPr/>
+            </a:pPr>
+            <a:r>
+              <a:rPr lang="en-US"/>
               <a:t>Click to edit Master title style</a:t>
             </a:r>
             <a:endParaRPr lang="en-US"/>
@@ -352,7 +2310,7 @@
       </p:sp>
       <p:sp>
         <p:nvSpPr>
-          <p:cNvPr id="3" name="Vertical Text Placeholder 2"/>
+          <p:cNvPr id="833369880" name="Vertical Text Placeholder 2"/>
           <p:cNvSpPr>
             <a:spLocks noGrp="1"/>
           </p:cNvSpPr>
@@ -360,46 +2318,56 @@
             <p:ph type="body" orient="vert" idx="1"/>
           </p:nvPr>
         </p:nvSpPr>
-        <p:spPr/>
+        <p:spPr bwMode="auto"/>
         <p:txBody>
           <a:bodyPr vert="eaVert"/>
           <a:lstStyle/>
           <a:p>
-            <a:pPr lvl="0"/>
-            <a:r>
-              <a:rPr lang="en-US" smtClean="0"/>
+            <a:pPr lvl="0">
+              <a:defRPr/>
+            </a:pPr>
+            <a:r>
+              <a:rPr lang="en-US"/>
               <a:t>Edit Master text styles</a:t>
             </a:r>
-            <a:endParaRPr lang="en-US" smtClean="0"/>
-          </a:p>
-          <a:p>
-            <a:pPr lvl="1"/>
-            <a:r>
-              <a:rPr lang="en-US" smtClean="0"/>
+            <a:endParaRPr lang="en-US"/>
+          </a:p>
+          <a:p>
+            <a:pPr lvl="1">
+              <a:defRPr/>
+            </a:pPr>
+            <a:r>
+              <a:rPr lang="en-US"/>
               <a:t>Second level</a:t>
             </a:r>
-            <a:endParaRPr lang="en-US" smtClean="0"/>
-          </a:p>
-          <a:p>
-            <a:pPr lvl="2"/>
-            <a:r>
-              <a:rPr lang="en-US" smtClean="0"/>
+            <a:endParaRPr lang="en-US"/>
+          </a:p>
+          <a:p>
+            <a:pPr lvl="2">
+              <a:defRPr/>
+            </a:pPr>
+            <a:r>
+              <a:rPr lang="en-US"/>
               <a:t>Third level</a:t>
             </a:r>
-            <a:endParaRPr lang="en-US" smtClean="0"/>
-          </a:p>
-          <a:p>
-            <a:pPr lvl="3"/>
-            <a:r>
-              <a:rPr lang="en-US" smtClean="0"/>
+            <a:endParaRPr lang="en-US"/>
+          </a:p>
+          <a:p>
+            <a:pPr lvl="3">
+              <a:defRPr/>
+            </a:pPr>
+            <a:r>
+              <a:rPr lang="en-US"/>
               <a:t>Fourth level</a:t>
             </a:r>
-            <a:endParaRPr lang="en-US" smtClean="0"/>
-          </a:p>
-          <a:p>
-            <a:pPr lvl="4"/>
-            <a:r>
-              <a:rPr lang="en-US" smtClean="0"/>
+            <a:endParaRPr lang="en-US"/>
+          </a:p>
+          <a:p>
+            <a:pPr lvl="4">
+              <a:defRPr/>
+            </a:pPr>
+            <a:r>
+              <a:rPr lang="en-US"/>
               <a:t>Fifth level</a:t>
             </a:r>
             <a:endParaRPr lang="en-US"/>
@@ -408,7 +2376,7 @@
       </p:sp>
       <p:sp>
         <p:nvSpPr>
-          <p:cNvPr id="4" name="Date Placeholder 3"/>
+          <p:cNvPr id="614559586" name="Date Placeholder 3"/>
           <p:cNvSpPr>
             <a:spLocks noGrp="1"/>
           </p:cNvSpPr>
@@ -416,13 +2384,17 @@
             <p:ph type="dt" sz="half" idx="10"/>
           </p:nvPr>
         </p:nvSpPr>
-        <p:spPr/>
-        <p:txBody>
-          <a:bodyPr/>
-          <a:lstStyle/>
-          <a:p>
+        <p:spPr bwMode="auto"/>
+        <p:txBody>
+          <a:bodyPr/>
+          <a:lstStyle/>
+          <a:p>
+            <a:pPr>
+              <a:defRPr/>
+            </a:pPr>
             <a:fld id="{90867743-95B3-4C68-AD86-AECB47900815}" type="datetimeFigureOut">
-              <a:rPr lang="en-US" smtClean="0"/>
+              <a:rPr lang="en-US"/>
+              <a:t/>
             </a:fld>
             <a:endParaRPr lang="en-US"/>
           </a:p>
@@ -430,7 +2402,7 @@
       </p:sp>
       <p:sp>
         <p:nvSpPr>
-          <p:cNvPr id="5" name="Footer Placeholder 4"/>
+          <p:cNvPr id="381384840" name="Footer Placeholder 4"/>
           <p:cNvSpPr>
             <a:spLocks noGrp="1"/>
           </p:cNvSpPr>
@@ -438,18 +2410,21 @@
             <p:ph type="ftr" sz="quarter" idx="11"/>
           </p:nvPr>
         </p:nvSpPr>
-        <p:spPr/>
-        <p:txBody>
-          <a:bodyPr/>
-          <a:lstStyle/>
-          <a:p>
-            <a:endParaRPr lang="en-US"/>
-          </a:p>
-        </p:txBody>
-      </p:sp>
-      <p:sp>
-        <p:nvSpPr>
-          <p:cNvPr id="6" name="Slide Number Placeholder 5"/>
+        <p:spPr bwMode="auto"/>
+        <p:txBody>
+          <a:bodyPr/>
+          <a:lstStyle/>
+          <a:p>
+            <a:pPr>
+              <a:defRPr/>
+            </a:pPr>
+            <a:endParaRPr lang="en-US"/>
+          </a:p>
+        </p:txBody>
+      </p:sp>
+      <p:sp>
+        <p:nvSpPr>
+          <p:cNvPr id="306691339" name="Slide Number Placeholder 5"/>
           <p:cNvSpPr>
             <a:spLocks noGrp="1"/>
           </p:cNvSpPr>
@@ -457,13 +2432,17 @@
             <p:ph type="sldNum" sz="quarter" idx="12"/>
           </p:nvPr>
         </p:nvSpPr>
-        <p:spPr/>
-        <p:txBody>
-          <a:bodyPr/>
-          <a:lstStyle/>
-          <a:p>
+        <p:spPr bwMode="auto"/>
+        <p:txBody>
+          <a:bodyPr/>
+          <a:lstStyle/>
+          <a:p>
+            <a:pPr>
+              <a:defRPr/>
+            </a:pPr>
             <a:fld id="{D233FBF5-F569-4CE1-9AFD-EF5EEDD8FE3A}" type="slidenum">
-              <a:rPr lang="en-US" smtClean="0"/>
+              <a:rPr lang="en-US"/>
+              <a:t/>
             </a:fld>
             <a:endParaRPr lang="en-US"/>
           </a:p>
@@ -478,7 +2457,7 @@
 </file>
 
 <file path=ppt/slideLayouts/slideLayout11.xml><?xml version="1.0" encoding="utf-8"?>
-<p:sldLayout xmlns:a="http://schemas.openxmlformats.org/drawingml/2006/main" xmlns:r="http://schemas.openxmlformats.org/officeDocument/2006/relationships" xmlns:p="http://schemas.openxmlformats.org/presentationml/2006/main" type="vertTitleAndTx" preserve="1">
+<p:sldLayout xmlns:a="http://schemas.openxmlformats.org/drawingml/2006/main" xmlns:r="http://schemas.openxmlformats.org/officeDocument/2006/relationships" xmlns:p="http://schemas.openxmlformats.org/presentationml/2006/main" xmlns:m="http://schemas.openxmlformats.org/officeDocument/2006/math" xmlns:w="http://schemas.openxmlformats.org/wordprocessingml/2006/main" matchingName="" preserve="1" showMasterPhAnim="0" showMasterSp="1" type="vertTitleAndTx" userDrawn="1">
   <p:cSld name="Vertical Title and Text">
     <p:spTree>
       <p:nvGrpSpPr>
@@ -486,7 +2465,7 @@
         <p:cNvGrpSpPr/>
         <p:nvPr/>
       </p:nvGrpSpPr>
-      <p:grpSpPr>
+      <p:grpSpPr bwMode="auto">
         <a:xfrm>
           <a:off x="0" y="0"/>
           <a:ext cx="0" cy="0"/>
@@ -496,7 +2475,7 @@
       </p:grpSpPr>
       <p:sp>
         <p:nvSpPr>
-          <p:cNvPr id="2" name="Vertical Title 1"/>
+          <p:cNvPr id="1535364952" name="Vertical Title 1"/>
           <p:cNvSpPr>
             <a:spLocks noGrp="1"/>
           </p:cNvSpPr>
@@ -504,7 +2483,7 @@
             <p:ph type="title" orient="vert"/>
           </p:nvPr>
         </p:nvSpPr>
-        <p:spPr>
+        <p:spPr bwMode="auto">
           <a:xfrm>
             <a:off x="8724900" y="365125"/>
             <a:ext cx="2628900" cy="5811838"/>
@@ -514,8 +2493,11 @@
           <a:bodyPr vert="eaVert"/>
           <a:lstStyle/>
           <a:p>
-            <a:r>
-              <a:rPr lang="en-US" smtClean="0"/>
+            <a:pPr>
+              <a:defRPr/>
+            </a:pPr>
+            <a:r>
+              <a:rPr lang="en-US"/>
               <a:t>Click to edit Master title style</a:t>
             </a:r>
             <a:endParaRPr lang="en-US"/>
@@ -524,7 +2506,7 @@
       </p:sp>
       <p:sp>
         <p:nvSpPr>
-          <p:cNvPr id="3" name="Vertical Text Placeholder 2"/>
+          <p:cNvPr id="414552431" name="Vertical Text Placeholder 2"/>
           <p:cNvSpPr>
             <a:spLocks noGrp="1"/>
           </p:cNvSpPr>
@@ -532,7 +2514,7 @@
             <p:ph type="body" orient="vert" idx="1"/>
           </p:nvPr>
         </p:nvSpPr>
-        <p:spPr>
+        <p:spPr bwMode="auto">
           <a:xfrm>
             <a:off x="838200" y="365125"/>
             <a:ext cx="7734300" cy="5811838"/>
@@ -542,41 +2524,51 @@
           <a:bodyPr vert="eaVert"/>
           <a:lstStyle/>
           <a:p>
-            <a:pPr lvl="0"/>
-            <a:r>
-              <a:rPr lang="en-US" smtClean="0"/>
+            <a:pPr lvl="0">
+              <a:defRPr/>
+            </a:pPr>
+            <a:r>
+              <a:rPr lang="en-US"/>
               <a:t>Edit Master text styles</a:t>
             </a:r>
-            <a:endParaRPr lang="en-US" smtClean="0"/>
-          </a:p>
-          <a:p>
-            <a:pPr lvl="1"/>
-            <a:r>
-              <a:rPr lang="en-US" smtClean="0"/>
+            <a:endParaRPr lang="en-US"/>
+          </a:p>
+          <a:p>
+            <a:pPr lvl="1">
+              <a:defRPr/>
+            </a:pPr>
+            <a:r>
+              <a:rPr lang="en-US"/>
               <a:t>Second level</a:t>
             </a:r>
-            <a:endParaRPr lang="en-US" smtClean="0"/>
-          </a:p>
-          <a:p>
-            <a:pPr lvl="2"/>
-            <a:r>
-              <a:rPr lang="en-US" smtClean="0"/>
+            <a:endParaRPr lang="en-US"/>
+          </a:p>
+          <a:p>
+            <a:pPr lvl="2">
+              <a:defRPr/>
+            </a:pPr>
+            <a:r>
+              <a:rPr lang="en-US"/>
               <a:t>Third level</a:t>
             </a:r>
-            <a:endParaRPr lang="en-US" smtClean="0"/>
-          </a:p>
-          <a:p>
-            <a:pPr lvl="3"/>
-            <a:r>
-              <a:rPr lang="en-US" smtClean="0"/>
+            <a:endParaRPr lang="en-US"/>
+          </a:p>
+          <a:p>
+            <a:pPr lvl="3">
+              <a:defRPr/>
+            </a:pPr>
+            <a:r>
+              <a:rPr lang="en-US"/>
               <a:t>Fourth level</a:t>
             </a:r>
-            <a:endParaRPr lang="en-US" smtClean="0"/>
-          </a:p>
-          <a:p>
-            <a:pPr lvl="4"/>
-            <a:r>
-              <a:rPr lang="en-US" smtClean="0"/>
+            <a:endParaRPr lang="en-US"/>
+          </a:p>
+          <a:p>
+            <a:pPr lvl="4">
+              <a:defRPr/>
+            </a:pPr>
+            <a:r>
+              <a:rPr lang="en-US"/>
               <a:t>Fifth level</a:t>
             </a:r>
             <a:endParaRPr lang="en-US"/>
@@ -585,7 +2577,7 @@
       </p:sp>
       <p:sp>
         <p:nvSpPr>
-          <p:cNvPr id="4" name="Date Placeholder 3"/>
+          <p:cNvPr id="1517850580" name="Date Placeholder 3"/>
           <p:cNvSpPr>
             <a:spLocks noGrp="1"/>
           </p:cNvSpPr>
@@ -593,13 +2585,17 @@
             <p:ph type="dt" sz="half" idx="10"/>
           </p:nvPr>
         </p:nvSpPr>
-        <p:spPr/>
-        <p:txBody>
-          <a:bodyPr/>
-          <a:lstStyle/>
-          <a:p>
+        <p:spPr bwMode="auto"/>
+        <p:txBody>
+          <a:bodyPr/>
+          <a:lstStyle/>
+          <a:p>
+            <a:pPr>
+              <a:defRPr/>
+            </a:pPr>
             <a:fld id="{90867743-95B3-4C68-AD86-AECB47900815}" type="datetimeFigureOut">
-              <a:rPr lang="en-US" smtClean="0"/>
+              <a:rPr lang="en-US"/>
+              <a:t/>
             </a:fld>
             <a:endParaRPr lang="en-US"/>
           </a:p>
@@ -607,7 +2603,7 @@
       </p:sp>
       <p:sp>
         <p:nvSpPr>
-          <p:cNvPr id="5" name="Footer Placeholder 4"/>
+          <p:cNvPr id="1968487630" name="Footer Placeholder 4"/>
           <p:cNvSpPr>
             <a:spLocks noGrp="1"/>
           </p:cNvSpPr>
@@ -615,18 +2611,21 @@
             <p:ph type="ftr" sz="quarter" idx="11"/>
           </p:nvPr>
         </p:nvSpPr>
-        <p:spPr/>
-        <p:txBody>
-          <a:bodyPr/>
-          <a:lstStyle/>
-          <a:p>
-            <a:endParaRPr lang="en-US"/>
-          </a:p>
-        </p:txBody>
-      </p:sp>
-      <p:sp>
-        <p:nvSpPr>
-          <p:cNvPr id="6" name="Slide Number Placeholder 5"/>
+        <p:spPr bwMode="auto"/>
+        <p:txBody>
+          <a:bodyPr/>
+          <a:lstStyle/>
+          <a:p>
+            <a:pPr>
+              <a:defRPr/>
+            </a:pPr>
+            <a:endParaRPr lang="en-US"/>
+          </a:p>
+        </p:txBody>
+      </p:sp>
+      <p:sp>
+        <p:nvSpPr>
+          <p:cNvPr id="1823939290" name="Slide Number Placeholder 5"/>
           <p:cNvSpPr>
             <a:spLocks noGrp="1"/>
           </p:cNvSpPr>
@@ -634,13 +2633,17 @@
             <p:ph type="sldNum" sz="quarter" idx="12"/>
           </p:nvPr>
         </p:nvSpPr>
-        <p:spPr/>
-        <p:txBody>
-          <a:bodyPr/>
-          <a:lstStyle/>
-          <a:p>
+        <p:spPr bwMode="auto"/>
+        <p:txBody>
+          <a:bodyPr/>
+          <a:lstStyle/>
+          <a:p>
+            <a:pPr>
+              <a:defRPr/>
+            </a:pPr>
             <a:fld id="{D233FBF5-F569-4CE1-9AFD-EF5EEDD8FE3A}" type="slidenum">
-              <a:rPr lang="en-US" smtClean="0"/>
+              <a:rPr lang="en-US"/>
+              <a:t/>
             </a:fld>
             <a:endParaRPr lang="en-US"/>
           </a:p>
@@ -655,7 +2658,7 @@
 </file>
 
 <file path=ppt/slideLayouts/slideLayout2.xml><?xml version="1.0" encoding="utf-8"?>
-<p:sldLayout xmlns:a="http://schemas.openxmlformats.org/drawingml/2006/main" xmlns:r="http://schemas.openxmlformats.org/officeDocument/2006/relationships" xmlns:p="http://schemas.openxmlformats.org/presentationml/2006/main" type="obj" preserve="1">
+<p:sldLayout xmlns:a="http://schemas.openxmlformats.org/drawingml/2006/main" xmlns:r="http://schemas.openxmlformats.org/officeDocument/2006/relationships" xmlns:p="http://schemas.openxmlformats.org/presentationml/2006/main" xmlns:m="http://schemas.openxmlformats.org/officeDocument/2006/math" xmlns:w="http://schemas.openxmlformats.org/wordprocessingml/2006/main" matchingName="" preserve="1" showMasterPhAnim="0" showMasterSp="1" type="obj" userDrawn="1">
   <p:cSld name="Title and Content">
     <p:spTree>
       <p:nvGrpSpPr>
@@ -663,7 +2666,7 @@
         <p:cNvGrpSpPr/>
         <p:nvPr/>
       </p:nvGrpSpPr>
-      <p:grpSpPr>
+      <p:grpSpPr bwMode="auto">
         <a:xfrm>
           <a:off x="0" y="0"/>
           <a:ext cx="0" cy="0"/>
@@ -673,7 +2676,7 @@
       </p:grpSpPr>
       <p:sp>
         <p:nvSpPr>
-          <p:cNvPr id="2" name="Title 1"/>
+          <p:cNvPr id="1656849743" name="Title 1"/>
           <p:cNvSpPr>
             <a:spLocks noGrp="1"/>
           </p:cNvSpPr>
@@ -681,13 +2684,16 @@
             <p:ph type="title"/>
           </p:nvPr>
         </p:nvSpPr>
-        <p:spPr/>
-        <p:txBody>
-          <a:bodyPr/>
-          <a:lstStyle/>
-          <a:p>
-            <a:r>
-              <a:rPr lang="en-US" smtClean="0"/>
+        <p:spPr bwMode="auto"/>
+        <p:txBody>
+          <a:bodyPr/>
+          <a:lstStyle/>
+          <a:p>
+            <a:pPr>
+              <a:defRPr/>
+            </a:pPr>
+            <a:r>
+              <a:rPr lang="en-US"/>
               <a:t>Click to edit Master title style</a:t>
             </a:r>
             <a:endParaRPr lang="en-US"/>
@@ -696,7 +2702,7 @@
       </p:sp>
       <p:sp>
         <p:nvSpPr>
-          <p:cNvPr id="3" name="Content Placeholder 2"/>
+          <p:cNvPr id="928726904" name="Content Placeholder 2"/>
           <p:cNvSpPr>
             <a:spLocks noGrp="1"/>
           </p:cNvSpPr>
@@ -704,46 +2710,56 @@
             <p:ph idx="1"/>
           </p:nvPr>
         </p:nvSpPr>
-        <p:spPr/>
-        <p:txBody>
-          <a:bodyPr/>
-          <a:lstStyle/>
-          <a:p>
-            <a:pPr lvl="0"/>
-            <a:r>
-              <a:rPr lang="en-US" smtClean="0"/>
+        <p:spPr bwMode="auto"/>
+        <p:txBody>
+          <a:bodyPr/>
+          <a:lstStyle/>
+          <a:p>
+            <a:pPr lvl="0">
+              <a:defRPr/>
+            </a:pPr>
+            <a:r>
+              <a:rPr lang="en-US"/>
               <a:t>Edit Master text styles</a:t>
             </a:r>
-            <a:endParaRPr lang="en-US" smtClean="0"/>
-          </a:p>
-          <a:p>
-            <a:pPr lvl="1"/>
-            <a:r>
-              <a:rPr lang="en-US" smtClean="0"/>
+            <a:endParaRPr lang="en-US"/>
+          </a:p>
+          <a:p>
+            <a:pPr lvl="1">
+              <a:defRPr/>
+            </a:pPr>
+            <a:r>
+              <a:rPr lang="en-US"/>
               <a:t>Second level</a:t>
             </a:r>
-            <a:endParaRPr lang="en-US" smtClean="0"/>
-          </a:p>
-          <a:p>
-            <a:pPr lvl="2"/>
-            <a:r>
-              <a:rPr lang="en-US" smtClean="0"/>
+            <a:endParaRPr lang="en-US"/>
+          </a:p>
+          <a:p>
+            <a:pPr lvl="2">
+              <a:defRPr/>
+            </a:pPr>
+            <a:r>
+              <a:rPr lang="en-US"/>
               <a:t>Third level</a:t>
             </a:r>
-            <a:endParaRPr lang="en-US" smtClean="0"/>
-          </a:p>
-          <a:p>
-            <a:pPr lvl="3"/>
-            <a:r>
-              <a:rPr lang="en-US" smtClean="0"/>
+            <a:endParaRPr lang="en-US"/>
+          </a:p>
+          <a:p>
+            <a:pPr lvl="3">
+              <a:defRPr/>
+            </a:pPr>
+            <a:r>
+              <a:rPr lang="en-US"/>
               <a:t>Fourth level</a:t>
             </a:r>
-            <a:endParaRPr lang="en-US" smtClean="0"/>
-          </a:p>
-          <a:p>
-            <a:pPr lvl="4"/>
-            <a:r>
-              <a:rPr lang="en-US" smtClean="0"/>
+            <a:endParaRPr lang="en-US"/>
+          </a:p>
+          <a:p>
+            <a:pPr lvl="4">
+              <a:defRPr/>
+            </a:pPr>
+            <a:r>
+              <a:rPr lang="en-US"/>
               <a:t>Fifth level</a:t>
             </a:r>
             <a:endParaRPr lang="en-US"/>
@@ -752,7 +2768,7 @@
       </p:sp>
       <p:sp>
         <p:nvSpPr>
-          <p:cNvPr id="4" name="Date Placeholder 3"/>
+          <p:cNvPr id="1413147917" name="Date Placeholder 3"/>
           <p:cNvSpPr>
             <a:spLocks noGrp="1"/>
           </p:cNvSpPr>
@@ -760,13 +2776,17 @@
             <p:ph type="dt" sz="half" idx="10"/>
           </p:nvPr>
         </p:nvSpPr>
-        <p:spPr/>
-        <p:txBody>
-          <a:bodyPr/>
-          <a:lstStyle/>
-          <a:p>
+        <p:spPr bwMode="auto"/>
+        <p:txBody>
+          <a:bodyPr/>
+          <a:lstStyle/>
+          <a:p>
+            <a:pPr>
+              <a:defRPr/>
+            </a:pPr>
             <a:fld id="{90867743-95B3-4C68-AD86-AECB47900815}" type="datetimeFigureOut">
-              <a:rPr lang="en-US" smtClean="0"/>
+              <a:rPr lang="en-US"/>
+              <a:t/>
             </a:fld>
             <a:endParaRPr lang="en-US"/>
           </a:p>
@@ -774,7 +2794,7 @@
       </p:sp>
       <p:sp>
         <p:nvSpPr>
-          <p:cNvPr id="5" name="Footer Placeholder 4"/>
+          <p:cNvPr id="1585263584" name="Footer Placeholder 4"/>
           <p:cNvSpPr>
             <a:spLocks noGrp="1"/>
           </p:cNvSpPr>
@@ -782,18 +2802,21 @@
             <p:ph type="ftr" sz="quarter" idx="11"/>
           </p:nvPr>
         </p:nvSpPr>
-        <p:spPr/>
-        <p:txBody>
-          <a:bodyPr/>
-          <a:lstStyle/>
-          <a:p>
-            <a:endParaRPr lang="en-US"/>
-          </a:p>
-        </p:txBody>
-      </p:sp>
-      <p:sp>
-        <p:nvSpPr>
-          <p:cNvPr id="6" name="Slide Number Placeholder 5"/>
+        <p:spPr bwMode="auto"/>
+        <p:txBody>
+          <a:bodyPr/>
+          <a:lstStyle/>
+          <a:p>
+            <a:pPr>
+              <a:defRPr/>
+            </a:pPr>
+            <a:endParaRPr lang="en-US"/>
+          </a:p>
+        </p:txBody>
+      </p:sp>
+      <p:sp>
+        <p:nvSpPr>
+          <p:cNvPr id="1773809190" name="Slide Number Placeholder 5"/>
           <p:cNvSpPr>
             <a:spLocks noGrp="1"/>
           </p:cNvSpPr>
@@ -801,13 +2824,17 @@
             <p:ph type="sldNum" sz="quarter" idx="12"/>
           </p:nvPr>
         </p:nvSpPr>
-        <p:spPr/>
-        <p:txBody>
-          <a:bodyPr/>
-          <a:lstStyle/>
-          <a:p>
+        <p:spPr bwMode="auto"/>
+        <p:txBody>
+          <a:bodyPr/>
+          <a:lstStyle/>
+          <a:p>
+            <a:pPr>
+              <a:defRPr/>
+            </a:pPr>
             <a:fld id="{D233FBF5-F569-4CE1-9AFD-EF5EEDD8FE3A}" type="slidenum">
-              <a:rPr lang="en-US" smtClean="0"/>
+              <a:rPr lang="en-US"/>
+              <a:t/>
             </a:fld>
             <a:endParaRPr lang="en-US"/>
           </a:p>
@@ -822,7 +2849,7 @@
 </file>
 
 <file path=ppt/slideLayouts/slideLayout3.xml><?xml version="1.0" encoding="utf-8"?>
-<p:sldLayout xmlns:a="http://schemas.openxmlformats.org/drawingml/2006/main" xmlns:r="http://schemas.openxmlformats.org/officeDocument/2006/relationships" xmlns:p="http://schemas.openxmlformats.org/presentationml/2006/main" type="secHead" preserve="1">
+<p:sldLayout xmlns:a="http://schemas.openxmlformats.org/drawingml/2006/main" xmlns:r="http://schemas.openxmlformats.org/officeDocument/2006/relationships" xmlns:p="http://schemas.openxmlformats.org/presentationml/2006/main" xmlns:m="http://schemas.openxmlformats.org/officeDocument/2006/math" xmlns:w="http://schemas.openxmlformats.org/wordprocessingml/2006/main" matchingName="" preserve="1" showMasterPhAnim="0" showMasterSp="1" type="secHead" userDrawn="1">
   <p:cSld name="Section Header">
     <p:spTree>
       <p:nvGrpSpPr>
@@ -830,7 +2857,7 @@
         <p:cNvGrpSpPr/>
         <p:nvPr/>
       </p:nvGrpSpPr>
-      <p:grpSpPr>
+      <p:grpSpPr bwMode="auto">
         <a:xfrm>
           <a:off x="0" y="0"/>
           <a:ext cx="0" cy="0"/>
@@ -840,7 +2867,7 @@
       </p:grpSpPr>
       <p:sp>
         <p:nvSpPr>
-          <p:cNvPr id="2" name="Title 1"/>
+          <p:cNvPr id="1309345470" name="Title 1"/>
           <p:cNvSpPr>
             <a:spLocks noGrp="1"/>
           </p:cNvSpPr>
@@ -848,7 +2875,7 @@
             <p:ph type="title"/>
           </p:nvPr>
         </p:nvSpPr>
-        <p:spPr>
+        <p:spPr bwMode="auto">
           <a:xfrm>
             <a:off x="831850" y="1709738"/>
             <a:ext cx="10515600" cy="2852737"/>
@@ -862,8 +2889,11 @@
             </a:lvl1pPr>
           </a:lstStyle>
           <a:p>
-            <a:r>
-              <a:rPr lang="en-US" smtClean="0"/>
+            <a:pPr>
+              <a:defRPr/>
+            </a:pPr>
+            <a:r>
+              <a:rPr lang="en-US"/>
               <a:t>Click to edit Master title style</a:t>
             </a:r>
             <a:endParaRPr lang="en-US"/>
@@ -872,7 +2902,7 @@
       </p:sp>
       <p:sp>
         <p:nvSpPr>
-          <p:cNvPr id="3" name="Text Placeholder 2"/>
+          <p:cNvPr id="1864128567" name="Text Placeholder 2"/>
           <p:cNvSpPr>
             <a:spLocks noGrp="1"/>
           </p:cNvSpPr>
@@ -880,7 +2910,7 @@
             <p:ph type="body" idx="1"/>
           </p:nvPr>
         </p:nvSpPr>
-        <p:spPr>
+        <p:spPr bwMode="auto">
           <a:xfrm>
             <a:off x="831850" y="4589463"/>
             <a:ext cx="10515600" cy="1500187"/>
@@ -981,18 +3011,20 @@
             </a:lvl9pPr>
           </a:lstStyle>
           <a:p>
-            <a:pPr lvl="0"/>
-            <a:r>
-              <a:rPr lang="en-US" smtClean="0"/>
+            <a:pPr lvl="0">
+              <a:defRPr/>
+            </a:pPr>
+            <a:r>
+              <a:rPr lang="en-US"/>
               <a:t>Edit Master text styles</a:t>
             </a:r>
-            <a:endParaRPr lang="en-US" smtClean="0"/>
-          </a:p>
-        </p:txBody>
-      </p:sp>
-      <p:sp>
-        <p:nvSpPr>
-          <p:cNvPr id="4" name="Date Placeholder 3"/>
+            <a:endParaRPr lang="en-US"/>
+          </a:p>
+        </p:txBody>
+      </p:sp>
+      <p:sp>
+        <p:nvSpPr>
+          <p:cNvPr id="1131887638" name="Date Placeholder 3"/>
           <p:cNvSpPr>
             <a:spLocks noGrp="1"/>
           </p:cNvSpPr>
@@ -1000,13 +3032,17 @@
             <p:ph type="dt" sz="half" idx="10"/>
           </p:nvPr>
         </p:nvSpPr>
-        <p:spPr/>
-        <p:txBody>
-          <a:bodyPr/>
-          <a:lstStyle/>
-          <a:p>
+        <p:spPr bwMode="auto"/>
+        <p:txBody>
+          <a:bodyPr/>
+          <a:lstStyle/>
+          <a:p>
+            <a:pPr>
+              <a:defRPr/>
+            </a:pPr>
             <a:fld id="{90867743-95B3-4C68-AD86-AECB47900815}" type="datetimeFigureOut">
-              <a:rPr lang="en-US" smtClean="0"/>
+              <a:rPr lang="en-US"/>
+              <a:t/>
             </a:fld>
             <a:endParaRPr lang="en-US"/>
           </a:p>
@@ -1014,7 +3050,7 @@
       </p:sp>
       <p:sp>
         <p:nvSpPr>
-          <p:cNvPr id="5" name="Footer Placeholder 4"/>
+          <p:cNvPr id="1917393895" name="Footer Placeholder 4"/>
           <p:cNvSpPr>
             <a:spLocks noGrp="1"/>
           </p:cNvSpPr>
@@ -1022,18 +3058,21 @@
             <p:ph type="ftr" sz="quarter" idx="11"/>
           </p:nvPr>
         </p:nvSpPr>
-        <p:spPr/>
-        <p:txBody>
-          <a:bodyPr/>
-          <a:lstStyle/>
-          <a:p>
-            <a:endParaRPr lang="en-US"/>
-          </a:p>
-        </p:txBody>
-      </p:sp>
-      <p:sp>
-        <p:nvSpPr>
-          <p:cNvPr id="6" name="Slide Number Placeholder 5"/>
+        <p:spPr bwMode="auto"/>
+        <p:txBody>
+          <a:bodyPr/>
+          <a:lstStyle/>
+          <a:p>
+            <a:pPr>
+              <a:defRPr/>
+            </a:pPr>
+            <a:endParaRPr lang="en-US"/>
+          </a:p>
+        </p:txBody>
+      </p:sp>
+      <p:sp>
+        <p:nvSpPr>
+          <p:cNvPr id="1914139279" name="Slide Number Placeholder 5"/>
           <p:cNvSpPr>
             <a:spLocks noGrp="1"/>
           </p:cNvSpPr>
@@ -1041,13 +3080,17 @@
             <p:ph type="sldNum" sz="quarter" idx="12"/>
           </p:nvPr>
         </p:nvSpPr>
-        <p:spPr/>
-        <p:txBody>
-          <a:bodyPr/>
-          <a:lstStyle/>
-          <a:p>
+        <p:spPr bwMode="auto"/>
+        <p:txBody>
+          <a:bodyPr/>
+          <a:lstStyle/>
+          <a:p>
+            <a:pPr>
+              <a:defRPr/>
+            </a:pPr>
             <a:fld id="{D233FBF5-F569-4CE1-9AFD-EF5EEDD8FE3A}" type="slidenum">
-              <a:rPr lang="en-US" smtClean="0"/>
+              <a:rPr lang="en-US"/>
+              <a:t/>
             </a:fld>
             <a:endParaRPr lang="en-US"/>
           </a:p>
@@ -1062,7 +3105,7 @@
 </file>
 
 <file path=ppt/slideLayouts/slideLayout4.xml><?xml version="1.0" encoding="utf-8"?>
-<p:sldLayout xmlns:a="http://schemas.openxmlformats.org/drawingml/2006/main" xmlns:r="http://schemas.openxmlformats.org/officeDocument/2006/relationships" xmlns:p="http://schemas.openxmlformats.org/presentationml/2006/main" type="twoObj" preserve="1">
+<p:sldLayout xmlns:a="http://schemas.openxmlformats.org/drawingml/2006/main" xmlns:r="http://schemas.openxmlformats.org/officeDocument/2006/relationships" xmlns:p="http://schemas.openxmlformats.org/presentationml/2006/main" xmlns:m="http://schemas.openxmlformats.org/officeDocument/2006/math" xmlns:w="http://schemas.openxmlformats.org/wordprocessingml/2006/main" matchingName="" preserve="1" showMasterPhAnim="0" showMasterSp="1" type="twoObj" userDrawn="1">
   <p:cSld name="Two Content">
     <p:spTree>
       <p:nvGrpSpPr>
@@ -1070,7 +3113,7 @@
         <p:cNvGrpSpPr/>
         <p:nvPr/>
       </p:nvGrpSpPr>
-      <p:grpSpPr>
+      <p:grpSpPr bwMode="auto">
         <a:xfrm>
           <a:off x="0" y="0"/>
           <a:ext cx="0" cy="0"/>
@@ -1080,7 +3123,7 @@
       </p:grpSpPr>
       <p:sp>
         <p:nvSpPr>
-          <p:cNvPr id="2" name="Title 1"/>
+          <p:cNvPr id="854295598" name="Title 1"/>
           <p:cNvSpPr>
             <a:spLocks noGrp="1"/>
           </p:cNvSpPr>
@@ -1088,13 +3131,16 @@
             <p:ph type="title"/>
           </p:nvPr>
         </p:nvSpPr>
-        <p:spPr/>
-        <p:txBody>
-          <a:bodyPr/>
-          <a:lstStyle/>
-          <a:p>
-            <a:r>
-              <a:rPr lang="en-US" smtClean="0"/>
+        <p:spPr bwMode="auto"/>
+        <p:txBody>
+          <a:bodyPr/>
+          <a:lstStyle/>
+          <a:p>
+            <a:pPr>
+              <a:defRPr/>
+            </a:pPr>
+            <a:r>
+              <a:rPr lang="en-US"/>
               <a:t>Click to edit Master title style</a:t>
             </a:r>
             <a:endParaRPr lang="en-US"/>
@@ -1103,7 +3149,7 @@
       </p:sp>
       <p:sp>
         <p:nvSpPr>
-          <p:cNvPr id="3" name="Content Placeholder 2"/>
+          <p:cNvPr id="563691532" name="Content Placeholder 2"/>
           <p:cNvSpPr>
             <a:spLocks noGrp="1"/>
           </p:cNvSpPr>
@@ -1111,7 +3157,7 @@
             <p:ph sz="half" idx="1"/>
           </p:nvPr>
         </p:nvSpPr>
-        <p:spPr>
+        <p:spPr bwMode="auto">
           <a:xfrm>
             <a:off x="838200" y="1825625"/>
             <a:ext cx="5181600" cy="4351338"/>
@@ -1121,41 +3167,51 @@
           <a:bodyPr/>
           <a:lstStyle/>
           <a:p>
-            <a:pPr lvl="0"/>
-            <a:r>
-              <a:rPr lang="en-US" smtClean="0"/>
+            <a:pPr lvl="0">
+              <a:defRPr/>
+            </a:pPr>
+            <a:r>
+              <a:rPr lang="en-US"/>
               <a:t>Edit Master text styles</a:t>
             </a:r>
-            <a:endParaRPr lang="en-US" smtClean="0"/>
-          </a:p>
-          <a:p>
-            <a:pPr lvl="1"/>
-            <a:r>
-              <a:rPr lang="en-US" smtClean="0"/>
+            <a:endParaRPr lang="en-US"/>
+          </a:p>
+          <a:p>
+            <a:pPr lvl="1">
+              <a:defRPr/>
+            </a:pPr>
+            <a:r>
+              <a:rPr lang="en-US"/>
               <a:t>Second level</a:t>
             </a:r>
-            <a:endParaRPr lang="en-US" smtClean="0"/>
-          </a:p>
-          <a:p>
-            <a:pPr lvl="2"/>
-            <a:r>
-              <a:rPr lang="en-US" smtClean="0"/>
+            <a:endParaRPr lang="en-US"/>
+          </a:p>
+          <a:p>
+            <a:pPr lvl="2">
+              <a:defRPr/>
+            </a:pPr>
+            <a:r>
+              <a:rPr lang="en-US"/>
               <a:t>Third level</a:t>
             </a:r>
-            <a:endParaRPr lang="en-US" smtClean="0"/>
-          </a:p>
-          <a:p>
-            <a:pPr lvl="3"/>
-            <a:r>
-              <a:rPr lang="en-US" smtClean="0"/>
+            <a:endParaRPr lang="en-US"/>
+          </a:p>
+          <a:p>
+            <a:pPr lvl="3">
+              <a:defRPr/>
+            </a:pPr>
+            <a:r>
+              <a:rPr lang="en-US"/>
               <a:t>Fourth level</a:t>
             </a:r>
-            <a:endParaRPr lang="en-US" smtClean="0"/>
-          </a:p>
-          <a:p>
-            <a:pPr lvl="4"/>
-            <a:r>
-              <a:rPr lang="en-US" smtClean="0"/>
+            <a:endParaRPr lang="en-US"/>
+          </a:p>
+          <a:p>
+            <a:pPr lvl="4">
+              <a:defRPr/>
+            </a:pPr>
+            <a:r>
+              <a:rPr lang="en-US"/>
               <a:t>Fifth level</a:t>
             </a:r>
             <a:endParaRPr lang="en-US"/>
@@ -1164,7 +3220,7 @@
       </p:sp>
       <p:sp>
         <p:nvSpPr>
-          <p:cNvPr id="4" name="Content Placeholder 3"/>
+          <p:cNvPr id="568059700" name="Content Placeholder 3"/>
           <p:cNvSpPr>
             <a:spLocks noGrp="1"/>
           </p:cNvSpPr>
@@ -1172,7 +3228,7 @@
             <p:ph sz="half" idx="2"/>
           </p:nvPr>
         </p:nvSpPr>
-        <p:spPr>
+        <p:spPr bwMode="auto">
           <a:xfrm>
             <a:off x="6172200" y="1825625"/>
             <a:ext cx="5181600" cy="4351338"/>
@@ -1182,41 +3238,51 @@
           <a:bodyPr/>
           <a:lstStyle/>
           <a:p>
-            <a:pPr lvl="0"/>
-            <a:r>
-              <a:rPr lang="en-US" smtClean="0"/>
+            <a:pPr lvl="0">
+              <a:defRPr/>
+            </a:pPr>
+            <a:r>
+              <a:rPr lang="en-US"/>
               <a:t>Edit Master text styles</a:t>
             </a:r>
-            <a:endParaRPr lang="en-US" smtClean="0"/>
-          </a:p>
-          <a:p>
-            <a:pPr lvl="1"/>
-            <a:r>
-              <a:rPr lang="en-US" smtClean="0"/>
+            <a:endParaRPr lang="en-US"/>
+          </a:p>
+          <a:p>
+            <a:pPr lvl="1">
+              <a:defRPr/>
+            </a:pPr>
+            <a:r>
+              <a:rPr lang="en-US"/>
               <a:t>Second level</a:t>
             </a:r>
-            <a:endParaRPr lang="en-US" smtClean="0"/>
-          </a:p>
-          <a:p>
-            <a:pPr lvl="2"/>
-            <a:r>
-              <a:rPr lang="en-US" smtClean="0"/>
+            <a:endParaRPr lang="en-US"/>
+          </a:p>
+          <a:p>
+            <a:pPr lvl="2">
+              <a:defRPr/>
+            </a:pPr>
+            <a:r>
+              <a:rPr lang="en-US"/>
               <a:t>Third level</a:t>
             </a:r>
-            <a:endParaRPr lang="en-US" smtClean="0"/>
-          </a:p>
-          <a:p>
-            <a:pPr lvl="3"/>
-            <a:r>
-              <a:rPr lang="en-US" smtClean="0"/>
+            <a:endParaRPr lang="en-US"/>
+          </a:p>
+          <a:p>
+            <a:pPr lvl="3">
+              <a:defRPr/>
+            </a:pPr>
+            <a:r>
+              <a:rPr lang="en-US"/>
               <a:t>Fourth level</a:t>
             </a:r>
-            <a:endParaRPr lang="en-US" smtClean="0"/>
-          </a:p>
-          <a:p>
-            <a:pPr lvl="4"/>
-            <a:r>
-              <a:rPr lang="en-US" smtClean="0"/>
+            <a:endParaRPr lang="en-US"/>
+          </a:p>
+          <a:p>
+            <a:pPr lvl="4">
+              <a:defRPr/>
+            </a:pPr>
+            <a:r>
+              <a:rPr lang="en-US"/>
               <a:t>Fifth level</a:t>
             </a:r>
             <a:endParaRPr lang="en-US"/>
@@ -1225,7 +3291,7 @@
       </p:sp>
       <p:sp>
         <p:nvSpPr>
-          <p:cNvPr id="5" name="Date Placeholder 4"/>
+          <p:cNvPr id="1322624800" name="Date Placeholder 4"/>
           <p:cNvSpPr>
             <a:spLocks noGrp="1"/>
           </p:cNvSpPr>
@@ -1233,13 +3299,17 @@
             <p:ph type="dt" sz="half" idx="10"/>
           </p:nvPr>
         </p:nvSpPr>
-        <p:spPr/>
-        <p:txBody>
-          <a:bodyPr/>
-          <a:lstStyle/>
-          <a:p>
+        <p:spPr bwMode="auto"/>
+        <p:txBody>
+          <a:bodyPr/>
+          <a:lstStyle/>
+          <a:p>
+            <a:pPr>
+              <a:defRPr/>
+            </a:pPr>
             <a:fld id="{90867743-95B3-4C68-AD86-AECB47900815}" type="datetimeFigureOut">
-              <a:rPr lang="en-US" smtClean="0"/>
+              <a:rPr lang="en-US"/>
+              <a:t/>
             </a:fld>
             <a:endParaRPr lang="en-US"/>
           </a:p>
@@ -1247,7 +3317,7 @@
       </p:sp>
       <p:sp>
         <p:nvSpPr>
-          <p:cNvPr id="6" name="Footer Placeholder 5"/>
+          <p:cNvPr id="328168330" name="Footer Placeholder 5"/>
           <p:cNvSpPr>
             <a:spLocks noGrp="1"/>
           </p:cNvSpPr>
@@ -1255,18 +3325,21 @@
             <p:ph type="ftr" sz="quarter" idx="11"/>
           </p:nvPr>
         </p:nvSpPr>
-        <p:spPr/>
-        <p:txBody>
-          <a:bodyPr/>
-          <a:lstStyle/>
-          <a:p>
-            <a:endParaRPr lang="en-US"/>
-          </a:p>
-        </p:txBody>
-      </p:sp>
-      <p:sp>
-        <p:nvSpPr>
-          <p:cNvPr id="7" name="Slide Number Placeholder 6"/>
+        <p:spPr bwMode="auto"/>
+        <p:txBody>
+          <a:bodyPr/>
+          <a:lstStyle/>
+          <a:p>
+            <a:pPr>
+              <a:defRPr/>
+            </a:pPr>
+            <a:endParaRPr lang="en-US"/>
+          </a:p>
+        </p:txBody>
+      </p:sp>
+      <p:sp>
+        <p:nvSpPr>
+          <p:cNvPr id="1764161732" name="Slide Number Placeholder 6"/>
           <p:cNvSpPr>
             <a:spLocks noGrp="1"/>
           </p:cNvSpPr>
@@ -1274,13 +3347,17 @@
             <p:ph type="sldNum" sz="quarter" idx="12"/>
           </p:nvPr>
         </p:nvSpPr>
-        <p:spPr/>
-        <p:txBody>
-          <a:bodyPr/>
-          <a:lstStyle/>
-          <a:p>
+        <p:spPr bwMode="auto"/>
+        <p:txBody>
+          <a:bodyPr/>
+          <a:lstStyle/>
+          <a:p>
+            <a:pPr>
+              <a:defRPr/>
+            </a:pPr>
             <a:fld id="{D233FBF5-F569-4CE1-9AFD-EF5EEDD8FE3A}" type="slidenum">
-              <a:rPr lang="en-US" smtClean="0"/>
+              <a:rPr lang="en-US"/>
+              <a:t/>
             </a:fld>
             <a:endParaRPr lang="en-US"/>
           </a:p>
@@ -1295,7 +3372,7 @@
 </file>
 
 <file path=ppt/slideLayouts/slideLayout5.xml><?xml version="1.0" encoding="utf-8"?>
-<p:sldLayout xmlns:a="http://schemas.openxmlformats.org/drawingml/2006/main" xmlns:r="http://schemas.openxmlformats.org/officeDocument/2006/relationships" xmlns:p="http://schemas.openxmlformats.org/presentationml/2006/main" type="twoTxTwoObj" preserve="1">
+<p:sldLayout xmlns:a="http://schemas.openxmlformats.org/drawingml/2006/main" xmlns:r="http://schemas.openxmlformats.org/officeDocument/2006/relationships" xmlns:p="http://schemas.openxmlformats.org/presentationml/2006/main" xmlns:m="http://schemas.openxmlformats.org/officeDocument/2006/math" xmlns:w="http://schemas.openxmlformats.org/wordprocessingml/2006/main" matchingName="" preserve="1" showMasterPhAnim="0" showMasterSp="1" type="twoTxTwoObj" userDrawn="1">
   <p:cSld name="Comparison">
     <p:spTree>
       <p:nvGrpSpPr>
@@ -1303,7 +3380,7 @@
         <p:cNvGrpSpPr/>
         <p:nvPr/>
       </p:nvGrpSpPr>
-      <p:grpSpPr>
+      <p:grpSpPr bwMode="auto">
         <a:xfrm>
           <a:off x="0" y="0"/>
           <a:ext cx="0" cy="0"/>
@@ -1313,7 +3390,7 @@
       </p:grpSpPr>
       <p:sp>
         <p:nvSpPr>
-          <p:cNvPr id="2" name="Title 1"/>
+          <p:cNvPr id="1350851427" name="Title 1"/>
           <p:cNvSpPr>
             <a:spLocks noGrp="1"/>
           </p:cNvSpPr>
@@ -1321,7 +3398,7 @@
             <p:ph type="title"/>
           </p:nvPr>
         </p:nvSpPr>
-        <p:spPr>
+        <p:spPr bwMode="auto">
           <a:xfrm>
             <a:off x="839788" y="365125"/>
             <a:ext cx="10515600" cy="1325563"/>
@@ -1331,8 +3408,11 @@
           <a:bodyPr/>
           <a:lstStyle/>
           <a:p>
-            <a:r>
-              <a:rPr lang="en-US" smtClean="0"/>
+            <a:pPr>
+              <a:defRPr/>
+            </a:pPr>
+            <a:r>
+              <a:rPr lang="en-US"/>
               <a:t>Click to edit Master title style</a:t>
             </a:r>
             <a:endParaRPr lang="en-US"/>
@@ -1341,7 +3421,7 @@
       </p:sp>
       <p:sp>
         <p:nvSpPr>
-          <p:cNvPr id="3" name="Text Placeholder 2"/>
+          <p:cNvPr id="620706737" name="Text Placeholder 2"/>
           <p:cNvSpPr>
             <a:spLocks noGrp="1"/>
           </p:cNvSpPr>
@@ -1349,7 +3429,7 @@
             <p:ph type="body" idx="1"/>
           </p:nvPr>
         </p:nvSpPr>
-        <p:spPr>
+        <p:spPr bwMode="auto">
           <a:xfrm>
             <a:off x="839788" y="1681163"/>
             <a:ext cx="5157787" cy="823912"/>
@@ -1396,18 +3476,20 @@
             </a:lvl9pPr>
           </a:lstStyle>
           <a:p>
-            <a:pPr lvl="0"/>
-            <a:r>
-              <a:rPr lang="en-US" smtClean="0"/>
+            <a:pPr lvl="0">
+              <a:defRPr/>
+            </a:pPr>
+            <a:r>
+              <a:rPr lang="en-US"/>
               <a:t>Edit Master text styles</a:t>
             </a:r>
-            <a:endParaRPr lang="en-US" smtClean="0"/>
-          </a:p>
-        </p:txBody>
-      </p:sp>
-      <p:sp>
-        <p:nvSpPr>
-          <p:cNvPr id="4" name="Content Placeholder 3"/>
+            <a:endParaRPr lang="en-US"/>
+          </a:p>
+        </p:txBody>
+      </p:sp>
+      <p:sp>
+        <p:nvSpPr>
+          <p:cNvPr id="1600446217" name="Content Placeholder 3"/>
           <p:cNvSpPr>
             <a:spLocks noGrp="1"/>
           </p:cNvSpPr>
@@ -1415,9 +3497,9 @@
             <p:ph sz="half" idx="2"/>
           </p:nvPr>
         </p:nvSpPr>
-        <p:spPr>
+        <p:spPr bwMode="auto">
           <a:xfrm>
-            <a:off x="839788" y="2505075"/>
+            <a:off x="839788" y="2505074"/>
             <a:ext cx="5157787" cy="3684588"/>
           </a:xfrm>
         </p:spPr>
@@ -1425,41 +3507,51 @@
           <a:bodyPr/>
           <a:lstStyle/>
           <a:p>
-            <a:pPr lvl="0"/>
-            <a:r>
-              <a:rPr lang="en-US" smtClean="0"/>
+            <a:pPr lvl="0">
+              <a:defRPr/>
+            </a:pPr>
+            <a:r>
+              <a:rPr lang="en-US"/>
               <a:t>Edit Master text styles</a:t>
             </a:r>
-            <a:endParaRPr lang="en-US" smtClean="0"/>
-          </a:p>
-          <a:p>
-            <a:pPr lvl="1"/>
-            <a:r>
-              <a:rPr lang="en-US" smtClean="0"/>
+            <a:endParaRPr lang="en-US"/>
+          </a:p>
+          <a:p>
+            <a:pPr lvl="1">
+              <a:defRPr/>
+            </a:pPr>
+            <a:r>
+              <a:rPr lang="en-US"/>
               <a:t>Second level</a:t>
             </a:r>
-            <a:endParaRPr lang="en-US" smtClean="0"/>
-          </a:p>
-          <a:p>
-            <a:pPr lvl="2"/>
-            <a:r>
-              <a:rPr lang="en-US" smtClean="0"/>
+            <a:endParaRPr lang="en-US"/>
+          </a:p>
+          <a:p>
+            <a:pPr lvl="2">
+              <a:defRPr/>
+            </a:pPr>
+            <a:r>
+              <a:rPr lang="en-US"/>
               <a:t>Third level</a:t>
             </a:r>
-            <a:endParaRPr lang="en-US" smtClean="0"/>
-          </a:p>
-          <a:p>
-            <a:pPr lvl="3"/>
-            <a:r>
-              <a:rPr lang="en-US" smtClean="0"/>
+            <a:endParaRPr lang="en-US"/>
+          </a:p>
+          <a:p>
+            <a:pPr lvl="3">
+              <a:defRPr/>
+            </a:pPr>
+            <a:r>
+              <a:rPr lang="en-US"/>
               <a:t>Fourth level</a:t>
             </a:r>
-            <a:endParaRPr lang="en-US" smtClean="0"/>
-          </a:p>
-          <a:p>
-            <a:pPr lvl="4"/>
-            <a:r>
-              <a:rPr lang="en-US" smtClean="0"/>
+            <a:endParaRPr lang="en-US"/>
+          </a:p>
+          <a:p>
+            <a:pPr lvl="4">
+              <a:defRPr/>
+            </a:pPr>
+            <a:r>
+              <a:rPr lang="en-US"/>
               <a:t>Fifth level</a:t>
             </a:r>
             <a:endParaRPr lang="en-US"/>
@@ -1468,7 +3560,7 @@
       </p:sp>
       <p:sp>
         <p:nvSpPr>
-          <p:cNvPr id="5" name="Text Placeholder 4"/>
+          <p:cNvPr id="1322652993" name="Text Placeholder 4"/>
           <p:cNvSpPr>
             <a:spLocks noGrp="1"/>
           </p:cNvSpPr>
@@ -1476,7 +3568,7 @@
             <p:ph type="body" sz="quarter" idx="3"/>
           </p:nvPr>
         </p:nvSpPr>
-        <p:spPr>
+        <p:spPr bwMode="auto">
           <a:xfrm>
             <a:off x="6172200" y="1681163"/>
             <a:ext cx="5183188" cy="823912"/>
@@ -1523,18 +3615,20 @@
             </a:lvl9pPr>
           </a:lstStyle>
           <a:p>
-            <a:pPr lvl="0"/>
-            <a:r>
-              <a:rPr lang="en-US" smtClean="0"/>
+            <a:pPr lvl="0">
+              <a:defRPr/>
+            </a:pPr>
+            <a:r>
+              <a:rPr lang="en-US"/>
               <a:t>Edit Master text styles</a:t>
             </a:r>
-            <a:endParaRPr lang="en-US" smtClean="0"/>
-          </a:p>
-        </p:txBody>
-      </p:sp>
-      <p:sp>
-        <p:nvSpPr>
-          <p:cNvPr id="6" name="Content Placeholder 5"/>
+            <a:endParaRPr lang="en-US"/>
+          </a:p>
+        </p:txBody>
+      </p:sp>
+      <p:sp>
+        <p:nvSpPr>
+          <p:cNvPr id="344002706" name="Content Placeholder 5"/>
           <p:cNvSpPr>
             <a:spLocks noGrp="1"/>
           </p:cNvSpPr>
@@ -1542,9 +3636,9 @@
             <p:ph sz="quarter" idx="4"/>
           </p:nvPr>
         </p:nvSpPr>
-        <p:spPr>
+        <p:spPr bwMode="auto">
           <a:xfrm>
-            <a:off x="6172200" y="2505075"/>
+            <a:off x="6172200" y="2505074"/>
             <a:ext cx="5183188" cy="3684588"/>
           </a:xfrm>
         </p:spPr>
@@ -1552,41 +3646,51 @@
           <a:bodyPr/>
           <a:lstStyle/>
           <a:p>
-            <a:pPr lvl="0"/>
-            <a:r>
-              <a:rPr lang="en-US" smtClean="0"/>
+            <a:pPr lvl="0">
+              <a:defRPr/>
+            </a:pPr>
+            <a:r>
+              <a:rPr lang="en-US"/>
               <a:t>Edit Master text styles</a:t>
             </a:r>
-            <a:endParaRPr lang="en-US" smtClean="0"/>
-          </a:p>
-          <a:p>
-            <a:pPr lvl="1"/>
-            <a:r>
-              <a:rPr lang="en-US" smtClean="0"/>
+            <a:endParaRPr lang="en-US"/>
+          </a:p>
+          <a:p>
+            <a:pPr lvl="1">
+              <a:defRPr/>
+            </a:pPr>
+            <a:r>
+              <a:rPr lang="en-US"/>
               <a:t>Second level</a:t>
             </a:r>
-            <a:endParaRPr lang="en-US" smtClean="0"/>
-          </a:p>
-          <a:p>
-            <a:pPr lvl="2"/>
-            <a:r>
-              <a:rPr lang="en-US" smtClean="0"/>
+            <a:endParaRPr lang="en-US"/>
+          </a:p>
+          <a:p>
+            <a:pPr lvl="2">
+              <a:defRPr/>
+            </a:pPr>
+            <a:r>
+              <a:rPr lang="en-US"/>
               <a:t>Third level</a:t>
             </a:r>
-            <a:endParaRPr lang="en-US" smtClean="0"/>
-          </a:p>
-          <a:p>
-            <a:pPr lvl="3"/>
-            <a:r>
-              <a:rPr lang="en-US" smtClean="0"/>
+            <a:endParaRPr lang="en-US"/>
+          </a:p>
+          <a:p>
+            <a:pPr lvl="3">
+              <a:defRPr/>
+            </a:pPr>
+            <a:r>
+              <a:rPr lang="en-US"/>
               <a:t>Fourth level</a:t>
             </a:r>
-            <a:endParaRPr lang="en-US" smtClean="0"/>
-          </a:p>
-          <a:p>
-            <a:pPr lvl="4"/>
-            <a:r>
-              <a:rPr lang="en-US" smtClean="0"/>
+            <a:endParaRPr lang="en-US"/>
+          </a:p>
+          <a:p>
+            <a:pPr lvl="4">
+              <a:defRPr/>
+            </a:pPr>
+            <a:r>
+              <a:rPr lang="en-US"/>
               <a:t>Fifth level</a:t>
             </a:r>
             <a:endParaRPr lang="en-US"/>
@@ -1595,7 +3699,7 @@
       </p:sp>
       <p:sp>
         <p:nvSpPr>
-          <p:cNvPr id="7" name="Date Placeholder 6"/>
+          <p:cNvPr id="2067187232" name="Date Placeholder 6"/>
           <p:cNvSpPr>
             <a:spLocks noGrp="1"/>
           </p:cNvSpPr>
@@ -1603,13 +3707,17 @@
             <p:ph type="dt" sz="half" idx="10"/>
           </p:nvPr>
         </p:nvSpPr>
-        <p:spPr/>
-        <p:txBody>
-          <a:bodyPr/>
-          <a:lstStyle/>
-          <a:p>
+        <p:spPr bwMode="auto"/>
+        <p:txBody>
+          <a:bodyPr/>
+          <a:lstStyle/>
+          <a:p>
+            <a:pPr>
+              <a:defRPr/>
+            </a:pPr>
             <a:fld id="{90867743-95B3-4C68-AD86-AECB47900815}" type="datetimeFigureOut">
-              <a:rPr lang="en-US" smtClean="0"/>
+              <a:rPr lang="en-US"/>
+              <a:t/>
             </a:fld>
             <a:endParaRPr lang="en-US"/>
           </a:p>
@@ -1617,7 +3725,7 @@
       </p:sp>
       <p:sp>
         <p:nvSpPr>
-          <p:cNvPr id="8" name="Footer Placeholder 7"/>
+          <p:cNvPr id="1554271665" name="Footer Placeholder 7"/>
           <p:cNvSpPr>
             <a:spLocks noGrp="1"/>
           </p:cNvSpPr>
@@ -1625,18 +3733,21 @@
             <p:ph type="ftr" sz="quarter" idx="11"/>
           </p:nvPr>
         </p:nvSpPr>
-        <p:spPr/>
-        <p:txBody>
-          <a:bodyPr/>
-          <a:lstStyle/>
-          <a:p>
-            <a:endParaRPr lang="en-US"/>
-          </a:p>
-        </p:txBody>
-      </p:sp>
-      <p:sp>
-        <p:nvSpPr>
-          <p:cNvPr id="9" name="Slide Number Placeholder 8"/>
+        <p:spPr bwMode="auto"/>
+        <p:txBody>
+          <a:bodyPr/>
+          <a:lstStyle/>
+          <a:p>
+            <a:pPr>
+              <a:defRPr/>
+            </a:pPr>
+            <a:endParaRPr lang="en-US"/>
+          </a:p>
+        </p:txBody>
+      </p:sp>
+      <p:sp>
+        <p:nvSpPr>
+          <p:cNvPr id="727714135" name="Slide Number Placeholder 8"/>
           <p:cNvSpPr>
             <a:spLocks noGrp="1"/>
           </p:cNvSpPr>
@@ -1644,13 +3755,17 @@
             <p:ph type="sldNum" sz="quarter" idx="12"/>
           </p:nvPr>
         </p:nvSpPr>
-        <p:spPr/>
-        <p:txBody>
-          <a:bodyPr/>
-          <a:lstStyle/>
-          <a:p>
+        <p:spPr bwMode="auto"/>
+        <p:txBody>
+          <a:bodyPr/>
+          <a:lstStyle/>
+          <a:p>
+            <a:pPr>
+              <a:defRPr/>
+            </a:pPr>
             <a:fld id="{D233FBF5-F569-4CE1-9AFD-EF5EEDD8FE3A}" type="slidenum">
-              <a:rPr lang="en-US" smtClean="0"/>
+              <a:rPr lang="en-US"/>
+              <a:t/>
             </a:fld>
             <a:endParaRPr lang="en-US"/>
           </a:p>
@@ -1665,7 +3780,7 @@
 </file>
 
 <file path=ppt/slideLayouts/slideLayout6.xml><?xml version="1.0" encoding="utf-8"?>
-<p:sldLayout xmlns:a="http://schemas.openxmlformats.org/drawingml/2006/main" xmlns:r="http://schemas.openxmlformats.org/officeDocument/2006/relationships" xmlns:p="http://schemas.openxmlformats.org/presentationml/2006/main" type="titleOnly" preserve="1">
+<p:sldLayout xmlns:a="http://schemas.openxmlformats.org/drawingml/2006/main" xmlns:r="http://schemas.openxmlformats.org/officeDocument/2006/relationships" xmlns:p="http://schemas.openxmlformats.org/presentationml/2006/main" xmlns:m="http://schemas.openxmlformats.org/officeDocument/2006/math" xmlns:w="http://schemas.openxmlformats.org/wordprocessingml/2006/main" matchingName="" preserve="1" showMasterPhAnim="0" showMasterSp="1" type="titleOnly" userDrawn="1">
   <p:cSld name="Title Only">
     <p:spTree>
       <p:nvGrpSpPr>
@@ -1673,7 +3788,7 @@
         <p:cNvGrpSpPr/>
         <p:nvPr/>
       </p:nvGrpSpPr>
-      <p:grpSpPr>
+      <p:grpSpPr bwMode="auto">
         <a:xfrm>
           <a:off x="0" y="0"/>
           <a:ext cx="0" cy="0"/>
@@ -1683,7 +3798,7 @@
       </p:grpSpPr>
       <p:sp>
         <p:nvSpPr>
-          <p:cNvPr id="2" name="Title 1"/>
+          <p:cNvPr id="1853031754" name="Title 1"/>
           <p:cNvSpPr>
             <a:spLocks noGrp="1"/>
           </p:cNvSpPr>
@@ -1691,13 +3806,16 @@
             <p:ph type="title"/>
           </p:nvPr>
         </p:nvSpPr>
-        <p:spPr/>
-        <p:txBody>
-          <a:bodyPr/>
-          <a:lstStyle/>
-          <a:p>
-            <a:r>
-              <a:rPr lang="en-US" smtClean="0"/>
+        <p:spPr bwMode="auto"/>
+        <p:txBody>
+          <a:bodyPr/>
+          <a:lstStyle/>
+          <a:p>
+            <a:pPr>
+              <a:defRPr/>
+            </a:pPr>
+            <a:r>
+              <a:rPr lang="en-US"/>
               <a:t>Click to edit Master title style</a:t>
             </a:r>
             <a:endParaRPr lang="en-US"/>
@@ -1706,7 +3824,7 @@
       </p:sp>
       <p:sp>
         <p:nvSpPr>
-          <p:cNvPr id="3" name="Date Placeholder 2"/>
+          <p:cNvPr id="1303589071" name="Date Placeholder 2"/>
           <p:cNvSpPr>
             <a:spLocks noGrp="1"/>
           </p:cNvSpPr>
@@ -1714,13 +3832,17 @@
             <p:ph type="dt" sz="half" idx="10"/>
           </p:nvPr>
         </p:nvSpPr>
-        <p:spPr/>
-        <p:txBody>
-          <a:bodyPr/>
-          <a:lstStyle/>
-          <a:p>
+        <p:spPr bwMode="auto"/>
+        <p:txBody>
+          <a:bodyPr/>
+          <a:lstStyle/>
+          <a:p>
+            <a:pPr>
+              <a:defRPr/>
+            </a:pPr>
             <a:fld id="{90867743-95B3-4C68-AD86-AECB47900815}" type="datetimeFigureOut">
-              <a:rPr lang="en-US" smtClean="0"/>
+              <a:rPr lang="en-US"/>
+              <a:t/>
             </a:fld>
             <a:endParaRPr lang="en-US"/>
           </a:p>
@@ -1728,7 +3850,7 @@
       </p:sp>
       <p:sp>
         <p:nvSpPr>
-          <p:cNvPr id="4" name="Footer Placeholder 3"/>
+          <p:cNvPr id="1056256384" name="Footer Placeholder 3"/>
           <p:cNvSpPr>
             <a:spLocks noGrp="1"/>
           </p:cNvSpPr>
@@ -1736,18 +3858,21 @@
             <p:ph type="ftr" sz="quarter" idx="11"/>
           </p:nvPr>
         </p:nvSpPr>
-        <p:spPr/>
-        <p:txBody>
-          <a:bodyPr/>
-          <a:lstStyle/>
-          <a:p>
-            <a:endParaRPr lang="en-US"/>
-          </a:p>
-        </p:txBody>
-      </p:sp>
-      <p:sp>
-        <p:nvSpPr>
-          <p:cNvPr id="5" name="Slide Number Placeholder 4"/>
+        <p:spPr bwMode="auto"/>
+        <p:txBody>
+          <a:bodyPr/>
+          <a:lstStyle/>
+          <a:p>
+            <a:pPr>
+              <a:defRPr/>
+            </a:pPr>
+            <a:endParaRPr lang="en-US"/>
+          </a:p>
+        </p:txBody>
+      </p:sp>
+      <p:sp>
+        <p:nvSpPr>
+          <p:cNvPr id="1968874619" name="Slide Number Placeholder 4"/>
           <p:cNvSpPr>
             <a:spLocks noGrp="1"/>
           </p:cNvSpPr>
@@ -1755,13 +3880,17 @@
             <p:ph type="sldNum" sz="quarter" idx="12"/>
           </p:nvPr>
         </p:nvSpPr>
-        <p:spPr/>
-        <p:txBody>
-          <a:bodyPr/>
-          <a:lstStyle/>
-          <a:p>
+        <p:spPr bwMode="auto"/>
+        <p:txBody>
+          <a:bodyPr/>
+          <a:lstStyle/>
+          <a:p>
+            <a:pPr>
+              <a:defRPr/>
+            </a:pPr>
             <a:fld id="{D233FBF5-F569-4CE1-9AFD-EF5EEDD8FE3A}" type="slidenum">
-              <a:rPr lang="en-US" smtClean="0"/>
+              <a:rPr lang="en-US"/>
+              <a:t/>
             </a:fld>
             <a:endParaRPr lang="en-US"/>
           </a:p>
@@ -1776,7 +3905,7 @@
 </file>
 
 <file path=ppt/slideLayouts/slideLayout7.xml><?xml version="1.0" encoding="utf-8"?>
-<p:sldLayout xmlns:a="http://schemas.openxmlformats.org/drawingml/2006/main" xmlns:r="http://schemas.openxmlformats.org/officeDocument/2006/relationships" xmlns:p="http://schemas.openxmlformats.org/presentationml/2006/main" type="blank" preserve="1">
+<p:sldLayout xmlns:a="http://schemas.openxmlformats.org/drawingml/2006/main" xmlns:r="http://schemas.openxmlformats.org/officeDocument/2006/relationships" xmlns:p="http://schemas.openxmlformats.org/presentationml/2006/main" xmlns:m="http://schemas.openxmlformats.org/officeDocument/2006/math" xmlns:w="http://schemas.openxmlformats.org/wordprocessingml/2006/main" matchingName="" preserve="1" showMasterPhAnim="0" showMasterSp="1" type="blank" userDrawn="1">
   <p:cSld name="Blank">
     <p:spTree>
       <p:nvGrpSpPr>
@@ -1784,7 +3913,7 @@
         <p:cNvGrpSpPr/>
         <p:nvPr/>
       </p:nvGrpSpPr>
-      <p:grpSpPr>
+      <p:grpSpPr bwMode="auto">
         <a:xfrm>
           <a:off x="0" y="0"/>
           <a:ext cx="0" cy="0"/>
@@ -1794,7 +3923,7 @@
       </p:grpSpPr>
       <p:sp>
         <p:nvSpPr>
-          <p:cNvPr id="2" name="Date Placeholder 1"/>
+          <p:cNvPr id="91715602" name="Date Placeholder 1"/>
           <p:cNvSpPr>
             <a:spLocks noGrp="1"/>
           </p:cNvSpPr>
@@ -1802,13 +3931,17 @@
             <p:ph type="dt" sz="half" idx="10"/>
           </p:nvPr>
         </p:nvSpPr>
-        <p:spPr/>
-        <p:txBody>
-          <a:bodyPr/>
-          <a:lstStyle/>
-          <a:p>
+        <p:spPr bwMode="auto"/>
+        <p:txBody>
+          <a:bodyPr/>
+          <a:lstStyle/>
+          <a:p>
+            <a:pPr>
+              <a:defRPr/>
+            </a:pPr>
             <a:fld id="{90867743-95B3-4C68-AD86-AECB47900815}" type="datetimeFigureOut">
-              <a:rPr lang="en-US" smtClean="0"/>
+              <a:rPr lang="en-US"/>
+              <a:t/>
             </a:fld>
             <a:endParaRPr lang="en-US"/>
           </a:p>
@@ -1816,7 +3949,7 @@
       </p:sp>
       <p:sp>
         <p:nvSpPr>
-          <p:cNvPr id="3" name="Footer Placeholder 2"/>
+          <p:cNvPr id="960306778" name="Footer Placeholder 2"/>
           <p:cNvSpPr>
             <a:spLocks noGrp="1"/>
           </p:cNvSpPr>
@@ -1824,18 +3957,21 @@
             <p:ph type="ftr" sz="quarter" idx="11"/>
           </p:nvPr>
         </p:nvSpPr>
-        <p:spPr/>
-        <p:txBody>
-          <a:bodyPr/>
-          <a:lstStyle/>
-          <a:p>
-            <a:endParaRPr lang="en-US"/>
-          </a:p>
-        </p:txBody>
-      </p:sp>
-      <p:sp>
-        <p:nvSpPr>
-          <p:cNvPr id="4" name="Slide Number Placeholder 3"/>
+        <p:spPr bwMode="auto"/>
+        <p:txBody>
+          <a:bodyPr/>
+          <a:lstStyle/>
+          <a:p>
+            <a:pPr>
+              <a:defRPr/>
+            </a:pPr>
+            <a:endParaRPr lang="en-US"/>
+          </a:p>
+        </p:txBody>
+      </p:sp>
+      <p:sp>
+        <p:nvSpPr>
+          <p:cNvPr id="361540504" name="Slide Number Placeholder 3"/>
           <p:cNvSpPr>
             <a:spLocks noGrp="1"/>
           </p:cNvSpPr>
@@ -1843,13 +3979,17 @@
             <p:ph type="sldNum" sz="quarter" idx="12"/>
           </p:nvPr>
         </p:nvSpPr>
-        <p:spPr/>
-        <p:txBody>
-          <a:bodyPr/>
-          <a:lstStyle/>
-          <a:p>
+        <p:spPr bwMode="auto"/>
+        <p:txBody>
+          <a:bodyPr/>
+          <a:lstStyle/>
+          <a:p>
+            <a:pPr>
+              <a:defRPr/>
+            </a:pPr>
             <a:fld id="{D233FBF5-F569-4CE1-9AFD-EF5EEDD8FE3A}" type="slidenum">
-              <a:rPr lang="en-US" smtClean="0"/>
+              <a:rPr lang="en-US"/>
+              <a:t/>
             </a:fld>
             <a:endParaRPr lang="en-US"/>
           </a:p>
@@ -1864,7 +4004,7 @@
 </file>
 
 <file path=ppt/slideLayouts/slideLayout8.xml><?xml version="1.0" encoding="utf-8"?>
-<p:sldLayout xmlns:a="http://schemas.openxmlformats.org/drawingml/2006/main" xmlns:r="http://schemas.openxmlformats.org/officeDocument/2006/relationships" xmlns:p="http://schemas.openxmlformats.org/presentationml/2006/main" type="objTx" preserve="1">
+<p:sldLayout xmlns:a="http://schemas.openxmlformats.org/drawingml/2006/main" xmlns:r="http://schemas.openxmlformats.org/officeDocument/2006/relationships" xmlns:p="http://schemas.openxmlformats.org/presentationml/2006/main" xmlns:m="http://schemas.openxmlformats.org/officeDocument/2006/math" xmlns:w="http://schemas.openxmlformats.org/wordprocessingml/2006/main" matchingName="" preserve="1" showMasterPhAnim="0" showMasterSp="1" type="objTx" userDrawn="1">
   <p:cSld name="Content with Caption">
     <p:spTree>
       <p:nvGrpSpPr>
@@ -1872,7 +4012,7 @@
         <p:cNvGrpSpPr/>
         <p:nvPr/>
       </p:nvGrpSpPr>
-      <p:grpSpPr>
+      <p:grpSpPr bwMode="auto">
         <a:xfrm>
           <a:off x="0" y="0"/>
           <a:ext cx="0" cy="0"/>
@@ -1882,7 +4022,7 @@
       </p:grpSpPr>
       <p:sp>
         <p:nvSpPr>
-          <p:cNvPr id="2" name="Title 1"/>
+          <p:cNvPr id="131743864" name="Title 1"/>
           <p:cNvSpPr>
             <a:spLocks noGrp="1"/>
           </p:cNvSpPr>
@@ -1890,7 +4030,7 @@
             <p:ph type="title"/>
           </p:nvPr>
         </p:nvSpPr>
-        <p:spPr>
+        <p:spPr bwMode="auto">
           <a:xfrm>
             <a:off x="839788" y="457200"/>
             <a:ext cx="3932237" cy="1600200"/>
@@ -1904,8 +4044,11 @@
             </a:lvl1pPr>
           </a:lstStyle>
           <a:p>
-            <a:r>
-              <a:rPr lang="en-US" smtClean="0"/>
+            <a:pPr>
+              <a:defRPr/>
+            </a:pPr>
+            <a:r>
+              <a:rPr lang="en-US"/>
               <a:t>Click to edit Master title style</a:t>
             </a:r>
             <a:endParaRPr lang="en-US"/>
@@ -1914,7 +4057,7 @@
       </p:sp>
       <p:sp>
         <p:nvSpPr>
-          <p:cNvPr id="3" name="Content Placeholder 2"/>
+          <p:cNvPr id="1336946782" name="Content Placeholder 2"/>
           <p:cNvSpPr>
             <a:spLocks noGrp="1"/>
           </p:cNvSpPr>
@@ -1922,7 +4065,7 @@
             <p:ph idx="1"/>
           </p:nvPr>
         </p:nvSpPr>
-        <p:spPr>
+        <p:spPr bwMode="auto">
           <a:xfrm>
             <a:off x="5183188" y="987425"/>
             <a:ext cx="6172200" cy="4873625"/>
@@ -1960,41 +4103,51 @@
             </a:lvl9pPr>
           </a:lstStyle>
           <a:p>
-            <a:pPr lvl="0"/>
-            <a:r>
-              <a:rPr lang="en-US" smtClean="0"/>
+            <a:pPr lvl="0">
+              <a:defRPr/>
+            </a:pPr>
+            <a:r>
+              <a:rPr lang="en-US"/>
               <a:t>Edit Master text styles</a:t>
             </a:r>
-            <a:endParaRPr lang="en-US" smtClean="0"/>
-          </a:p>
-          <a:p>
-            <a:pPr lvl="1"/>
-            <a:r>
-              <a:rPr lang="en-US" smtClean="0"/>
+            <a:endParaRPr lang="en-US"/>
+          </a:p>
+          <a:p>
+            <a:pPr lvl="1">
+              <a:defRPr/>
+            </a:pPr>
+            <a:r>
+              <a:rPr lang="en-US"/>
               <a:t>Second level</a:t>
             </a:r>
-            <a:endParaRPr lang="en-US" smtClean="0"/>
-          </a:p>
-          <a:p>
-            <a:pPr lvl="2"/>
-            <a:r>
-              <a:rPr lang="en-US" smtClean="0"/>
+            <a:endParaRPr lang="en-US"/>
+          </a:p>
+          <a:p>
+            <a:pPr lvl="2">
+              <a:defRPr/>
+            </a:pPr>
+            <a:r>
+              <a:rPr lang="en-US"/>
               <a:t>Third level</a:t>
             </a:r>
-            <a:endParaRPr lang="en-US" smtClean="0"/>
-          </a:p>
-          <a:p>
-            <a:pPr lvl="3"/>
-            <a:r>
-              <a:rPr lang="en-US" smtClean="0"/>
+            <a:endParaRPr lang="en-US"/>
+          </a:p>
+          <a:p>
+            <a:pPr lvl="3">
+              <a:defRPr/>
+            </a:pPr>
+            <a:r>
+              <a:rPr lang="en-US"/>
               <a:t>Fourth level</a:t>
             </a:r>
-            <a:endParaRPr lang="en-US" smtClean="0"/>
-          </a:p>
-          <a:p>
-            <a:pPr lvl="4"/>
-            <a:r>
-              <a:rPr lang="en-US" smtClean="0"/>
+            <a:endParaRPr lang="en-US"/>
+          </a:p>
+          <a:p>
+            <a:pPr lvl="4">
+              <a:defRPr/>
+            </a:pPr>
+            <a:r>
+              <a:rPr lang="en-US"/>
               <a:t>Fifth level</a:t>
             </a:r>
             <a:endParaRPr lang="en-US"/>
@@ -2003,7 +4156,7 @@
       </p:sp>
       <p:sp>
         <p:nvSpPr>
-          <p:cNvPr id="4" name="Text Placeholder 3"/>
+          <p:cNvPr id="21443805" name="Text Placeholder 3"/>
           <p:cNvSpPr>
             <a:spLocks noGrp="1"/>
           </p:cNvSpPr>
@@ -2011,7 +4164,7 @@
             <p:ph type="body" sz="half" idx="2"/>
           </p:nvPr>
         </p:nvSpPr>
-        <p:spPr>
+        <p:spPr bwMode="auto">
           <a:xfrm>
             <a:off x="839788" y="2057400"/>
             <a:ext cx="3932237" cy="3811588"/>
@@ -2058,18 +4211,20 @@
             </a:lvl9pPr>
           </a:lstStyle>
           <a:p>
-            <a:pPr lvl="0"/>
-            <a:r>
-              <a:rPr lang="en-US" smtClean="0"/>
+            <a:pPr lvl="0">
+              <a:defRPr/>
+            </a:pPr>
+            <a:r>
+              <a:rPr lang="en-US"/>
               <a:t>Edit Master text styles</a:t>
             </a:r>
-            <a:endParaRPr lang="en-US" smtClean="0"/>
-          </a:p>
-        </p:txBody>
-      </p:sp>
-      <p:sp>
-        <p:nvSpPr>
-          <p:cNvPr id="5" name="Date Placeholder 4"/>
+            <a:endParaRPr lang="en-US"/>
+          </a:p>
+        </p:txBody>
+      </p:sp>
+      <p:sp>
+        <p:nvSpPr>
+          <p:cNvPr id="1831549532" name="Date Placeholder 4"/>
           <p:cNvSpPr>
             <a:spLocks noGrp="1"/>
           </p:cNvSpPr>
@@ -2077,13 +4232,17 @@
             <p:ph type="dt" sz="half" idx="10"/>
           </p:nvPr>
         </p:nvSpPr>
-        <p:spPr/>
-        <p:txBody>
-          <a:bodyPr/>
-          <a:lstStyle/>
-          <a:p>
+        <p:spPr bwMode="auto"/>
+        <p:txBody>
+          <a:bodyPr/>
+          <a:lstStyle/>
+          <a:p>
+            <a:pPr>
+              <a:defRPr/>
+            </a:pPr>
             <a:fld id="{90867743-95B3-4C68-AD86-AECB47900815}" type="datetimeFigureOut">
-              <a:rPr lang="en-US" smtClean="0"/>
+              <a:rPr lang="en-US"/>
+              <a:t/>
             </a:fld>
             <a:endParaRPr lang="en-US"/>
           </a:p>
@@ -2091,7 +4250,7 @@
       </p:sp>
       <p:sp>
         <p:nvSpPr>
-          <p:cNvPr id="6" name="Footer Placeholder 5"/>
+          <p:cNvPr id="175437479" name="Footer Placeholder 5"/>
           <p:cNvSpPr>
             <a:spLocks noGrp="1"/>
           </p:cNvSpPr>
@@ -2099,18 +4258,21 @@
             <p:ph type="ftr" sz="quarter" idx="11"/>
           </p:nvPr>
         </p:nvSpPr>
-        <p:spPr/>
-        <p:txBody>
-          <a:bodyPr/>
-          <a:lstStyle/>
-          <a:p>
-            <a:endParaRPr lang="en-US"/>
-          </a:p>
-        </p:txBody>
-      </p:sp>
-      <p:sp>
-        <p:nvSpPr>
-          <p:cNvPr id="7" name="Slide Number Placeholder 6"/>
+        <p:spPr bwMode="auto"/>
+        <p:txBody>
+          <a:bodyPr/>
+          <a:lstStyle/>
+          <a:p>
+            <a:pPr>
+              <a:defRPr/>
+            </a:pPr>
+            <a:endParaRPr lang="en-US"/>
+          </a:p>
+        </p:txBody>
+      </p:sp>
+      <p:sp>
+        <p:nvSpPr>
+          <p:cNvPr id="950836950" name="Slide Number Placeholder 6"/>
           <p:cNvSpPr>
             <a:spLocks noGrp="1"/>
           </p:cNvSpPr>
@@ -2118,13 +4280,17 @@
             <p:ph type="sldNum" sz="quarter" idx="12"/>
           </p:nvPr>
         </p:nvSpPr>
-        <p:spPr/>
-        <p:txBody>
-          <a:bodyPr/>
-          <a:lstStyle/>
-          <a:p>
+        <p:spPr bwMode="auto"/>
+        <p:txBody>
+          <a:bodyPr/>
+          <a:lstStyle/>
+          <a:p>
+            <a:pPr>
+              <a:defRPr/>
+            </a:pPr>
             <a:fld id="{D233FBF5-F569-4CE1-9AFD-EF5EEDD8FE3A}" type="slidenum">
-              <a:rPr lang="en-US" smtClean="0"/>
+              <a:rPr lang="en-US"/>
+              <a:t/>
             </a:fld>
             <a:endParaRPr lang="en-US"/>
           </a:p>
@@ -2139,7 +4305,7 @@
 </file>
 
 <file path=ppt/slideLayouts/slideLayout9.xml><?xml version="1.0" encoding="utf-8"?>
-<p:sldLayout xmlns:a="http://schemas.openxmlformats.org/drawingml/2006/main" xmlns:r="http://schemas.openxmlformats.org/officeDocument/2006/relationships" xmlns:p="http://schemas.openxmlformats.org/presentationml/2006/main" type="picTx" preserve="1">
+<p:sldLayout xmlns:a="http://schemas.openxmlformats.org/drawingml/2006/main" xmlns:r="http://schemas.openxmlformats.org/officeDocument/2006/relationships" xmlns:p="http://schemas.openxmlformats.org/presentationml/2006/main" xmlns:m="http://schemas.openxmlformats.org/officeDocument/2006/math" xmlns:w="http://schemas.openxmlformats.org/wordprocessingml/2006/main" matchingName="" preserve="1" showMasterPhAnim="0" showMasterSp="1" type="picTx" userDrawn="1">
   <p:cSld name="Picture with Caption">
     <p:spTree>
       <p:nvGrpSpPr>
@@ -2147,7 +4313,7 @@
         <p:cNvGrpSpPr/>
         <p:nvPr/>
       </p:nvGrpSpPr>
-      <p:grpSpPr>
+      <p:grpSpPr bwMode="auto">
         <a:xfrm>
           <a:off x="0" y="0"/>
           <a:ext cx="0" cy="0"/>
@@ -2157,7 +4323,7 @@
       </p:grpSpPr>
       <p:sp>
         <p:nvSpPr>
-          <p:cNvPr id="2" name="Title 1"/>
+          <p:cNvPr id="786087275" name="Title 1"/>
           <p:cNvSpPr>
             <a:spLocks noGrp="1"/>
           </p:cNvSpPr>
@@ -2165,7 +4331,7 @@
             <p:ph type="title"/>
           </p:nvPr>
         </p:nvSpPr>
-        <p:spPr>
+        <p:spPr bwMode="auto">
           <a:xfrm>
             <a:off x="839788" y="457200"/>
             <a:ext cx="3932237" cy="1600200"/>
@@ -2179,8 +4345,11 @@
             </a:lvl1pPr>
           </a:lstStyle>
           <a:p>
-            <a:r>
-              <a:rPr lang="en-US" smtClean="0"/>
+            <a:pPr>
+              <a:defRPr/>
+            </a:pPr>
+            <a:r>
+              <a:rPr lang="en-US"/>
               <a:t>Click to edit Master title style</a:t>
             </a:r>
             <a:endParaRPr lang="en-US"/>
@@ -2189,7 +4358,7 @@
       </p:sp>
       <p:sp>
         <p:nvSpPr>
-          <p:cNvPr id="3" name="Picture Placeholder 2"/>
+          <p:cNvPr id="359402029" name="Picture Placeholder 2"/>
           <p:cNvSpPr>
             <a:spLocks noGrp="1"/>
           </p:cNvSpPr>
@@ -2197,7 +4366,7 @@
             <p:ph type="pic" idx="1"/>
           </p:nvPr>
         </p:nvSpPr>
-        <p:spPr>
+        <p:spPr bwMode="auto">
           <a:xfrm>
             <a:off x="5183188" y="987425"/>
             <a:ext cx="6172200" cy="4873625"/>
@@ -2244,13 +4413,16 @@
             </a:lvl9pPr>
           </a:lstStyle>
           <a:p>
-            <a:endParaRPr lang="en-US"/>
-          </a:p>
-        </p:txBody>
-      </p:sp>
-      <p:sp>
-        <p:nvSpPr>
-          <p:cNvPr id="4" name="Text Placeholder 3"/>
+            <a:pPr>
+              <a:defRPr/>
+            </a:pPr>
+            <a:endParaRPr lang="en-US"/>
+          </a:p>
+        </p:txBody>
+      </p:sp>
+      <p:sp>
+        <p:nvSpPr>
+          <p:cNvPr id="881806079" name="Text Placeholder 3"/>
           <p:cNvSpPr>
             <a:spLocks noGrp="1"/>
           </p:cNvSpPr>
@@ -2258,7 +4430,7 @@
             <p:ph type="body" sz="half" idx="2"/>
           </p:nvPr>
         </p:nvSpPr>
-        <p:spPr>
+        <p:spPr bwMode="auto">
           <a:xfrm>
             <a:off x="839788" y="2057400"/>
             <a:ext cx="3932237" cy="3811588"/>
@@ -2305,18 +4477,20 @@
             </a:lvl9pPr>
           </a:lstStyle>
           <a:p>
-            <a:pPr lvl="0"/>
-            <a:r>
-              <a:rPr lang="en-US" smtClean="0"/>
+            <a:pPr lvl="0">
+              <a:defRPr/>
+            </a:pPr>
+            <a:r>
+              <a:rPr lang="en-US"/>
               <a:t>Edit Master text styles</a:t>
             </a:r>
-            <a:endParaRPr lang="en-US" smtClean="0"/>
-          </a:p>
-        </p:txBody>
-      </p:sp>
-      <p:sp>
-        <p:nvSpPr>
-          <p:cNvPr id="5" name="Date Placeholder 4"/>
+            <a:endParaRPr lang="en-US"/>
+          </a:p>
+        </p:txBody>
+      </p:sp>
+      <p:sp>
+        <p:nvSpPr>
+          <p:cNvPr id="1580655543" name="Date Placeholder 4"/>
           <p:cNvSpPr>
             <a:spLocks noGrp="1"/>
           </p:cNvSpPr>
@@ -2324,13 +4498,17 @@
             <p:ph type="dt" sz="half" idx="10"/>
           </p:nvPr>
         </p:nvSpPr>
-        <p:spPr/>
-        <p:txBody>
-          <a:bodyPr/>
-          <a:lstStyle/>
-          <a:p>
+        <p:spPr bwMode="auto"/>
+        <p:txBody>
+          <a:bodyPr/>
+          <a:lstStyle/>
+          <a:p>
+            <a:pPr>
+              <a:defRPr/>
+            </a:pPr>
             <a:fld id="{90867743-95B3-4C68-AD86-AECB47900815}" type="datetimeFigureOut">
-              <a:rPr lang="en-US" smtClean="0"/>
+              <a:rPr lang="en-US"/>
+              <a:t/>
             </a:fld>
             <a:endParaRPr lang="en-US"/>
           </a:p>
@@ -2338,7 +4516,7 @@
       </p:sp>
       <p:sp>
         <p:nvSpPr>
-          <p:cNvPr id="6" name="Footer Placeholder 5"/>
+          <p:cNvPr id="818760542" name="Footer Placeholder 5"/>
           <p:cNvSpPr>
             <a:spLocks noGrp="1"/>
           </p:cNvSpPr>
@@ -2346,18 +4524,21 @@
             <p:ph type="ftr" sz="quarter" idx="11"/>
           </p:nvPr>
         </p:nvSpPr>
-        <p:spPr/>
-        <p:txBody>
-          <a:bodyPr/>
-          <a:lstStyle/>
-          <a:p>
-            <a:endParaRPr lang="en-US"/>
-          </a:p>
-        </p:txBody>
-      </p:sp>
-      <p:sp>
-        <p:nvSpPr>
-          <p:cNvPr id="7" name="Slide Number Placeholder 6"/>
+        <p:spPr bwMode="auto"/>
+        <p:txBody>
+          <a:bodyPr/>
+          <a:lstStyle/>
+          <a:p>
+            <a:pPr>
+              <a:defRPr/>
+            </a:pPr>
+            <a:endParaRPr lang="en-US"/>
+          </a:p>
+        </p:txBody>
+      </p:sp>
+      <p:sp>
+        <p:nvSpPr>
+          <p:cNvPr id="714798795" name="Slide Number Placeholder 6"/>
           <p:cNvSpPr>
             <a:spLocks noGrp="1"/>
           </p:cNvSpPr>
@@ -2365,13 +4546,17 @@
             <p:ph type="sldNum" sz="quarter" idx="12"/>
           </p:nvPr>
         </p:nvSpPr>
-        <p:spPr/>
-        <p:txBody>
-          <a:bodyPr/>
-          <a:lstStyle/>
-          <a:p>
+        <p:spPr bwMode="auto"/>
+        <p:txBody>
+          <a:bodyPr/>
+          <a:lstStyle/>
+          <a:p>
+            <a:pPr>
+              <a:defRPr/>
+            </a:pPr>
             <a:fld id="{D233FBF5-F569-4CE1-9AFD-EF5EEDD8FE3A}" type="slidenum">
-              <a:rPr lang="en-US" smtClean="0"/>
+              <a:rPr lang="en-US"/>
+              <a:t/>
             </a:fld>
             <a:endParaRPr lang="en-US"/>
           </a:p>
@@ -2386,8 +4571,8 @@
 </file>
 
 <file path=ppt/slideMasters/slideMaster1.xml><?xml version="1.0" encoding="utf-8"?>
-<p:sldMaster xmlns:a="http://schemas.openxmlformats.org/drawingml/2006/main" xmlns:r="http://schemas.openxmlformats.org/officeDocument/2006/relationships" xmlns:p="http://schemas.openxmlformats.org/presentationml/2006/main">
-  <p:cSld>
+<p:sldMaster xmlns:a="http://schemas.openxmlformats.org/drawingml/2006/main" xmlns:r="http://schemas.openxmlformats.org/officeDocument/2006/relationships" xmlns:p="http://schemas.openxmlformats.org/presentationml/2006/main" xmlns:m="http://schemas.openxmlformats.org/officeDocument/2006/math" xmlns:w="http://schemas.openxmlformats.org/wordprocessingml/2006/main" preserve="0">
+  <p:cSld name="">
     <p:bg>
       <p:bgRef idx="1001">
         <a:schemeClr val="bg1"/>
@@ -2399,7 +4584,7 @@
         <p:cNvGrpSpPr/>
         <p:nvPr/>
       </p:nvGrpSpPr>
-      <p:grpSpPr>
+      <p:grpSpPr bwMode="auto">
         <a:xfrm>
           <a:off x="0" y="0"/>
           <a:ext cx="0" cy="0"/>
@@ -2409,7 +4594,7 @@
       </p:grpSpPr>
       <p:sp>
         <p:nvSpPr>
-          <p:cNvPr id="2" name="Title Placeholder 1"/>
+          <p:cNvPr id="1928573036" name="Title Placeholder 1"/>
           <p:cNvSpPr>
             <a:spLocks noGrp="1"/>
           </p:cNvSpPr>
@@ -2417,7 +4602,7 @@
             <p:ph type="title"/>
           </p:nvPr>
         </p:nvSpPr>
-        <p:spPr>
+        <p:spPr bwMode="auto">
           <a:xfrm>
             <a:off x="838200" y="365125"/>
             <a:ext cx="10515600" cy="1325563"/>
@@ -2432,8 +4617,11 @@
           </a:bodyPr>
           <a:lstStyle/>
           <a:p>
-            <a:r>
-              <a:rPr lang="en-US" smtClean="0"/>
+            <a:pPr>
+              <a:defRPr/>
+            </a:pPr>
+            <a:r>
+              <a:rPr lang="en-US"/>
               <a:t>Click to edit Master title style</a:t>
             </a:r>
             <a:endParaRPr lang="en-US"/>
@@ -2442,7 +4630,7 @@
       </p:sp>
       <p:sp>
         <p:nvSpPr>
-          <p:cNvPr id="3" name="Text Placeholder 2"/>
+          <p:cNvPr id="883890328" name="Text Placeholder 2"/>
           <p:cNvSpPr>
             <a:spLocks noGrp="1"/>
           </p:cNvSpPr>
@@ -2450,7 +4638,7 @@
             <p:ph type="body" idx="1"/>
           </p:nvPr>
         </p:nvSpPr>
-        <p:spPr>
+        <p:spPr bwMode="auto">
           <a:xfrm>
             <a:off x="838200" y="1825625"/>
             <a:ext cx="10515600" cy="4351338"/>
@@ -2465,41 +4653,51 @@
           </a:bodyPr>
           <a:lstStyle/>
           <a:p>
-            <a:pPr lvl="0"/>
-            <a:r>
-              <a:rPr lang="en-US" smtClean="0"/>
+            <a:pPr lvl="0">
+              <a:defRPr/>
+            </a:pPr>
+            <a:r>
+              <a:rPr lang="en-US"/>
               <a:t>Edit Master text styles</a:t>
             </a:r>
-            <a:endParaRPr lang="en-US" smtClean="0"/>
-          </a:p>
-          <a:p>
-            <a:pPr lvl="1"/>
-            <a:r>
-              <a:rPr lang="en-US" smtClean="0"/>
+            <a:endParaRPr lang="en-US"/>
+          </a:p>
+          <a:p>
+            <a:pPr lvl="1">
+              <a:defRPr/>
+            </a:pPr>
+            <a:r>
+              <a:rPr lang="en-US"/>
               <a:t>Second level</a:t>
             </a:r>
-            <a:endParaRPr lang="en-US" smtClean="0"/>
-          </a:p>
-          <a:p>
-            <a:pPr lvl="2"/>
-            <a:r>
-              <a:rPr lang="en-US" smtClean="0"/>
+            <a:endParaRPr lang="en-US"/>
+          </a:p>
+          <a:p>
+            <a:pPr lvl="2">
+              <a:defRPr/>
+            </a:pPr>
+            <a:r>
+              <a:rPr lang="en-US"/>
               <a:t>Third level</a:t>
             </a:r>
-            <a:endParaRPr lang="en-US" smtClean="0"/>
-          </a:p>
-          <a:p>
-            <a:pPr lvl="3"/>
-            <a:r>
-              <a:rPr lang="en-US" smtClean="0"/>
+            <a:endParaRPr lang="en-US"/>
+          </a:p>
+          <a:p>
+            <a:pPr lvl="3">
+              <a:defRPr/>
+            </a:pPr>
+            <a:r>
+              <a:rPr lang="en-US"/>
               <a:t>Fourth level</a:t>
             </a:r>
-            <a:endParaRPr lang="en-US" smtClean="0"/>
-          </a:p>
-          <a:p>
-            <a:pPr lvl="4"/>
-            <a:r>
-              <a:rPr lang="en-US" smtClean="0"/>
+            <a:endParaRPr lang="en-US"/>
+          </a:p>
+          <a:p>
+            <a:pPr lvl="4">
+              <a:defRPr/>
+            </a:pPr>
+            <a:r>
+              <a:rPr lang="en-US"/>
               <a:t>Fifth level</a:t>
             </a:r>
             <a:endParaRPr lang="en-US"/>
@@ -2508,7 +4706,7 @@
       </p:sp>
       <p:sp>
         <p:nvSpPr>
-          <p:cNvPr id="4" name="Date Placeholder 3"/>
+          <p:cNvPr id="1727552252" name="Date Placeholder 3"/>
           <p:cNvSpPr>
             <a:spLocks noGrp="1"/>
           </p:cNvSpPr>
@@ -2516,7 +4714,7 @@
             <p:ph type="dt" sz="half" idx="2"/>
           </p:nvPr>
         </p:nvSpPr>
-        <p:spPr>
+        <p:spPr bwMode="auto">
           <a:xfrm>
             <a:off x="838200" y="6356350"/>
             <a:ext cx="2743200" cy="365125"/>
@@ -2539,8 +4737,12 @@
             </a:lvl1pPr>
           </a:lstStyle>
           <a:p>
+            <a:pPr>
+              <a:defRPr/>
+            </a:pPr>
             <a:fld id="{90867743-95B3-4C68-AD86-AECB47900815}" type="datetimeFigureOut">
-              <a:rPr lang="en-US" smtClean="0"/>
+              <a:rPr lang="en-US"/>
+              <a:t/>
             </a:fld>
             <a:endParaRPr lang="en-US"/>
           </a:p>
@@ -2548,7 +4750,7 @@
       </p:sp>
       <p:sp>
         <p:nvSpPr>
-          <p:cNvPr id="5" name="Footer Placeholder 4"/>
+          <p:cNvPr id="2098550262" name="Footer Placeholder 4"/>
           <p:cNvSpPr>
             <a:spLocks noGrp="1"/>
           </p:cNvSpPr>
@@ -2556,7 +4758,7 @@
             <p:ph type="ftr" sz="quarter" idx="3"/>
           </p:nvPr>
         </p:nvSpPr>
-        <p:spPr>
+        <p:spPr bwMode="auto">
           <a:xfrm>
             <a:off x="4038600" y="6356350"/>
             <a:ext cx="4114800" cy="365125"/>
@@ -2579,13 +4781,16 @@
             </a:lvl1pPr>
           </a:lstStyle>
           <a:p>
-            <a:endParaRPr lang="en-US"/>
-          </a:p>
-        </p:txBody>
-      </p:sp>
-      <p:sp>
-        <p:nvSpPr>
-          <p:cNvPr id="6" name="Slide Number Placeholder 5"/>
+            <a:pPr>
+              <a:defRPr/>
+            </a:pPr>
+            <a:endParaRPr lang="en-US"/>
+          </a:p>
+        </p:txBody>
+      </p:sp>
+      <p:sp>
+        <p:nvSpPr>
+          <p:cNvPr id="1340272006" name="Slide Number Placeholder 5"/>
           <p:cNvSpPr>
             <a:spLocks noGrp="1"/>
           </p:cNvSpPr>
@@ -2593,7 +4798,7 @@
             <p:ph type="sldNum" sz="quarter" idx="4"/>
           </p:nvPr>
         </p:nvSpPr>
-        <p:spPr>
+        <p:spPr bwMode="auto">
           <a:xfrm>
             <a:off x="8610600" y="6356350"/>
             <a:ext cx="2743200" cy="365125"/>
@@ -2616,8 +4821,12 @@
             </a:lvl1pPr>
           </a:lstStyle>
           <a:p>
+            <a:pPr>
+              <a:defRPr/>
+            </a:pPr>
             <a:fld id="{D233FBF5-F569-4CE1-9AFD-EF5EEDD8FE3A}" type="slidenum">
-              <a:rPr lang="en-US" smtClean="0"/>
+              <a:rPr lang="en-US"/>
+              <a:t/>
             </a:fld>
             <a:endParaRPr lang="en-US"/>
           </a:p>
@@ -2641,15 +4850,15 @@
   </p:sldLayoutIdLst>
   <p:txStyles>
     <p:titleStyle>
-      <a:lvl1pPr algn="l" defTabSz="914400" rtl="0" eaLnBrk="1" latinLnBrk="0" hangingPunct="1">
+      <a:lvl1pPr algn="l" defTabSz="914400" rtl="0">
         <a:lnSpc>
           <a:spcPct val="90000"/>
         </a:lnSpc>
         <a:spcBef>
-          <a:spcPct val="0"/>
+          <a:spcPts val="0"/>
         </a:spcBef>
         <a:buNone/>
-        <a:defRPr sz="4400" kern="1200">
+        <a:defRPr sz="4400">
           <a:solidFill>
             <a:schemeClr val="tx1"/>
           </a:solidFill>
@@ -2660,16 +4869,16 @@
       </a:lvl1pPr>
     </p:titleStyle>
     <p:bodyStyle>
-      <a:lvl1pPr marL="228600" indent="-228600" algn="l" defTabSz="914400" rtl="0" eaLnBrk="1" latinLnBrk="0" hangingPunct="1">
+      <a:lvl1pPr marL="228600" indent="-228600" algn="l" defTabSz="914400" rtl="0">
         <a:lnSpc>
           <a:spcPct val="90000"/>
         </a:lnSpc>
         <a:spcBef>
           <a:spcPts val="1000"/>
         </a:spcBef>
-        <a:buFont typeface="Arial" panose="02080604020202020204" pitchFamily="34" charset="0"/>
+        <a:buFont typeface="Arial"/>
         <a:buChar char="•"/>
-        <a:defRPr sz="2800" kern="1200">
+        <a:defRPr sz="2800">
           <a:solidFill>
             <a:schemeClr val="tx1"/>
           </a:solidFill>
@@ -2678,16 +4887,16 @@
           <a:cs typeface="+mn-cs"/>
         </a:defRPr>
       </a:lvl1pPr>
-      <a:lvl2pPr marL="685800" indent="-228600" algn="l" defTabSz="914400" rtl="0" eaLnBrk="1" latinLnBrk="0" hangingPunct="1">
+      <a:lvl2pPr marL="685800" indent="-228600" algn="l" defTabSz="914400" rtl="0">
         <a:lnSpc>
           <a:spcPct val="90000"/>
         </a:lnSpc>
         <a:spcBef>
           <a:spcPts val="500"/>
         </a:spcBef>
-        <a:buFont typeface="Arial" panose="02080604020202020204" pitchFamily="34" charset="0"/>
+        <a:buFont typeface="Arial"/>
         <a:buChar char="•"/>
-        <a:defRPr sz="2400" kern="1200">
+        <a:defRPr sz="2400">
           <a:solidFill>
             <a:schemeClr val="tx1"/>
           </a:solidFill>
@@ -2696,16 +4905,16 @@
           <a:cs typeface="+mn-cs"/>
         </a:defRPr>
       </a:lvl2pPr>
-      <a:lvl3pPr marL="1143000" indent="-228600" algn="l" defTabSz="914400" rtl="0" eaLnBrk="1" latinLnBrk="0" hangingPunct="1">
+      <a:lvl3pPr marL="1143000" indent="-228600" algn="l" defTabSz="914400" rtl="0">
         <a:lnSpc>
           <a:spcPct val="90000"/>
         </a:lnSpc>
         <a:spcBef>
           <a:spcPts val="500"/>
         </a:spcBef>
-        <a:buFont typeface="Arial" panose="02080604020202020204" pitchFamily="34" charset="0"/>
+        <a:buFont typeface="Arial"/>
         <a:buChar char="•"/>
-        <a:defRPr sz="2000" kern="1200">
+        <a:defRPr sz="2000">
           <a:solidFill>
             <a:schemeClr val="tx1"/>
           </a:solidFill>
@@ -2714,16 +4923,16 @@
           <a:cs typeface="+mn-cs"/>
         </a:defRPr>
       </a:lvl3pPr>
-      <a:lvl4pPr marL="1600200" indent="-228600" algn="l" defTabSz="914400" rtl="0" eaLnBrk="1" latinLnBrk="0" hangingPunct="1">
+      <a:lvl4pPr marL="1600200" indent="-228600" algn="l" defTabSz="914400" rtl="0">
         <a:lnSpc>
           <a:spcPct val="90000"/>
         </a:lnSpc>
         <a:spcBef>
           <a:spcPts val="500"/>
         </a:spcBef>
-        <a:buFont typeface="Arial" panose="02080604020202020204" pitchFamily="34" charset="0"/>
+        <a:buFont typeface="Arial"/>
         <a:buChar char="•"/>
-        <a:defRPr sz="1800" kern="1200">
+        <a:defRPr sz="1800">
           <a:solidFill>
             <a:schemeClr val="tx1"/>
           </a:solidFill>
@@ -2732,16 +4941,16 @@
           <a:cs typeface="+mn-cs"/>
         </a:defRPr>
       </a:lvl4pPr>
-      <a:lvl5pPr marL="2057400" indent="-228600" algn="l" defTabSz="914400" rtl="0" eaLnBrk="1" latinLnBrk="0" hangingPunct="1">
+      <a:lvl5pPr marL="2057400" indent="-228600" algn="l" defTabSz="914400" rtl="0">
         <a:lnSpc>
           <a:spcPct val="90000"/>
         </a:lnSpc>
         <a:spcBef>
           <a:spcPts val="500"/>
         </a:spcBef>
-        <a:buFont typeface="Arial" panose="02080604020202020204" pitchFamily="34" charset="0"/>
+        <a:buFont typeface="Arial"/>
         <a:buChar char="•"/>
-        <a:defRPr sz="1800" kern="1200">
+        <a:defRPr sz="1800">
           <a:solidFill>
             <a:schemeClr val="tx1"/>
           </a:solidFill>
@@ -2750,16 +4959,16 @@
           <a:cs typeface="+mn-cs"/>
         </a:defRPr>
       </a:lvl5pPr>
-      <a:lvl6pPr marL="2514600" indent="-228600" algn="l" defTabSz="914400" rtl="0" eaLnBrk="1" latinLnBrk="0" hangingPunct="1">
+      <a:lvl6pPr marL="2514600" indent="-228600" algn="l" defTabSz="914400" rtl="0">
         <a:lnSpc>
           <a:spcPct val="90000"/>
         </a:lnSpc>
         <a:spcBef>
           <a:spcPts val="500"/>
         </a:spcBef>
-        <a:buFont typeface="Arial" panose="02080604020202020204" pitchFamily="34" charset="0"/>
+        <a:buFont typeface="Arial"/>
         <a:buChar char="•"/>
-        <a:defRPr sz="1800" kern="1200">
+        <a:defRPr sz="1800">
           <a:solidFill>
             <a:schemeClr val="tx1"/>
           </a:solidFill>
@@ -2768,16 +4977,16 @@
           <a:cs typeface="+mn-cs"/>
         </a:defRPr>
       </a:lvl6pPr>
-      <a:lvl7pPr marL="2971800" indent="-228600" algn="l" defTabSz="914400" rtl="0" eaLnBrk="1" latinLnBrk="0" hangingPunct="1">
+      <a:lvl7pPr marL="2971800" indent="-228600" algn="l" defTabSz="914400" rtl="0">
         <a:lnSpc>
           <a:spcPct val="90000"/>
         </a:lnSpc>
         <a:spcBef>
           <a:spcPts val="500"/>
         </a:spcBef>
-        <a:buFont typeface="Arial" panose="02080604020202020204" pitchFamily="34" charset="0"/>
+        <a:buFont typeface="Arial"/>
         <a:buChar char="•"/>
-        <a:defRPr sz="1800" kern="1200">
+        <a:defRPr sz="1800">
           <a:solidFill>
             <a:schemeClr val="tx1"/>
           </a:solidFill>
@@ -2786,16 +4995,16 @@
           <a:cs typeface="+mn-cs"/>
         </a:defRPr>
       </a:lvl7pPr>
-      <a:lvl8pPr marL="3429000" indent="-228600" algn="l" defTabSz="914400" rtl="0" eaLnBrk="1" latinLnBrk="0" hangingPunct="1">
+      <a:lvl8pPr marL="3429000" indent="-228600" algn="l" defTabSz="914400" rtl="0">
         <a:lnSpc>
           <a:spcPct val="90000"/>
         </a:lnSpc>
         <a:spcBef>
           <a:spcPts val="500"/>
         </a:spcBef>
-        <a:buFont typeface="Arial" panose="02080604020202020204" pitchFamily="34" charset="0"/>
+        <a:buFont typeface="Arial"/>
         <a:buChar char="•"/>
-        <a:defRPr sz="1800" kern="1200">
+        <a:defRPr sz="1800">
           <a:solidFill>
             <a:schemeClr val="tx1"/>
           </a:solidFill>
@@ -2804,16 +5013,16 @@
           <a:cs typeface="+mn-cs"/>
         </a:defRPr>
       </a:lvl8pPr>
-      <a:lvl9pPr marL="3886200" indent="-228600" algn="l" defTabSz="914400" rtl="0" eaLnBrk="1" latinLnBrk="0" hangingPunct="1">
+      <a:lvl9pPr marL="3886200" indent="-228600" algn="l" defTabSz="914400" rtl="0">
         <a:lnSpc>
           <a:spcPct val="90000"/>
         </a:lnSpc>
         <a:spcBef>
           <a:spcPts val="500"/>
         </a:spcBef>
-        <a:buFont typeface="Arial" panose="02080604020202020204" pitchFamily="34" charset="0"/>
+        <a:buFont typeface="Arial"/>
         <a:buChar char="•"/>
-        <a:defRPr sz="1800" kern="1200">
+        <a:defRPr sz="1800">
           <a:solidFill>
             <a:schemeClr val="tx1"/>
           </a:solidFill>
@@ -2827,8 +5036,8 @@
       <a:defPPr>
         <a:defRPr lang="en-US"/>
       </a:defPPr>
-      <a:lvl1pPr marL="0" algn="l" defTabSz="914400" rtl="0" eaLnBrk="1" latinLnBrk="0" hangingPunct="1">
-        <a:defRPr sz="1800" kern="1200">
+      <a:lvl1pPr marL="0" algn="l" defTabSz="914400" rtl="0">
+        <a:defRPr sz="1800">
           <a:solidFill>
             <a:schemeClr val="tx1"/>
           </a:solidFill>
@@ -2837,8 +5046,8 @@
           <a:cs typeface="+mn-cs"/>
         </a:defRPr>
       </a:lvl1pPr>
-      <a:lvl2pPr marL="457200" algn="l" defTabSz="914400" rtl="0" eaLnBrk="1" latinLnBrk="0" hangingPunct="1">
-        <a:defRPr sz="1800" kern="1200">
+      <a:lvl2pPr marL="457200" algn="l" defTabSz="914400" rtl="0">
+        <a:defRPr sz="1800">
           <a:solidFill>
             <a:schemeClr val="tx1"/>
           </a:solidFill>
@@ -2847,8 +5056,8 @@
           <a:cs typeface="+mn-cs"/>
         </a:defRPr>
       </a:lvl2pPr>
-      <a:lvl3pPr marL="914400" algn="l" defTabSz="914400" rtl="0" eaLnBrk="1" latinLnBrk="0" hangingPunct="1">
-        <a:defRPr sz="1800" kern="1200">
+      <a:lvl3pPr marL="914400" algn="l" defTabSz="914400" rtl="0">
+        <a:defRPr sz="1800">
           <a:solidFill>
             <a:schemeClr val="tx1"/>
           </a:solidFill>
@@ -2857,8 +5066,8 @@
           <a:cs typeface="+mn-cs"/>
         </a:defRPr>
       </a:lvl3pPr>
-      <a:lvl4pPr marL="1371600" algn="l" defTabSz="914400" rtl="0" eaLnBrk="1" latinLnBrk="0" hangingPunct="1">
-        <a:defRPr sz="1800" kern="1200">
+      <a:lvl4pPr marL="1371600" algn="l" defTabSz="914400" rtl="0">
+        <a:defRPr sz="1800">
           <a:solidFill>
             <a:schemeClr val="tx1"/>
           </a:solidFill>
@@ -2867,8 +5076,8 @@
           <a:cs typeface="+mn-cs"/>
         </a:defRPr>
       </a:lvl4pPr>
-      <a:lvl5pPr marL="1828800" algn="l" defTabSz="914400" rtl="0" eaLnBrk="1" latinLnBrk="0" hangingPunct="1">
-        <a:defRPr sz="1800" kern="1200">
+      <a:lvl5pPr marL="1828800" algn="l" defTabSz="914400" rtl="0">
+        <a:defRPr sz="1800">
           <a:solidFill>
             <a:schemeClr val="tx1"/>
           </a:solidFill>
@@ -2877,8 +5086,8 @@
           <a:cs typeface="+mn-cs"/>
         </a:defRPr>
       </a:lvl5pPr>
-      <a:lvl6pPr marL="2286000" algn="l" defTabSz="914400" rtl="0" eaLnBrk="1" latinLnBrk="0" hangingPunct="1">
-        <a:defRPr sz="1800" kern="1200">
+      <a:lvl6pPr marL="2286000" algn="l" defTabSz="914400" rtl="0">
+        <a:defRPr sz="1800">
           <a:solidFill>
             <a:schemeClr val="tx1"/>
           </a:solidFill>
@@ -2887,8 +5096,8 @@
           <a:cs typeface="+mn-cs"/>
         </a:defRPr>
       </a:lvl6pPr>
-      <a:lvl7pPr marL="2743200" algn="l" defTabSz="914400" rtl="0" eaLnBrk="1" latinLnBrk="0" hangingPunct="1">
-        <a:defRPr sz="1800" kern="1200">
+      <a:lvl7pPr marL="2743200" algn="l" defTabSz="914400" rtl="0">
+        <a:defRPr sz="1800">
           <a:solidFill>
             <a:schemeClr val="tx1"/>
           </a:solidFill>
@@ -2897,8 +5106,8 @@
           <a:cs typeface="+mn-cs"/>
         </a:defRPr>
       </a:lvl7pPr>
-      <a:lvl8pPr marL="3200400" algn="l" defTabSz="914400" rtl="0" eaLnBrk="1" latinLnBrk="0" hangingPunct="1">
-        <a:defRPr sz="1800" kern="1200">
+      <a:lvl8pPr marL="3200400" algn="l" defTabSz="914400" rtl="0">
+        <a:defRPr sz="1800">
           <a:solidFill>
             <a:schemeClr val="tx1"/>
           </a:solidFill>
@@ -2907,8 +5116,8 @@
           <a:cs typeface="+mn-cs"/>
         </a:defRPr>
       </a:lvl8pPr>
-      <a:lvl9pPr marL="3657600" algn="l" defTabSz="914400" rtl="0" eaLnBrk="1" latinLnBrk="0" hangingPunct="1">
-        <a:defRPr sz="1800" kern="1200">
+      <a:lvl9pPr marL="3657600" algn="l" defTabSz="914400" rtl="0">
+        <a:defRPr sz="1800">
           <a:solidFill>
             <a:schemeClr val="tx1"/>
           </a:solidFill>
@@ -2923,15 +5132,15 @@
 </file>
 
 <file path=ppt/slides/slide1.xml><?xml version="1.0" encoding="utf-8"?>
-<p:sld xmlns:a="http://schemas.openxmlformats.org/drawingml/2006/main" xmlns:r="http://schemas.openxmlformats.org/officeDocument/2006/relationships" xmlns:p="http://schemas.openxmlformats.org/presentationml/2006/main">
-  <p:cSld>
+<p:sld xmlns:a="http://schemas.openxmlformats.org/drawingml/2006/main" xmlns:r="http://schemas.openxmlformats.org/officeDocument/2006/relationships" xmlns:p="http://schemas.openxmlformats.org/presentationml/2006/main" xmlns:m="http://schemas.openxmlformats.org/officeDocument/2006/math" xmlns:w="http://schemas.openxmlformats.org/wordprocessingml/2006/main" xmlns:mc="http://schemas.openxmlformats.org/markup-compatibility/2006" showMasterPhAnim="0" showMasterSp="1" show="1">
+  <p:cSld name="">
     <p:spTree>
       <p:nvGrpSpPr>
         <p:cNvPr id="1" name=""/>
         <p:cNvGrpSpPr/>
         <p:nvPr/>
       </p:nvGrpSpPr>
-      <p:grpSpPr>
+      <p:grpSpPr bwMode="auto">
         <a:xfrm>
           <a:off x="0" y="0"/>
           <a:ext cx="0" cy="0"/>
@@ -2941,7 +5150,7 @@
       </p:grpSpPr>
       <p:sp>
         <p:nvSpPr>
-          <p:cNvPr id="2" name="Title 1"/>
+          <p:cNvPr id="661742769" name="Title 1"/>
           <p:cNvSpPr>
             <a:spLocks noGrp="1"/>
           </p:cNvSpPr>
@@ -2949,18 +5158,25 @@
             <p:ph type="ctrTitle"/>
           </p:nvPr>
         </p:nvSpPr>
-        <p:spPr/>
-        <p:txBody>
-          <a:bodyPr/>
-          <a:lstStyle/>
-          <a:p>
-            <a:endParaRPr lang="en-US"/>
-          </a:p>
-        </p:txBody>
-      </p:sp>
-      <p:sp>
-        <p:nvSpPr>
-          <p:cNvPr id="3" name="Subtitle 2"/>
+        <p:spPr bwMode="auto"/>
+        <p:txBody>
+          <a:bodyPr/>
+          <a:lstStyle/>
+          <a:p>
+            <a:pPr>
+              <a:defRPr/>
+            </a:pPr>
+            <a:r>
+              <a:rPr lang="en-US"/>
+              <a:t>Unit 5</a:t>
+            </a:r>
+            <a:endParaRPr lang="en-US"/>
+          </a:p>
+        </p:txBody>
+      </p:sp>
+      <p:sp>
+        <p:nvSpPr>
+          <p:cNvPr id="809438927" name="Subtitle 2"/>
           <p:cNvSpPr>
             <a:spLocks noGrp="1"/>
           </p:cNvSpPr>
@@ -2968,22 +5184,25 @@
             <p:ph type="subTitle" idx="1"/>
           </p:nvPr>
         </p:nvSpPr>
-        <p:spPr/>
-        <p:txBody>
-          <a:bodyPr/>
-          <a:lstStyle/>
-          <a:p>
-            <a:endParaRPr lang="en-US"/>
-          </a:p>
-        </p:txBody>
-      </p:sp>
-      <p:sp>
-        <p:nvSpPr>
-          <p:cNvPr id="4" name="Text Box 3"/>
+        <p:spPr bwMode="auto"/>
+        <p:txBody>
+          <a:bodyPr/>
+          <a:lstStyle/>
+          <a:p>
+            <a:pPr>
+              <a:defRPr/>
+            </a:pPr>
+            <a:endParaRPr lang="en-US"/>
+          </a:p>
+        </p:txBody>
+      </p:sp>
+      <p:sp>
+        <p:nvSpPr>
+          <p:cNvPr id="468705863" name="Text Box 3"/>
           <p:cNvSpPr txBox="1"/>
           <p:nvPr/>
         </p:nvSpPr>
-        <p:spPr>
+        <p:spPr bwMode="auto">
           <a:xfrm>
             <a:off x="677545" y="1988185"/>
             <a:ext cx="309880" cy="368300"/>
@@ -2998,6 +5217,9 @@
             <a:spAutoFit/>
           </a:bodyPr>
           <a:p>
+            <a:pPr>
+              <a:defRPr/>
+            </a:pPr>
             <a:endParaRPr lang="en-US"/>
           </a:p>
         </p:txBody>
@@ -3007,19 +5229,27 @@
   <p:clrMapOvr>
     <a:masterClrMapping/>
   </p:clrMapOvr>
+  <mc:AlternateContent xmlns:mc="http://schemas.openxmlformats.org/markup-compatibility/2006">
+    <mc:Choice xmlns:p159="http://schemas.microsoft.com/office/powerpoint/2015/09/main" xmlns:p14="http://schemas.microsoft.com/office/powerpoint/2010/main" Requires="p159">
+      <p:transition p14:dur="500" advClick="1"/>
+    </mc:Choice>
+    <mc:Fallback>
+      <p:transition advClick="1"/>
+    </mc:Fallback>
+  </mc:AlternateContent>
 </p:sld>
 </file>
 
 <file path=ppt/slides/slide10.xml><?xml version="1.0" encoding="utf-8"?>
-<p:sld xmlns:a="http://schemas.openxmlformats.org/drawingml/2006/main" xmlns:r="http://schemas.openxmlformats.org/officeDocument/2006/relationships" xmlns:p="http://schemas.openxmlformats.org/presentationml/2006/main">
-  <p:cSld>
+<p:sld xmlns:a="http://schemas.openxmlformats.org/drawingml/2006/main" xmlns:r="http://schemas.openxmlformats.org/officeDocument/2006/relationships" xmlns:p="http://schemas.openxmlformats.org/presentationml/2006/main" xmlns:m="http://schemas.openxmlformats.org/officeDocument/2006/math" xmlns:w="http://schemas.openxmlformats.org/wordprocessingml/2006/main" xmlns:mc="http://schemas.openxmlformats.org/markup-compatibility/2006" showMasterPhAnim="0" showMasterSp="1" show="1">
+  <p:cSld name="">
     <p:spTree>
       <p:nvGrpSpPr>
         <p:cNvPr id="1" name=""/>
         <p:cNvGrpSpPr/>
         <p:nvPr/>
       </p:nvGrpSpPr>
-      <p:grpSpPr>
+      <p:grpSpPr bwMode="auto">
         <a:xfrm>
           <a:off x="0" y="0"/>
           <a:ext cx="0" cy="0"/>
@@ -3029,21 +5259,19 @@
       </p:grpSpPr>
       <p:pic>
         <p:nvPicPr>
-          <p:cNvPr id="5" name="Content Placeholder 4"/>
+          <p:cNvPr id="1130274221" name="Content Placeholder 4"/>
           <p:cNvPicPr>
-            <a:picLocks noGrp="1" noChangeAspect="1"/>
+            <a:picLocks noChangeAspect="1" noGrp="1"/>
           </p:cNvPicPr>
           <p:nvPr>
             <p:ph sz="half" idx="1"/>
           </p:nvPr>
         </p:nvPicPr>
-        <p:blipFill>
-          <a:blip r:embed="rId1"/>
-          <a:stretch>
-            <a:fillRect/>
-          </a:stretch>
+        <p:blipFill rotWithShape="1">
+          <a:blip r:embed="rId3"/>
+          <a:stretch/>
         </p:blipFill>
-        <p:spPr>
+        <p:spPr bwMode="auto">
           <a:xfrm>
             <a:off x="0" y="1282045"/>
             <a:ext cx="5769204" cy="4430598"/>
@@ -3055,21 +5283,19 @@
       </p:pic>
       <p:pic>
         <p:nvPicPr>
-          <p:cNvPr id="6" name="Content Placeholder 5"/>
+          <p:cNvPr id="1687290916" name="Content Placeholder 5"/>
           <p:cNvPicPr>
-            <a:picLocks noGrp="1" noChangeAspect="1"/>
+            <a:picLocks noChangeAspect="1" noGrp="1"/>
           </p:cNvPicPr>
           <p:nvPr>
             <p:ph sz="half" idx="2"/>
           </p:nvPr>
         </p:nvPicPr>
-        <p:blipFill>
-          <a:blip r:embed="rId2"/>
-          <a:stretch>
-            <a:fillRect/>
-          </a:stretch>
+        <p:blipFill rotWithShape="1">
+          <a:blip r:embed="rId4"/>
+          <a:stretch/>
         </p:blipFill>
-        <p:spPr>
+        <p:spPr bwMode="auto">
           <a:xfrm>
             <a:off x="6061435" y="1800519"/>
             <a:ext cx="5976593" cy="3978111"/>
@@ -3084,19 +5310,27 @@
   <p:clrMapOvr>
     <a:masterClrMapping/>
   </p:clrMapOvr>
+  <mc:AlternateContent xmlns:mc="http://schemas.openxmlformats.org/markup-compatibility/2006">
+    <mc:Choice xmlns:p159="http://schemas.microsoft.com/office/powerpoint/2015/09/main" xmlns:p14="http://schemas.microsoft.com/office/powerpoint/2010/main" Requires="p159">
+      <p:transition p14:dur="500" advClick="1"/>
+    </mc:Choice>
+    <mc:Fallback>
+      <p:transition advClick="1"/>
+    </mc:Fallback>
+  </mc:AlternateContent>
 </p:sld>
 </file>
 
 <file path=ppt/slides/slide11.xml><?xml version="1.0" encoding="utf-8"?>
-<p:sld xmlns:a="http://schemas.openxmlformats.org/drawingml/2006/main" xmlns:r="http://schemas.openxmlformats.org/officeDocument/2006/relationships" xmlns:p="http://schemas.openxmlformats.org/presentationml/2006/main">
-  <p:cSld>
+<p:sld xmlns:a="http://schemas.openxmlformats.org/drawingml/2006/main" xmlns:r="http://schemas.openxmlformats.org/officeDocument/2006/relationships" xmlns:p="http://schemas.openxmlformats.org/presentationml/2006/main" xmlns:m="http://schemas.openxmlformats.org/officeDocument/2006/math" xmlns:w="http://schemas.openxmlformats.org/wordprocessingml/2006/main" xmlns:mc="http://schemas.openxmlformats.org/markup-compatibility/2006" showMasterPhAnim="0" showMasterSp="1" show="1">
+  <p:cSld name="">
     <p:spTree>
       <p:nvGrpSpPr>
         <p:cNvPr id="1" name=""/>
         <p:cNvGrpSpPr/>
         <p:nvPr/>
       </p:nvGrpSpPr>
-      <p:grpSpPr>
+      <p:grpSpPr bwMode="auto">
         <a:xfrm>
           <a:off x="0" y="0"/>
           <a:ext cx="0" cy="0"/>
@@ -3106,7 +5340,7 @@
       </p:grpSpPr>
       <p:sp>
         <p:nvSpPr>
-          <p:cNvPr id="3" name="Content Placeholder 2"/>
+          <p:cNvPr id="60441751" name="Content Placeholder 2"/>
           <p:cNvSpPr>
             <a:spLocks noGrp="1"/>
           </p:cNvSpPr>
@@ -3114,7 +5348,7 @@
             <p:ph sz="half" idx="1"/>
           </p:nvPr>
         </p:nvSpPr>
-        <p:spPr>
+        <p:spPr bwMode="auto">
           <a:xfrm>
             <a:off x="0" y="0"/>
             <a:ext cx="6019800" cy="6858000"/>
@@ -3126,48 +5360,66 @@
           </a:bodyPr>
           <a:lstStyle/>
           <a:p>
-            <a:r>
-              <a:rPr lang="en-US" b="1" dirty="0" smtClean="0"/>
+            <a:pPr>
+              <a:defRPr/>
+            </a:pPr>
+            <a:r>
+              <a:rPr lang="en-US" b="1"/>
               <a:t>Business Interpretation</a:t>
             </a:r>
-            <a:endParaRPr lang="en-US" b="1" dirty="0" smtClean="0"/>
-          </a:p>
-          <a:p>
-            <a:r>
-              <a:rPr lang="en-US" dirty="0" smtClean="0"/>
+            <a:endParaRPr lang="en-US" b="1"/>
+          </a:p>
+          <a:p>
+            <a:pPr>
+              <a:defRPr/>
+            </a:pPr>
+            <a:r>
+              <a:rPr lang="en-US"/>
               <a:t>The supermarket can use this information to:</a:t>
             </a:r>
-            <a:endParaRPr lang="en-US" dirty="0" smtClean="0"/>
-          </a:p>
-          <a:p>
-            <a:r>
-              <a:rPr lang="en-US" dirty="0" smtClean="0"/>
+            <a:endParaRPr lang="en-US"/>
+          </a:p>
+          <a:p>
+            <a:pPr>
+              <a:defRPr/>
+            </a:pPr>
+            <a:r>
+              <a:rPr lang="en-US"/>
               <a:t>Place bread and butter near each other Offer combo discounts </a:t>
             </a:r>
-            <a:endParaRPr lang="en-US" dirty="0" smtClean="0"/>
-          </a:p>
-          <a:p>
-            <a:r>
-              <a:rPr lang="en-US" dirty="0" smtClean="0"/>
+            <a:endParaRPr lang="en-US"/>
+          </a:p>
+          <a:p>
+            <a:pPr>
+              <a:defRPr/>
+            </a:pPr>
+            <a:r>
+              <a:rPr lang="en-US"/>
               <a:t>Recommend butter when customers buy bread </a:t>
             </a:r>
-            <a:endParaRPr lang="en-US" dirty="0" smtClean="0"/>
-          </a:p>
-          <a:p>
-            <a:r>
-              <a:rPr lang="en-US" dirty="0" smtClean="0"/>
+            <a:endParaRPr lang="en-US"/>
+          </a:p>
+          <a:p>
+            <a:pPr>
+              <a:defRPr/>
+            </a:pPr>
+            <a:r>
+              <a:rPr lang="en-US"/>
               <a:t>Increase sales through cross-selling</a:t>
             </a:r>
-            <a:endParaRPr lang="en-US" dirty="0" smtClean="0"/>
-          </a:p>
-          <a:p>
-            <a:endParaRPr lang="en-US" dirty="0"/>
-          </a:p>
-        </p:txBody>
-      </p:sp>
-      <p:sp>
-        <p:nvSpPr>
-          <p:cNvPr id="7" name="Content Placeholder 6"/>
+            <a:endParaRPr lang="en-US"/>
+          </a:p>
+          <a:p>
+            <a:pPr>
+              <a:defRPr/>
+            </a:pPr>
+            <a:endParaRPr lang="en-US"/>
+          </a:p>
+        </p:txBody>
+      </p:sp>
+      <p:sp>
+        <p:nvSpPr>
+          <p:cNvPr id="156493218" name="Content Placeholder 6"/>
           <p:cNvSpPr>
             <a:spLocks noGrp="1"/>
           </p:cNvSpPr>
@@ -3175,10 +5427,10 @@
             <p:ph sz="half" idx="2"/>
           </p:nvPr>
         </p:nvSpPr>
-        <p:spPr>
+        <p:spPr bwMode="auto">
           <a:xfrm>
             <a:off x="6155703" y="0"/>
-            <a:ext cx="5882326" cy="6693031"/>
+            <a:ext cx="5882326" cy="6693030"/>
           </a:xfrm>
         </p:spPr>
         <p:txBody>
@@ -3187,103 +5439,106 @@
           </a:bodyPr>
           <a:lstStyle/>
           <a:p>
-            <a:pPr marL="0" lvl="0" indent="0" eaLnBrk="0" fontAlgn="base" hangingPunct="0">
+            <a:pPr marL="0" lvl="0" indent="0">
               <a:lnSpc>
                 <a:spcPct val="100000"/>
               </a:lnSpc>
               <a:spcBef>
-                <a:spcPct val="0"/>
+                <a:spcPts val="0"/>
               </a:spcBef>
               <a:spcAft>
-                <a:spcPct val="0"/>
+                <a:spcPts val="0"/>
               </a:spcAft>
               <a:buNone/>
-            </a:pPr>
-            <a:r>
-              <a:rPr kumimoji="0" lang="en-US" altLang="en-US" sz="2400" b="1" i="0" u="none" strike="noStrike" cap="none" normalizeH="0" baseline="0" dirty="0" smtClean="0">
+              <a:defRPr/>
+            </a:pPr>
+            <a:r>
+              <a:rPr lang="en-US" sz="2400" b="1" i="0" u="none" strike="noStrike" cap="none">
                 <a:ln>
                   <a:noFill/>
                 </a:ln>
                 <a:solidFill>
                   <a:schemeClr val="tx1"/>
                 </a:solidFill>
-                <a:effectLst/>
-                <a:latin typeface="Arial" panose="02080604020202020204" pitchFamily="34" charset="0"/>
+                <a:latin typeface="Arial"/>
               </a:rPr>
               <a:t>Real-Life Example</a:t>
             </a:r>
-            <a:endParaRPr kumimoji="0" lang="en-US" altLang="en-US" sz="2400" b="1" i="0" u="none" strike="noStrike" cap="none" normalizeH="0" baseline="0" dirty="0" smtClean="0">
+            <a:endParaRPr lang="en-US" sz="2400" b="1" i="0" u="none" strike="noStrike" cap="none">
               <a:ln>
                 <a:noFill/>
               </a:ln>
               <a:solidFill>
                 <a:schemeClr val="tx1"/>
               </a:solidFill>
-              <a:effectLst/>
-              <a:latin typeface="Arial" panose="02080604020202020204" pitchFamily="34" charset="0"/>
+              <a:latin typeface="Arial"/>
             </a:endParaRPr>
           </a:p>
           <a:p>
-            <a:pPr marL="0" lvl="0" indent="0" eaLnBrk="0" fontAlgn="base" hangingPunct="0">
+            <a:pPr marL="0" lvl="0" indent="0">
               <a:lnSpc>
                 <a:spcPct val="100000"/>
               </a:lnSpc>
               <a:spcBef>
-                <a:spcPct val="0"/>
+                <a:spcPts val="0"/>
               </a:spcBef>
               <a:spcAft>
-                <a:spcPct val="0"/>
+                <a:spcPts val="0"/>
               </a:spcAft>
               <a:buNone/>
-            </a:pPr>
-            <a:r>
-              <a:rPr kumimoji="0" lang="en-US" altLang="en-US" b="0" i="0" u="none" strike="noStrike" cap="none" normalizeH="0" baseline="0" dirty="0" smtClean="0">
+              <a:defRPr/>
+            </a:pPr>
+            <a:r>
+              <a:rPr lang="en-US" b="0" i="0" u="none" strike="noStrike" cap="none">
                 <a:ln>
                   <a:noFill/>
                 </a:ln>
                 <a:solidFill>
                   <a:schemeClr val="tx1"/>
                 </a:solidFill>
-                <a:effectLst/>
-                <a:latin typeface="Arial" panose="02080604020202020204" pitchFamily="34" charset="0"/>
+                <a:latin typeface="Arial"/>
               </a:rPr>
               <a:t>Online shopping websites such as </a:t>
             </a:r>
             <a:r>
-              <a:rPr lang="en-US" altLang="en-US" dirty="0">
-                <a:latin typeface="Arial" panose="02080604020202020204" pitchFamily="34" charset="0"/>
+              <a:rPr lang="en-US">
+                <a:latin typeface="Arial"/>
               </a:rPr>
               <a:t>Amazon use Market Basket Analysis for recommendations like:</a:t>
             </a:r>
-            <a:endParaRPr lang="en-US" altLang="en-US" dirty="0">
-              <a:latin typeface="Arial" panose="02080604020202020204" pitchFamily="34" charset="0"/>
+            <a:endParaRPr lang="en-US">
+              <a:latin typeface="Arial"/>
             </a:endParaRPr>
           </a:p>
           <a:p>
-            <a:pPr marL="0" lvl="0" indent="0" eaLnBrk="0" fontAlgn="base" hangingPunct="0">
+            <a:pPr marL="0" lvl="0" indent="0">
               <a:lnSpc>
                 <a:spcPct val="100000"/>
               </a:lnSpc>
               <a:spcBef>
-                <a:spcPct val="0"/>
+                <a:spcPts val="0"/>
               </a:spcBef>
               <a:spcAft>
-                <a:spcPct val="0"/>
+                <a:spcPts val="0"/>
               </a:spcAft>
               <a:buNone/>
-            </a:pPr>
-            <a:r>
-              <a:rPr lang="en-US" altLang="en-US" dirty="0">
-                <a:latin typeface="Arial" panose="02080604020202020204" pitchFamily="34" charset="0"/>
+              <a:defRPr/>
+            </a:pPr>
+            <a:r>
+              <a:rPr lang="en-US">
+                <a:latin typeface="Arial"/>
               </a:rPr>
               <a:t>“Customers who bought this product also bought...”</a:t>
             </a:r>
-            <a:endParaRPr lang="en-US" altLang="en-US" dirty="0">
-              <a:latin typeface="Arial" panose="02080604020202020204" pitchFamily="34" charset="0"/>
+            <a:endParaRPr lang="en-US">
+              <a:latin typeface="Arial"/>
             </a:endParaRPr>
           </a:p>
           <a:p>
-            <a:endParaRPr lang="en-US" dirty="0"/>
+            <a:pPr>
+              <a:defRPr/>
+            </a:pPr>
+            <a:endParaRPr lang="en-US"/>
           </a:p>
         </p:txBody>
       </p:sp>
@@ -3292,19 +5547,27 @@
   <p:clrMapOvr>
     <a:masterClrMapping/>
   </p:clrMapOvr>
+  <mc:AlternateContent xmlns:mc="http://schemas.openxmlformats.org/markup-compatibility/2006">
+    <mc:Choice xmlns:p159="http://schemas.microsoft.com/office/powerpoint/2015/09/main" xmlns:p14="http://schemas.microsoft.com/office/powerpoint/2010/main" Requires="p159">
+      <p:transition p14:dur="500" advClick="1"/>
+    </mc:Choice>
+    <mc:Fallback>
+      <p:transition advClick="1"/>
+    </mc:Fallback>
+  </mc:AlternateContent>
 </p:sld>
 </file>
 
 <file path=ppt/slides/slide12.xml><?xml version="1.0" encoding="utf-8"?>
-<p:sld xmlns:a="http://schemas.openxmlformats.org/drawingml/2006/main" xmlns:r="http://schemas.openxmlformats.org/officeDocument/2006/relationships" xmlns:p="http://schemas.openxmlformats.org/presentationml/2006/main">
-  <p:cSld>
+<p:sld xmlns:a="http://schemas.openxmlformats.org/drawingml/2006/main" xmlns:r="http://schemas.openxmlformats.org/officeDocument/2006/relationships" xmlns:p="http://schemas.openxmlformats.org/presentationml/2006/main" xmlns:m="http://schemas.openxmlformats.org/officeDocument/2006/math" xmlns:w="http://schemas.openxmlformats.org/wordprocessingml/2006/main" xmlns:mc="http://schemas.openxmlformats.org/markup-compatibility/2006" showMasterPhAnim="0" showMasterSp="1" show="1">
+  <p:cSld name="">
     <p:spTree>
       <p:nvGrpSpPr>
         <p:cNvPr id="1" name=""/>
         <p:cNvGrpSpPr/>
         <p:nvPr/>
       </p:nvGrpSpPr>
-      <p:grpSpPr>
+      <p:grpSpPr bwMode="auto">
         <a:xfrm>
           <a:off x="0" y="0"/>
           <a:ext cx="0" cy="0"/>
@@ -3314,7 +5577,7 @@
       </p:grpSpPr>
       <p:sp>
         <p:nvSpPr>
-          <p:cNvPr id="2" name="Title 1"/>
+          <p:cNvPr id="680511038" name="Title 1"/>
           <p:cNvSpPr>
             <a:spLocks noGrp="1"/>
           </p:cNvSpPr>
@@ -3322,34 +5585,37 @@
             <p:ph type="title"/>
           </p:nvPr>
         </p:nvSpPr>
-        <p:spPr/>
-        <p:txBody>
-          <a:bodyPr/>
-          <a:lstStyle/>
-          <a:p>
-            <a:r>
-              <a:rPr lang="en-US" dirty="0" smtClean="0"/>
+        <p:spPr bwMode="auto"/>
+        <p:txBody>
+          <a:bodyPr/>
+          <a:lstStyle/>
+          <a:p>
+            <a:pPr>
+              <a:defRPr/>
+            </a:pPr>
+            <a:r>
+              <a:rPr lang="en-US"/>
               <a:t>Frequent </a:t>
             </a:r>
             <a:r>
-              <a:rPr lang="en-US" dirty="0" err="1" smtClean="0"/>
+              <a:rPr lang="en-US"/>
               <a:t>Itemsets</a:t>
             </a:r>
             <a:r>
-              <a:rPr lang="en-US" dirty="0" smtClean="0"/>
+              <a:rPr lang="en-US"/>
               <a:t> and Closed </a:t>
             </a:r>
             <a:r>
-              <a:rPr lang="en-US" dirty="0" err="1" smtClean="0"/>
+              <a:rPr lang="en-US"/>
               <a:t>Itemsets</a:t>
             </a:r>
-            <a:endParaRPr lang="en-US" dirty="0"/>
-          </a:p>
-        </p:txBody>
-      </p:sp>
-      <p:sp>
-        <p:nvSpPr>
-          <p:cNvPr id="3" name="Content Placeholder 2"/>
+            <a:endParaRPr lang="en-US"/>
+          </a:p>
+        </p:txBody>
+      </p:sp>
+      <p:sp>
+        <p:nvSpPr>
+          <p:cNvPr id="619491241" name="Content Placeholder 2"/>
           <p:cNvSpPr>
             <a:spLocks noGrp="1"/>
           </p:cNvSpPr>
@@ -3357,7 +5623,7 @@
             <p:ph sz="half" idx="1"/>
           </p:nvPr>
         </p:nvSpPr>
-        <p:spPr>
+        <p:spPr bwMode="auto">
           <a:xfrm>
             <a:off x="0" y="1825625"/>
             <a:ext cx="6019800" cy="4707150"/>
@@ -3369,106 +5635,122 @@
           </a:bodyPr>
           <a:lstStyle/>
           <a:p>
-            <a:r>
-              <a:rPr lang="en-US" b="1" dirty="0" smtClean="0"/>
+            <a:pPr>
+              <a:defRPr/>
+            </a:pPr>
+            <a:r>
+              <a:rPr lang="en-US" b="1"/>
               <a:t>1. Frequent </a:t>
             </a:r>
             <a:r>
-              <a:rPr lang="en-US" b="1" dirty="0" err="1" smtClean="0"/>
+              <a:rPr lang="en-US" b="1"/>
               <a:t>Itemsets</a:t>
             </a:r>
-            <a:endParaRPr lang="en-US" b="1" dirty="0" smtClean="0"/>
-          </a:p>
-          <a:p>
-            <a:r>
-              <a:rPr lang="en-US" dirty="0" smtClean="0"/>
+            <a:endParaRPr lang="en-US" b="1"/>
+          </a:p>
+          <a:p>
+            <a:pPr>
+              <a:defRPr/>
+            </a:pPr>
+            <a:r>
+              <a:rPr lang="en-US"/>
               <a:t>A </a:t>
             </a:r>
             <a:r>
-              <a:rPr lang="en-US" b="1" dirty="0" smtClean="0"/>
+              <a:rPr lang="en-US" b="1"/>
               <a:t>Frequent </a:t>
             </a:r>
             <a:r>
-              <a:rPr lang="en-US" b="1" dirty="0" err="1" smtClean="0"/>
+              <a:rPr lang="en-US" b="1"/>
               <a:t>Itemset</a:t>
             </a:r>
             <a:r>
-              <a:rPr lang="en-US" dirty="0" smtClean="0"/>
+              <a:rPr lang="en-US"/>
               <a:t> is a group of items that appear together in transactions more frequently than a minimum threshold called </a:t>
             </a:r>
             <a:r>
-              <a:rPr lang="en-US" b="1" dirty="0" smtClean="0"/>
+              <a:rPr lang="en-US" b="1"/>
               <a:t>minimum support</a:t>
             </a:r>
             <a:r>
-              <a:rPr lang="en-US" dirty="0" smtClean="0"/>
+              <a:rPr lang="en-US"/>
               <a:t>.</a:t>
             </a:r>
-            <a:endParaRPr lang="en-US" dirty="0" smtClean="0"/>
-          </a:p>
-          <a:p>
-            <a:r>
-              <a:rPr lang="en-US" dirty="0" smtClean="0"/>
+            <a:endParaRPr lang="en-US"/>
+          </a:p>
+          <a:p>
+            <a:pPr>
+              <a:defRPr/>
+            </a:pPr>
+            <a:r>
+              <a:rPr lang="en-US"/>
               <a:t>If the occurrence frequency of an </a:t>
             </a:r>
             <a:r>
-              <a:rPr lang="en-US" dirty="0" err="1" smtClean="0"/>
+              <a:rPr lang="en-US"/>
               <a:t>itemset</a:t>
             </a:r>
             <a:r>
-              <a:rPr lang="en-US" dirty="0" smtClean="0"/>
+              <a:rPr lang="en-US"/>
               <a:t> is greater than or equal to the minimum support value, it is called a </a:t>
             </a:r>
             <a:r>
-              <a:rPr lang="en-US" b="1" dirty="0" smtClean="0"/>
+              <a:rPr lang="en-US" b="1"/>
               <a:t>frequent </a:t>
             </a:r>
             <a:r>
-              <a:rPr lang="en-US" b="1" dirty="0" err="1" smtClean="0"/>
+              <a:rPr lang="en-US" b="1"/>
               <a:t>itemset</a:t>
             </a:r>
             <a:r>
-              <a:rPr lang="en-US" dirty="0" smtClean="0"/>
+              <a:rPr lang="en-US"/>
               <a:t>.</a:t>
             </a:r>
-            <a:endParaRPr lang="en-US" dirty="0" smtClean="0"/>
-          </a:p>
-          <a:p>
-            <a:r>
-              <a:rPr lang="en-US" dirty="0" smtClean="0"/>
+            <a:endParaRPr lang="en-US"/>
+          </a:p>
+          <a:p>
+            <a:pPr>
+              <a:defRPr/>
+            </a:pPr>
+            <a:r>
+              <a:rPr lang="en-US"/>
               <a:t>Suppose minimum support = </a:t>
             </a:r>
             <a:r>
-              <a:rPr lang="en-US" b="1" dirty="0" smtClean="0"/>
+              <a:rPr lang="en-US" b="1"/>
               <a:t>2</a:t>
             </a:r>
-            <a:endParaRPr lang="en-US" dirty="0" smtClean="0"/>
-          </a:p>
-          <a:p>
-            <a:endParaRPr lang="en-US" dirty="0" smtClean="0"/>
-          </a:p>
-          <a:p>
-            <a:endParaRPr lang="en-US" dirty="0"/>
+            <a:endParaRPr lang="en-US"/>
+          </a:p>
+          <a:p>
+            <a:pPr>
+              <a:defRPr/>
+            </a:pPr>
+            <a:endParaRPr lang="en-US"/>
+          </a:p>
+          <a:p>
+            <a:pPr>
+              <a:defRPr/>
+            </a:pPr>
+            <a:endParaRPr lang="en-US"/>
           </a:p>
         </p:txBody>
       </p:sp>
       <p:pic>
         <p:nvPicPr>
-          <p:cNvPr id="5" name="Content Placeholder 4"/>
+          <p:cNvPr id="724530482" name="Content Placeholder 4"/>
           <p:cNvPicPr>
-            <a:picLocks noGrp="1" noChangeAspect="1"/>
+            <a:picLocks noChangeAspect="1" noGrp="1"/>
           </p:cNvPicPr>
           <p:nvPr>
             <p:ph sz="half" idx="2"/>
           </p:nvPr>
         </p:nvPicPr>
-        <p:blipFill>
-          <a:blip r:embed="rId1"/>
-          <a:stretch>
-            <a:fillRect/>
-          </a:stretch>
+        <p:blipFill rotWithShape="1">
+          <a:blip r:embed="rId3"/>
+          <a:stretch/>
         </p:blipFill>
-        <p:spPr>
+        <p:spPr bwMode="auto">
           <a:xfrm>
             <a:off x="6172199" y="1825625"/>
             <a:ext cx="5799841" cy="4707149"/>
@@ -3483,19 +5765,27 @@
   <p:clrMapOvr>
     <a:masterClrMapping/>
   </p:clrMapOvr>
+  <mc:AlternateContent xmlns:mc="http://schemas.openxmlformats.org/markup-compatibility/2006">
+    <mc:Choice xmlns:p159="http://schemas.microsoft.com/office/powerpoint/2015/09/main" xmlns:p14="http://schemas.microsoft.com/office/powerpoint/2010/main" Requires="p159">
+      <p:transition p14:dur="500" advClick="1"/>
+    </mc:Choice>
+    <mc:Fallback>
+      <p:transition advClick="1"/>
+    </mc:Fallback>
+  </mc:AlternateContent>
 </p:sld>
 </file>
 
 <file path=ppt/slides/slide13.xml><?xml version="1.0" encoding="utf-8"?>
-<p:sld xmlns:a="http://schemas.openxmlformats.org/drawingml/2006/main" xmlns:r="http://schemas.openxmlformats.org/officeDocument/2006/relationships" xmlns:p="http://schemas.openxmlformats.org/presentationml/2006/main">
-  <p:cSld>
+<p:sld xmlns:a="http://schemas.openxmlformats.org/drawingml/2006/main" xmlns:r="http://schemas.openxmlformats.org/officeDocument/2006/relationships" xmlns:p="http://schemas.openxmlformats.org/presentationml/2006/main" xmlns:m="http://schemas.openxmlformats.org/officeDocument/2006/math" xmlns:w="http://schemas.openxmlformats.org/wordprocessingml/2006/main" xmlns:mc="http://schemas.openxmlformats.org/markup-compatibility/2006" showMasterPhAnim="0" showMasterSp="1" show="1">
+  <p:cSld name="">
     <p:spTree>
       <p:nvGrpSpPr>
         <p:cNvPr id="1" name=""/>
         <p:cNvGrpSpPr/>
         <p:nvPr/>
       </p:nvGrpSpPr>
-      <p:grpSpPr>
+      <p:grpSpPr bwMode="auto">
         <a:xfrm>
           <a:off x="0" y="0"/>
           <a:ext cx="0" cy="0"/>
@@ -3505,21 +5795,19 @@
       </p:grpSpPr>
       <p:pic>
         <p:nvPicPr>
-          <p:cNvPr id="5" name="Content Placeholder 4"/>
+          <p:cNvPr id="1335452407" name="Content Placeholder 4"/>
           <p:cNvPicPr>
-            <a:picLocks noGrp="1" noChangeAspect="1"/>
+            <a:picLocks noChangeAspect="1" noGrp="1"/>
           </p:cNvPicPr>
           <p:nvPr>
             <p:ph sz="half" idx="1"/>
           </p:nvPr>
         </p:nvPicPr>
-        <p:blipFill>
-          <a:blip r:embed="rId1"/>
-          <a:stretch>
-            <a:fillRect/>
-          </a:stretch>
+        <p:blipFill rotWithShape="1">
+          <a:blip r:embed="rId3"/>
+          <a:stretch/>
         </p:blipFill>
-        <p:spPr>
+        <p:spPr bwMode="auto">
           <a:xfrm>
             <a:off x="263951" y="1234911"/>
             <a:ext cx="11928049" cy="4942052"/>
@@ -3534,19 +5822,27 @@
   <p:clrMapOvr>
     <a:masterClrMapping/>
   </p:clrMapOvr>
+  <mc:AlternateContent xmlns:mc="http://schemas.openxmlformats.org/markup-compatibility/2006">
+    <mc:Choice xmlns:p159="http://schemas.microsoft.com/office/powerpoint/2015/09/main" xmlns:p14="http://schemas.microsoft.com/office/powerpoint/2010/main" Requires="p159">
+      <p:transition p14:dur="500" advClick="1"/>
+    </mc:Choice>
+    <mc:Fallback>
+      <p:transition advClick="1"/>
+    </mc:Fallback>
+  </mc:AlternateContent>
 </p:sld>
 </file>
 
 <file path=ppt/slides/slide14.xml><?xml version="1.0" encoding="utf-8"?>
-<p:sld xmlns:a="http://schemas.openxmlformats.org/drawingml/2006/main" xmlns:r="http://schemas.openxmlformats.org/officeDocument/2006/relationships" xmlns:p="http://schemas.openxmlformats.org/presentationml/2006/main">
-  <p:cSld>
+<p:sld xmlns:a="http://schemas.openxmlformats.org/drawingml/2006/main" xmlns:r="http://schemas.openxmlformats.org/officeDocument/2006/relationships" xmlns:p="http://schemas.openxmlformats.org/presentationml/2006/main" xmlns:m="http://schemas.openxmlformats.org/officeDocument/2006/math" xmlns:w="http://schemas.openxmlformats.org/wordprocessingml/2006/main" xmlns:mc="http://schemas.openxmlformats.org/markup-compatibility/2006" showMasterPhAnim="0" showMasterSp="1" show="1">
+  <p:cSld name="">
     <p:spTree>
       <p:nvGrpSpPr>
         <p:cNvPr id="1" name=""/>
         <p:cNvGrpSpPr/>
         <p:nvPr/>
       </p:nvGrpSpPr>
-      <p:grpSpPr>
+      <p:grpSpPr bwMode="auto">
         <a:xfrm>
           <a:off x="0" y="0"/>
           <a:ext cx="0" cy="0"/>
@@ -3556,7 +5852,7 @@
       </p:grpSpPr>
       <p:sp>
         <p:nvSpPr>
-          <p:cNvPr id="3" name="Content Placeholder 2"/>
+          <p:cNvPr id="1377421807" name="Content Placeholder 2"/>
           <p:cNvSpPr>
             <a:spLocks noGrp="1"/>
           </p:cNvSpPr>
@@ -3564,7 +5860,7 @@
             <p:ph sz="half" idx="1"/>
           </p:nvPr>
         </p:nvSpPr>
-        <p:spPr>
+        <p:spPr bwMode="auto">
           <a:xfrm>
             <a:off x="122548" y="0"/>
             <a:ext cx="5897252" cy="6749592"/>
@@ -3576,274 +5872,273 @@
           </a:bodyPr>
           <a:lstStyle/>
           <a:p>
-            <a:pPr marL="0" lvl="0" indent="0" eaLnBrk="0" fontAlgn="base" hangingPunct="0">
+            <a:pPr marL="0" lvl="0" indent="0">
               <a:lnSpc>
                 <a:spcPct val="100000"/>
               </a:lnSpc>
               <a:spcBef>
-                <a:spcPct val="0"/>
+                <a:spcPts val="0"/>
               </a:spcBef>
               <a:spcAft>
-                <a:spcPct val="0"/>
+                <a:spcPts val="0"/>
               </a:spcAft>
               <a:buNone/>
-            </a:pPr>
-            <a:r>
-              <a:rPr kumimoji="0" lang="en-US" altLang="en-US" b="1" i="0" u="none" strike="noStrike" cap="none" normalizeH="0" baseline="0" dirty="0" smtClean="0">
+              <a:defRPr/>
+            </a:pPr>
+            <a:r>
+              <a:rPr lang="en-US" b="1" i="0" u="none" strike="noStrike" cap="none">
                 <a:ln>
                   <a:noFill/>
                 </a:ln>
                 <a:solidFill>
                   <a:schemeClr val="tx1"/>
                 </a:solidFill>
-                <a:effectLst/>
-                <a:latin typeface="Times New Roman" panose="02020603050405020304" pitchFamily="18" charset="0"/>
-                <a:cs typeface="Times New Roman" panose="02020603050405020304" pitchFamily="18" charset="0"/>
+                <a:latin typeface="Times New Roman"/>
+                <a:cs typeface="Times New Roman"/>
               </a:rPr>
               <a:t>2. Closed </a:t>
             </a:r>
             <a:r>
-              <a:rPr kumimoji="0" lang="en-US" altLang="en-US" b="1" i="0" u="none" strike="noStrike" cap="none" normalizeH="0" baseline="0" dirty="0" err="1" smtClean="0">
+              <a:rPr lang="en-US" b="1" i="0" u="none" strike="noStrike" cap="none">
                 <a:ln>
                   <a:noFill/>
                 </a:ln>
                 <a:solidFill>
                   <a:schemeClr val="tx1"/>
                 </a:solidFill>
-                <a:effectLst/>
-                <a:latin typeface="Times New Roman" panose="02020603050405020304" pitchFamily="18" charset="0"/>
-                <a:cs typeface="Times New Roman" panose="02020603050405020304" pitchFamily="18" charset="0"/>
+                <a:latin typeface="Times New Roman"/>
+                <a:cs typeface="Times New Roman"/>
               </a:rPr>
               <a:t>Itemsets</a:t>
             </a:r>
-            <a:endParaRPr kumimoji="0" lang="en-US" altLang="en-US" b="1" i="0" u="none" strike="noStrike" cap="none" normalizeH="0" baseline="0" dirty="0" smtClean="0">
+            <a:endParaRPr lang="en-US" b="1" i="0" u="none" strike="noStrike" cap="none">
               <a:ln>
                 <a:noFill/>
               </a:ln>
               <a:solidFill>
                 <a:schemeClr val="tx1"/>
               </a:solidFill>
-              <a:effectLst/>
-              <a:latin typeface="Times New Roman" panose="02020603050405020304" pitchFamily="18" charset="0"/>
-              <a:cs typeface="Times New Roman" panose="02020603050405020304" pitchFamily="18" charset="0"/>
+              <a:latin typeface="Times New Roman"/>
+              <a:cs typeface="Times New Roman"/>
             </a:endParaRPr>
           </a:p>
           <a:p>
-            <a:pPr marL="0" lvl="0" indent="0" eaLnBrk="0" fontAlgn="base" hangingPunct="0">
+            <a:pPr marL="0" lvl="0" indent="0">
               <a:lnSpc>
                 <a:spcPct val="100000"/>
               </a:lnSpc>
               <a:spcBef>
-                <a:spcPct val="0"/>
+                <a:spcPts val="0"/>
               </a:spcBef>
               <a:spcAft>
-                <a:spcPct val="0"/>
+                <a:spcPts val="0"/>
               </a:spcAft>
               <a:buNone/>
-            </a:pPr>
-            <a:endParaRPr kumimoji="0" lang="en-US" altLang="en-US" b="1" i="0" u="none" strike="noStrike" cap="none" normalizeH="0" baseline="0" dirty="0" smtClean="0">
+              <a:defRPr/>
+            </a:pPr>
+            <a:endParaRPr lang="en-US" b="1" i="0" u="none" strike="noStrike" cap="none">
               <a:ln>
                 <a:noFill/>
               </a:ln>
               <a:solidFill>
                 <a:schemeClr val="tx1"/>
               </a:solidFill>
-              <a:effectLst/>
-              <a:latin typeface="Times New Roman" panose="02020603050405020304" pitchFamily="18" charset="0"/>
-              <a:cs typeface="Times New Roman" panose="02020603050405020304" pitchFamily="18" charset="0"/>
+              <a:latin typeface="Times New Roman"/>
+              <a:cs typeface="Times New Roman"/>
             </a:endParaRPr>
           </a:p>
           <a:p>
-            <a:pPr marL="0" lvl="0" indent="0" eaLnBrk="0" fontAlgn="base" hangingPunct="0">
+            <a:pPr marL="0" lvl="0" indent="0">
               <a:lnSpc>
                 <a:spcPct val="100000"/>
               </a:lnSpc>
               <a:spcBef>
-                <a:spcPct val="0"/>
+                <a:spcPts val="0"/>
               </a:spcBef>
               <a:spcAft>
-                <a:spcPct val="0"/>
+                <a:spcPts val="0"/>
               </a:spcAft>
               <a:buNone/>
-            </a:pPr>
-            <a:r>
-              <a:rPr kumimoji="0" lang="en-US" altLang="en-US" b="0" i="0" u="none" strike="noStrike" cap="none" normalizeH="0" baseline="0" dirty="0" smtClean="0">
+              <a:defRPr/>
+            </a:pPr>
+            <a:r>
+              <a:rPr lang="en-US" b="0" i="0" u="none" strike="noStrike" cap="none">
                 <a:ln>
                   <a:noFill/>
                 </a:ln>
                 <a:solidFill>
                   <a:schemeClr val="tx1"/>
                 </a:solidFill>
-                <a:effectLst/>
-                <a:latin typeface="Times New Roman" panose="02020603050405020304" pitchFamily="18" charset="0"/>
-                <a:cs typeface="Times New Roman" panose="02020603050405020304" pitchFamily="18" charset="0"/>
+                <a:latin typeface="Times New Roman"/>
+                <a:cs typeface="Times New Roman"/>
               </a:rPr>
               <a:t>A </a:t>
             </a:r>
             <a:r>
-              <a:rPr lang="en-US" altLang="en-US" b="1" dirty="0">
-                <a:latin typeface="Times New Roman" panose="02020603050405020304" pitchFamily="18" charset="0"/>
-                <a:cs typeface="Times New Roman" panose="02020603050405020304" pitchFamily="18" charset="0"/>
+              <a:rPr lang="en-US" b="1">
+                <a:latin typeface="Times New Roman"/>
+                <a:cs typeface="Times New Roman"/>
               </a:rPr>
               <a:t>Closed </a:t>
             </a:r>
             <a:r>
-              <a:rPr lang="en-US" altLang="en-US" b="1" dirty="0" err="1">
-                <a:latin typeface="Times New Roman" panose="02020603050405020304" pitchFamily="18" charset="0"/>
-                <a:cs typeface="Times New Roman" panose="02020603050405020304" pitchFamily="18" charset="0"/>
+              <a:rPr lang="en-US" b="1">
+                <a:latin typeface="Times New Roman"/>
+                <a:cs typeface="Times New Roman"/>
               </a:rPr>
               <a:t>Itemset</a:t>
             </a:r>
             <a:r>
-              <a:rPr lang="en-US" altLang="en-US" dirty="0">
-                <a:latin typeface="Times New Roman" panose="02020603050405020304" pitchFamily="18" charset="0"/>
-                <a:cs typeface="Times New Roman" panose="02020603050405020304" pitchFamily="18" charset="0"/>
+              <a:rPr lang="en-US">
+                <a:latin typeface="Times New Roman"/>
+                <a:cs typeface="Times New Roman"/>
               </a:rPr>
               <a:t> is a frequent </a:t>
             </a:r>
             <a:r>
-              <a:rPr lang="en-US" altLang="en-US" dirty="0" err="1">
-                <a:latin typeface="Times New Roman" panose="02020603050405020304" pitchFamily="18" charset="0"/>
-                <a:cs typeface="Times New Roman" panose="02020603050405020304" pitchFamily="18" charset="0"/>
+              <a:rPr lang="en-US">
+                <a:latin typeface="Times New Roman"/>
+                <a:cs typeface="Times New Roman"/>
               </a:rPr>
               <a:t>itemset</a:t>
             </a:r>
             <a:r>
-              <a:rPr lang="en-US" altLang="en-US" dirty="0">
-                <a:latin typeface="Times New Roman" panose="02020603050405020304" pitchFamily="18" charset="0"/>
-                <a:cs typeface="Times New Roman" panose="02020603050405020304" pitchFamily="18" charset="0"/>
+              <a:rPr lang="en-US">
+                <a:latin typeface="Times New Roman"/>
+                <a:cs typeface="Times New Roman"/>
               </a:rPr>
               <a:t> for which no superset has the same support count</a:t>
             </a:r>
             <a:r>
-              <a:rPr lang="en-US" altLang="en-US" dirty="0" smtClean="0">
-                <a:latin typeface="Times New Roman" panose="02020603050405020304" pitchFamily="18" charset="0"/>
-                <a:cs typeface="Times New Roman" panose="02020603050405020304" pitchFamily="18" charset="0"/>
+              <a:rPr lang="en-US">
+                <a:latin typeface="Times New Roman"/>
+                <a:cs typeface="Times New Roman"/>
               </a:rPr>
               <a:t>.</a:t>
             </a:r>
-            <a:endParaRPr lang="en-US" altLang="en-US" dirty="0" smtClean="0">
-              <a:latin typeface="Times New Roman" panose="02020603050405020304" pitchFamily="18" charset="0"/>
-              <a:cs typeface="Times New Roman" panose="02020603050405020304" pitchFamily="18" charset="0"/>
+            <a:endParaRPr lang="en-US">
+              <a:latin typeface="Times New Roman"/>
+              <a:cs typeface="Times New Roman"/>
             </a:endParaRPr>
           </a:p>
           <a:p>
-            <a:pPr marL="0" lvl="0" indent="0" eaLnBrk="0" fontAlgn="base" hangingPunct="0">
+            <a:pPr marL="0" lvl="0" indent="0">
               <a:lnSpc>
                 <a:spcPct val="100000"/>
               </a:lnSpc>
               <a:spcBef>
-                <a:spcPct val="0"/>
+                <a:spcPts val="0"/>
               </a:spcBef>
               <a:spcAft>
-                <a:spcPct val="0"/>
+                <a:spcPts val="0"/>
               </a:spcAft>
               <a:buNone/>
-            </a:pPr>
-            <a:endParaRPr kumimoji="0" lang="en-US" altLang="en-US" b="1" i="0" u="none" strike="noStrike" cap="none" normalizeH="0" baseline="0" dirty="0" smtClean="0">
+              <a:defRPr/>
+            </a:pPr>
+            <a:endParaRPr lang="en-US" b="1" i="0" u="none" strike="noStrike" cap="none">
               <a:ln>
                 <a:noFill/>
               </a:ln>
               <a:solidFill>
                 <a:schemeClr val="tx1"/>
               </a:solidFill>
-              <a:effectLst/>
-              <a:latin typeface="Times New Roman" panose="02020603050405020304" pitchFamily="18" charset="0"/>
-              <a:cs typeface="Times New Roman" panose="02020603050405020304" pitchFamily="18" charset="0"/>
+              <a:latin typeface="Times New Roman"/>
+              <a:cs typeface="Times New Roman"/>
             </a:endParaRPr>
           </a:p>
           <a:p>
-            <a:pPr marL="0" lvl="0" indent="0" eaLnBrk="0" fontAlgn="base" hangingPunct="0">
+            <a:pPr marL="0" lvl="0" indent="0">
               <a:lnSpc>
                 <a:spcPct val="100000"/>
               </a:lnSpc>
               <a:spcBef>
-                <a:spcPct val="0"/>
+                <a:spcPts val="0"/>
               </a:spcBef>
               <a:spcAft>
-                <a:spcPct val="0"/>
+                <a:spcPts val="0"/>
               </a:spcAft>
               <a:buNone/>
-            </a:pPr>
-            <a:r>
-              <a:rPr kumimoji="0" lang="en-US" altLang="en-US" b="0" i="0" u="none" strike="noStrike" cap="none" normalizeH="0" baseline="0" dirty="0" smtClean="0">
+              <a:defRPr/>
+            </a:pPr>
+            <a:r>
+              <a:rPr lang="en-US" b="0" i="0" u="none" strike="noStrike" cap="none">
                 <a:ln>
                   <a:noFill/>
                 </a:ln>
                 <a:solidFill>
                   <a:schemeClr val="tx1"/>
                 </a:solidFill>
-                <a:effectLst/>
-                <a:latin typeface="Times New Roman" panose="02020603050405020304" pitchFamily="18" charset="0"/>
-                <a:cs typeface="Times New Roman" panose="02020603050405020304" pitchFamily="18" charset="0"/>
+                <a:latin typeface="Times New Roman"/>
+                <a:cs typeface="Times New Roman"/>
               </a:rPr>
               <a:t>An </a:t>
             </a:r>
             <a:r>
-              <a:rPr kumimoji="0" lang="en-US" altLang="en-US" b="0" i="0" u="none" strike="noStrike" cap="none" normalizeH="0" baseline="0" dirty="0" err="1" smtClean="0">
+              <a:rPr lang="en-US" b="0" i="0" u="none" strike="noStrike" cap="none">
                 <a:ln>
                   <a:noFill/>
                 </a:ln>
                 <a:solidFill>
                   <a:schemeClr val="tx1"/>
                 </a:solidFill>
-                <a:effectLst/>
-                <a:latin typeface="Times New Roman" panose="02020603050405020304" pitchFamily="18" charset="0"/>
-                <a:cs typeface="Times New Roman" panose="02020603050405020304" pitchFamily="18" charset="0"/>
+                <a:latin typeface="Times New Roman"/>
+                <a:cs typeface="Times New Roman"/>
               </a:rPr>
               <a:t>itemset</a:t>
             </a:r>
             <a:r>
-              <a:rPr kumimoji="0" lang="en-US" altLang="en-US" b="0" i="0" u="none" strike="noStrike" cap="none" normalizeH="0" baseline="0" dirty="0" smtClean="0">
+              <a:rPr lang="en-US" b="0" i="0" u="none" strike="noStrike" cap="none">
                 <a:ln>
                   <a:noFill/>
                 </a:ln>
                 <a:solidFill>
                   <a:schemeClr val="tx1"/>
                 </a:solidFill>
-                <a:effectLst/>
-                <a:latin typeface="Times New Roman" panose="02020603050405020304" pitchFamily="18" charset="0"/>
-                <a:cs typeface="Times New Roman" panose="02020603050405020304" pitchFamily="18" charset="0"/>
+                <a:latin typeface="Times New Roman"/>
+                <a:cs typeface="Times New Roman"/>
               </a:rPr>
               <a:t> is called </a:t>
             </a:r>
             <a:r>
-              <a:rPr lang="en-US" altLang="en-US" b="1" dirty="0">
-                <a:latin typeface="Times New Roman" panose="02020603050405020304" pitchFamily="18" charset="0"/>
-                <a:cs typeface="Times New Roman" panose="02020603050405020304" pitchFamily="18" charset="0"/>
+              <a:rPr lang="en-US" b="1">
+                <a:latin typeface="Times New Roman"/>
+                <a:cs typeface="Times New Roman"/>
               </a:rPr>
               <a:t>closed</a:t>
             </a:r>
             <a:r>
-              <a:rPr lang="en-US" altLang="en-US" dirty="0">
-                <a:latin typeface="Times New Roman" panose="02020603050405020304" pitchFamily="18" charset="0"/>
-                <a:cs typeface="Times New Roman" panose="02020603050405020304" pitchFamily="18" charset="0"/>
+              <a:rPr lang="en-US">
+                <a:latin typeface="Times New Roman"/>
+                <a:cs typeface="Times New Roman"/>
               </a:rPr>
               <a:t> if there is no larger </a:t>
             </a:r>
             <a:r>
-              <a:rPr lang="en-US" altLang="en-US" dirty="0" err="1">
-                <a:latin typeface="Times New Roman" panose="02020603050405020304" pitchFamily="18" charset="0"/>
-                <a:cs typeface="Times New Roman" panose="02020603050405020304" pitchFamily="18" charset="0"/>
+              <a:rPr lang="en-US">
+                <a:latin typeface="Times New Roman"/>
+                <a:cs typeface="Times New Roman"/>
               </a:rPr>
               <a:t>itemset</a:t>
             </a:r>
             <a:r>
-              <a:rPr lang="en-US" altLang="en-US" dirty="0">
-                <a:latin typeface="Times New Roman" panose="02020603050405020304" pitchFamily="18" charset="0"/>
-                <a:cs typeface="Times New Roman" panose="02020603050405020304" pitchFamily="18" charset="0"/>
+              <a:rPr lang="en-US">
+                <a:latin typeface="Times New Roman"/>
+                <a:cs typeface="Times New Roman"/>
               </a:rPr>
               <a:t> containing it with the same support.</a:t>
             </a:r>
-            <a:endParaRPr lang="en-US" altLang="en-US" dirty="0">
-              <a:latin typeface="Times New Roman" panose="02020603050405020304" pitchFamily="18" charset="0"/>
-              <a:cs typeface="Times New Roman" panose="02020603050405020304" pitchFamily="18" charset="0"/>
+            <a:endParaRPr lang="en-US">
+              <a:latin typeface="Times New Roman"/>
+              <a:cs typeface="Times New Roman"/>
             </a:endParaRPr>
           </a:p>
           <a:p>
-            <a:endParaRPr lang="en-US" dirty="0">
-              <a:latin typeface="Times New Roman" panose="02020603050405020304" pitchFamily="18" charset="0"/>
-              <a:cs typeface="Times New Roman" panose="02020603050405020304" pitchFamily="18" charset="0"/>
+            <a:pPr>
+              <a:defRPr/>
+            </a:pPr>
+            <a:endParaRPr lang="en-US">
+              <a:latin typeface="Times New Roman"/>
+              <a:cs typeface="Times New Roman"/>
             </a:endParaRPr>
           </a:p>
         </p:txBody>
@@ -3853,19 +6148,27 @@
   <p:clrMapOvr>
     <a:masterClrMapping/>
   </p:clrMapOvr>
+  <mc:AlternateContent xmlns:mc="http://schemas.openxmlformats.org/markup-compatibility/2006">
+    <mc:Choice xmlns:p159="http://schemas.microsoft.com/office/powerpoint/2015/09/main" xmlns:p14="http://schemas.microsoft.com/office/powerpoint/2010/main" Requires="p159">
+      <p:transition p14:dur="500" advClick="1"/>
+    </mc:Choice>
+    <mc:Fallback>
+      <p:transition advClick="1"/>
+    </mc:Fallback>
+  </mc:AlternateContent>
 </p:sld>
 </file>
 
 <file path=ppt/slides/slide15.xml><?xml version="1.0" encoding="utf-8"?>
-<p:sld xmlns:a="http://schemas.openxmlformats.org/drawingml/2006/main" xmlns:r="http://schemas.openxmlformats.org/officeDocument/2006/relationships" xmlns:p="http://schemas.openxmlformats.org/presentationml/2006/main">
-  <p:cSld>
+<p:sld xmlns:a="http://schemas.openxmlformats.org/drawingml/2006/main" xmlns:r="http://schemas.openxmlformats.org/officeDocument/2006/relationships" xmlns:p="http://schemas.openxmlformats.org/presentationml/2006/main" xmlns:m="http://schemas.openxmlformats.org/officeDocument/2006/math" xmlns:w="http://schemas.openxmlformats.org/wordprocessingml/2006/main" xmlns:mc="http://schemas.openxmlformats.org/markup-compatibility/2006" showMasterPhAnim="0" showMasterSp="1" show="1">
+  <p:cSld name="">
     <p:spTree>
       <p:nvGrpSpPr>
         <p:cNvPr id="1" name=""/>
         <p:cNvGrpSpPr/>
         <p:nvPr/>
       </p:nvGrpSpPr>
-      <p:grpSpPr>
+      <p:grpSpPr bwMode="auto">
         <a:xfrm>
           <a:off x="0" y="0"/>
           <a:ext cx="0" cy="0"/>
@@ -3875,21 +6178,19 @@
       </p:grpSpPr>
       <p:pic>
         <p:nvPicPr>
-          <p:cNvPr id="5" name="Content Placeholder 4"/>
+          <p:cNvPr id="1055953635" name="Content Placeholder 4"/>
           <p:cNvPicPr>
-            <a:picLocks noGrp="1" noChangeAspect="1"/>
+            <a:picLocks noChangeAspect="1" noGrp="1"/>
           </p:cNvPicPr>
           <p:nvPr>
             <p:ph sz="half" idx="1"/>
           </p:nvPr>
         </p:nvPicPr>
-        <p:blipFill>
-          <a:blip r:embed="rId1"/>
-          <a:stretch>
-            <a:fillRect/>
-          </a:stretch>
+        <p:blipFill rotWithShape="1">
+          <a:blip r:embed="rId3"/>
+          <a:stretch/>
         </p:blipFill>
-        <p:spPr>
+        <p:spPr bwMode="auto">
           <a:xfrm>
             <a:off x="137113" y="424206"/>
             <a:ext cx="6035087" cy="6155703"/>
@@ -3901,7 +6202,7 @@
       </p:pic>
       <p:sp>
         <p:nvSpPr>
-          <p:cNvPr id="4" name="Content Placeholder 3"/>
+          <p:cNvPr id="1120373349" name="Content Placeholder 3"/>
           <p:cNvSpPr>
             <a:spLocks noGrp="1"/>
           </p:cNvSpPr>
@@ -3909,38 +6210,47 @@
             <p:ph sz="half" idx="2"/>
           </p:nvPr>
         </p:nvSpPr>
-        <p:spPr/>
-        <p:txBody>
-          <a:bodyPr/>
-          <a:lstStyle/>
-          <a:p>
-            <a:r>
-              <a:rPr lang="en-US" dirty="0" smtClean="0"/>
+        <p:spPr bwMode="auto"/>
+        <p:txBody>
+          <a:bodyPr/>
+          <a:lstStyle/>
+          <a:p>
+            <a:pPr>
+              <a:defRPr/>
+            </a:pPr>
+            <a:r>
+              <a:rPr lang="en-US"/>
               <a:t>Therefore:</a:t>
             </a:r>
-            <a:endParaRPr lang="en-US" dirty="0" smtClean="0"/>
-          </a:p>
-          <a:p>
-            <a:r>
-              <a:rPr lang="en-US" dirty="0" smtClean="0"/>
+            <a:endParaRPr lang="en-US"/>
+          </a:p>
+          <a:p>
+            <a:pPr>
+              <a:defRPr/>
+            </a:pPr>
+            <a:r>
+              <a:rPr lang="en-US"/>
               <a:t>Bread is a </a:t>
             </a:r>
             <a:r>
-              <a:rPr lang="en-US" b="1" dirty="0" smtClean="0"/>
+              <a:rPr lang="en-US" b="1"/>
               <a:t>Closed </a:t>
             </a:r>
             <a:r>
-              <a:rPr lang="en-US" b="1" dirty="0" err="1" smtClean="0"/>
+              <a:rPr lang="en-US" b="1"/>
               <a:t>Itemset</a:t>
             </a:r>
             <a:r>
-              <a:rPr lang="en-US" dirty="0" smtClean="0"/>
+              <a:rPr lang="en-US"/>
               <a:t>.</a:t>
             </a:r>
-            <a:endParaRPr lang="en-US" dirty="0" smtClean="0"/>
-          </a:p>
-          <a:p>
-            <a:endParaRPr lang="en-US" dirty="0"/>
+            <a:endParaRPr lang="en-US"/>
+          </a:p>
+          <a:p>
+            <a:pPr>
+              <a:defRPr/>
+            </a:pPr>
+            <a:endParaRPr lang="en-US"/>
           </a:p>
         </p:txBody>
       </p:sp>
@@ -3949,19 +6259,27 @@
   <p:clrMapOvr>
     <a:masterClrMapping/>
   </p:clrMapOvr>
+  <mc:AlternateContent xmlns:mc="http://schemas.openxmlformats.org/markup-compatibility/2006">
+    <mc:Choice xmlns:p159="http://schemas.microsoft.com/office/powerpoint/2015/09/main" xmlns:p14="http://schemas.microsoft.com/office/powerpoint/2010/main" Requires="p159">
+      <p:transition p14:dur="500" advClick="1"/>
+    </mc:Choice>
+    <mc:Fallback>
+      <p:transition advClick="1"/>
+    </mc:Fallback>
+  </mc:AlternateContent>
 </p:sld>
 </file>
 
 <file path=ppt/slides/slide16.xml><?xml version="1.0" encoding="utf-8"?>
-<p:sld xmlns:a="http://schemas.openxmlformats.org/drawingml/2006/main" xmlns:r="http://schemas.openxmlformats.org/officeDocument/2006/relationships" xmlns:p="http://schemas.openxmlformats.org/presentationml/2006/main">
-  <p:cSld>
+<p:sld xmlns:a="http://schemas.openxmlformats.org/drawingml/2006/main" xmlns:r="http://schemas.openxmlformats.org/officeDocument/2006/relationships" xmlns:p="http://schemas.openxmlformats.org/presentationml/2006/main" xmlns:m="http://schemas.openxmlformats.org/officeDocument/2006/math" xmlns:w="http://schemas.openxmlformats.org/wordprocessingml/2006/main" xmlns:mc="http://schemas.openxmlformats.org/markup-compatibility/2006" showMasterPhAnim="0" showMasterSp="1" show="1">
+  <p:cSld name="">
     <p:spTree>
       <p:nvGrpSpPr>
         <p:cNvPr id="1" name=""/>
         <p:cNvGrpSpPr/>
         <p:nvPr/>
       </p:nvGrpSpPr>
-      <p:grpSpPr>
+      <p:grpSpPr bwMode="auto">
         <a:xfrm>
           <a:off x="0" y="0"/>
           <a:ext cx="0" cy="0"/>
@@ -3971,21 +6289,19 @@
       </p:grpSpPr>
       <p:pic>
         <p:nvPicPr>
-          <p:cNvPr id="5" name="Content Placeholder 4"/>
+          <p:cNvPr id="757041172" name="Content Placeholder 4"/>
           <p:cNvPicPr>
-            <a:picLocks noGrp="1" noChangeAspect="1"/>
+            <a:picLocks noChangeAspect="1" noGrp="1"/>
           </p:cNvPicPr>
           <p:nvPr>
             <p:ph sz="half" idx="1"/>
           </p:nvPr>
         </p:nvPicPr>
-        <p:blipFill>
-          <a:blip r:embed="rId1"/>
-          <a:stretch>
-            <a:fillRect/>
-          </a:stretch>
+        <p:blipFill rotWithShape="1">
+          <a:blip r:embed="rId3"/>
+          <a:stretch/>
         </p:blipFill>
-        <p:spPr>
+        <p:spPr bwMode="auto">
           <a:xfrm>
             <a:off x="149196" y="895546"/>
             <a:ext cx="11888833" cy="5281417"/>
@@ -4000,19 +6316,27 @@
   <p:clrMapOvr>
     <a:masterClrMapping/>
   </p:clrMapOvr>
+  <mc:AlternateContent xmlns:mc="http://schemas.openxmlformats.org/markup-compatibility/2006">
+    <mc:Choice xmlns:p159="http://schemas.microsoft.com/office/powerpoint/2015/09/main" xmlns:p14="http://schemas.microsoft.com/office/powerpoint/2010/main" Requires="p159">
+      <p:transition p14:dur="500" advClick="1"/>
+    </mc:Choice>
+    <mc:Fallback>
+      <p:transition advClick="1"/>
+    </mc:Fallback>
+  </mc:AlternateContent>
 </p:sld>
 </file>
 
 <file path=ppt/slides/slide17.xml><?xml version="1.0" encoding="utf-8"?>
-<p:sld xmlns:a="http://schemas.openxmlformats.org/drawingml/2006/main" xmlns:r="http://schemas.openxmlformats.org/officeDocument/2006/relationships" xmlns:p="http://schemas.openxmlformats.org/presentationml/2006/main">
-  <p:cSld>
+<p:sld xmlns:a="http://schemas.openxmlformats.org/drawingml/2006/main" xmlns:r="http://schemas.openxmlformats.org/officeDocument/2006/relationships" xmlns:p="http://schemas.openxmlformats.org/presentationml/2006/main" xmlns:m="http://schemas.openxmlformats.org/officeDocument/2006/math" xmlns:w="http://schemas.openxmlformats.org/wordprocessingml/2006/main" xmlns:mc="http://schemas.openxmlformats.org/markup-compatibility/2006" showMasterPhAnim="0" showMasterSp="1" show="1">
+  <p:cSld name="">
     <p:spTree>
       <p:nvGrpSpPr>
         <p:cNvPr id="1" name=""/>
         <p:cNvGrpSpPr/>
         <p:nvPr/>
       </p:nvGrpSpPr>
-      <p:grpSpPr>
+      <p:grpSpPr bwMode="auto">
         <a:xfrm>
           <a:off x="0" y="0"/>
           <a:ext cx="0" cy="0"/>
@@ -4022,7 +6346,7 @@
       </p:grpSpPr>
       <p:sp>
         <p:nvSpPr>
-          <p:cNvPr id="3" name="Content Placeholder 2"/>
+          <p:cNvPr id="928093619" name="Content Placeholder 2"/>
           <p:cNvSpPr>
             <a:spLocks noGrp="1"/>
           </p:cNvSpPr>
@@ -4030,7 +6354,7 @@
             <p:ph sz="half" idx="1"/>
           </p:nvPr>
         </p:nvSpPr>
-        <p:spPr>
+        <p:spPr bwMode="auto">
           <a:xfrm>
             <a:off x="0" y="0"/>
             <a:ext cx="6019800" cy="6683604"/>
@@ -4042,63 +6366,84 @@
           </a:bodyPr>
           <a:lstStyle/>
           <a:p>
-            <a:r>
-              <a:rPr lang="en-US" b="1" dirty="0"/>
+            <a:pPr>
+              <a:defRPr/>
+            </a:pPr>
+            <a:r>
+              <a:rPr lang="en-US" b="1"/>
               <a:t>Association Rules</a:t>
             </a:r>
-            <a:endParaRPr lang="en-US" b="1" dirty="0"/>
-          </a:p>
-          <a:p>
-            <a:r>
-              <a:rPr lang="en-US" dirty="0"/>
+            <a:endParaRPr lang="en-US" b="1"/>
+          </a:p>
+          <a:p>
+            <a:pPr>
+              <a:defRPr/>
+            </a:pPr>
+            <a:r>
+              <a:rPr lang="en-US"/>
               <a:t>Association rule mining is a data mining technique used to discover interesting relationships, patterns, or associations among items in large databases. </a:t>
             </a:r>
-            <a:endParaRPr lang="en-US" dirty="0" smtClean="0"/>
-          </a:p>
-          <a:p>
-            <a:endParaRPr lang="en-US" dirty="0"/>
-          </a:p>
-          <a:p>
-            <a:r>
-              <a:rPr lang="en-US" dirty="0" smtClean="0"/>
+            <a:endParaRPr lang="en-US"/>
+          </a:p>
+          <a:p>
+            <a:pPr>
+              <a:defRPr/>
+            </a:pPr>
+            <a:endParaRPr lang="en-US"/>
+          </a:p>
+          <a:p>
+            <a:pPr>
+              <a:defRPr/>
+            </a:pPr>
+            <a:r>
+              <a:rPr lang="en-US"/>
               <a:t>It </a:t>
             </a:r>
             <a:r>
-              <a:rPr lang="en-US" dirty="0"/>
+              <a:rPr lang="en-US"/>
               <a:t>is widely used in market basket analysis, recommendation systems, web usage mining, and business analytics</a:t>
             </a:r>
             <a:r>
-              <a:rPr lang="en-US" dirty="0" smtClean="0"/>
+              <a:rPr lang="en-US"/>
               <a:t>.</a:t>
             </a:r>
-            <a:endParaRPr lang="en-US" dirty="0" smtClean="0"/>
-          </a:p>
-          <a:p>
-            <a:endParaRPr lang="en-US" dirty="0"/>
-          </a:p>
-          <a:p>
-            <a:r>
-              <a:rPr lang="en-US" dirty="0"/>
+            <a:endParaRPr lang="en-US"/>
+          </a:p>
+          <a:p>
+            <a:pPr>
+              <a:defRPr/>
+            </a:pPr>
+            <a:endParaRPr lang="en-US"/>
+          </a:p>
+          <a:p>
+            <a:pPr>
+              <a:defRPr/>
+            </a:pPr>
+            <a:r>
+              <a:rPr lang="en-US"/>
               <a:t>An association rule is generally written in the form:</a:t>
             </a:r>
-            <a:endParaRPr lang="en-US" dirty="0"/>
-          </a:p>
-          <a:p>
-            <a:r>
-              <a:rPr lang="en-US" dirty="0"/>
+            <a:endParaRPr lang="en-US"/>
+          </a:p>
+          <a:p>
+            <a:pPr>
+              <a:defRPr/>
+            </a:pPr>
+            <a:r>
+              <a:rPr lang="en-US"/>
               <a:t>X→</a:t>
             </a:r>
             <a:r>
-              <a:rPr lang="en-US" dirty="0" smtClean="0"/>
+              <a:rPr lang="en-US"/>
               <a:t>Y</a:t>
             </a:r>
-            <a:endParaRPr lang="en-US" dirty="0"/>
-          </a:p>
-        </p:txBody>
-      </p:sp>
-      <p:sp>
-        <p:nvSpPr>
-          <p:cNvPr id="4" name="Content Placeholder 3"/>
+            <a:endParaRPr lang="en-US"/>
+          </a:p>
+        </p:txBody>
+      </p:sp>
+      <p:sp>
+        <p:nvSpPr>
+          <p:cNvPr id="149866330" name="Content Placeholder 3"/>
           <p:cNvSpPr>
             <a:spLocks noGrp="1"/>
           </p:cNvSpPr>
@@ -4106,10 +6451,10 @@
             <p:ph sz="half" idx="2"/>
           </p:nvPr>
         </p:nvSpPr>
-        <p:spPr>
+        <p:spPr bwMode="auto">
           <a:xfrm>
             <a:off x="6172199" y="75414"/>
-            <a:ext cx="5818695" cy="6693031"/>
+            <a:ext cx="5818695" cy="6693030"/>
           </a:xfrm>
         </p:spPr>
         <p:txBody>
@@ -4118,95 +6463,122 @@
           </a:bodyPr>
           <a:lstStyle/>
           <a:p>
-            <a:r>
-              <a:rPr lang="en-US" dirty="0"/>
+            <a:pPr>
+              <a:defRPr/>
+            </a:pPr>
+            <a:r>
+              <a:rPr lang="en-US"/>
               <a:t>where:</a:t>
             </a:r>
-            <a:endParaRPr lang="en-US" dirty="0"/>
-          </a:p>
-          <a:p>
-            <a:r>
-              <a:rPr lang="en-US" b="1" dirty="0"/>
+            <a:endParaRPr lang="en-US"/>
+          </a:p>
+          <a:p>
+            <a:pPr>
+              <a:defRPr/>
+            </a:pPr>
+            <a:r>
+              <a:rPr lang="en-US" b="1"/>
               <a:t>X</a:t>
             </a:r>
             <a:r>
-              <a:rPr lang="en-US" dirty="0"/>
+              <a:rPr lang="en-US"/>
               <a:t> = antecedent (if part) </a:t>
             </a:r>
-            <a:endParaRPr lang="en-US" dirty="0"/>
-          </a:p>
-          <a:p>
-            <a:r>
-              <a:rPr lang="en-US" b="1" dirty="0"/>
+            <a:endParaRPr lang="en-US"/>
+          </a:p>
+          <a:p>
+            <a:pPr>
+              <a:defRPr/>
+            </a:pPr>
+            <a:r>
+              <a:rPr lang="en-US" b="1"/>
               <a:t>Y</a:t>
             </a:r>
             <a:r>
-              <a:rPr lang="en-US" dirty="0"/>
+              <a:rPr lang="en-US"/>
               <a:t> = consequent (then part) </a:t>
             </a:r>
-            <a:endParaRPr lang="en-US" dirty="0"/>
-          </a:p>
-          <a:p>
-            <a:r>
-              <a:rPr lang="en-US" dirty="0"/>
+            <a:endParaRPr lang="en-US"/>
+          </a:p>
+          <a:p>
+            <a:pPr>
+              <a:defRPr/>
+            </a:pPr>
+            <a:r>
+              <a:rPr lang="en-US"/>
               <a:t>This means that if item </a:t>
             </a:r>
             <a:r>
-              <a:rPr lang="en-US" b="1" dirty="0"/>
+              <a:rPr lang="en-US" b="1"/>
               <a:t>X</a:t>
             </a:r>
             <a:r>
-              <a:rPr lang="en-US" dirty="0"/>
+              <a:rPr lang="en-US"/>
               <a:t> occurs, item </a:t>
             </a:r>
             <a:r>
-              <a:rPr lang="en-US" b="1" dirty="0"/>
+              <a:rPr lang="en-US" b="1"/>
               <a:t>Y</a:t>
             </a:r>
             <a:r>
-              <a:rPr lang="en-US" dirty="0"/>
+              <a:rPr lang="en-US"/>
               <a:t> is likely to occur as well.</a:t>
             </a:r>
-            <a:endParaRPr lang="en-US" dirty="0"/>
-          </a:p>
-          <a:p>
-            <a:r>
-              <a:rPr lang="en-US" dirty="0"/>
+            <a:endParaRPr lang="en-US"/>
+          </a:p>
+          <a:p>
+            <a:pPr>
+              <a:defRPr/>
+            </a:pPr>
+            <a:r>
+              <a:rPr lang="en-US"/>
               <a:t>Example</a:t>
             </a:r>
             <a:r>
-              <a:rPr lang="en-US" dirty="0" smtClean="0"/>
+              <a:rPr lang="en-US"/>
               <a:t>:</a:t>
             </a:r>
-            <a:endParaRPr lang="en-US" dirty="0" smtClean="0"/>
-          </a:p>
-          <a:p>
-            <a:r>
-              <a:rPr lang="en-US" dirty="0" smtClean="0"/>
+            <a:endParaRPr lang="en-US"/>
+          </a:p>
+          <a:p>
+            <a:pPr>
+              <a:defRPr/>
+            </a:pPr>
+            <a:r>
+              <a:rPr lang="en-US"/>
               <a:t>Bread → Butter</a:t>
             </a:r>
-            <a:endParaRPr lang="en-US" dirty="0"/>
-          </a:p>
-          <a:p>
-            <a:r>
-              <a:rPr lang="en-US" dirty="0" smtClean="0"/>
+            <a:endParaRPr lang="en-US"/>
+          </a:p>
+          <a:p>
+            <a:pPr>
+              <a:defRPr/>
+            </a:pPr>
+            <a:r>
+              <a:rPr lang="en-US"/>
               <a:t>It </a:t>
             </a:r>
             <a:r>
-              <a:rPr lang="en-US" dirty="0"/>
+              <a:rPr lang="en-US"/>
               <a:t>means customers who buy bread also tend to buy butter</a:t>
             </a:r>
             <a:r>
-              <a:rPr lang="en-US" dirty="0" smtClean="0"/>
+              <a:rPr lang="en-US"/>
               <a:t>.</a:t>
             </a:r>
-            <a:endParaRPr lang="en-US" dirty="0" smtClean="0"/>
-          </a:p>
-          <a:p>
-            <a:endParaRPr lang="en-US" dirty="0"/>
-          </a:p>
-          <a:p>
-            <a:endParaRPr lang="en-US" dirty="0"/>
+            <a:endParaRPr lang="en-US"/>
+          </a:p>
+          <a:p>
+            <a:pPr>
+              <a:defRPr/>
+            </a:pPr>
+            <a:endParaRPr lang="en-US"/>
+          </a:p>
+          <a:p>
+            <a:pPr>
+              <a:defRPr/>
+            </a:pPr>
+            <a:endParaRPr lang="en-US"/>
           </a:p>
         </p:txBody>
       </p:sp>
@@ -4215,19 +6587,27 @@
   <p:clrMapOvr>
     <a:masterClrMapping/>
   </p:clrMapOvr>
+  <mc:AlternateContent xmlns:mc="http://schemas.openxmlformats.org/markup-compatibility/2006">
+    <mc:Choice xmlns:p159="http://schemas.microsoft.com/office/powerpoint/2015/09/main" xmlns:p14="http://schemas.microsoft.com/office/powerpoint/2010/main" Requires="p159">
+      <p:transition p14:dur="500" advClick="1"/>
+    </mc:Choice>
+    <mc:Fallback>
+      <p:transition advClick="1"/>
+    </mc:Fallback>
+  </mc:AlternateContent>
 </p:sld>
 </file>
 
 <file path=ppt/slides/slide18.xml><?xml version="1.0" encoding="utf-8"?>
-<p:sld xmlns:a="http://schemas.openxmlformats.org/drawingml/2006/main" xmlns:r="http://schemas.openxmlformats.org/officeDocument/2006/relationships" xmlns:p="http://schemas.openxmlformats.org/presentationml/2006/main">
-  <p:cSld>
+<p:sld xmlns:a="http://schemas.openxmlformats.org/drawingml/2006/main" xmlns:r="http://schemas.openxmlformats.org/officeDocument/2006/relationships" xmlns:p="http://schemas.openxmlformats.org/presentationml/2006/main" xmlns:m="http://schemas.openxmlformats.org/officeDocument/2006/math" xmlns:w="http://schemas.openxmlformats.org/wordprocessingml/2006/main" xmlns:mc="http://schemas.openxmlformats.org/markup-compatibility/2006" showMasterPhAnim="0" showMasterSp="1" show="1">
+  <p:cSld name="">
     <p:spTree>
       <p:nvGrpSpPr>
         <p:cNvPr id="1" name=""/>
         <p:cNvGrpSpPr/>
         <p:nvPr/>
       </p:nvGrpSpPr>
-      <p:grpSpPr>
+      <p:grpSpPr bwMode="auto">
         <a:xfrm>
           <a:off x="0" y="0"/>
           <a:ext cx="0" cy="0"/>
@@ -4237,21 +6617,19 @@
       </p:grpSpPr>
       <p:pic>
         <p:nvPicPr>
-          <p:cNvPr id="5" name="Content Placeholder 4"/>
+          <p:cNvPr id="420252220" name="Content Placeholder 4"/>
           <p:cNvPicPr>
-            <a:picLocks noGrp="1" noChangeAspect="1"/>
+            <a:picLocks noChangeAspect="1" noGrp="1"/>
           </p:cNvPicPr>
           <p:nvPr>
             <p:ph sz="half" idx="1"/>
           </p:nvPr>
         </p:nvPicPr>
-        <p:blipFill>
-          <a:blip r:embed="rId1"/>
-          <a:stretch>
-            <a:fillRect/>
-          </a:stretch>
+        <p:blipFill rotWithShape="1">
+          <a:blip r:embed="rId3"/>
+          <a:stretch/>
         </p:blipFill>
-        <p:spPr>
+        <p:spPr bwMode="auto">
           <a:xfrm>
             <a:off x="179109" y="358218"/>
             <a:ext cx="11840066" cy="5835191"/>
@@ -4266,19 +6644,27 @@
   <p:clrMapOvr>
     <a:masterClrMapping/>
   </p:clrMapOvr>
+  <mc:AlternateContent xmlns:mc="http://schemas.openxmlformats.org/markup-compatibility/2006">
+    <mc:Choice xmlns:p159="http://schemas.microsoft.com/office/powerpoint/2015/09/main" xmlns:p14="http://schemas.microsoft.com/office/powerpoint/2010/main" Requires="p159">
+      <p:transition p14:dur="500" advClick="1"/>
+    </mc:Choice>
+    <mc:Fallback>
+      <p:transition advClick="1"/>
+    </mc:Fallback>
+  </mc:AlternateContent>
 </p:sld>
 </file>
 
 <file path=ppt/slides/slide19.xml><?xml version="1.0" encoding="utf-8"?>
-<p:sld xmlns:a="http://schemas.openxmlformats.org/drawingml/2006/main" xmlns:r="http://schemas.openxmlformats.org/officeDocument/2006/relationships" xmlns:p="http://schemas.openxmlformats.org/presentationml/2006/main">
-  <p:cSld>
+<p:sld xmlns:a="http://schemas.openxmlformats.org/drawingml/2006/main" xmlns:r="http://schemas.openxmlformats.org/officeDocument/2006/relationships" xmlns:p="http://schemas.openxmlformats.org/presentationml/2006/main" xmlns:m="http://schemas.openxmlformats.org/officeDocument/2006/math" xmlns:w="http://schemas.openxmlformats.org/wordprocessingml/2006/main" xmlns:mc="http://schemas.openxmlformats.org/markup-compatibility/2006" showMasterPhAnim="0" showMasterSp="1" show="1">
+  <p:cSld name="">
     <p:spTree>
       <p:nvGrpSpPr>
         <p:cNvPr id="1" name=""/>
         <p:cNvGrpSpPr/>
         <p:nvPr/>
       </p:nvGrpSpPr>
-      <p:grpSpPr>
+      <p:grpSpPr bwMode="auto">
         <a:xfrm>
           <a:off x="0" y="0"/>
           <a:ext cx="0" cy="0"/>
@@ -4288,7 +6674,7 @@
       </p:grpSpPr>
       <p:sp>
         <p:nvSpPr>
-          <p:cNvPr id="2" name="Title 1"/>
+          <p:cNvPr id="22388559" name="Title 1"/>
           <p:cNvSpPr>
             <a:spLocks noGrp="1"/>
           </p:cNvSpPr>
@@ -4296,7 +6682,7 @@
             <p:ph type="title"/>
           </p:nvPr>
         </p:nvSpPr>
-        <p:spPr>
+        <p:spPr bwMode="auto">
           <a:xfrm>
             <a:off x="0" y="75414"/>
             <a:ext cx="12192000" cy="848414"/>
@@ -4308,17 +6694,20 @@
           </a:bodyPr>
           <a:lstStyle/>
           <a:p>
-            <a:r>
-              <a:rPr lang="en-US" dirty="0"/>
+            <a:pPr>
+              <a:defRPr/>
+            </a:pPr>
+            <a:r>
+              <a:rPr lang="en-US"/>
               <a:t>Types of Association Rules</a:t>
             </a:r>
-            <a:endParaRPr lang="en-US" dirty="0"/>
-          </a:p>
-        </p:txBody>
-      </p:sp>
-      <p:sp>
-        <p:nvSpPr>
-          <p:cNvPr id="3" name="Content Placeholder 2"/>
+            <a:endParaRPr lang="en-US"/>
+          </a:p>
+        </p:txBody>
+      </p:sp>
+      <p:sp>
+        <p:nvSpPr>
+          <p:cNvPr id="1478940184" name="Content Placeholder 2"/>
           <p:cNvSpPr>
             <a:spLocks noGrp="1"/>
           </p:cNvSpPr>
@@ -4326,7 +6715,7 @@
             <p:ph sz="half" idx="1"/>
           </p:nvPr>
         </p:nvSpPr>
-        <p:spPr>
+        <p:spPr bwMode="auto">
           <a:xfrm>
             <a:off x="122548" y="1027522"/>
             <a:ext cx="5897252" cy="5722070"/>
@@ -4338,129 +6727,168 @@
           </a:bodyPr>
           <a:lstStyle/>
           <a:p>
-            <a:r>
-              <a:rPr lang="en-US" b="1" dirty="0"/>
+            <a:pPr>
+              <a:defRPr/>
+            </a:pPr>
+            <a:r>
+              <a:rPr lang="en-US" b="1"/>
               <a:t>1. Single Dimensional Association Rule</a:t>
             </a:r>
-            <a:endParaRPr lang="en-US" b="1" dirty="0"/>
-          </a:p>
-          <a:p>
-            <a:r>
-              <a:rPr lang="en-US" dirty="0"/>
+            <a:endParaRPr lang="en-US" b="1"/>
+          </a:p>
+          <a:p>
+            <a:pPr>
+              <a:defRPr/>
+            </a:pPr>
+            <a:r>
+              <a:rPr lang="en-US"/>
               <a:t>A single-dimensional association rule contains only one predicate or dimension.</a:t>
             </a:r>
-            <a:endParaRPr lang="en-US" dirty="0"/>
-          </a:p>
-          <a:p>
-            <a:r>
-              <a:rPr lang="en-US" b="1" dirty="0" smtClean="0"/>
+            <a:endParaRPr lang="en-US"/>
+          </a:p>
+          <a:p>
+            <a:pPr>
+              <a:defRPr/>
+            </a:pPr>
+            <a:r>
+              <a:rPr lang="en-US" b="1"/>
               <a:t>Example</a:t>
             </a:r>
-            <a:endParaRPr lang="en-US" b="1" dirty="0" smtClean="0"/>
-          </a:p>
-          <a:p>
-            <a:r>
-              <a:rPr lang="en-US" dirty="0" smtClean="0"/>
+            <a:endParaRPr lang="en-US" b="1"/>
+          </a:p>
+          <a:p>
+            <a:pPr>
+              <a:defRPr/>
+            </a:pPr>
+            <a:r>
+              <a:rPr lang="en-US"/>
               <a:t>buys(</a:t>
             </a:r>
             <a:r>
-              <a:rPr lang="en-US" dirty="0" err="1" smtClean="0"/>
+              <a:rPr lang="en-US"/>
               <a:t>X</a:t>
             </a:r>
             <a:r>
-              <a:rPr lang="en-US" dirty="0" err="1"/>
+              <a:rPr lang="en-US"/>
               <a:t>,"Laptop</a:t>
             </a:r>
             <a:r>
-              <a:rPr lang="en-US" dirty="0"/>
+              <a:rPr lang="en-US"/>
               <a:t>")→buys(</a:t>
             </a:r>
             <a:r>
-              <a:rPr lang="en-US" dirty="0" err="1"/>
+              <a:rPr lang="en-US"/>
               <a:t>X,"Mouse</a:t>
             </a:r>
             <a:r>
-              <a:rPr lang="en-US" dirty="0"/>
+              <a:rPr lang="en-US"/>
               <a:t>")</a:t>
             </a:r>
-            <a:endParaRPr lang="en-US" b="1" dirty="0"/>
-          </a:p>
-          <a:p>
-            <a:r>
-              <a:rPr lang="en-US" dirty="0" smtClean="0"/>
+            <a:endParaRPr lang="en-US" b="1"/>
+          </a:p>
+          <a:p>
+            <a:pPr>
+              <a:defRPr/>
+            </a:pPr>
+            <a:r>
+              <a:rPr lang="en-US"/>
               <a:t>This </a:t>
             </a:r>
             <a:r>
-              <a:rPr lang="en-US" dirty="0"/>
+              <a:rPr lang="en-US"/>
               <a:t>rule only considers the </a:t>
             </a:r>
             <a:r>
-              <a:rPr lang="en-US" b="1" dirty="0"/>
+              <a:rPr lang="en-US" b="1"/>
               <a:t>buying dimension</a:t>
             </a:r>
             <a:r>
-              <a:rPr lang="en-US" dirty="0"/>
+              <a:rPr lang="en-US"/>
               <a:t>.</a:t>
             </a:r>
-            <a:endParaRPr lang="en-US" dirty="0"/>
-          </a:p>
-          <a:p>
-            <a:r>
-              <a:rPr lang="en-US" b="1" dirty="0"/>
+            <a:endParaRPr lang="en-US"/>
+          </a:p>
+          <a:p>
+            <a:pPr>
+              <a:defRPr/>
+            </a:pPr>
+            <a:r>
+              <a:rPr lang="en-US" b="1"/>
               <a:t>Characteristics</a:t>
             </a:r>
-            <a:endParaRPr lang="en-US" b="1" dirty="0"/>
-          </a:p>
-          <a:p>
-            <a:r>
-              <a:rPr lang="en-US" dirty="0"/>
+            <a:endParaRPr lang="en-US" b="1"/>
+          </a:p>
+          <a:p>
+            <a:pPr>
+              <a:defRPr/>
+            </a:pPr>
+            <a:r>
+              <a:rPr lang="en-US"/>
               <a:t>Uses one type of relationship </a:t>
             </a:r>
-            <a:endParaRPr lang="en-US" dirty="0"/>
-          </a:p>
-          <a:p>
-            <a:r>
-              <a:rPr lang="en-US" dirty="0"/>
+            <a:endParaRPr lang="en-US"/>
+          </a:p>
+          <a:p>
+            <a:pPr>
+              <a:defRPr/>
+            </a:pPr>
+            <a:r>
+              <a:rPr lang="en-US"/>
               <a:t>Simple and easy to analyze </a:t>
             </a:r>
-            <a:endParaRPr lang="en-US" dirty="0"/>
-          </a:p>
-          <a:p>
-            <a:r>
-              <a:rPr lang="en-US" dirty="0"/>
+            <a:endParaRPr lang="en-US"/>
+          </a:p>
+          <a:p>
+            <a:pPr>
+              <a:defRPr/>
+            </a:pPr>
+            <a:r>
+              <a:rPr lang="en-US"/>
               <a:t>Mostly used in market basket analysis </a:t>
             </a:r>
-            <a:endParaRPr lang="en-US" dirty="0"/>
-          </a:p>
-          <a:p>
-            <a:r>
-              <a:rPr lang="en-US" b="1" dirty="0"/>
+            <a:endParaRPr lang="en-US"/>
+          </a:p>
+          <a:p>
+            <a:pPr>
+              <a:defRPr/>
+            </a:pPr>
+            <a:r>
+              <a:rPr lang="en-US" b="1"/>
               <a:t>Applications</a:t>
             </a:r>
-            <a:endParaRPr lang="en-US" b="1" dirty="0"/>
-          </a:p>
-          <a:p>
-            <a:r>
-              <a:rPr lang="en-US" dirty="0"/>
+            <a:endParaRPr lang="en-US" b="1"/>
+          </a:p>
+          <a:p>
+            <a:pPr>
+              <a:defRPr/>
+            </a:pPr>
+            <a:r>
+              <a:rPr lang="en-US"/>
               <a:t>Supermarket sales analysis </a:t>
             </a:r>
-            <a:endParaRPr lang="en-US" dirty="0"/>
-          </a:p>
-          <a:p>
-            <a:r>
-              <a:rPr lang="en-US" dirty="0"/>
+            <a:endParaRPr lang="en-US"/>
+          </a:p>
+          <a:p>
+            <a:pPr>
+              <a:defRPr/>
+            </a:pPr>
+            <a:r>
+              <a:rPr lang="en-US"/>
               <a:t>Product recommendation systems</a:t>
             </a:r>
-            <a:endParaRPr lang="en-US" dirty="0"/>
-          </a:p>
-          <a:p>
-            <a:endParaRPr lang="en-US" dirty="0"/>
-          </a:p>
-        </p:txBody>
-      </p:sp>
-      <p:sp>
-        <p:nvSpPr>
-          <p:cNvPr id="4" name="Content Placeholder 3"/>
+            <a:endParaRPr lang="en-US"/>
+          </a:p>
+          <a:p>
+            <a:pPr>
+              <a:defRPr/>
+            </a:pPr>
+            <a:endParaRPr lang="en-US"/>
+          </a:p>
+        </p:txBody>
+      </p:sp>
+      <p:sp>
+        <p:nvSpPr>
+          <p:cNvPr id="1239735406" name="Content Placeholder 3"/>
           <p:cNvSpPr>
             <a:spLocks noGrp="1"/>
           </p:cNvSpPr>
@@ -4468,7 +6896,7 @@
             <p:ph sz="half" idx="2"/>
           </p:nvPr>
         </p:nvSpPr>
-        <p:spPr>
+        <p:spPr bwMode="auto">
           <a:xfrm>
             <a:off x="6165130" y="923828"/>
             <a:ext cx="5957740" cy="5731496"/>
@@ -4480,119 +6908,170 @@
           </a:bodyPr>
           <a:lstStyle/>
           <a:p>
-            <a:r>
-              <a:rPr lang="en-US" b="1" dirty="0"/>
+            <a:pPr>
+              <a:defRPr/>
+            </a:pPr>
+            <a:r>
+              <a:rPr lang="en-US" b="1"/>
               <a:t>2. Multidimensional Association Rule</a:t>
             </a:r>
-            <a:endParaRPr lang="en-US" b="1" dirty="0"/>
-          </a:p>
-          <a:p>
-            <a:r>
-              <a:rPr lang="en-US" dirty="0"/>
+            <a:endParaRPr lang="en-US" b="1"/>
+          </a:p>
+          <a:p>
+            <a:pPr>
+              <a:defRPr/>
+            </a:pPr>
+            <a:r>
+              <a:rPr lang="en-US"/>
               <a:t>A multidimensional association rule involves two or more dimensions or predicates.</a:t>
             </a:r>
-            <a:endParaRPr lang="en-US" dirty="0"/>
-          </a:p>
-          <a:p>
-            <a:r>
-              <a:rPr lang="en-US" b="1" dirty="0" smtClean="0"/>
+            <a:endParaRPr lang="en-US"/>
+          </a:p>
+          <a:p>
+            <a:pPr>
+              <a:defRPr/>
+            </a:pPr>
+            <a:r>
+              <a:rPr lang="en-US" b="1"/>
               <a:t>Example</a:t>
             </a:r>
-            <a:endParaRPr lang="en-US" b="1" dirty="0" smtClean="0"/>
-          </a:p>
-          <a:p>
-            <a:r>
-              <a:rPr lang="en-US" dirty="0"/>
+            <a:endParaRPr lang="en-US" b="1"/>
+          </a:p>
+          <a:p>
+            <a:pPr>
+              <a:defRPr/>
+            </a:pPr>
+            <a:r>
+              <a:rPr lang="en-US"/>
               <a:t>Age(20−30)∧Occupation(Student)→buys(Laptop)</a:t>
             </a:r>
-            <a:endParaRPr lang="en-US" b="1" dirty="0"/>
-          </a:p>
-          <a:p>
-            <a:r>
-              <a:rPr lang="en-US" dirty="0"/>
+            <a:endParaRPr lang="en-US" b="1"/>
+          </a:p>
+          <a:p>
+            <a:pPr>
+              <a:defRPr/>
+            </a:pPr>
+            <a:r>
+              <a:rPr lang="en-US"/>
               <a:t>This rule includes:</a:t>
             </a:r>
-            <a:endParaRPr lang="en-US" dirty="0"/>
-          </a:p>
-          <a:p>
-            <a:r>
-              <a:rPr lang="en-US" dirty="0"/>
+            <a:endParaRPr lang="en-US"/>
+          </a:p>
+          <a:p>
+            <a:pPr>
+              <a:defRPr/>
+            </a:pPr>
+            <a:r>
+              <a:rPr lang="en-US"/>
               <a:t>Age dimension </a:t>
             </a:r>
-            <a:endParaRPr lang="en-US" dirty="0"/>
-          </a:p>
-          <a:p>
-            <a:r>
-              <a:rPr lang="en-US" dirty="0"/>
+            <a:endParaRPr lang="en-US"/>
+          </a:p>
+          <a:p>
+            <a:pPr>
+              <a:defRPr/>
+            </a:pPr>
+            <a:r>
+              <a:rPr lang="en-US"/>
               <a:t>Occupation dimension </a:t>
             </a:r>
-            <a:endParaRPr lang="en-US" dirty="0"/>
-          </a:p>
-          <a:p>
-            <a:r>
-              <a:rPr lang="en-US" dirty="0"/>
+            <a:endParaRPr lang="en-US"/>
+          </a:p>
+          <a:p>
+            <a:pPr>
+              <a:defRPr/>
+            </a:pPr>
+            <a:r>
+              <a:rPr lang="en-US"/>
               <a:t>Buying behavior</a:t>
             </a:r>
-            <a:endParaRPr lang="en-US" dirty="0"/>
-          </a:p>
-          <a:p>
-            <a:r>
-              <a:rPr lang="en-US" b="1" dirty="0" smtClean="0"/>
+            <a:endParaRPr lang="en-US"/>
+          </a:p>
+          <a:p>
+            <a:pPr>
+              <a:defRPr/>
+            </a:pPr>
+            <a:r>
+              <a:rPr lang="en-US" b="1"/>
               <a:t>Characteristics</a:t>
             </a:r>
-            <a:endParaRPr lang="en-US" b="1" dirty="0"/>
-          </a:p>
-          <a:p>
-            <a:r>
-              <a:rPr lang="en-US" dirty="0"/>
+            <a:endParaRPr lang="en-US" b="1"/>
+          </a:p>
+          <a:p>
+            <a:pPr>
+              <a:defRPr/>
+            </a:pPr>
+            <a:r>
+              <a:rPr lang="en-US"/>
               <a:t>Uses multiple attributes </a:t>
             </a:r>
-            <a:endParaRPr lang="en-US" dirty="0"/>
-          </a:p>
-          <a:p>
-            <a:r>
-              <a:rPr lang="en-US" dirty="0"/>
+            <a:endParaRPr lang="en-US"/>
+          </a:p>
+          <a:p>
+            <a:pPr>
+              <a:defRPr/>
+            </a:pPr>
+            <a:r>
+              <a:rPr lang="en-US"/>
               <a:t>More informative than single-dimensional rules </a:t>
             </a:r>
-            <a:endParaRPr lang="en-US" dirty="0"/>
-          </a:p>
-          <a:p>
-            <a:r>
-              <a:rPr lang="en-US" dirty="0"/>
+            <a:endParaRPr lang="en-US"/>
+          </a:p>
+          <a:p>
+            <a:pPr>
+              <a:defRPr/>
+            </a:pPr>
+            <a:r>
+              <a:rPr lang="en-US"/>
               <a:t>Helps in customer segmentation </a:t>
             </a:r>
-            <a:endParaRPr lang="en-US" dirty="0"/>
-          </a:p>
-          <a:p>
-            <a:r>
-              <a:rPr lang="en-US" b="1" dirty="0"/>
+            <a:endParaRPr lang="en-US"/>
+          </a:p>
+          <a:p>
+            <a:pPr>
+              <a:defRPr/>
+            </a:pPr>
+            <a:r>
+              <a:rPr lang="en-US" b="1"/>
               <a:t>Applications</a:t>
             </a:r>
-            <a:endParaRPr lang="en-US" b="1" dirty="0"/>
-          </a:p>
-          <a:p>
-            <a:r>
-              <a:rPr lang="en-US" dirty="0"/>
+            <a:endParaRPr lang="en-US" b="1"/>
+          </a:p>
+          <a:p>
+            <a:pPr>
+              <a:defRPr/>
+            </a:pPr>
+            <a:r>
+              <a:rPr lang="en-US"/>
               <a:t>Customer profiling </a:t>
             </a:r>
-            <a:endParaRPr lang="en-US" dirty="0"/>
-          </a:p>
-          <a:p>
-            <a:r>
-              <a:rPr lang="en-US" dirty="0"/>
+            <a:endParaRPr lang="en-US"/>
+          </a:p>
+          <a:p>
+            <a:pPr>
+              <a:defRPr/>
+            </a:pPr>
+            <a:r>
+              <a:rPr lang="en-US"/>
               <a:t>Business intelligence </a:t>
             </a:r>
-            <a:endParaRPr lang="en-US" dirty="0"/>
-          </a:p>
-          <a:p>
-            <a:r>
-              <a:rPr lang="en-US" dirty="0"/>
+            <a:endParaRPr lang="en-US"/>
+          </a:p>
+          <a:p>
+            <a:pPr>
+              <a:defRPr/>
+            </a:pPr>
+            <a:r>
+              <a:rPr lang="en-US"/>
               <a:t>Decision support systems</a:t>
             </a:r>
-            <a:endParaRPr lang="en-US" dirty="0"/>
-          </a:p>
-          <a:p>
-            <a:endParaRPr lang="en-US" dirty="0"/>
+            <a:endParaRPr lang="en-US"/>
+          </a:p>
+          <a:p>
+            <a:pPr>
+              <a:defRPr/>
+            </a:pPr>
+            <a:endParaRPr lang="en-US"/>
           </a:p>
         </p:txBody>
       </p:sp>
@@ -4601,19 +7080,27 @@
   <p:clrMapOvr>
     <a:masterClrMapping/>
   </p:clrMapOvr>
+  <mc:AlternateContent xmlns:mc="http://schemas.openxmlformats.org/markup-compatibility/2006">
+    <mc:Choice xmlns:p159="http://schemas.microsoft.com/office/powerpoint/2015/09/main" xmlns:p14="http://schemas.microsoft.com/office/powerpoint/2010/main" Requires="p159">
+      <p:transition p14:dur="500" advClick="1"/>
+    </mc:Choice>
+    <mc:Fallback>
+      <p:transition advClick="1"/>
+    </mc:Fallback>
+  </mc:AlternateContent>
 </p:sld>
 </file>
 
 <file path=ppt/slides/slide2.xml><?xml version="1.0" encoding="utf-8"?>
-<p:sld xmlns:a="http://schemas.openxmlformats.org/drawingml/2006/main" xmlns:r="http://schemas.openxmlformats.org/officeDocument/2006/relationships" xmlns:p="http://schemas.openxmlformats.org/presentationml/2006/main">
-  <p:cSld>
+<p:sld xmlns:a="http://schemas.openxmlformats.org/drawingml/2006/main" xmlns:r="http://schemas.openxmlformats.org/officeDocument/2006/relationships" xmlns:p="http://schemas.openxmlformats.org/presentationml/2006/main" xmlns:m="http://schemas.openxmlformats.org/officeDocument/2006/math" xmlns:w="http://schemas.openxmlformats.org/wordprocessingml/2006/main" xmlns:mc="http://schemas.openxmlformats.org/markup-compatibility/2006" showMasterPhAnim="0" showMasterSp="1" show="1">
+  <p:cSld name="">
     <p:spTree>
       <p:nvGrpSpPr>
         <p:cNvPr id="1" name=""/>
         <p:cNvGrpSpPr/>
         <p:nvPr/>
       </p:nvGrpSpPr>
-      <p:grpSpPr>
+      <p:grpSpPr bwMode="auto">
         <a:xfrm>
           <a:off x="0" y="0"/>
           <a:ext cx="0" cy="0"/>
@@ -4623,7 +7110,7 @@
       </p:grpSpPr>
       <p:sp>
         <p:nvSpPr>
-          <p:cNvPr id="2" name="Title 1"/>
+          <p:cNvPr id="1763883613" name="Title 1"/>
           <p:cNvSpPr>
             <a:spLocks noGrp="1"/>
           </p:cNvSpPr>
@@ -4631,25 +7118,28 @@
             <p:ph type="title"/>
           </p:nvPr>
         </p:nvSpPr>
-        <p:spPr/>
-        <p:txBody>
-          <a:bodyPr/>
-          <a:lstStyle/>
-          <a:p>
-            <a:r>
-              <a:rPr lang="en-US" b="1" dirty="0"/>
+        <p:spPr bwMode="auto"/>
+        <p:txBody>
+          <a:bodyPr/>
+          <a:lstStyle/>
+          <a:p>
+            <a:pPr>
+              <a:defRPr/>
+            </a:pPr>
+            <a:r>
+              <a:rPr lang="en-US" b="1"/>
               <a:t>Market Basket Analysis in Data Mining</a:t>
             </a:r>
             <a:br>
-              <a:rPr lang="en-US" b="1" dirty="0"/>
+              <a:rPr lang="en-US" b="1"/>
             </a:br>
-            <a:endParaRPr lang="en-US" dirty="0"/>
-          </a:p>
-        </p:txBody>
-      </p:sp>
-      <p:sp>
-        <p:nvSpPr>
-          <p:cNvPr id="3" name="Content Placeholder 2"/>
+            <a:endParaRPr lang="en-US"/>
+          </a:p>
+        </p:txBody>
+      </p:sp>
+      <p:sp>
+        <p:nvSpPr>
+          <p:cNvPr id="1068340667" name="Content Placeholder 2"/>
           <p:cNvSpPr>
             <a:spLocks noGrp="1"/>
           </p:cNvSpPr>
@@ -4657,64 +7147,85 @@
             <p:ph idx="1"/>
           </p:nvPr>
         </p:nvSpPr>
-        <p:spPr/>
+        <p:spPr bwMode="auto"/>
         <p:txBody>
           <a:bodyPr>
             <a:normAutofit/>
           </a:bodyPr>
           <a:lstStyle/>
           <a:p>
-            <a:r>
-              <a:rPr lang="en-US" dirty="0" smtClean="0"/>
+            <a:pPr>
+              <a:defRPr/>
+            </a:pPr>
+            <a:r>
+              <a:rPr lang="en-US"/>
               <a:t>Market Basket Analysis is the process of discovering associations or patterns among items bought together by customers. It is mainly based on </a:t>
             </a:r>
             <a:r>
-              <a:rPr lang="en-US" b="1" dirty="0" smtClean="0"/>
+              <a:rPr lang="en-US" b="1"/>
               <a:t>Association Rule Mining</a:t>
             </a:r>
             <a:r>
-              <a:rPr lang="en-US" dirty="0" smtClean="0"/>
+              <a:rPr lang="en-US"/>
               <a:t> techniques in data mining.</a:t>
             </a:r>
-            <a:endParaRPr lang="en-US" dirty="0" smtClean="0"/>
-          </a:p>
-          <a:p>
-            <a:r>
-              <a:rPr lang="en-US" b="1" dirty="0" smtClean="0"/>
+            <a:endParaRPr lang="en-US"/>
+          </a:p>
+          <a:p>
+            <a:pPr>
+              <a:defRPr/>
+            </a:pPr>
+            <a:r>
+              <a:rPr lang="en-US" b="1"/>
               <a:t>Example</a:t>
             </a:r>
-            <a:endParaRPr lang="en-US" b="1" dirty="0" smtClean="0"/>
-          </a:p>
-          <a:p>
-            <a:r>
-              <a:rPr lang="en-US" dirty="0" smtClean="0"/>
+            <a:endParaRPr lang="en-US" b="1"/>
+          </a:p>
+          <a:p>
+            <a:pPr>
+              <a:defRPr/>
+            </a:pPr>
+            <a:r>
+              <a:rPr lang="en-US"/>
               <a:t>If customers frequently buy:</a:t>
             </a:r>
-            <a:endParaRPr lang="en-US" dirty="0" smtClean="0"/>
-          </a:p>
-          <a:p>
-            <a:r>
-              <a:rPr lang="en-US" dirty="0" smtClean="0"/>
+            <a:endParaRPr lang="en-US"/>
+          </a:p>
+          <a:p>
+            <a:pPr>
+              <a:defRPr/>
+            </a:pPr>
+            <a:r>
+              <a:rPr lang="en-US"/>
               <a:t>Bread + Butter </a:t>
             </a:r>
-            <a:endParaRPr lang="en-US" dirty="0" smtClean="0"/>
-          </a:p>
-          <a:p>
-            <a:r>
-              <a:rPr lang="en-US" dirty="0" smtClean="0"/>
+            <a:endParaRPr lang="en-US"/>
+          </a:p>
+          <a:p>
+            <a:pPr>
+              <a:defRPr/>
+            </a:pPr>
+            <a:r>
+              <a:rPr lang="en-US"/>
               <a:t>Milk + Bread </a:t>
             </a:r>
-            <a:endParaRPr lang="en-US" dirty="0" smtClean="0"/>
-          </a:p>
-          <a:p>
-            <a:r>
-              <a:rPr lang="en-US" dirty="0" smtClean="0"/>
+            <a:endParaRPr lang="en-US"/>
+          </a:p>
+          <a:p>
+            <a:pPr>
+              <a:defRPr/>
+            </a:pPr>
+            <a:r>
+              <a:rPr lang="en-US"/>
               <a:t>then the store may place these products nearby or provide combo offers.</a:t>
             </a:r>
-            <a:endParaRPr lang="en-US" dirty="0" smtClean="0"/>
-          </a:p>
-          <a:p>
-            <a:endParaRPr lang="en-US" dirty="0"/>
+            <a:endParaRPr lang="en-US"/>
+          </a:p>
+          <a:p>
+            <a:pPr>
+              <a:defRPr/>
+            </a:pPr>
+            <a:endParaRPr lang="en-US"/>
           </a:p>
         </p:txBody>
       </p:sp>
@@ -4723,19 +7234,27 @@
   <p:clrMapOvr>
     <a:masterClrMapping/>
   </p:clrMapOvr>
+  <mc:AlternateContent xmlns:mc="http://schemas.openxmlformats.org/markup-compatibility/2006">
+    <mc:Choice xmlns:p159="http://schemas.microsoft.com/office/powerpoint/2015/09/main" xmlns:p14="http://schemas.microsoft.com/office/powerpoint/2010/main" Requires="p159">
+      <p:transition p14:dur="500" advClick="1"/>
+    </mc:Choice>
+    <mc:Fallback>
+      <p:transition advClick="1"/>
+    </mc:Fallback>
+  </mc:AlternateContent>
 </p:sld>
 </file>
 
 <file path=ppt/slides/slide3.xml><?xml version="1.0" encoding="utf-8"?>
-<p:sld xmlns:a="http://schemas.openxmlformats.org/drawingml/2006/main" xmlns:r="http://schemas.openxmlformats.org/officeDocument/2006/relationships" xmlns:p="http://schemas.openxmlformats.org/presentationml/2006/main">
-  <p:cSld>
+<p:sld xmlns:a="http://schemas.openxmlformats.org/drawingml/2006/main" xmlns:r="http://schemas.openxmlformats.org/officeDocument/2006/relationships" xmlns:p="http://schemas.openxmlformats.org/presentationml/2006/main" xmlns:m="http://schemas.openxmlformats.org/officeDocument/2006/math" xmlns:w="http://schemas.openxmlformats.org/wordprocessingml/2006/main" xmlns:mc="http://schemas.openxmlformats.org/markup-compatibility/2006" showMasterPhAnim="0" showMasterSp="1" show="1">
+  <p:cSld name="">
     <p:spTree>
       <p:nvGrpSpPr>
         <p:cNvPr id="1" name=""/>
         <p:cNvGrpSpPr/>
         <p:nvPr/>
       </p:nvGrpSpPr>
-      <p:grpSpPr>
+      <p:grpSpPr bwMode="auto">
         <a:xfrm>
           <a:off x="0" y="0"/>
           <a:ext cx="0" cy="0"/>
@@ -4745,7 +7264,7 @@
       </p:grpSpPr>
       <p:sp>
         <p:nvSpPr>
-          <p:cNvPr id="3" name="Content Placeholder 2"/>
+          <p:cNvPr id="1806643814" name="Content Placeholder 2"/>
           <p:cNvSpPr>
             <a:spLocks noGrp="1"/>
           </p:cNvSpPr>
@@ -4753,7 +7272,7 @@
             <p:ph idx="1"/>
           </p:nvPr>
         </p:nvSpPr>
-        <p:spPr>
+        <p:spPr bwMode="auto">
           <a:xfrm>
             <a:off x="188536" y="452486"/>
             <a:ext cx="11764652" cy="6231117"/>
@@ -4763,56 +7282,80 @@
           <a:bodyPr/>
           <a:lstStyle/>
           <a:p>
-            <a:r>
-              <a:rPr lang="en-US" b="1" dirty="0" smtClean="0"/>
+            <a:pPr>
+              <a:defRPr/>
+            </a:pPr>
+            <a:r>
+              <a:rPr lang="en-US" b="1"/>
               <a:t>Objectives of Market Basket Analysis</a:t>
             </a:r>
-            <a:endParaRPr lang="en-US" b="1" dirty="0" smtClean="0"/>
-          </a:p>
-          <a:p>
-            <a:r>
-              <a:rPr lang="en-US" dirty="0" smtClean="0"/>
+            <a:endParaRPr lang="en-US" b="1"/>
+          </a:p>
+          <a:p>
+            <a:pPr>
+              <a:defRPr/>
+            </a:pPr>
+            <a:r>
+              <a:rPr lang="en-US"/>
               <a:t>Identify customer purchasing patterns </a:t>
             </a:r>
-            <a:endParaRPr lang="en-US" dirty="0" smtClean="0"/>
-          </a:p>
-          <a:p>
-            <a:r>
-              <a:rPr lang="en-US" dirty="0" smtClean="0"/>
+            <a:endParaRPr lang="en-US"/>
+          </a:p>
+          <a:p>
+            <a:pPr>
+              <a:defRPr/>
+            </a:pPr>
+            <a:r>
+              <a:rPr lang="en-US"/>
               <a:t>Improve product placement </a:t>
             </a:r>
-            <a:endParaRPr lang="en-US" dirty="0" smtClean="0"/>
-          </a:p>
-          <a:p>
-            <a:r>
-              <a:rPr lang="en-US" dirty="0" smtClean="0"/>
+            <a:endParaRPr lang="en-US"/>
+          </a:p>
+          <a:p>
+            <a:pPr>
+              <a:defRPr/>
+            </a:pPr>
+            <a:r>
+              <a:rPr lang="en-US"/>
               <a:t>Increase cross-selling opportunities </a:t>
             </a:r>
-            <a:endParaRPr lang="en-US" dirty="0" smtClean="0"/>
-          </a:p>
-          <a:p>
-            <a:r>
-              <a:rPr lang="en-US" dirty="0" smtClean="0"/>
+            <a:endParaRPr lang="en-US"/>
+          </a:p>
+          <a:p>
+            <a:pPr>
+              <a:defRPr/>
+            </a:pPr>
+            <a:r>
+              <a:rPr lang="en-US"/>
               <a:t>Enhance customer satisfaction </a:t>
             </a:r>
-            <a:endParaRPr lang="en-US" dirty="0" smtClean="0"/>
-          </a:p>
-          <a:p>
-            <a:r>
-              <a:rPr lang="en-US" dirty="0" smtClean="0"/>
+            <a:endParaRPr lang="en-US"/>
+          </a:p>
+          <a:p>
+            <a:pPr>
+              <a:defRPr/>
+            </a:pPr>
+            <a:r>
+              <a:rPr lang="en-US"/>
               <a:t>Boost sales and profit </a:t>
             </a:r>
-            <a:endParaRPr lang="en-US" dirty="0" smtClean="0"/>
-          </a:p>
-          <a:p>
-            <a:r>
-              <a:rPr lang="en-US" dirty="0" smtClean="0"/>
+            <a:endParaRPr lang="en-US"/>
+          </a:p>
+          <a:p>
+            <a:pPr>
+              <a:defRPr/>
+            </a:pPr>
+            <a:r>
+              <a:rPr lang="en-US"/>
               <a:t>Design promotional offers and discounts</a:t>
             </a:r>
-            <a:endParaRPr lang="en-US" dirty="0" smtClean="0"/>
-          </a:p>
-          <a:p>
-            <a:endParaRPr lang="en-US" dirty="0"/>
+            <a:endParaRPr lang="en-US"/>
+          </a:p>
+          <a:p>
+            <a:pPr>
+              <a:defRPr/>
+            </a:pPr>
+            <a:endParaRPr lang="en-US"/>
           </a:p>
         </p:txBody>
       </p:sp>
@@ -4821,19 +7364,27 @@
   <p:clrMapOvr>
     <a:masterClrMapping/>
   </p:clrMapOvr>
+  <mc:AlternateContent xmlns:mc="http://schemas.openxmlformats.org/markup-compatibility/2006">
+    <mc:Choice xmlns:p159="http://schemas.microsoft.com/office/powerpoint/2015/09/main" xmlns:p14="http://schemas.microsoft.com/office/powerpoint/2010/main" Requires="p159">
+      <p:transition p14:dur="500" advClick="1"/>
+    </mc:Choice>
+    <mc:Fallback>
+      <p:transition advClick="1"/>
+    </mc:Fallback>
+  </mc:AlternateContent>
 </p:sld>
 </file>
 
 <file path=ppt/slides/slide4.xml><?xml version="1.0" encoding="utf-8"?>
-<p:sld xmlns:a="http://schemas.openxmlformats.org/drawingml/2006/main" xmlns:r="http://schemas.openxmlformats.org/officeDocument/2006/relationships" xmlns:p="http://schemas.openxmlformats.org/presentationml/2006/main">
-  <p:cSld>
+<p:sld xmlns:a="http://schemas.openxmlformats.org/drawingml/2006/main" xmlns:r="http://schemas.openxmlformats.org/officeDocument/2006/relationships" xmlns:p="http://schemas.openxmlformats.org/presentationml/2006/main" xmlns:m="http://schemas.openxmlformats.org/officeDocument/2006/math" xmlns:w="http://schemas.openxmlformats.org/wordprocessingml/2006/main" xmlns:mc="http://schemas.openxmlformats.org/markup-compatibility/2006" showMasterPhAnim="0" showMasterSp="1" show="1">
+  <p:cSld name="">
     <p:spTree>
       <p:nvGrpSpPr>
         <p:cNvPr id="1" name=""/>
         <p:cNvGrpSpPr/>
         <p:nvPr/>
       </p:nvGrpSpPr>
-      <p:grpSpPr>
+      <p:grpSpPr bwMode="auto">
         <a:xfrm>
           <a:off x="0" y="0"/>
           <a:ext cx="0" cy="0"/>
@@ -4843,7 +7394,7 @@
       </p:grpSpPr>
       <p:sp>
         <p:nvSpPr>
-          <p:cNvPr id="3" name="Content Placeholder 2"/>
+          <p:cNvPr id="608384390" name="Content Placeholder 2"/>
           <p:cNvSpPr>
             <a:spLocks noGrp="1"/>
           </p:cNvSpPr>
@@ -4851,7 +7402,7 @@
             <p:ph idx="1"/>
           </p:nvPr>
         </p:nvSpPr>
-        <p:spPr>
+        <p:spPr bwMode="auto">
           <a:xfrm>
             <a:off x="245097" y="527901"/>
             <a:ext cx="11811785" cy="6004874"/>
@@ -4861,47 +7412,62 @@
           <a:bodyPr/>
           <a:lstStyle/>
           <a:p>
-            <a:r>
-              <a:rPr lang="en-US" b="1" dirty="0" smtClean="0"/>
+            <a:pPr>
+              <a:defRPr/>
+            </a:pPr>
+            <a:r>
+              <a:rPr lang="en-US" b="1"/>
               <a:t>Working Principle</a:t>
             </a:r>
-            <a:endParaRPr lang="en-US" b="1" dirty="0" smtClean="0"/>
-          </a:p>
-          <a:p>
-            <a:r>
-              <a:rPr lang="en-US" dirty="0" smtClean="0"/>
+            <a:endParaRPr lang="en-US" b="1"/>
+          </a:p>
+          <a:p>
+            <a:pPr>
+              <a:defRPr/>
+            </a:pPr>
+            <a:r>
+              <a:rPr lang="en-US"/>
               <a:t>The analysis studies transaction data collected from customer purchases. It identifies:</a:t>
             </a:r>
-            <a:endParaRPr lang="en-US" dirty="0" smtClean="0"/>
-          </a:p>
-          <a:p>
-            <a:r>
-              <a:rPr lang="en-US" b="1" dirty="0" smtClean="0"/>
+            <a:endParaRPr lang="en-US"/>
+          </a:p>
+          <a:p>
+            <a:pPr>
+              <a:defRPr/>
+            </a:pPr>
+            <a:r>
+              <a:rPr lang="en-US" b="1"/>
               <a:t>Frequent </a:t>
             </a:r>
             <a:r>
-              <a:rPr lang="en-US" b="1" dirty="0" err="1" smtClean="0"/>
+              <a:rPr lang="en-US" b="1"/>
               <a:t>itemsets</a:t>
             </a:r>
             <a:r>
-              <a:rPr lang="en-US" dirty="0" smtClean="0"/>
+              <a:rPr lang="en-US"/>
               <a:t> → items often purchased together </a:t>
             </a:r>
-            <a:endParaRPr lang="en-US" dirty="0" smtClean="0"/>
-          </a:p>
-          <a:p>
-            <a:r>
-              <a:rPr lang="en-US" b="1" dirty="0" smtClean="0"/>
+            <a:endParaRPr lang="en-US"/>
+          </a:p>
+          <a:p>
+            <a:pPr>
+              <a:defRPr/>
+            </a:pPr>
+            <a:r>
+              <a:rPr lang="en-US" b="1"/>
               <a:t>Association rules</a:t>
             </a:r>
             <a:r>
-              <a:rPr lang="en-US" dirty="0" smtClean="0"/>
+              <a:rPr lang="en-US"/>
               <a:t> → relationships among products </a:t>
             </a:r>
-            <a:endParaRPr lang="en-US" dirty="0" smtClean="0"/>
-          </a:p>
-          <a:p>
-            <a:endParaRPr lang="en-US" dirty="0"/>
+            <a:endParaRPr lang="en-US"/>
+          </a:p>
+          <a:p>
+            <a:pPr>
+              <a:defRPr/>
+            </a:pPr>
+            <a:endParaRPr lang="en-US"/>
           </a:p>
         </p:txBody>
       </p:sp>
@@ -4910,19 +7476,27 @@
   <p:clrMapOvr>
     <a:masterClrMapping/>
   </p:clrMapOvr>
+  <mc:AlternateContent xmlns:mc="http://schemas.openxmlformats.org/markup-compatibility/2006">
+    <mc:Choice xmlns:p159="http://schemas.microsoft.com/office/powerpoint/2015/09/main" xmlns:p14="http://schemas.microsoft.com/office/powerpoint/2010/main" Requires="p159">
+      <p:transition p14:dur="500" advClick="1"/>
+    </mc:Choice>
+    <mc:Fallback>
+      <p:transition advClick="1"/>
+    </mc:Fallback>
+  </mc:AlternateContent>
 </p:sld>
 </file>
 
 <file path=ppt/slides/slide5.xml><?xml version="1.0" encoding="utf-8"?>
-<p:sld xmlns:a="http://schemas.openxmlformats.org/drawingml/2006/main" xmlns:r="http://schemas.openxmlformats.org/officeDocument/2006/relationships" xmlns:p="http://schemas.openxmlformats.org/presentationml/2006/main">
-  <p:cSld>
+<p:sld xmlns:a="http://schemas.openxmlformats.org/drawingml/2006/main" xmlns:r="http://schemas.openxmlformats.org/officeDocument/2006/relationships" xmlns:p="http://schemas.openxmlformats.org/presentationml/2006/main" xmlns:m="http://schemas.openxmlformats.org/officeDocument/2006/math" xmlns:w="http://schemas.openxmlformats.org/wordprocessingml/2006/main" xmlns:mc="http://schemas.openxmlformats.org/markup-compatibility/2006" showMasterPhAnim="0" showMasterSp="1" show="1">
+  <p:cSld name="">
     <p:spTree>
       <p:nvGrpSpPr>
         <p:cNvPr id="1" name=""/>
         <p:cNvGrpSpPr/>
         <p:nvPr/>
       </p:nvGrpSpPr>
-      <p:grpSpPr>
+      <p:grpSpPr bwMode="auto">
         <a:xfrm>
           <a:off x="0" y="0"/>
           <a:ext cx="0" cy="0"/>
@@ -4932,21 +7506,19 @@
       </p:grpSpPr>
       <p:pic>
         <p:nvPicPr>
-          <p:cNvPr id="4" name="Content Placeholder 3"/>
+          <p:cNvPr id="137391793" name="Content Placeholder 3"/>
           <p:cNvPicPr>
-            <a:picLocks noGrp="1" noChangeAspect="1"/>
+            <a:picLocks noChangeAspect="1" noGrp="1"/>
           </p:cNvPicPr>
           <p:nvPr>
             <p:ph idx="1"/>
           </p:nvPr>
         </p:nvPicPr>
-        <p:blipFill>
-          <a:blip r:embed="rId1"/>
-          <a:stretch>
-            <a:fillRect/>
-          </a:stretch>
+        <p:blipFill rotWithShape="1">
+          <a:blip r:embed="rId3"/>
+          <a:stretch/>
         </p:blipFill>
-        <p:spPr>
+        <p:spPr bwMode="auto">
           <a:xfrm>
             <a:off x="744717" y="471340"/>
             <a:ext cx="10727703" cy="5882325"/>
@@ -4961,19 +7533,27 @@
   <p:clrMapOvr>
     <a:masterClrMapping/>
   </p:clrMapOvr>
+  <mc:AlternateContent xmlns:mc="http://schemas.openxmlformats.org/markup-compatibility/2006">
+    <mc:Choice xmlns:p159="http://schemas.microsoft.com/office/powerpoint/2015/09/main" xmlns:p14="http://schemas.microsoft.com/office/powerpoint/2010/main" Requires="p159">
+      <p:transition p14:dur="500" advClick="1"/>
+    </mc:Choice>
+    <mc:Fallback>
+      <p:transition advClick="1"/>
+    </mc:Fallback>
+  </mc:AlternateContent>
 </p:sld>
 </file>
 
 <file path=ppt/slides/slide6.xml><?xml version="1.0" encoding="utf-8"?>
-<p:sld xmlns:a="http://schemas.openxmlformats.org/drawingml/2006/main" xmlns:r="http://schemas.openxmlformats.org/officeDocument/2006/relationships" xmlns:p="http://schemas.openxmlformats.org/presentationml/2006/main">
-  <p:cSld>
+<p:sld xmlns:a="http://schemas.openxmlformats.org/drawingml/2006/main" xmlns:r="http://schemas.openxmlformats.org/officeDocument/2006/relationships" xmlns:p="http://schemas.openxmlformats.org/presentationml/2006/main" xmlns:m="http://schemas.openxmlformats.org/officeDocument/2006/math" xmlns:w="http://schemas.openxmlformats.org/wordprocessingml/2006/main" xmlns:mc="http://schemas.openxmlformats.org/markup-compatibility/2006" showMasterPhAnim="0" showMasterSp="1" show="1">
+  <p:cSld name="">
     <p:spTree>
       <p:nvGrpSpPr>
         <p:cNvPr id="1" name=""/>
         <p:cNvGrpSpPr/>
         <p:nvPr/>
       </p:nvGrpSpPr>
-      <p:grpSpPr>
+      <p:grpSpPr bwMode="auto">
         <a:xfrm>
           <a:off x="0" y="0"/>
           <a:ext cx="0" cy="0"/>
@@ -4983,7 +7563,7 @@
       </p:grpSpPr>
       <p:sp>
         <p:nvSpPr>
-          <p:cNvPr id="3" name="Content Placeholder 2"/>
+          <p:cNvPr id="747015423" name="Content Placeholder 2"/>
           <p:cNvSpPr>
             <a:spLocks noGrp="1"/>
           </p:cNvSpPr>
@@ -4991,7 +7571,7 @@
             <p:ph sz="half" idx="1"/>
           </p:nvPr>
         </p:nvSpPr>
-        <p:spPr>
+        <p:spPr bwMode="auto">
           <a:xfrm>
             <a:off x="0" y="0"/>
             <a:ext cx="6019800" cy="6768445"/>
@@ -5003,79 +7583,102 @@
           </a:bodyPr>
           <a:lstStyle/>
           <a:p>
-            <a:r>
-              <a:rPr lang="en-US" b="1" dirty="0" smtClean="0"/>
+            <a:pPr>
+              <a:defRPr/>
+            </a:pPr>
+            <a:r>
+              <a:rPr lang="en-US" b="1"/>
               <a:t>Applications of Market Basket Analysis</a:t>
             </a:r>
-            <a:endParaRPr lang="en-US" b="1" dirty="0" smtClean="0"/>
+            <a:endParaRPr lang="en-US" b="1"/>
           </a:p>
           <a:p>
             <a:pPr marL="0" indent="0">
               <a:buNone/>
-            </a:pPr>
-            <a:r>
-              <a:rPr lang="en-US" b="1" dirty="0" smtClean="0"/>
+              <a:defRPr/>
+            </a:pPr>
+            <a:r>
+              <a:rPr lang="en-US" b="1"/>
               <a:t>1. Sales and Marketing</a:t>
             </a:r>
-            <a:endParaRPr lang="en-US" b="1" dirty="0" smtClean="0"/>
-          </a:p>
-          <a:p>
-            <a:r>
-              <a:rPr lang="en-US" dirty="0" smtClean="0"/>
+            <a:endParaRPr lang="en-US" b="1"/>
+          </a:p>
+          <a:p>
+            <a:pPr>
+              <a:defRPr/>
+            </a:pPr>
+            <a:r>
+              <a:rPr lang="en-US"/>
               <a:t>Improves customer service </a:t>
             </a:r>
-            <a:endParaRPr lang="en-US" dirty="0" smtClean="0"/>
-          </a:p>
-          <a:p>
-            <a:r>
-              <a:rPr lang="en-US" dirty="0" smtClean="0"/>
+            <a:endParaRPr lang="en-US"/>
+          </a:p>
+          <a:p>
+            <a:pPr>
+              <a:defRPr/>
+            </a:pPr>
+            <a:r>
+              <a:rPr lang="en-US"/>
               <a:t>Helps in cross-selling products </a:t>
             </a:r>
-            <a:endParaRPr lang="en-US" dirty="0" smtClean="0"/>
-          </a:p>
-          <a:p>
-            <a:r>
-              <a:rPr lang="en-US" dirty="0" smtClean="0"/>
+            <a:endParaRPr lang="en-US"/>
+          </a:p>
+          <a:p>
+            <a:pPr>
+              <a:defRPr/>
+            </a:pPr>
+            <a:r>
+              <a:rPr lang="en-US"/>
               <a:t>Increases response rates in promotions and direct marketing </a:t>
             </a:r>
-            <a:endParaRPr lang="en-US" dirty="0" smtClean="0"/>
+            <a:endParaRPr lang="en-US"/>
           </a:p>
           <a:p>
             <a:pPr marL="0" indent="0">
               <a:buNone/>
-            </a:pPr>
-            <a:r>
-              <a:rPr lang="en-US" b="1" dirty="0" smtClean="0"/>
+              <a:defRPr/>
+            </a:pPr>
+            <a:r>
+              <a:rPr lang="en-US" b="1"/>
               <a:t>2. Customer Retention</a:t>
             </a:r>
-            <a:endParaRPr lang="en-US" b="1" dirty="0" smtClean="0"/>
-          </a:p>
-          <a:p>
-            <a:r>
-              <a:rPr lang="en-US" dirty="0" smtClean="0"/>
+            <a:endParaRPr lang="en-US" b="1"/>
+          </a:p>
+          <a:p>
+            <a:pPr>
+              <a:defRPr/>
+            </a:pPr>
+            <a:r>
+              <a:rPr lang="en-US"/>
               <a:t>Identifies customer behavior patterns </a:t>
             </a:r>
-            <a:endParaRPr lang="en-US" dirty="0" smtClean="0"/>
-          </a:p>
-          <a:p>
-            <a:r>
-              <a:rPr lang="en-US" dirty="0" smtClean="0"/>
+            <a:endParaRPr lang="en-US"/>
+          </a:p>
+          <a:p>
+            <a:pPr>
+              <a:defRPr/>
+            </a:pPr>
+            <a:r>
+              <a:rPr lang="en-US"/>
               <a:t>Predicts possible customer defections </a:t>
             </a:r>
-            <a:endParaRPr lang="en-US" dirty="0" smtClean="0"/>
-          </a:p>
-          <a:p>
-            <a:r>
-              <a:rPr lang="en-US" dirty="0" smtClean="0"/>
+            <a:endParaRPr lang="en-US"/>
+          </a:p>
+          <a:p>
+            <a:pPr>
+              <a:defRPr/>
+            </a:pPr>
+            <a:r>
+              <a:rPr lang="en-US"/>
               <a:t>Helps companies maintain loyal customers </a:t>
             </a:r>
-            <a:endParaRPr lang="en-US" dirty="0" smtClean="0"/>
-          </a:p>
-        </p:txBody>
-      </p:sp>
-      <p:sp>
-        <p:nvSpPr>
-          <p:cNvPr id="5" name="Content Placeholder 4"/>
+            <a:endParaRPr lang="en-US"/>
+          </a:p>
+        </p:txBody>
+      </p:sp>
+      <p:sp>
+        <p:nvSpPr>
+          <p:cNvPr id="544404908" name="Content Placeholder 4"/>
           <p:cNvSpPr>
             <a:spLocks noGrp="1"/>
           </p:cNvSpPr>
@@ -5083,9 +7686,9 @@
             <p:ph sz="half" idx="2"/>
           </p:nvPr>
         </p:nvSpPr>
-        <p:spPr>
+        <p:spPr bwMode="auto">
           <a:xfrm>
-            <a:off x="6268824" y="0"/>
+            <a:off x="6268823" y="0"/>
             <a:ext cx="5923176" cy="6858000"/>
           </a:xfrm>
         </p:spPr>
@@ -5097,87 +7700,117 @@
           <a:p>
             <a:pPr marL="0" indent="0">
               <a:buNone/>
-            </a:pPr>
-            <a:r>
-              <a:rPr lang="en-US" b="1" dirty="0" smtClean="0"/>
+              <a:defRPr/>
+            </a:pPr>
+            <a:r>
+              <a:rPr lang="en-US" b="1"/>
               <a:t>3. Risk Assessment and Fraud Detection</a:t>
             </a:r>
-            <a:endParaRPr lang="en-US" b="1" dirty="0" smtClean="0"/>
-          </a:p>
-          <a:p>
-            <a:r>
-              <a:rPr lang="en-US" dirty="0" smtClean="0"/>
+            <a:endParaRPr lang="en-US" b="1"/>
+          </a:p>
+          <a:p>
+            <a:pPr>
+              <a:defRPr/>
+            </a:pPr>
+            <a:r>
+              <a:rPr lang="en-US"/>
               <a:t>Detects unusual purchasing behavior </a:t>
             </a:r>
-            <a:endParaRPr lang="en-US" dirty="0" smtClean="0"/>
-          </a:p>
-          <a:p>
-            <a:r>
-              <a:rPr lang="en-US" dirty="0" smtClean="0"/>
+            <a:endParaRPr lang="en-US"/>
+          </a:p>
+          <a:p>
+            <a:pPr>
+              <a:defRPr/>
+            </a:pPr>
+            <a:r>
+              <a:rPr lang="en-US"/>
               <a:t>Identifies fraudulent activities </a:t>
             </a:r>
-            <a:endParaRPr lang="en-US" dirty="0" smtClean="0"/>
-          </a:p>
-          <a:p>
-            <a:r>
-              <a:rPr lang="en-US" dirty="0" smtClean="0"/>
+            <a:endParaRPr lang="en-US"/>
+          </a:p>
+          <a:p>
+            <a:pPr>
+              <a:defRPr/>
+            </a:pPr>
+            <a:r>
+              <a:rPr lang="en-US"/>
               <a:t>Helps in security and monitoring systems </a:t>
             </a:r>
-            <a:endParaRPr lang="en-US" dirty="0" smtClean="0"/>
+            <a:endParaRPr lang="en-US"/>
           </a:p>
           <a:p>
             <a:pPr marL="0" indent="0">
               <a:buNone/>
-            </a:pPr>
-            <a:r>
-              <a:rPr lang="en-US" b="1" dirty="0" smtClean="0"/>
+              <a:defRPr/>
+            </a:pPr>
+            <a:r>
+              <a:rPr lang="en-US" b="1"/>
               <a:t>4. Store Layout Design</a:t>
             </a:r>
-            <a:endParaRPr lang="en-US" b="1" dirty="0" smtClean="0"/>
-          </a:p>
-          <a:p>
-            <a:r>
-              <a:rPr lang="en-US" dirty="0" smtClean="0"/>
+            <a:endParaRPr lang="en-US" b="1"/>
+          </a:p>
+          <a:p>
+            <a:pPr>
+              <a:defRPr/>
+            </a:pPr>
+            <a:r>
+              <a:rPr lang="en-US"/>
               <a:t>Products frequently bought together are placed nearby </a:t>
             </a:r>
-            <a:endParaRPr lang="en-US" dirty="0" smtClean="0"/>
-          </a:p>
-          <a:p>
-            <a:r>
-              <a:rPr lang="en-US" dirty="0" smtClean="0"/>
+            <a:endParaRPr lang="en-US"/>
+          </a:p>
+          <a:p>
+            <a:pPr>
+              <a:defRPr/>
+            </a:pPr>
+            <a:r>
+              <a:rPr lang="en-US"/>
               <a:t>Improves shopping convenience </a:t>
             </a:r>
-            <a:endParaRPr lang="en-US" dirty="0" smtClean="0"/>
+            <a:endParaRPr lang="en-US"/>
           </a:p>
           <a:p>
             <a:pPr marL="0" indent="0">
               <a:buNone/>
-            </a:pPr>
-            <a:r>
-              <a:rPr lang="en-US" b="1" dirty="0" smtClean="0"/>
+              <a:defRPr/>
+            </a:pPr>
+            <a:r>
+              <a:rPr lang="en-US" b="1"/>
               <a:t>5. Recommendation Systems</a:t>
             </a:r>
-            <a:endParaRPr lang="en-US" b="1" dirty="0" smtClean="0"/>
-          </a:p>
-          <a:p>
-            <a:r>
-              <a:rPr lang="en-US" dirty="0" smtClean="0"/>
+            <a:endParaRPr lang="en-US" b="1"/>
+          </a:p>
+          <a:p>
+            <a:pPr>
+              <a:defRPr/>
+            </a:pPr>
+            <a:r>
+              <a:rPr lang="en-US"/>
               <a:t>Used in online shopping platforms such as:</a:t>
             </a:r>
-            <a:endParaRPr lang="en-US" dirty="0" smtClean="0"/>
-          </a:p>
-          <a:p>
-            <a:r>
-              <a:rPr lang="en-US" dirty="0" smtClean="0"/>
+            <a:endParaRPr lang="en-US"/>
+          </a:p>
+          <a:p>
+            <a:pPr>
+              <a:defRPr/>
+            </a:pPr>
+            <a:r>
+              <a:rPr lang="en-US"/>
               <a:t>“Customers who bought this also bought…”</a:t>
             </a:r>
-            <a:endParaRPr lang="en-US" dirty="0" smtClean="0"/>
-          </a:p>
-          <a:p>
-            <a:endParaRPr lang="en-US" dirty="0" smtClean="0"/>
-          </a:p>
-          <a:p>
-            <a:endParaRPr lang="en-US" dirty="0"/>
+            <a:endParaRPr lang="en-US"/>
+          </a:p>
+          <a:p>
+            <a:pPr>
+              <a:defRPr/>
+            </a:pPr>
+            <a:endParaRPr lang="en-US"/>
+          </a:p>
+          <a:p>
+            <a:pPr>
+              <a:defRPr/>
+            </a:pPr>
+            <a:endParaRPr lang="en-US"/>
           </a:p>
         </p:txBody>
       </p:sp>
@@ -5186,19 +7819,27 @@
   <p:clrMapOvr>
     <a:masterClrMapping/>
   </p:clrMapOvr>
+  <mc:AlternateContent xmlns:mc="http://schemas.openxmlformats.org/markup-compatibility/2006">
+    <mc:Choice xmlns:p159="http://schemas.microsoft.com/office/powerpoint/2015/09/main" xmlns:p14="http://schemas.microsoft.com/office/powerpoint/2010/main" Requires="p159">
+      <p:transition p14:dur="500" advClick="1"/>
+    </mc:Choice>
+    <mc:Fallback>
+      <p:transition advClick="1"/>
+    </mc:Fallback>
+  </mc:AlternateContent>
 </p:sld>
 </file>
 
 <file path=ppt/slides/slide7.xml><?xml version="1.0" encoding="utf-8"?>
-<p:sld xmlns:a="http://schemas.openxmlformats.org/drawingml/2006/main" xmlns:r="http://schemas.openxmlformats.org/officeDocument/2006/relationships" xmlns:p="http://schemas.openxmlformats.org/presentationml/2006/main">
-  <p:cSld>
+<p:sld xmlns:a="http://schemas.openxmlformats.org/drawingml/2006/main" xmlns:r="http://schemas.openxmlformats.org/officeDocument/2006/relationships" xmlns:p="http://schemas.openxmlformats.org/presentationml/2006/main" xmlns:m="http://schemas.openxmlformats.org/officeDocument/2006/math" xmlns:w="http://schemas.openxmlformats.org/wordprocessingml/2006/main" xmlns:mc="http://schemas.openxmlformats.org/markup-compatibility/2006" showMasterPhAnim="0" showMasterSp="1" show="1">
+  <p:cSld name="">
     <p:spTree>
       <p:nvGrpSpPr>
         <p:cNvPr id="1" name=""/>
         <p:cNvGrpSpPr/>
         <p:nvPr/>
       </p:nvGrpSpPr>
-      <p:grpSpPr>
+      <p:grpSpPr bwMode="auto">
         <a:xfrm>
           <a:off x="0" y="0"/>
           <a:ext cx="0" cy="0"/>
@@ -5208,7 +7849,7 @@
       </p:grpSpPr>
       <p:sp>
         <p:nvSpPr>
-          <p:cNvPr id="3" name="Content Placeholder 2"/>
+          <p:cNvPr id="2006284288" name="Content Placeholder 2"/>
           <p:cNvSpPr>
             <a:spLocks noGrp="1"/>
           </p:cNvSpPr>
@@ -5216,7 +7857,7 @@
             <p:ph sz="half" idx="1"/>
           </p:nvPr>
         </p:nvSpPr>
-        <p:spPr>
+        <p:spPr bwMode="auto">
           <a:xfrm>
             <a:off x="0" y="0"/>
             <a:ext cx="6019800" cy="6702458"/>
@@ -5226,55 +7867,76 @@
           <a:bodyPr/>
           <a:lstStyle/>
           <a:p>
-            <a:r>
-              <a:rPr lang="en-US" b="1" dirty="0" smtClean="0"/>
+            <a:pPr>
+              <a:defRPr/>
+            </a:pPr>
+            <a:r>
+              <a:rPr lang="en-US" b="1"/>
               <a:t>Advantages</a:t>
             </a:r>
-            <a:endParaRPr lang="en-US" b="1" dirty="0" smtClean="0"/>
-          </a:p>
-          <a:p>
-            <a:r>
-              <a:rPr lang="en-US" dirty="0" smtClean="0"/>
+            <a:endParaRPr lang="en-US" b="1"/>
+          </a:p>
+          <a:p>
+            <a:pPr>
+              <a:defRPr/>
+            </a:pPr>
+            <a:r>
+              <a:rPr lang="en-US"/>
               <a:t>Increases sales and revenue </a:t>
             </a:r>
-            <a:endParaRPr lang="en-US" dirty="0" smtClean="0"/>
-          </a:p>
-          <a:p>
-            <a:r>
-              <a:rPr lang="en-US" dirty="0" smtClean="0"/>
+            <a:endParaRPr lang="en-US"/>
+          </a:p>
+          <a:p>
+            <a:pPr>
+              <a:defRPr/>
+            </a:pPr>
+            <a:r>
+              <a:rPr lang="en-US"/>
               <a:t>Improves customer satisfaction </a:t>
             </a:r>
-            <a:endParaRPr lang="en-US" dirty="0" smtClean="0"/>
-          </a:p>
-          <a:p>
-            <a:r>
-              <a:rPr lang="en-US" dirty="0" smtClean="0"/>
+            <a:endParaRPr lang="en-US"/>
+          </a:p>
+          <a:p>
+            <a:pPr>
+              <a:defRPr/>
+            </a:pPr>
+            <a:r>
+              <a:rPr lang="en-US"/>
               <a:t>Supports better decision-making </a:t>
             </a:r>
-            <a:endParaRPr lang="en-US" dirty="0" smtClean="0"/>
-          </a:p>
-          <a:p>
-            <a:r>
-              <a:rPr lang="en-US" dirty="0" smtClean="0"/>
+            <a:endParaRPr lang="en-US"/>
+          </a:p>
+          <a:p>
+            <a:pPr>
+              <a:defRPr/>
+            </a:pPr>
+            <a:r>
+              <a:rPr lang="en-US"/>
               <a:t>Helps in targeted marketing </a:t>
             </a:r>
-            <a:endParaRPr lang="en-US" dirty="0" smtClean="0"/>
-          </a:p>
-          <a:p>
-            <a:r>
-              <a:rPr lang="en-US" dirty="0" smtClean="0"/>
+            <a:endParaRPr lang="en-US"/>
+          </a:p>
+          <a:p>
+            <a:pPr>
+              <a:defRPr/>
+            </a:pPr>
+            <a:r>
+              <a:rPr lang="en-US"/>
               <a:t>Easy to implement with transaction data</a:t>
             </a:r>
-            <a:endParaRPr lang="en-US" dirty="0" smtClean="0"/>
-          </a:p>
-          <a:p>
-            <a:endParaRPr lang="en-US" dirty="0"/>
-          </a:p>
-        </p:txBody>
-      </p:sp>
-      <p:sp>
-        <p:nvSpPr>
-          <p:cNvPr id="4" name="Content Placeholder 3"/>
+            <a:endParaRPr lang="en-US"/>
+          </a:p>
+          <a:p>
+            <a:pPr>
+              <a:defRPr/>
+            </a:pPr>
+            <a:endParaRPr lang="en-US"/>
+          </a:p>
+        </p:txBody>
+      </p:sp>
+      <p:sp>
+        <p:nvSpPr>
+          <p:cNvPr id="556427019" name="Content Placeholder 3"/>
           <p:cNvSpPr>
             <a:spLocks noGrp="1"/>
           </p:cNvSpPr>
@@ -5282,7 +7944,7 @@
             <p:ph sz="half" idx="2"/>
           </p:nvPr>
         </p:nvSpPr>
-        <p:spPr>
+        <p:spPr bwMode="auto">
           <a:xfrm>
             <a:off x="6287678" y="0"/>
             <a:ext cx="5806912" cy="6702458"/>
@@ -5292,42 +7954,60 @@
           <a:bodyPr/>
           <a:lstStyle/>
           <a:p>
-            <a:r>
-              <a:rPr lang="en-US" b="1" dirty="0" smtClean="0"/>
+            <a:pPr>
+              <a:defRPr/>
+            </a:pPr>
+            <a:r>
+              <a:rPr lang="en-US" b="1"/>
               <a:t>Limitations</a:t>
             </a:r>
-            <a:endParaRPr lang="en-US" b="1" dirty="0" smtClean="0"/>
-          </a:p>
-          <a:p>
-            <a:r>
-              <a:rPr lang="en-US" dirty="0" smtClean="0"/>
+            <a:endParaRPr lang="en-US" b="1"/>
+          </a:p>
+          <a:p>
+            <a:pPr>
+              <a:defRPr/>
+            </a:pPr>
+            <a:r>
+              <a:rPr lang="en-US"/>
               <a:t>Requires large amounts of data </a:t>
             </a:r>
-            <a:endParaRPr lang="en-US" dirty="0" smtClean="0"/>
-          </a:p>
-          <a:p>
-            <a:r>
-              <a:rPr lang="en-US" dirty="0" smtClean="0"/>
+            <a:endParaRPr lang="en-US"/>
+          </a:p>
+          <a:p>
+            <a:pPr>
+              <a:defRPr/>
+            </a:pPr>
+            <a:r>
+              <a:rPr lang="en-US"/>
               <a:t>Patterns may change over time </a:t>
             </a:r>
-            <a:endParaRPr lang="en-US" dirty="0" smtClean="0"/>
-          </a:p>
-          <a:p>
-            <a:r>
-              <a:rPr lang="en-US" dirty="0" smtClean="0"/>
+            <a:endParaRPr lang="en-US"/>
+          </a:p>
+          <a:p>
+            <a:pPr>
+              <a:defRPr/>
+            </a:pPr>
+            <a:r>
+              <a:rPr lang="en-US"/>
               <a:t>Rare item combinations may be ignored </a:t>
             </a:r>
-            <a:endParaRPr lang="en-US" dirty="0" smtClean="0"/>
-          </a:p>
-          <a:p>
-            <a:r>
-              <a:rPr lang="en-US" dirty="0" smtClean="0"/>
+            <a:endParaRPr lang="en-US"/>
+          </a:p>
+          <a:p>
+            <a:pPr>
+              <a:defRPr/>
+            </a:pPr>
+            <a:r>
+              <a:rPr lang="en-US"/>
               <a:t>Incorrect analysis may lead to poor business decisions</a:t>
             </a:r>
-            <a:endParaRPr lang="en-US" dirty="0" smtClean="0"/>
-          </a:p>
-          <a:p>
-            <a:endParaRPr lang="en-US" dirty="0"/>
+            <a:endParaRPr lang="en-US"/>
+          </a:p>
+          <a:p>
+            <a:pPr>
+              <a:defRPr/>
+            </a:pPr>
+            <a:endParaRPr lang="en-US"/>
           </a:p>
         </p:txBody>
       </p:sp>
@@ -5336,19 +8016,27 @@
   <p:clrMapOvr>
     <a:masterClrMapping/>
   </p:clrMapOvr>
+  <mc:AlternateContent xmlns:mc="http://schemas.openxmlformats.org/markup-compatibility/2006">
+    <mc:Choice xmlns:p159="http://schemas.microsoft.com/office/powerpoint/2015/09/main" xmlns:p14="http://schemas.microsoft.com/office/powerpoint/2010/main" Requires="p159">
+      <p:transition p14:dur="500" advClick="1"/>
+    </mc:Choice>
+    <mc:Fallback>
+      <p:transition advClick="1"/>
+    </mc:Fallback>
+  </mc:AlternateContent>
 </p:sld>
 </file>
 
 <file path=ppt/slides/slide8.xml><?xml version="1.0" encoding="utf-8"?>
-<p:sld xmlns:a="http://schemas.openxmlformats.org/drawingml/2006/main" xmlns:r="http://schemas.openxmlformats.org/officeDocument/2006/relationships" xmlns:p="http://schemas.openxmlformats.org/presentationml/2006/main">
-  <p:cSld>
+<p:sld xmlns:a="http://schemas.openxmlformats.org/drawingml/2006/main" xmlns:r="http://schemas.openxmlformats.org/officeDocument/2006/relationships" xmlns:p="http://schemas.openxmlformats.org/presentationml/2006/main" xmlns:m="http://schemas.openxmlformats.org/officeDocument/2006/math" xmlns:w="http://schemas.openxmlformats.org/wordprocessingml/2006/main" xmlns:mc="http://schemas.openxmlformats.org/markup-compatibility/2006" showMasterPhAnim="0" showMasterSp="1" show="1">
+  <p:cSld name="">
     <p:spTree>
       <p:nvGrpSpPr>
         <p:cNvPr id="1" name=""/>
         <p:cNvGrpSpPr/>
         <p:nvPr/>
       </p:nvGrpSpPr>
-      <p:grpSpPr>
+      <p:grpSpPr bwMode="auto">
         <a:xfrm>
           <a:off x="0" y="0"/>
           <a:ext cx="0" cy="0"/>
@@ -5358,21 +8046,19 @@
       </p:grpSpPr>
       <p:pic>
         <p:nvPicPr>
-          <p:cNvPr id="9" name="Content Placeholder 8"/>
+          <p:cNvPr id="404074116" name="Content Placeholder 8"/>
           <p:cNvPicPr>
-            <a:picLocks noGrp="1" noChangeAspect="1"/>
+            <a:picLocks noChangeAspect="1" noGrp="1"/>
           </p:cNvPicPr>
           <p:nvPr>
             <p:ph idx="1"/>
           </p:nvPr>
         </p:nvPicPr>
-        <p:blipFill>
-          <a:blip r:embed="rId1"/>
-          <a:stretch>
-            <a:fillRect/>
-          </a:stretch>
+        <p:blipFill rotWithShape="1">
+          <a:blip r:embed="rId3"/>
+          <a:stretch/>
         </p:blipFill>
-        <p:spPr>
+        <p:spPr bwMode="auto">
           <a:xfrm>
             <a:off x="0" y="-1"/>
             <a:ext cx="12191999" cy="6858001"/>
@@ -5387,19 +8073,27 @@
   <p:clrMapOvr>
     <a:masterClrMapping/>
   </p:clrMapOvr>
+  <mc:AlternateContent xmlns:mc="http://schemas.openxmlformats.org/markup-compatibility/2006">
+    <mc:Choice xmlns:p159="http://schemas.microsoft.com/office/powerpoint/2015/09/main" xmlns:p14="http://schemas.microsoft.com/office/powerpoint/2010/main" Requires="p159">
+      <p:transition p14:dur="500" advClick="1"/>
+    </mc:Choice>
+    <mc:Fallback>
+      <p:transition advClick="1"/>
+    </mc:Fallback>
+  </mc:AlternateContent>
 </p:sld>
 </file>
 
 <file path=ppt/slides/slide9.xml><?xml version="1.0" encoding="utf-8"?>
-<p:sld xmlns:a="http://schemas.openxmlformats.org/drawingml/2006/main" xmlns:r="http://schemas.openxmlformats.org/officeDocument/2006/relationships" xmlns:p="http://schemas.openxmlformats.org/presentationml/2006/main">
-  <p:cSld>
+<p:sld xmlns:a="http://schemas.openxmlformats.org/drawingml/2006/main" xmlns:r="http://schemas.openxmlformats.org/officeDocument/2006/relationships" xmlns:p="http://schemas.openxmlformats.org/presentationml/2006/main" xmlns:m="http://schemas.openxmlformats.org/officeDocument/2006/math" xmlns:w="http://schemas.openxmlformats.org/wordprocessingml/2006/main" xmlns:mc="http://schemas.openxmlformats.org/markup-compatibility/2006" showMasterPhAnim="0" showMasterSp="1" show="1">
+  <p:cSld name="">
     <p:spTree>
       <p:nvGrpSpPr>
         <p:cNvPr id="1" name=""/>
         <p:cNvGrpSpPr/>
         <p:nvPr/>
       </p:nvGrpSpPr>
-      <p:grpSpPr>
+      <p:grpSpPr bwMode="auto">
         <a:xfrm>
           <a:off x="0" y="0"/>
           <a:ext cx="0" cy="0"/>
@@ -5409,7 +8103,7 @@
       </p:grpSpPr>
       <p:sp>
         <p:nvSpPr>
-          <p:cNvPr id="3" name="Content Placeholder 2"/>
+          <p:cNvPr id="706548889" name="Content Placeholder 2"/>
           <p:cNvSpPr>
             <a:spLocks noGrp="1"/>
           </p:cNvSpPr>
@@ -5417,7 +8111,7 @@
             <p:ph sz="half" idx="1"/>
           </p:nvPr>
         </p:nvSpPr>
-        <p:spPr>
+        <p:spPr bwMode="auto">
           <a:xfrm>
             <a:off x="0" y="0"/>
             <a:ext cx="6019800" cy="6858000"/>
@@ -5431,154 +8125,183 @@
           <a:p>
             <a:pPr marL="0" indent="0">
               <a:buNone/>
-            </a:pPr>
-            <a:r>
-              <a:rPr lang="en-US" b="1" dirty="0" smtClean="0"/>
+              <a:defRPr/>
+            </a:pPr>
+            <a:r>
+              <a:rPr lang="en-US" b="1"/>
               <a:t>Step 1: Identify Frequent </a:t>
             </a:r>
             <a:r>
-              <a:rPr lang="en-US" b="1" dirty="0" err="1" smtClean="0"/>
+              <a:rPr lang="en-US" b="1"/>
               <a:t>Itemsets</a:t>
             </a:r>
-            <a:endParaRPr lang="en-US" b="1" dirty="0" smtClean="0"/>
-          </a:p>
-          <a:p>
-            <a:r>
-              <a:rPr lang="en-US" dirty="0" smtClean="0"/>
+            <a:endParaRPr lang="en-US" b="1"/>
+          </a:p>
+          <a:p>
+            <a:pPr>
+              <a:defRPr/>
+            </a:pPr>
+            <a:r>
+              <a:rPr lang="en-US"/>
               <a:t>From the transactions, we observe:</a:t>
             </a:r>
-            <a:endParaRPr lang="en-US" dirty="0" smtClean="0"/>
-          </a:p>
-          <a:p>
-            <a:r>
-              <a:rPr lang="en-US" dirty="0" smtClean="0"/>
+            <a:endParaRPr lang="en-US"/>
+          </a:p>
+          <a:p>
+            <a:pPr>
+              <a:defRPr/>
+            </a:pPr>
+            <a:r>
+              <a:rPr lang="en-US"/>
               <a:t>Bread and Butter appear together in: </a:t>
             </a:r>
-            <a:endParaRPr lang="en-US" dirty="0" smtClean="0"/>
-          </a:p>
-          <a:p>
-            <a:pPr lvl="1"/>
-            <a:r>
-              <a:rPr lang="en-US" dirty="0" smtClean="0"/>
+            <a:endParaRPr lang="en-US"/>
+          </a:p>
+          <a:p>
+            <a:pPr lvl="1">
+              <a:defRPr/>
+            </a:pPr>
+            <a:r>
+              <a:rPr lang="en-US"/>
               <a:t>T1 </a:t>
             </a:r>
-            <a:endParaRPr lang="en-US" dirty="0" smtClean="0"/>
-          </a:p>
-          <a:p>
-            <a:pPr lvl="1"/>
-            <a:r>
-              <a:rPr lang="en-US" dirty="0" smtClean="0"/>
+            <a:endParaRPr lang="en-US"/>
+          </a:p>
+          <a:p>
+            <a:pPr lvl="1">
+              <a:defRPr/>
+            </a:pPr>
+            <a:r>
+              <a:rPr lang="en-US"/>
               <a:t>T4 </a:t>
             </a:r>
-            <a:endParaRPr lang="en-US" dirty="0" smtClean="0"/>
-          </a:p>
-          <a:p>
-            <a:pPr lvl="1"/>
-            <a:r>
-              <a:rPr lang="en-US" dirty="0" smtClean="0"/>
+            <a:endParaRPr lang="en-US"/>
+          </a:p>
+          <a:p>
+            <a:pPr lvl="1">
+              <a:defRPr/>
+            </a:pPr>
+            <a:r>
+              <a:rPr lang="en-US"/>
               <a:t>T5 </a:t>
             </a:r>
-            <a:endParaRPr lang="en-US" dirty="0" smtClean="0"/>
-          </a:p>
-          <a:p>
-            <a:r>
-              <a:rPr lang="en-US" dirty="0" smtClean="0"/>
+            <a:endParaRPr lang="en-US"/>
+          </a:p>
+          <a:p>
+            <a:pPr>
+              <a:defRPr/>
+            </a:pPr>
+            <a:r>
+              <a:rPr lang="en-US"/>
               <a:t>So, </a:t>
             </a:r>
             <a:r>
-              <a:rPr lang="en-US" b="1" dirty="0" smtClean="0"/>
+              <a:rPr lang="en-US" b="1"/>
               <a:t>Bread + Butter</a:t>
             </a:r>
             <a:r>
-              <a:rPr lang="en-US" dirty="0" smtClean="0"/>
+              <a:rPr lang="en-US"/>
               <a:t> is a frequent </a:t>
             </a:r>
             <a:r>
-              <a:rPr lang="en-US" dirty="0" err="1" smtClean="0"/>
+              <a:rPr lang="en-US"/>
               <a:t>itemset</a:t>
             </a:r>
             <a:r>
-              <a:rPr lang="en-US" dirty="0" smtClean="0"/>
+              <a:rPr lang="en-US"/>
               <a:t>.</a:t>
             </a:r>
-            <a:endParaRPr lang="en-US" dirty="0" smtClean="0"/>
-          </a:p>
-          <a:p>
-            <a:r>
-              <a:rPr lang="en-US" dirty="0" smtClean="0"/>
+            <a:endParaRPr lang="en-US"/>
+          </a:p>
+          <a:p>
+            <a:pPr>
+              <a:defRPr/>
+            </a:pPr>
+            <a:r>
+              <a:rPr lang="en-US"/>
               <a:t>Diaper and Beer appear together in: </a:t>
             </a:r>
-            <a:endParaRPr lang="en-US" dirty="0" smtClean="0"/>
-          </a:p>
-          <a:p>
-            <a:pPr lvl="1"/>
-            <a:r>
-              <a:rPr lang="en-US" dirty="0" smtClean="0"/>
+            <a:endParaRPr lang="en-US"/>
+          </a:p>
+          <a:p>
+            <a:pPr lvl="1">
+              <a:defRPr/>
+            </a:pPr>
+            <a:r>
+              <a:rPr lang="en-US"/>
               <a:t>T2 </a:t>
             </a:r>
-            <a:endParaRPr lang="en-US" dirty="0" smtClean="0"/>
-          </a:p>
-          <a:p>
-            <a:pPr lvl="1"/>
-            <a:r>
-              <a:rPr lang="en-US" dirty="0" smtClean="0"/>
+            <a:endParaRPr lang="en-US"/>
+          </a:p>
+          <a:p>
+            <a:pPr lvl="1">
+              <a:defRPr/>
+            </a:pPr>
+            <a:r>
+              <a:rPr lang="en-US"/>
               <a:t>T3 </a:t>
             </a:r>
-            <a:endParaRPr lang="en-US" dirty="0" smtClean="0"/>
-          </a:p>
-          <a:p>
-            <a:pPr lvl="1"/>
-            <a:r>
-              <a:rPr lang="en-US" dirty="0" smtClean="0"/>
+            <a:endParaRPr lang="en-US"/>
+          </a:p>
+          <a:p>
+            <a:pPr lvl="1">
+              <a:defRPr/>
+            </a:pPr>
+            <a:r>
+              <a:rPr lang="en-US"/>
               <a:t>T4 </a:t>
             </a:r>
-            <a:endParaRPr lang="en-US" dirty="0" smtClean="0"/>
-          </a:p>
-          <a:p>
-            <a:r>
-              <a:rPr lang="en-US" dirty="0" smtClean="0"/>
+            <a:endParaRPr lang="en-US"/>
+          </a:p>
+          <a:p>
+            <a:pPr>
+              <a:defRPr/>
+            </a:pPr>
+            <a:r>
+              <a:rPr lang="en-US"/>
               <a:t>So, </a:t>
             </a:r>
             <a:r>
-              <a:rPr lang="en-US" b="1" dirty="0" smtClean="0"/>
+              <a:rPr lang="en-US" b="1"/>
               <a:t>Diaper + Beer</a:t>
             </a:r>
             <a:r>
-              <a:rPr lang="en-US" dirty="0" smtClean="0"/>
+              <a:rPr lang="en-US"/>
               <a:t> is another frequent </a:t>
             </a:r>
             <a:r>
-              <a:rPr lang="en-US" dirty="0" err="1" smtClean="0"/>
+              <a:rPr lang="en-US"/>
               <a:t>itemset</a:t>
             </a:r>
             <a:r>
-              <a:rPr lang="en-US" dirty="0" smtClean="0"/>
+              <a:rPr lang="en-US"/>
               <a:t>.</a:t>
             </a:r>
-            <a:endParaRPr lang="en-US" dirty="0" smtClean="0"/>
-          </a:p>
-          <a:p>
-            <a:endParaRPr lang="en-US" dirty="0"/>
+            <a:endParaRPr lang="en-US"/>
+          </a:p>
+          <a:p>
+            <a:pPr>
+              <a:defRPr/>
+            </a:pPr>
+            <a:endParaRPr lang="en-US"/>
           </a:p>
         </p:txBody>
       </p:sp>
       <p:pic>
         <p:nvPicPr>
-          <p:cNvPr id="5" name="Content Placeholder 4"/>
+          <p:cNvPr id="409772651" name="Content Placeholder 4"/>
           <p:cNvPicPr>
-            <a:picLocks noGrp="1" noChangeAspect="1"/>
+            <a:picLocks noChangeAspect="1" noGrp="1"/>
           </p:cNvPicPr>
           <p:nvPr>
             <p:ph sz="half" idx="2"/>
           </p:nvPr>
         </p:nvPicPr>
-        <p:blipFill>
-          <a:blip r:embed="rId1"/>
-          <a:stretch>
-            <a:fillRect/>
-          </a:stretch>
+        <p:blipFill rotWithShape="1">
+          <a:blip r:embed="rId3"/>
+          <a:stretch/>
         </p:blipFill>
-        <p:spPr>
+        <p:spPr bwMode="auto">
           <a:xfrm>
             <a:off x="6248270" y="603315"/>
             <a:ext cx="5572941" cy="5467547"/>
@@ -5593,11 +8316,19 @@
   <p:clrMapOvr>
     <a:masterClrMapping/>
   </p:clrMapOvr>
+  <mc:AlternateContent xmlns:mc="http://schemas.openxmlformats.org/markup-compatibility/2006">
+    <mc:Choice xmlns:p159="http://schemas.microsoft.com/office/powerpoint/2015/09/main" xmlns:p14="http://schemas.microsoft.com/office/powerpoint/2010/main" Requires="p159">
+      <p:transition p14:dur="500" advClick="1"/>
+    </mc:Choice>
+    <mc:Fallback>
+      <p:transition advClick="1"/>
+    </mc:Fallback>
+  </mc:AlternateContent>
 </p:sld>
 </file>
 
 <file path=ppt/theme/theme1.xml><?xml version="1.0" encoding="utf-8"?>
-<a:theme xmlns:a="http://schemas.openxmlformats.org/drawingml/2006/main" name="Office Theme">
+<a:theme xmlns:a="http://schemas.openxmlformats.org/drawingml/2006/main" xmlns:r="http://schemas.openxmlformats.org/officeDocument/2006/relationships" xmlns:p="http://schemas.openxmlformats.org/presentationml/2006/main" name="Office Theme">
   <a:themeElements>
     <a:clrScheme name="Office">
       <a:dk1>
@@ -5640,73 +8371,13 @@
     <a:fontScheme name="Office">
       <a:majorFont>
         <a:latin typeface="Calibri Light"/>
-        <a:ea typeface=""/>
-        <a:cs typeface=""/>
-        <a:font script="Jpan" typeface="游ゴシック Light"/>
-        <a:font script="Hang" typeface="맑은 고딕"/>
-        <a:font script="Hans" typeface="等线 Light"/>
-        <a:font script="Hant" typeface="新細明體"/>
-        <a:font script="Arab" typeface="Times New Roman"/>
-        <a:font script="Hebr" typeface="Times New Roman"/>
-        <a:font script="Thai" typeface="Angsana New"/>
-        <a:font script="Ethi" typeface="Nyala"/>
-        <a:font script="Beng" typeface="Vrinda"/>
-        <a:font script="Gujr" typeface="Shruti"/>
-        <a:font script="Khmr" typeface="MoolBoran"/>
-        <a:font script="Knda" typeface="Tunga"/>
-        <a:font script="Guru" typeface="Raavi"/>
-        <a:font script="Cans" typeface="Euphemia"/>
-        <a:font script="Cher" typeface="Plantagenet Cherokee"/>
-        <a:font script="Yiii" typeface="Microsoft Yi Baiti"/>
-        <a:font script="Tibt" typeface="Microsoft Himalaya"/>
-        <a:font script="Thaa" typeface="MV Boli"/>
-        <a:font script="Deva" typeface="Mangal"/>
-        <a:font script="Telu" typeface="Gautami"/>
-        <a:font script="Taml" typeface="Latha"/>
-        <a:font script="Syrc" typeface="Estrangelo Edessa"/>
-        <a:font script="Orya" typeface="Kalinga"/>
-        <a:font script="Mlym" typeface="Kartika"/>
-        <a:font script="Laoo" typeface="DokChampa"/>
-        <a:font script="Sinh" typeface="Iskoola Pota"/>
-        <a:font script="Mong" typeface="Mongolian Baiti"/>
-        <a:font script="Viet" typeface="Times New Roman"/>
-        <a:font script="Uigh" typeface="Microsoft Uighur"/>
-        <a:font script="Geor" typeface="Sylfaen"/>
+        <a:ea typeface="Arial"/>
+        <a:cs typeface="Arial"/>
       </a:majorFont>
       <a:minorFont>
         <a:latin typeface="Calibri"/>
-        <a:ea typeface=""/>
-        <a:cs typeface=""/>
-        <a:font script="Jpan" typeface="游ゴシック"/>
-        <a:font script="Hang" typeface="맑은 고딕"/>
-        <a:font script="Hans" typeface="等线"/>
-        <a:font script="Hant" typeface="新細明體"/>
-        <a:font script="Arab" typeface="Arial"/>
-        <a:font script="Hebr" typeface="Arial"/>
-        <a:font script="Thai" typeface="Cordia New"/>
-        <a:font script="Ethi" typeface="Nyala"/>
-        <a:font script="Beng" typeface="Vrinda"/>
-        <a:font script="Gujr" typeface="Shruti"/>
-        <a:font script="Khmr" typeface="DaunPenh"/>
-        <a:font script="Knda" typeface="Tunga"/>
-        <a:font script="Guru" typeface="Raavi"/>
-        <a:font script="Cans" typeface="Euphemia"/>
-        <a:font script="Cher" typeface="Plantagenet Cherokee"/>
-        <a:font script="Yiii" typeface="Microsoft Yi Baiti"/>
-        <a:font script="Tibt" typeface="Microsoft Himalaya"/>
-        <a:font script="Thaa" typeface="MV Boli"/>
-        <a:font script="Deva" typeface="Mangal"/>
-        <a:font script="Telu" typeface="Gautami"/>
-        <a:font script="Taml" typeface="Latha"/>
-        <a:font script="Syrc" typeface="Estrangelo Edessa"/>
-        <a:font script="Orya" typeface="Kalinga"/>
-        <a:font script="Mlym" typeface="Kartika"/>
-        <a:font script="Laoo" typeface="DokChampa"/>
-        <a:font script="Sinh" typeface="Iskoola Pota"/>
-        <a:font script="Mong" typeface="Mongolian Baiti"/>
-        <a:font script="Viet" typeface="Arial"/>
-        <a:font script="Uigh" typeface="Microsoft Uighur"/>
-        <a:font script="Geor" typeface="Sylfaen"/>
+        <a:ea typeface="Arial"/>
+        <a:cs typeface="Arial"/>
       </a:minorFont>
     </a:fontScheme>
     <a:fmtScheme name="Office">
@@ -5714,7 +8385,7 @@
         <a:solidFill>
           <a:schemeClr val="phClr"/>
         </a:solidFill>
-        <a:gradFill rotWithShape="1">
+        <a:gradFill>
           <a:gsLst>
             <a:gs pos="0">
               <a:schemeClr val="phClr">
@@ -5740,7 +8411,7 @@
           </a:gsLst>
           <a:lin ang="5400000" scaled="0"/>
         </a:gradFill>
-        <a:gradFill rotWithShape="1">
+        <a:gradFill>
           <a:gsLst>
             <a:gs pos="0">
               <a:schemeClr val="phClr">
@@ -5817,7 +8488,7 @@
             <a:satMod val="170000"/>
           </a:schemeClr>
         </a:solidFill>
-        <a:gradFill rotWithShape="1">
+        <a:gradFill>
           <a:gsLst>
             <a:gs pos="0">
               <a:schemeClr val="phClr">
@@ -5847,10 +8518,201 @@
       </a:bgFillStyleLst>
     </a:fmtScheme>
   </a:themeElements>
-  <a:extLst>
-    <a:ext uri="{05A4C25C-085E-4340-85A3-A5531E510DB2}">
-      <thm15:themeFamily xmlns:thm15="http://schemas.microsoft.com/office/thememl/2012/main" name="Office Theme" id="{62F939B6-93AF-4DB8-9C6B-D6C7DFDC589F}" vid="{4A3C46E8-61CC-4603-A589-7422A47A8E4A}"/>
-    </a:ext>
-  </a:extLst>
+  <a:objectDefaults/>
+</a:theme>
+</file>
+
+<file path=ppt/theme/theme2.xml><?xml version="1.0" encoding="utf-8"?>
+<a:theme xmlns:a="http://schemas.openxmlformats.org/drawingml/2006/main" xmlns:r="http://schemas.openxmlformats.org/officeDocument/2006/relationships" xmlns:p="http://schemas.openxmlformats.org/presentationml/2006/main" name="Office Theme">
+  <a:themeElements>
+    <a:clrScheme name="Office">
+      <a:dk1>
+        <a:sysClr val="windowText" lastClr="000000"/>
+      </a:dk1>
+      <a:lt1>
+        <a:sysClr val="window" lastClr="FFFFFF"/>
+      </a:lt1>
+      <a:dk2>
+        <a:srgbClr val="44546A"/>
+      </a:dk2>
+      <a:lt2>
+        <a:srgbClr val="E7E6E6"/>
+      </a:lt2>
+      <a:accent1>
+        <a:srgbClr val="5B9BD5"/>
+      </a:accent1>
+      <a:accent2>
+        <a:srgbClr val="ED7D31"/>
+      </a:accent2>
+      <a:accent3>
+        <a:srgbClr val="A5A5A5"/>
+      </a:accent3>
+      <a:accent4>
+        <a:srgbClr val="FFC000"/>
+      </a:accent4>
+      <a:accent5>
+        <a:srgbClr val="4472C4"/>
+      </a:accent5>
+      <a:accent6>
+        <a:srgbClr val="70AD47"/>
+      </a:accent6>
+      <a:hlink>
+        <a:srgbClr val="0563C1"/>
+      </a:hlink>
+      <a:folHlink>
+        <a:srgbClr val="954F72"/>
+      </a:folHlink>
+    </a:clrScheme>
+    <a:fontScheme name="">
+      <a:majorFont>
+        <a:latin typeface="Calibri Light"/>
+        <a:ea typeface="Arial"/>
+        <a:cs typeface="Arial"/>
+      </a:majorFont>
+      <a:minorFont>
+        <a:latin typeface="Calibri"/>
+        <a:ea typeface="Arial"/>
+        <a:cs typeface="Arial"/>
+      </a:minorFont>
+    </a:fontScheme>
+    <a:fmtScheme name="Office">
+      <a:fillStyleLst>
+        <a:solidFill>
+          <a:schemeClr val="phClr"/>
+        </a:solidFill>
+        <a:gradFill>
+          <a:gsLst>
+            <a:gs pos="0">
+              <a:schemeClr val="phClr">
+                <a:lumMod val="110000"/>
+                <a:satMod val="105000"/>
+                <a:tint val="67000"/>
+              </a:schemeClr>
+            </a:gs>
+            <a:gs pos="50000">
+              <a:schemeClr val="phClr">
+                <a:lumMod val="105000"/>
+                <a:satMod val="103000"/>
+                <a:tint val="73000"/>
+              </a:schemeClr>
+            </a:gs>
+            <a:gs pos="100000">
+              <a:schemeClr val="phClr">
+                <a:lumMod val="105000"/>
+                <a:satMod val="109000"/>
+                <a:tint val="81000"/>
+              </a:schemeClr>
+            </a:gs>
+          </a:gsLst>
+          <a:lin ang="5400000" scaled="0"/>
+        </a:gradFill>
+        <a:gradFill>
+          <a:gsLst>
+            <a:gs pos="0">
+              <a:schemeClr val="phClr">
+                <a:satMod val="103000"/>
+                <a:lumMod val="102000"/>
+                <a:tint val="94000"/>
+              </a:schemeClr>
+            </a:gs>
+            <a:gs pos="50000">
+              <a:schemeClr val="phClr">
+                <a:satMod val="110000"/>
+                <a:lumMod val="100000"/>
+                <a:shade val="100000"/>
+              </a:schemeClr>
+            </a:gs>
+            <a:gs pos="100000">
+              <a:schemeClr val="phClr">
+                <a:lumMod val="99000"/>
+                <a:satMod val="120000"/>
+                <a:shade val="78000"/>
+              </a:schemeClr>
+            </a:gs>
+          </a:gsLst>
+          <a:lin ang="5400000" scaled="0"/>
+        </a:gradFill>
+      </a:fillStyleLst>
+      <a:lnStyleLst>
+        <a:ln w="6350" cap="flat" cmpd="sng" algn="ctr">
+          <a:solidFill>
+            <a:schemeClr val="phClr"/>
+          </a:solidFill>
+          <a:prstDash val="solid"/>
+          <a:miter lim="800000"/>
+        </a:ln>
+        <a:ln w="12700" cap="flat" cmpd="sng" algn="ctr">
+          <a:solidFill>
+            <a:schemeClr val="phClr"/>
+          </a:solidFill>
+          <a:prstDash val="solid"/>
+          <a:miter lim="800000"/>
+        </a:ln>
+        <a:ln w="19050" cap="flat" cmpd="sng" algn="ctr">
+          <a:solidFill>
+            <a:schemeClr val="phClr"/>
+          </a:solidFill>
+          <a:prstDash val="solid"/>
+          <a:miter lim="800000"/>
+        </a:ln>
+      </a:lnStyleLst>
+      <a:effectStyleLst>
+        <a:effectStyle>
+          <a:effectLst/>
+        </a:effectStyle>
+        <a:effectStyle>
+          <a:effectLst/>
+        </a:effectStyle>
+        <a:effectStyle>
+          <a:effectLst>
+            <a:outerShdw blurRad="57150" dist="19050" dir="5400000" algn="ctr" rotWithShape="0">
+              <a:srgbClr val="000000">
+                <a:alpha val="63000"/>
+              </a:srgbClr>
+            </a:outerShdw>
+          </a:effectLst>
+        </a:effectStyle>
+      </a:effectStyleLst>
+      <a:bgFillStyleLst>
+        <a:solidFill>
+          <a:schemeClr val="phClr"/>
+        </a:solidFill>
+        <a:solidFill>
+          <a:schemeClr val="phClr">
+            <a:tint val="95000"/>
+            <a:satMod val="170000"/>
+          </a:schemeClr>
+        </a:solidFill>
+        <a:gradFill>
+          <a:gsLst>
+            <a:gs pos="0">
+              <a:schemeClr val="phClr">
+                <a:tint val="93000"/>
+                <a:satMod val="150000"/>
+                <a:shade val="98000"/>
+                <a:lumMod val="102000"/>
+              </a:schemeClr>
+            </a:gs>
+            <a:gs pos="50000">
+              <a:schemeClr val="phClr">
+                <a:tint val="98000"/>
+                <a:satMod val="130000"/>
+                <a:shade val="90000"/>
+                <a:lumMod val="103000"/>
+              </a:schemeClr>
+            </a:gs>
+            <a:gs pos="100000">
+              <a:schemeClr val="phClr">
+                <a:shade val="63000"/>
+                <a:satMod val="120000"/>
+              </a:schemeClr>
+            </a:gs>
+          </a:gsLst>
+          <a:lin ang="5400000" scaled="0"/>
+        </a:gradFill>
+      </a:bgFillStyleLst>
+    </a:fmtScheme>
+  </a:themeElements>
+  <a:objectDefaults/>
 </a:theme>
 </file>